--- a/Prezentacja_Fintech.pptx
+++ b/Prezentacja_Fintech.pptx
@@ -3092,7 +3092,7 @@
     <p:bg>
       <p:bgPr>
         <a:solidFill>
-          <a:srgbClr val="1F3864"/>
+          <a:srgbClr val="1B2838"/>
         </a:solidFill>
         <a:effectLst/>
       </p:bgPr>
@@ -3106,13 +3106,191 @@
       <p:grpSpPr/>
       <p:sp>
         <p:nvSpPr>
-          <p:cNvPr id="2" name="TextBox 1"/>
+          <p:cNvPr id="2" name="Oval 1"/>
+          <p:cNvSpPr/>
+          <p:nvPr/>
+        </p:nvSpPr>
+        <p:spPr>
+          <a:xfrm>
+            <a:off x="-1371600" y="-1371600"/>
+            <a:ext cx="4114800" cy="4114800"/>
+          </a:xfrm>
+          <a:prstGeom prst="ellipse">
+            <a:avLst/>
+          </a:prstGeom>
+          <a:solidFill>
+            <a:srgbClr val="00B4D8">
+              <a:alpha val="12000"/>
+            </a:srgbClr>
+          </a:solidFill>
+          <a:ln>
+            <a:noFill/>
+          </a:ln>
+        </p:spPr>
+        <p:style>
+          <a:lnRef idx="1">
+            <a:schemeClr val="accent1"/>
+          </a:lnRef>
+          <a:fillRef idx="3">
+            <a:schemeClr val="accent1"/>
+          </a:fillRef>
+          <a:effectRef idx="2">
+            <a:schemeClr val="accent1"/>
+          </a:effectRef>
+          <a:fontRef idx="minor">
+            <a:schemeClr val="lt1"/>
+          </a:fontRef>
+        </p:style>
+        <p:txBody>
+          <a:bodyPr rtlCol="0" anchor="ctr"/>
+          <a:lstStyle/>
+          <a:p>
+            <a:pPr algn="ctr"/>
+          </a:p>
+        </p:txBody>
+      </p:sp>
+      <p:sp>
+        <p:nvSpPr>
+          <p:cNvPr id="3" name="Oval 2"/>
+          <p:cNvSpPr/>
+          <p:nvPr/>
+        </p:nvSpPr>
+        <p:spPr>
+          <a:xfrm>
+            <a:off x="9601200" y="4572000"/>
+            <a:ext cx="3657600" cy="3657600"/>
+          </a:xfrm>
+          <a:prstGeom prst="ellipse">
+            <a:avLst/>
+          </a:prstGeom>
+          <a:solidFill>
+            <a:srgbClr val="F4A261">
+              <a:alpha val="12000"/>
+            </a:srgbClr>
+          </a:solidFill>
+          <a:ln>
+            <a:noFill/>
+          </a:ln>
+        </p:spPr>
+        <p:style>
+          <a:lnRef idx="1">
+            <a:schemeClr val="accent1"/>
+          </a:lnRef>
+          <a:fillRef idx="3">
+            <a:schemeClr val="accent1"/>
+          </a:fillRef>
+          <a:effectRef idx="2">
+            <a:schemeClr val="accent1"/>
+          </a:effectRef>
+          <a:fontRef idx="minor">
+            <a:schemeClr val="lt1"/>
+          </a:fontRef>
+        </p:style>
+        <p:txBody>
+          <a:bodyPr rtlCol="0" anchor="ctr"/>
+          <a:lstStyle/>
+          <a:p>
+            <a:pPr algn="ctr"/>
+          </a:p>
+        </p:txBody>
+      </p:sp>
+      <p:sp>
+        <p:nvSpPr>
+          <p:cNvPr id="4" name="Oval 3"/>
+          <p:cNvSpPr/>
+          <p:nvPr/>
+        </p:nvSpPr>
+        <p:spPr>
+          <a:xfrm>
+            <a:off x="10058400" y="-1828800"/>
+            <a:ext cx="2743200" cy="2743200"/>
+          </a:xfrm>
+          <a:prstGeom prst="ellipse">
+            <a:avLst/>
+          </a:prstGeom>
+          <a:solidFill>
+            <a:srgbClr val="00B4D8">
+              <a:alpha val="8000"/>
+            </a:srgbClr>
+          </a:solidFill>
+          <a:ln>
+            <a:noFill/>
+          </a:ln>
+        </p:spPr>
+        <p:style>
+          <a:lnRef idx="1">
+            <a:schemeClr val="accent1"/>
+          </a:lnRef>
+          <a:fillRef idx="3">
+            <a:schemeClr val="accent1"/>
+          </a:fillRef>
+          <a:effectRef idx="2">
+            <a:schemeClr val="accent1"/>
+          </a:effectRef>
+          <a:fontRef idx="minor">
+            <a:schemeClr val="lt1"/>
+          </a:fontRef>
+        </p:style>
+        <p:txBody>
+          <a:bodyPr rtlCol="0" anchor="ctr"/>
+          <a:lstStyle/>
+          <a:p>
+            <a:pPr algn="ctr"/>
+          </a:p>
+        </p:txBody>
+      </p:sp>
+      <p:sp>
+        <p:nvSpPr>
+          <p:cNvPr id="5" name="Rectangle 4"/>
+          <p:cNvSpPr/>
+          <p:nvPr/>
+        </p:nvSpPr>
+        <p:spPr>
+          <a:xfrm>
+            <a:off x="3657600" y="1828800"/>
+            <a:ext cx="4846320" cy="45720"/>
+          </a:xfrm>
+          <a:prstGeom prst="rect">
+            <a:avLst/>
+          </a:prstGeom>
+          <a:solidFill>
+            <a:srgbClr val="00B4D8"/>
+          </a:solidFill>
+          <a:ln>
+            <a:noFill/>
+          </a:ln>
+        </p:spPr>
+        <p:style>
+          <a:lnRef idx="1">
+            <a:schemeClr val="accent1"/>
+          </a:lnRef>
+          <a:fillRef idx="3">
+            <a:schemeClr val="accent1"/>
+          </a:fillRef>
+          <a:effectRef idx="2">
+            <a:schemeClr val="accent1"/>
+          </a:effectRef>
+          <a:fontRef idx="minor">
+            <a:schemeClr val="lt1"/>
+          </a:fontRef>
+        </p:style>
+        <p:txBody>
+          <a:bodyPr rtlCol="0" anchor="ctr"/>
+          <a:lstStyle/>
+          <a:p>
+            <a:pPr algn="ctr"/>
+          </a:p>
+        </p:txBody>
+      </p:sp>
+      <p:sp>
+        <p:nvSpPr>
+          <p:cNvPr id="6" name="TextBox 5"/>
           <p:cNvSpPr txBox="1"/>
           <p:nvPr/>
         </p:nvSpPr>
         <p:spPr>
           <a:xfrm>
-            <a:off x="1371600" y="1645920"/>
+            <a:off x="1371600" y="2103120"/>
             <a:ext cx="9418320" cy="1371600"/>
           </a:xfrm>
           <a:prstGeom prst="rect">
@@ -3127,7 +3305,13 @@
           <a:lstStyle/>
           <a:p>
             <a:pPr algn="ctr">
-              <a:defRPr sz="3800" b="1">
+              <a:spcBef>
+                <a:spcPts val="400"/>
+              </a:spcBef>
+              <a:spcAft>
+                <a:spcPts val="200"/>
+              </a:spcAft>
+              <a:defRPr sz="4400" b="1">
                 <a:solidFill>
                   <a:srgbClr val="FFFFFF"/>
                 </a:solidFill>
@@ -3141,14 +3325,14 @@
       </p:sp>
       <p:sp>
         <p:nvSpPr>
-          <p:cNvPr id="3" name="TextBox 2"/>
+          <p:cNvPr id="7" name="TextBox 6"/>
           <p:cNvSpPr txBox="1"/>
           <p:nvPr/>
         </p:nvSpPr>
         <p:spPr>
           <a:xfrm>
-            <a:off x="1371600" y="3017520"/>
-            <a:ext cx="9418320" cy="1645920"/>
+            <a:off x="1828800" y="3291840"/>
+            <a:ext cx="8503920" cy="1645920"/>
           </a:xfrm>
           <a:prstGeom prst="rect">
             <a:avLst/>
@@ -3162,9 +3346,15 @@
           <a:lstStyle/>
           <a:p>
             <a:pPr algn="ctr">
-              <a:defRPr sz="2000">
-                <a:solidFill>
-                  <a:srgbClr val="BDD7EE"/>
+              <a:spcBef>
+                <a:spcPts val="400"/>
+              </a:spcBef>
+              <a:spcAft>
+                <a:spcPts val="200"/>
+              </a:spcAft>
+              <a:defRPr sz="1800" b="0">
+                <a:solidFill>
+                  <a:srgbClr val="ADD8E6"/>
                 </a:solidFill>
               </a:defRPr>
             </a:pPr>
@@ -3176,13 +3366,56 @@
       </p:sp>
       <p:sp>
         <p:nvSpPr>
-          <p:cNvPr id="4" name="TextBox 3"/>
+          <p:cNvPr id="8" name="Rectangle 7"/>
+          <p:cNvSpPr/>
+          <p:nvPr/>
+        </p:nvSpPr>
+        <p:spPr>
+          <a:xfrm>
+            <a:off x="3657600" y="4937760"/>
+            <a:ext cx="4846320" cy="45720"/>
+          </a:xfrm>
+          <a:prstGeom prst="rect">
+            <a:avLst/>
+          </a:prstGeom>
+          <a:solidFill>
+            <a:srgbClr val="F4A261"/>
+          </a:solidFill>
+          <a:ln>
+            <a:noFill/>
+          </a:ln>
+        </p:spPr>
+        <p:style>
+          <a:lnRef idx="1">
+            <a:schemeClr val="accent1"/>
+          </a:lnRef>
+          <a:fillRef idx="3">
+            <a:schemeClr val="accent1"/>
+          </a:fillRef>
+          <a:effectRef idx="2">
+            <a:schemeClr val="accent1"/>
+          </a:effectRef>
+          <a:fontRef idx="minor">
+            <a:schemeClr val="lt1"/>
+          </a:fontRef>
+        </p:style>
+        <p:txBody>
+          <a:bodyPr rtlCol="0" anchor="ctr"/>
+          <a:lstStyle/>
+          <a:p>
+            <a:pPr algn="ctr"/>
+          </a:p>
+        </p:txBody>
+      </p:sp>
+      <p:sp>
+        <p:nvSpPr>
+          <p:cNvPr id="9" name="TextBox 8"/>
           <p:cNvSpPr txBox="1"/>
           <p:nvPr/>
         </p:nvSpPr>
         <p:spPr>
           <a:xfrm>
-            <a:off x="1371600" y="5303520"/>
+            <a:off x="1371600" y="5212080"/>
             <a:ext cx="9418320" cy="731520"/>
           </a:xfrm>
           <a:prstGeom prst="rect">
@@ -3197,9 +3430,15 @@
           <a:lstStyle/>
           <a:p>
             <a:pPr algn="ctr">
-              <a:defRPr sz="1400">
-                <a:solidFill>
-                  <a:srgbClr val="9DC3E6"/>
+              <a:spcBef>
+                <a:spcPts val="400"/>
+              </a:spcBef>
+              <a:spcAft>
+                <a:spcPts val="200"/>
+              </a:spcAft>
+              <a:defRPr sz="1300" b="0">
+                <a:solidFill>
+                  <a:srgbClr val="99AABB"/>
                 </a:solidFill>
               </a:defRPr>
             </a:pPr>
@@ -3211,20 +3450,20 @@
       </p:sp>
       <p:sp>
         <p:nvSpPr>
-          <p:cNvPr id="5" name="Rectangle 4"/>
+          <p:cNvPr id="10" name="Rectangle 9"/>
           <p:cNvSpPr/>
           <p:nvPr/>
         </p:nvSpPr>
         <p:spPr>
           <a:xfrm>
-            <a:off x="4114800" y="5029200"/>
-            <a:ext cx="3931920" cy="36576"/>
+            <a:off x="457200" y="6217920"/>
+            <a:ext cx="1371600" cy="54864"/>
           </a:xfrm>
           <a:prstGeom prst="rect">
             <a:avLst/>
           </a:prstGeom>
           <a:solidFill>
-            <a:srgbClr val="2E75B6"/>
+            <a:srgbClr val="00B4D8"/>
           </a:solidFill>
           <a:ln>
             <a:noFill/>
@@ -3266,7 +3505,7 @@
     <p:bg>
       <p:bgPr>
         <a:solidFill>
-          <a:srgbClr val="FFFFFF"/>
+          <a:srgbClr val="F8F9FA"/>
         </a:solidFill>
         <a:effectLst/>
       </p:bgPr>
@@ -3287,13 +3526,13 @@
         <p:spPr>
           <a:xfrm>
             <a:off x="0" y="0"/>
-            <a:ext cx="12191695" cy="137160"/>
+            <a:ext cx="91440" cy="6858000"/>
           </a:xfrm>
           <a:prstGeom prst="rect">
             <a:avLst/>
           </a:prstGeom>
           <a:solidFill>
-            <a:srgbClr val="2E75B6"/>
+            <a:srgbClr val="00B4D8"/>
           </a:solidFill>
           <a:ln>
             <a:noFill/>
@@ -3323,14 +3562,102 @@
       </p:sp>
       <p:sp>
         <p:nvSpPr>
-          <p:cNvPr id="3" name="TextBox 2"/>
+          <p:cNvPr id="3" name="Rectangle 2"/>
+          <p:cNvSpPr/>
+          <p:nvPr/>
+        </p:nvSpPr>
+        <p:spPr>
+          <a:xfrm>
+            <a:off x="0" y="6803136"/>
+            <a:ext cx="12191695" cy="54864"/>
+          </a:xfrm>
+          <a:prstGeom prst="rect">
+            <a:avLst/>
+          </a:prstGeom>
+          <a:solidFill>
+            <a:srgbClr val="1B2838"/>
+          </a:solidFill>
+          <a:ln>
+            <a:noFill/>
+          </a:ln>
+        </p:spPr>
+        <p:style>
+          <a:lnRef idx="1">
+            <a:schemeClr val="accent1"/>
+          </a:lnRef>
+          <a:fillRef idx="3">
+            <a:schemeClr val="accent1"/>
+          </a:fillRef>
+          <a:effectRef idx="2">
+            <a:schemeClr val="accent1"/>
+          </a:effectRef>
+          <a:fontRef idx="minor">
+            <a:schemeClr val="lt1"/>
+          </a:fontRef>
+        </p:style>
+        <p:txBody>
+          <a:bodyPr rtlCol="0" anchor="ctr"/>
+          <a:lstStyle/>
+          <a:p>
+            <a:pPr algn="ctr"/>
+          </a:p>
+        </p:txBody>
+      </p:sp>
+      <p:sp>
+        <p:nvSpPr>
+          <p:cNvPr id="4" name="Oval 3"/>
+          <p:cNvSpPr/>
+          <p:nvPr/>
+        </p:nvSpPr>
+        <p:spPr>
+          <a:xfrm>
+            <a:off x="10058400" y="-1371600"/>
+            <a:ext cx="3200400" cy="3200400"/>
+          </a:xfrm>
+          <a:prstGeom prst="ellipse">
+            <a:avLst/>
+          </a:prstGeom>
+          <a:solidFill>
+            <a:srgbClr val="00B4D8">
+              <a:alpha val="8000"/>
+            </a:srgbClr>
+          </a:solidFill>
+          <a:ln>
+            <a:noFill/>
+          </a:ln>
+        </p:spPr>
+        <p:style>
+          <a:lnRef idx="1">
+            <a:schemeClr val="accent1"/>
+          </a:lnRef>
+          <a:fillRef idx="3">
+            <a:schemeClr val="accent1"/>
+          </a:fillRef>
+          <a:effectRef idx="2">
+            <a:schemeClr val="accent1"/>
+          </a:effectRef>
+          <a:fontRef idx="minor">
+            <a:schemeClr val="lt1"/>
+          </a:fontRef>
+        </p:style>
+        <p:txBody>
+          <a:bodyPr rtlCol="0" anchor="ctr"/>
+          <a:lstStyle/>
+          <a:p>
+            <a:pPr algn="ctr"/>
+          </a:p>
+        </p:txBody>
+      </p:sp>
+      <p:sp>
+        <p:nvSpPr>
+          <p:cNvPr id="5" name="TextBox 4"/>
           <p:cNvSpPr txBox="1"/>
           <p:nvPr/>
         </p:nvSpPr>
         <p:spPr>
           <a:xfrm>
-            <a:off x="731520" y="365760"/>
-            <a:ext cx="10515600" cy="822960"/>
+            <a:off x="548640" y="274320"/>
+            <a:ext cx="9144000" cy="822960"/>
           </a:xfrm>
           <a:prstGeom prst="rect">
             <a:avLst/>
@@ -3343,10 +3670,16 @@
           </a:bodyPr>
           <a:lstStyle/>
           <a:p>
-            <a:pPr>
+            <a:pPr algn="l">
+              <a:spcBef>
+                <a:spcPts val="400"/>
+              </a:spcBef>
+              <a:spcAft>
+                <a:spcPts val="200"/>
+              </a:spcAft>
               <a:defRPr sz="3000" b="1">
                 <a:solidFill>
-                  <a:srgbClr val="1F3864"/>
+                  <a:srgbClr val="1B2838"/>
                 </a:solidFill>
               </a:defRPr>
             </a:pPr>
@@ -3358,14 +3691,145 @@
       </p:sp>
       <p:sp>
         <p:nvSpPr>
-          <p:cNvPr id="4" name="TextBox 3"/>
+          <p:cNvPr id="6" name="Rectangle 5"/>
+          <p:cNvSpPr/>
+          <p:nvPr/>
+        </p:nvSpPr>
+        <p:spPr>
+          <a:xfrm>
+            <a:off x="548640" y="960120"/>
+            <a:ext cx="2286000" cy="45720"/>
+          </a:xfrm>
+          <a:prstGeom prst="rect">
+            <a:avLst/>
+          </a:prstGeom>
+          <a:solidFill>
+            <a:srgbClr val="00B4D8"/>
+          </a:solidFill>
+          <a:ln>
+            <a:noFill/>
+          </a:ln>
+        </p:spPr>
+        <p:style>
+          <a:lnRef idx="1">
+            <a:schemeClr val="accent1"/>
+          </a:lnRef>
+          <a:fillRef idx="3">
+            <a:schemeClr val="accent1"/>
+          </a:fillRef>
+          <a:effectRef idx="2">
+            <a:schemeClr val="accent1"/>
+          </a:effectRef>
+          <a:fontRef idx="minor">
+            <a:schemeClr val="lt1"/>
+          </a:fontRef>
+        </p:style>
+        <p:txBody>
+          <a:bodyPr rtlCol="0" anchor="ctr"/>
+          <a:lstStyle/>
+          <a:p>
+            <a:pPr algn="ctr"/>
+          </a:p>
+        </p:txBody>
+      </p:sp>
+      <p:sp>
+        <p:nvSpPr>
+          <p:cNvPr id="7" name="Rounded Rectangle 6"/>
+          <p:cNvSpPr/>
+          <p:nvPr/>
+        </p:nvSpPr>
+        <p:spPr>
+          <a:xfrm>
+            <a:off x="457200" y="1280160"/>
+            <a:ext cx="3566160" cy="5120640"/>
+          </a:xfrm>
+          <a:prstGeom prst="roundRect">
+            <a:avLst/>
+          </a:prstGeom>
+          <a:solidFill>
+            <a:srgbClr val="FFFFFF"/>
+          </a:solidFill>
+          <a:ln w="12700">
+            <a:solidFill>
+              <a:srgbClr val="DEE2E6"/>
+            </a:solidFill>
+          </a:ln>
+        </p:spPr>
+        <p:style>
+          <a:lnRef idx="1">
+            <a:schemeClr val="accent1"/>
+          </a:lnRef>
+          <a:fillRef idx="3">
+            <a:schemeClr val="accent1"/>
+          </a:fillRef>
+          <a:effectRef idx="2">
+            <a:schemeClr val="accent1"/>
+          </a:effectRef>
+          <a:fontRef idx="minor">
+            <a:schemeClr val="lt1"/>
+          </a:fontRef>
+        </p:style>
+        <p:txBody>
+          <a:bodyPr rtlCol="0" anchor="ctr"/>
+          <a:lstStyle/>
+          <a:p>
+            <a:pPr algn="ctr"/>
+          </a:p>
+        </p:txBody>
+      </p:sp>
+      <p:sp>
+        <p:nvSpPr>
+          <p:cNvPr id="8" name="Rectangle 7"/>
+          <p:cNvSpPr/>
+          <p:nvPr/>
+        </p:nvSpPr>
+        <p:spPr>
+          <a:xfrm>
+            <a:off x="457200" y="1280160"/>
+            <a:ext cx="3566160" cy="73152"/>
+          </a:xfrm>
+          <a:prstGeom prst="rect">
+            <a:avLst/>
+          </a:prstGeom>
+          <a:solidFill>
+            <a:srgbClr val="00B4D8"/>
+          </a:solidFill>
+          <a:ln>
+            <a:noFill/>
+          </a:ln>
+        </p:spPr>
+        <p:style>
+          <a:lnRef idx="1">
+            <a:schemeClr val="accent1"/>
+          </a:lnRef>
+          <a:fillRef idx="3">
+            <a:schemeClr val="accent1"/>
+          </a:fillRef>
+          <a:effectRef idx="2">
+            <a:schemeClr val="accent1"/>
+          </a:effectRef>
+          <a:fontRef idx="minor">
+            <a:schemeClr val="lt1"/>
+          </a:fontRef>
+        </p:style>
+        <p:txBody>
+          <a:bodyPr rtlCol="0" anchor="ctr"/>
+          <a:lstStyle/>
+          <a:p>
+            <a:pPr algn="ctr"/>
+          </a:p>
+        </p:txBody>
+      </p:sp>
+      <p:sp>
+        <p:nvSpPr>
+          <p:cNvPr id="9" name="TextBox 8"/>
           <p:cNvSpPr txBox="1"/>
           <p:nvPr/>
         </p:nvSpPr>
         <p:spPr>
           <a:xfrm>
-            <a:off x="731520" y="1371600"/>
-            <a:ext cx="10515600" cy="5029200"/>
+            <a:off x="640080" y="1554480"/>
+            <a:ext cx="3200400" cy="548640"/>
           </a:xfrm>
           <a:prstGeom prst="rect">
             <a:avLst/>
@@ -3377,221 +3841,511 @@
             <a:spAutoFit/>
           </a:bodyPr>
           <a:lstStyle/>
-          <a:p/>
-          <a:p>
-            <a:pPr>
+          <a:p>
+            <a:pPr algn="l">
+              <a:spcBef>
+                <a:spcPts val="400"/>
+              </a:spcBef>
+              <a:spcAft>
+                <a:spcPts val="200"/>
+              </a:spcAft>
+              <a:defRPr sz="1600" b="1">
+                <a:solidFill>
+                  <a:srgbClr val="00B4D8"/>
+                </a:solidFill>
+              </a:defRPr>
+            </a:pPr>
+            <a:r>
+              <a:t>Dlaczego aktualny?</a:t>
+            </a:r>
+          </a:p>
+        </p:txBody>
+      </p:sp>
+      <p:sp>
+        <p:nvSpPr>
+          <p:cNvPr id="10" name="TextBox 9"/>
+          <p:cNvSpPr txBox="1"/>
+          <p:nvPr/>
+        </p:nvSpPr>
+        <p:spPr>
+          <a:xfrm>
+            <a:off x="640080" y="2103120"/>
+            <a:ext cx="3200400" cy="4114800"/>
+          </a:xfrm>
+          <a:prstGeom prst="rect">
+            <a:avLst/>
+          </a:prstGeom>
+          <a:noFill/>
+        </p:spPr>
+        <p:txBody>
+          <a:bodyPr wrap="square">
+            <a:spAutoFit/>
+          </a:bodyPr>
+          <a:lstStyle/>
+          <a:p>
+            <a:pPr algn="l">
               <a:spcBef>
                 <a:spcPts val="0"/>
               </a:spcBef>
               <a:spcAft>
-                <a:spcPts val="400"/>
+                <a:spcPts val="200"/>
               </a:spcAft>
-              <a:defRPr sz="2000" b="1">
-                <a:solidFill>
-                  <a:srgbClr val="2E75B6"/>
+              <a:defRPr sz="1300" b="0">
+                <a:solidFill>
+                  <a:srgbClr val="2D3436"/>
                 </a:solidFill>
               </a:defRPr>
             </a:pPr>
             <a:r>
-              <a:t>Dlaczego ten problem jest aktualny?</a:t>
-            </a:r>
-          </a:p>
-          <a:p>
-            <a:pPr lvl="1">
+              <a:t>• Boom na aplikacje inwestycyjne (Revolut, eToro, XTB) oraz robo-doradztwo (Finax, Portu)</a:t>
+            </a:r>
+          </a:p>
+          <a:p>
+            <a:pPr algn="l">
               <a:spcBef>
-                <a:spcPts val="600"/>
+                <a:spcPts val="800"/>
               </a:spcBef>
               <a:spcAft>
-                <a:spcPts val="400"/>
+                <a:spcPts val="200"/>
               </a:spcAft>
-              <a:defRPr sz="1600" b="0">
-                <a:solidFill>
-                  <a:srgbClr val="333333"/>
+              <a:defRPr sz="1300" b="0">
+                <a:solidFill>
+                  <a:srgbClr val="2D3436"/>
                 </a:solidFill>
               </a:defRPr>
             </a:pPr>
             <a:r>
-              <a:t>Rynek przeżywa boom na aplikacje inwestycyjne (Revolut, eToro, XTB) oraz usługi robo-doradztwa (Finax, Portu)</a:t>
-            </a:r>
-          </a:p>
-          <a:p>
-            <a:pPr lvl="1">
+              <a:t>• Niskie bariery wejścia, brak minimalnych kwot, „gamifikacja” interfejsów</a:t>
+            </a:r>
+          </a:p>
+          <a:p>
+            <a:pPr algn="l">
               <a:spcBef>
-                <a:spcPts val="600"/>
+                <a:spcPts val="800"/>
               </a:spcBef>
               <a:spcAft>
+                <a:spcPts val="200"/>
+              </a:spcAft>
+              <a:defRPr sz="1300" b="0">
+                <a:solidFill>
+                  <a:srgbClr val="2D3436"/>
+                </a:solidFill>
+              </a:defRPr>
+            </a:pPr>
+            <a:r>
+              <a:t>• Rodzi pytania o rzeczywistą świadomość ryzyka</a:t>
+            </a:r>
+          </a:p>
+        </p:txBody>
+      </p:sp>
+      <p:sp>
+        <p:nvSpPr>
+          <p:cNvPr id="11" name="Rounded Rectangle 10"/>
+          <p:cNvSpPr/>
+          <p:nvPr/>
+        </p:nvSpPr>
+        <p:spPr>
+          <a:xfrm>
+            <a:off x="4297680" y="1280160"/>
+            <a:ext cx="3566160" cy="5120640"/>
+          </a:xfrm>
+          <a:prstGeom prst="roundRect">
+            <a:avLst/>
+          </a:prstGeom>
+          <a:solidFill>
+            <a:srgbClr val="FFFFFF"/>
+          </a:solidFill>
+          <a:ln w="12700">
+            <a:solidFill>
+              <a:srgbClr val="DEE2E6"/>
+            </a:solidFill>
+          </a:ln>
+        </p:spPr>
+        <p:style>
+          <a:lnRef idx="1">
+            <a:schemeClr val="accent1"/>
+          </a:lnRef>
+          <a:fillRef idx="3">
+            <a:schemeClr val="accent1"/>
+          </a:fillRef>
+          <a:effectRef idx="2">
+            <a:schemeClr val="accent1"/>
+          </a:effectRef>
+          <a:fontRef idx="minor">
+            <a:schemeClr val="lt1"/>
+          </a:fontRef>
+        </p:style>
+        <p:txBody>
+          <a:bodyPr rtlCol="0" anchor="ctr"/>
+          <a:lstStyle/>
+          <a:p>
+            <a:pPr algn="ctr"/>
+          </a:p>
+        </p:txBody>
+      </p:sp>
+      <p:sp>
+        <p:nvSpPr>
+          <p:cNvPr id="12" name="Rectangle 11"/>
+          <p:cNvSpPr/>
+          <p:nvPr/>
+        </p:nvSpPr>
+        <p:spPr>
+          <a:xfrm>
+            <a:off x="4297680" y="1280160"/>
+            <a:ext cx="3566160" cy="73152"/>
+          </a:xfrm>
+          <a:prstGeom prst="rect">
+            <a:avLst/>
+          </a:prstGeom>
+          <a:solidFill>
+            <a:srgbClr val="F4A261"/>
+          </a:solidFill>
+          <a:ln>
+            <a:noFill/>
+          </a:ln>
+        </p:spPr>
+        <p:style>
+          <a:lnRef idx="1">
+            <a:schemeClr val="accent1"/>
+          </a:lnRef>
+          <a:fillRef idx="3">
+            <a:schemeClr val="accent1"/>
+          </a:fillRef>
+          <a:effectRef idx="2">
+            <a:schemeClr val="accent1"/>
+          </a:effectRef>
+          <a:fontRef idx="minor">
+            <a:schemeClr val="lt1"/>
+          </a:fontRef>
+        </p:style>
+        <p:txBody>
+          <a:bodyPr rtlCol="0" anchor="ctr"/>
+          <a:lstStyle/>
+          <a:p>
+            <a:pPr algn="ctr"/>
+          </a:p>
+        </p:txBody>
+      </p:sp>
+      <p:sp>
+        <p:nvSpPr>
+          <p:cNvPr id="13" name="TextBox 12"/>
+          <p:cNvSpPr txBox="1"/>
+          <p:nvPr/>
+        </p:nvSpPr>
+        <p:spPr>
+          <a:xfrm>
+            <a:off x="4480560" y="1554480"/>
+            <a:ext cx="3200400" cy="548640"/>
+          </a:xfrm>
+          <a:prstGeom prst="rect">
+            <a:avLst/>
+          </a:prstGeom>
+          <a:noFill/>
+        </p:spPr>
+        <p:txBody>
+          <a:bodyPr wrap="square">
+            <a:spAutoFit/>
+          </a:bodyPr>
+          <a:lstStyle/>
+          <a:p>
+            <a:pPr algn="l">
+              <a:spcBef>
                 <a:spcPts val="400"/>
-              </a:spcAft>
-              <a:defRPr sz="1600" b="0">
-                <a:solidFill>
-                  <a:srgbClr val="333333"/>
-                </a:solidFill>
-              </a:defRPr>
-            </a:pPr>
-            <a:r>
-              <a:t>Niskie bariery wejścia, brak minimalnych kwot oraz „gamifikacja” interfejsów sprawiają, że inwestowanie stało się dostępne na jedno kliknięcie</a:t>
-            </a:r>
-          </a:p>
-          <a:p>
-            <a:pPr lvl="1">
-              <a:spcBef>
-                <a:spcPts val="600"/>
               </a:spcBef>
               <a:spcAft>
-                <a:spcPts val="400"/>
+                <a:spcPts val="200"/>
               </a:spcAft>
-              <a:defRPr sz="1600" b="0">
-                <a:solidFill>
-                  <a:srgbClr val="333333"/>
+              <a:defRPr sz="1600" b="1">
+                <a:solidFill>
+                  <a:srgbClr val="F4A261"/>
                 </a:solidFill>
               </a:defRPr>
             </a:pPr>
             <a:r>
-              <a:t>Rodzi to pytania o rzeczywistą świadomość ryzyka</a:t>
-            </a:r>
-          </a:p>
-          <a:p>
-            <a:pPr>
+              <a:t>Kogo dotyczy?</a:t>
+            </a:r>
+          </a:p>
+        </p:txBody>
+      </p:sp>
+      <p:sp>
+        <p:nvSpPr>
+          <p:cNvPr id="14" name="TextBox 13"/>
+          <p:cNvSpPr txBox="1"/>
+          <p:nvPr/>
+        </p:nvSpPr>
+        <p:spPr>
+          <a:xfrm>
+            <a:off x="4480560" y="2103120"/>
+            <a:ext cx="3200400" cy="4114800"/>
+          </a:xfrm>
+          <a:prstGeom prst="rect">
+            <a:avLst/>
+          </a:prstGeom>
+          <a:noFill/>
+        </p:spPr>
+        <p:txBody>
+          <a:bodyPr wrap="square">
+            <a:spAutoFit/>
+          </a:bodyPr>
+          <a:lstStyle/>
+          <a:p>
+            <a:pPr algn="l">
               <a:spcBef>
-                <a:spcPts val="1600"/>
+                <a:spcPts val="0"/>
               </a:spcBef>
               <a:spcAft>
-                <a:spcPts val="400"/>
+                <a:spcPts val="200"/>
               </a:spcAft>
-              <a:defRPr sz="2000" b="1">
-                <a:solidFill>
-                  <a:srgbClr val="2E75B6"/>
+              <a:defRPr sz="1300" b="0">
+                <a:solidFill>
+                  <a:srgbClr val="2D3436"/>
                 </a:solidFill>
               </a:defRPr>
             </a:pPr>
             <a:r>
-              <a:t>Kogo dotyczy?</a:t>
-            </a:r>
-          </a:p>
-          <a:p>
-            <a:pPr lvl="1">
+              <a:t>• Początkujących inwestorów detalicznych i gospodarstw domowych</a:t>
+            </a:r>
+          </a:p>
+          <a:p>
+            <a:pPr algn="l">
               <a:spcBef>
-                <a:spcPts val="600"/>
+                <a:spcPts val="800"/>
               </a:spcBef>
               <a:spcAft>
-                <a:spcPts val="400"/>
+                <a:spcPts val="200"/>
               </a:spcAft>
-              <a:defRPr sz="1600" b="0">
-                <a:solidFill>
-                  <a:srgbClr val="333333"/>
+              <a:defRPr sz="1300" b="0">
+                <a:solidFill>
+                  <a:srgbClr val="2D3436"/>
                 </a:solidFill>
               </a:defRPr>
             </a:pPr>
             <a:r>
-              <a:t>Początkujących inwestorów detalicznych oraz gospodarstw domowych</a:t>
-            </a:r>
-          </a:p>
-          <a:p>
-            <a:pPr lvl="1">
+              <a:t>• Szukają alternatywy dla nisko oprocentowanych lokat</a:t>
+            </a:r>
+          </a:p>
+          <a:p>
+            <a:pPr algn="l">
               <a:spcBef>
-                <a:spcPts val="600"/>
+                <a:spcPts val="800"/>
               </a:spcBef>
               <a:spcAft>
+                <a:spcPts val="200"/>
+              </a:spcAft>
+              <a:defRPr sz="1300" b="0">
+                <a:solidFill>
+                  <a:srgbClr val="2D3436"/>
+                </a:solidFill>
+              </a:defRPr>
+            </a:pPr>
+            <a:r>
+              <a:t>• Pierwszy kontakt z rynkiem kapitałowym przez smartfon</a:t>
+            </a:r>
+          </a:p>
+        </p:txBody>
+      </p:sp>
+      <p:sp>
+        <p:nvSpPr>
+          <p:cNvPr id="15" name="Rounded Rectangle 14"/>
+          <p:cNvSpPr/>
+          <p:nvPr/>
+        </p:nvSpPr>
+        <p:spPr>
+          <a:xfrm>
+            <a:off x="8138160" y="1280160"/>
+            <a:ext cx="3566160" cy="5120640"/>
+          </a:xfrm>
+          <a:prstGeom prst="roundRect">
+            <a:avLst/>
+          </a:prstGeom>
+          <a:solidFill>
+            <a:srgbClr val="FFFFFF"/>
+          </a:solidFill>
+          <a:ln w="12700">
+            <a:solidFill>
+              <a:srgbClr val="DEE2E6"/>
+            </a:solidFill>
+          </a:ln>
+        </p:spPr>
+        <p:style>
+          <a:lnRef idx="1">
+            <a:schemeClr val="accent1"/>
+          </a:lnRef>
+          <a:fillRef idx="3">
+            <a:schemeClr val="accent1"/>
+          </a:fillRef>
+          <a:effectRef idx="2">
+            <a:schemeClr val="accent1"/>
+          </a:effectRef>
+          <a:fontRef idx="minor">
+            <a:schemeClr val="lt1"/>
+          </a:fontRef>
+        </p:style>
+        <p:txBody>
+          <a:bodyPr rtlCol="0" anchor="ctr"/>
+          <a:lstStyle/>
+          <a:p>
+            <a:pPr algn="ctr"/>
+          </a:p>
+        </p:txBody>
+      </p:sp>
+      <p:sp>
+        <p:nvSpPr>
+          <p:cNvPr id="16" name="Rectangle 15"/>
+          <p:cNvSpPr/>
+          <p:nvPr/>
+        </p:nvSpPr>
+        <p:spPr>
+          <a:xfrm>
+            <a:off x="8138160" y="1280160"/>
+            <a:ext cx="3566160" cy="73152"/>
+          </a:xfrm>
+          <a:prstGeom prst="rect">
+            <a:avLst/>
+          </a:prstGeom>
+          <a:solidFill>
+            <a:srgbClr val="1B2838"/>
+          </a:solidFill>
+          <a:ln>
+            <a:noFill/>
+          </a:ln>
+        </p:spPr>
+        <p:style>
+          <a:lnRef idx="1">
+            <a:schemeClr val="accent1"/>
+          </a:lnRef>
+          <a:fillRef idx="3">
+            <a:schemeClr val="accent1"/>
+          </a:fillRef>
+          <a:effectRef idx="2">
+            <a:schemeClr val="accent1"/>
+          </a:effectRef>
+          <a:fontRef idx="minor">
+            <a:schemeClr val="lt1"/>
+          </a:fontRef>
+        </p:style>
+        <p:txBody>
+          <a:bodyPr rtlCol="0" anchor="ctr"/>
+          <a:lstStyle/>
+          <a:p>
+            <a:pPr algn="ctr"/>
+          </a:p>
+        </p:txBody>
+      </p:sp>
+      <p:sp>
+        <p:nvSpPr>
+          <p:cNvPr id="17" name="TextBox 16"/>
+          <p:cNvSpPr txBox="1"/>
+          <p:nvPr/>
+        </p:nvSpPr>
+        <p:spPr>
+          <a:xfrm>
+            <a:off x="8321040" y="1554480"/>
+            <a:ext cx="3200400" cy="548640"/>
+          </a:xfrm>
+          <a:prstGeom prst="rect">
+            <a:avLst/>
+          </a:prstGeom>
+          <a:noFill/>
+        </p:spPr>
+        <p:txBody>
+          <a:bodyPr wrap="square">
+            <a:spAutoFit/>
+          </a:bodyPr>
+          <a:lstStyle/>
+          <a:p>
+            <a:pPr algn="l">
+              <a:spcBef>
                 <a:spcPts val="400"/>
-              </a:spcAft>
-              <a:defRPr sz="1600" b="0">
-                <a:solidFill>
-                  <a:srgbClr val="333333"/>
-                </a:solidFill>
-              </a:defRPr>
-            </a:pPr>
-            <a:r>
-              <a:t>Szukają alternatywy dla nisko oprocentowanych lokat bankowych</a:t>
-            </a:r>
-          </a:p>
-          <a:p>
-            <a:pPr lvl="1">
-              <a:spcBef>
-                <a:spcPts val="600"/>
               </a:spcBef>
               <a:spcAft>
-                <a:spcPts val="400"/>
+                <a:spcPts val="200"/>
               </a:spcAft>
-              <a:defRPr sz="1600" b="0">
-                <a:solidFill>
-                  <a:srgbClr val="333333"/>
+              <a:defRPr sz="1600" b="1">
+                <a:solidFill>
+                  <a:srgbClr val="1B2838"/>
                 </a:solidFill>
               </a:defRPr>
             </a:pPr>
             <a:r>
-              <a:t>Po raz pierwszy stykają się z rynkiem kapitałowym za pośrednictwem smartfona</a:t>
-            </a:r>
-          </a:p>
-          <a:p>
-            <a:pPr>
+              <a:t>Jakie ma znaczenie?</a:t>
+            </a:r>
+          </a:p>
+        </p:txBody>
+      </p:sp>
+      <p:sp>
+        <p:nvSpPr>
+          <p:cNvPr id="18" name="TextBox 17"/>
+          <p:cNvSpPr txBox="1"/>
+          <p:nvPr/>
+        </p:nvSpPr>
+        <p:spPr>
+          <a:xfrm>
+            <a:off x="8321040" y="2103120"/>
+            <a:ext cx="3200400" cy="4114800"/>
+          </a:xfrm>
+          <a:prstGeom prst="rect">
+            <a:avLst/>
+          </a:prstGeom>
+          <a:noFill/>
+        </p:spPr>
+        <p:txBody>
+          <a:bodyPr wrap="square">
+            <a:spAutoFit/>
+          </a:bodyPr>
+          <a:lstStyle/>
+          <a:p>
+            <a:pPr algn="l">
               <a:spcBef>
-                <a:spcPts val="1600"/>
+                <a:spcPts val="0"/>
               </a:spcBef>
               <a:spcAft>
-                <a:spcPts val="400"/>
+                <a:spcPts val="200"/>
               </a:spcAft>
-              <a:defRPr sz="2000" b="1">
-                <a:solidFill>
-                  <a:srgbClr val="2E75B6"/>
+              <a:defRPr sz="1300" b="0">
+                <a:solidFill>
+                  <a:srgbClr val="2D3436"/>
                 </a:solidFill>
               </a:defRPr>
             </a:pPr>
             <a:r>
-              <a:t>Jakie ma znaczenie?</a:t>
-            </a:r>
-          </a:p>
-          <a:p>
-            <a:pPr lvl="1">
+              <a:t>• Dla regulatorów (KNF) – skuteczność ostrzeżeń i ochrona konsumenta</a:t>
+            </a:r>
+          </a:p>
+          <a:p>
+            <a:pPr algn="l">
               <a:spcBef>
-                <a:spcPts val="600"/>
+                <a:spcPts val="800"/>
               </a:spcBef>
               <a:spcAft>
-                <a:spcPts val="400"/>
+                <a:spcPts val="200"/>
               </a:spcAft>
-              <a:defRPr sz="1600" b="0">
-                <a:solidFill>
-                  <a:srgbClr val="333333"/>
+              <a:defRPr sz="1300" b="0">
+                <a:solidFill>
+                  <a:srgbClr val="2D3436"/>
                 </a:solidFill>
               </a:defRPr>
             </a:pPr>
             <a:r>
-              <a:t>Dla regulatorów (KNF) – wiedza o skuteczności ostrzeżeń o ryzyku i potrzebie ochrony konsumenta</a:t>
-            </a:r>
-          </a:p>
-          <a:p>
-            <a:pPr lvl="1">
+              <a:t>• Dla rynku – ocena ryzyka „paniki tłumu”</a:t>
+            </a:r>
+          </a:p>
+          <a:p>
+            <a:pPr algn="l">
               <a:spcBef>
-                <a:spcPts val="600"/>
+                <a:spcPts val="800"/>
               </a:spcBef>
               <a:spcAft>
-                <a:spcPts val="400"/>
+                <a:spcPts val="200"/>
               </a:spcAft>
-              <a:defRPr sz="1600" b="0">
-                <a:solidFill>
-                  <a:srgbClr val="333333"/>
+              <a:defRPr sz="1300" b="0">
+                <a:solidFill>
+                  <a:srgbClr val="2D3436"/>
                 </a:solidFill>
               </a:defRPr>
             </a:pPr>
             <a:r>
-              <a:t>Dla rynku finansowego – ocena ryzyka „paniki tłumu”</a:t>
-            </a:r>
-          </a:p>
-          <a:p>
-            <a:pPr lvl="1">
-              <a:spcBef>
-                <a:spcPts val="600"/>
-              </a:spcBef>
-              <a:spcAft>
-                <a:spcPts val="400"/>
-              </a:spcAft>
-              <a:defRPr sz="1600" b="0">
-                <a:solidFill>
-                  <a:srgbClr val="333333"/>
-                </a:solidFill>
-              </a:defRPr>
-            </a:pPr>
-            <a:r>
-              <a:t>Dla twórców aplikacji – wskazówki z zakresu odpowiedzialnego projektowania</a:t>
+              <a:t>• Dla twórców aplikacji – odpowiedzialne projektowanie</a:t>
             </a:r>
           </a:p>
         </p:txBody>
@@ -3631,13 +4385,13 @@
         <p:spPr>
           <a:xfrm>
             <a:off x="0" y="0"/>
-            <a:ext cx="12191695" cy="137160"/>
+            <a:ext cx="12191695" cy="54864"/>
           </a:xfrm>
           <a:prstGeom prst="rect">
             <a:avLst/>
           </a:prstGeom>
           <a:solidFill>
-            <a:srgbClr val="2E75B6"/>
+            <a:srgbClr val="00B4D8"/>
           </a:solidFill>
           <a:ln>
             <a:noFill/>
@@ -3667,14 +4421,102 @@
       </p:sp>
       <p:sp>
         <p:nvSpPr>
-          <p:cNvPr id="3" name="TextBox 2"/>
+          <p:cNvPr id="3" name="Rectangle 2"/>
+          <p:cNvSpPr/>
+          <p:nvPr/>
+        </p:nvSpPr>
+        <p:spPr>
+          <a:xfrm>
+            <a:off x="0" y="0"/>
+            <a:ext cx="91440" cy="6858000"/>
+          </a:xfrm>
+          <a:prstGeom prst="rect">
+            <a:avLst/>
+          </a:prstGeom>
+          <a:solidFill>
+            <a:srgbClr val="1B2838"/>
+          </a:solidFill>
+          <a:ln>
+            <a:noFill/>
+          </a:ln>
+        </p:spPr>
+        <p:style>
+          <a:lnRef idx="1">
+            <a:schemeClr val="accent1"/>
+          </a:lnRef>
+          <a:fillRef idx="3">
+            <a:schemeClr val="accent1"/>
+          </a:fillRef>
+          <a:effectRef idx="2">
+            <a:schemeClr val="accent1"/>
+          </a:effectRef>
+          <a:fontRef idx="minor">
+            <a:schemeClr val="lt1"/>
+          </a:fontRef>
+        </p:style>
+        <p:txBody>
+          <a:bodyPr rtlCol="0" anchor="ctr"/>
+          <a:lstStyle/>
+          <a:p>
+            <a:pPr algn="ctr"/>
+          </a:p>
+        </p:txBody>
+      </p:sp>
+      <p:sp>
+        <p:nvSpPr>
+          <p:cNvPr id="4" name="Oval 3"/>
+          <p:cNvSpPr/>
+          <p:nvPr/>
+        </p:nvSpPr>
+        <p:spPr>
+          <a:xfrm>
+            <a:off x="-914400" y="5029200"/>
+            <a:ext cx="2743200" cy="2743200"/>
+          </a:xfrm>
+          <a:prstGeom prst="ellipse">
+            <a:avLst/>
+          </a:prstGeom>
+          <a:solidFill>
+            <a:srgbClr val="1B2838">
+              <a:alpha val="8000"/>
+            </a:srgbClr>
+          </a:solidFill>
+          <a:ln>
+            <a:noFill/>
+          </a:ln>
+        </p:spPr>
+        <p:style>
+          <a:lnRef idx="1">
+            <a:schemeClr val="accent1"/>
+          </a:lnRef>
+          <a:fillRef idx="3">
+            <a:schemeClr val="accent1"/>
+          </a:fillRef>
+          <a:effectRef idx="2">
+            <a:schemeClr val="accent1"/>
+          </a:effectRef>
+          <a:fontRef idx="minor">
+            <a:schemeClr val="lt1"/>
+          </a:fontRef>
+        </p:style>
+        <p:txBody>
+          <a:bodyPr rtlCol="0" anchor="ctr"/>
+          <a:lstStyle/>
+          <a:p>
+            <a:pPr algn="ctr"/>
+          </a:p>
+        </p:txBody>
+      </p:sp>
+      <p:sp>
+        <p:nvSpPr>
+          <p:cNvPr id="5" name="TextBox 4"/>
           <p:cNvSpPr txBox="1"/>
           <p:nvPr/>
         </p:nvSpPr>
         <p:spPr>
           <a:xfrm>
-            <a:off x="731520" y="365760"/>
-            <a:ext cx="10515600" cy="822960"/>
+            <a:off x="548640" y="274320"/>
+            <a:ext cx="9144000" cy="822960"/>
           </a:xfrm>
           <a:prstGeom prst="rect">
             <a:avLst/>
@@ -3687,10 +4529,16 @@
           </a:bodyPr>
           <a:lstStyle/>
           <a:p>
-            <a:pPr>
+            <a:pPr algn="l">
+              <a:spcBef>
+                <a:spcPts val="400"/>
+              </a:spcBef>
+              <a:spcAft>
+                <a:spcPts val="200"/>
+              </a:spcAft>
               <a:defRPr sz="3000" b="1">
                 <a:solidFill>
-                  <a:srgbClr val="1F3864"/>
+                  <a:srgbClr val="1B2838"/>
                 </a:solidFill>
               </a:defRPr>
             </a:pPr>
@@ -3702,14 +4550,102 @@
       </p:sp>
       <p:sp>
         <p:nvSpPr>
-          <p:cNvPr id="4" name="TextBox 3"/>
+          <p:cNvPr id="6" name="Rectangle 5"/>
+          <p:cNvSpPr/>
+          <p:nvPr/>
+        </p:nvSpPr>
+        <p:spPr>
+          <a:xfrm>
+            <a:off x="548640" y="960120"/>
+            <a:ext cx="2286000" cy="45720"/>
+          </a:xfrm>
+          <a:prstGeom prst="rect">
+            <a:avLst/>
+          </a:prstGeom>
+          <a:solidFill>
+            <a:srgbClr val="00B4D8"/>
+          </a:solidFill>
+          <a:ln>
+            <a:noFill/>
+          </a:ln>
+        </p:spPr>
+        <p:style>
+          <a:lnRef idx="1">
+            <a:schemeClr val="accent1"/>
+          </a:lnRef>
+          <a:fillRef idx="3">
+            <a:schemeClr val="accent1"/>
+          </a:fillRef>
+          <a:effectRef idx="2">
+            <a:schemeClr val="accent1"/>
+          </a:effectRef>
+          <a:fontRef idx="minor">
+            <a:schemeClr val="lt1"/>
+          </a:fontRef>
+        </p:style>
+        <p:txBody>
+          <a:bodyPr rtlCol="0" anchor="ctr"/>
+          <a:lstStyle/>
+          <a:p>
+            <a:pPr algn="ctr"/>
+          </a:p>
+        </p:txBody>
+      </p:sp>
+      <p:sp>
+        <p:nvSpPr>
+          <p:cNvPr id="7" name="Rounded Rectangle 6"/>
+          <p:cNvSpPr/>
+          <p:nvPr/>
+        </p:nvSpPr>
+        <p:spPr>
+          <a:xfrm>
+            <a:off x="457200" y="1280160"/>
+            <a:ext cx="5303520" cy="5212080"/>
+          </a:xfrm>
+          <a:prstGeom prst="roundRect">
+            <a:avLst/>
+          </a:prstGeom>
+          <a:solidFill>
+            <a:srgbClr val="E0F7FA"/>
+          </a:solidFill>
+          <a:ln w="12700">
+            <a:solidFill>
+              <a:srgbClr val="00B4D8"/>
+            </a:solidFill>
+          </a:ln>
+        </p:spPr>
+        <p:style>
+          <a:lnRef idx="1">
+            <a:schemeClr val="accent1"/>
+          </a:lnRef>
+          <a:fillRef idx="3">
+            <a:schemeClr val="accent1"/>
+          </a:fillRef>
+          <a:effectRef idx="2">
+            <a:schemeClr val="accent1"/>
+          </a:effectRef>
+          <a:fontRef idx="minor">
+            <a:schemeClr val="lt1"/>
+          </a:fontRef>
+        </p:style>
+        <p:txBody>
+          <a:bodyPr rtlCol="0" anchor="ctr"/>
+          <a:lstStyle/>
+          <a:p>
+            <a:pPr algn="ctr"/>
+          </a:p>
+        </p:txBody>
+      </p:sp>
+      <p:sp>
+        <p:nvSpPr>
+          <p:cNvPr id="8" name="TextBox 7"/>
           <p:cNvSpPr txBox="1"/>
           <p:nvPr/>
         </p:nvSpPr>
         <p:spPr>
           <a:xfrm>
-            <a:off x="731520" y="1280160"/>
-            <a:ext cx="10515600" cy="5303520"/>
+            <a:off x="731520" y="1463040"/>
+            <a:ext cx="4846320" cy="457200"/>
           </a:xfrm>
           <a:prstGeom prst="rect">
             <a:avLst/>
@@ -3721,18 +4657,17 @@
             <a:spAutoFit/>
           </a:bodyPr>
           <a:lstStyle/>
-          <a:p/>
-          <a:p>
-            <a:pPr>
+          <a:p>
+            <a:pPr algn="l">
               <a:spcBef>
                 <a:spcPts val="0"/>
               </a:spcBef>
               <a:spcAft>
-                <a:spcPts val="400"/>
+                <a:spcPts val="200"/>
               </a:spcAft>
-              <a:defRPr sz="2000" b="1">
-                <a:solidFill>
-                  <a:srgbClr val="2E75B6"/>
+              <a:defRPr sz="1800" b="1">
+                <a:solidFill>
+                  <a:srgbClr val="00B4D8"/>
                 </a:solidFill>
               </a:defRPr>
             </a:pPr>
@@ -3740,17 +4675,40 @@
               <a:t>Cel:</a:t>
             </a:r>
           </a:p>
-          <a:p>
-            <a:pPr lvl="1">
+        </p:txBody>
+      </p:sp>
+      <p:sp>
+        <p:nvSpPr>
+          <p:cNvPr id="9" name="TextBox 8"/>
+          <p:cNvSpPr txBox="1"/>
+          <p:nvPr/>
+        </p:nvSpPr>
+        <p:spPr>
+          <a:xfrm>
+            <a:off x="731520" y="1920240"/>
+            <a:ext cx="4846320" cy="4389120"/>
+          </a:xfrm>
+          <a:prstGeom prst="rect">
+            <a:avLst/>
+          </a:prstGeom>
+          <a:noFill/>
+        </p:spPr>
+        <p:txBody>
+          <a:bodyPr wrap="square">
+            <a:spAutoFit/>
+          </a:bodyPr>
+          <a:lstStyle/>
+          <a:p>
+            <a:pPr algn="l">
               <a:spcBef>
-                <a:spcPts val="600"/>
+                <a:spcPts val="0"/>
               </a:spcBef>
               <a:spcAft>
-                <a:spcPts val="400"/>
+                <a:spcPts val="200"/>
               </a:spcAft>
-              <a:defRPr sz="1500" b="0">
-                <a:solidFill>
-                  <a:srgbClr val="333333"/>
+              <a:defRPr sz="1400" b="0">
+                <a:solidFill>
+                  <a:srgbClr val="2D3436"/>
                 </a:solidFill>
               </a:defRPr>
             </a:pPr>
@@ -3758,17 +4716,85 @@
               <a:t>Zrozumienie, czy i w jaki sposób interakcja z nowoczesnymi platformami inwestycyjnymi kształtuje rzeczywistą wiedzę finansową użytkowników. Zbadanie, czy aplikacje te pełnią funkcję edukacyjną, budując świadomość rynkową, czy raczej zwalniają użytkownika z myślenia, usypiając czujność.</a:t>
             </a:r>
           </a:p>
-          <a:p>
-            <a:pPr>
+        </p:txBody>
+      </p:sp>
+      <p:sp>
+        <p:nvSpPr>
+          <p:cNvPr id="10" name="Rounded Rectangle 9"/>
+          <p:cNvSpPr/>
+          <p:nvPr/>
+        </p:nvSpPr>
+        <p:spPr>
+          <a:xfrm>
+            <a:off x="6035040" y="1280160"/>
+            <a:ext cx="5669280" cy="5212080"/>
+          </a:xfrm>
+          <a:prstGeom prst="roundRect">
+            <a:avLst/>
+          </a:prstGeom>
+          <a:solidFill>
+            <a:srgbClr val="FFFFFF"/>
+          </a:solidFill>
+          <a:ln w="12700">
+            <a:solidFill>
+              <a:srgbClr val="DEE2E6"/>
+            </a:solidFill>
+          </a:ln>
+        </p:spPr>
+        <p:style>
+          <a:lnRef idx="1">
+            <a:schemeClr val="accent1"/>
+          </a:lnRef>
+          <a:fillRef idx="3">
+            <a:schemeClr val="accent1"/>
+          </a:fillRef>
+          <a:effectRef idx="2">
+            <a:schemeClr val="accent1"/>
+          </a:effectRef>
+          <a:fontRef idx="minor">
+            <a:schemeClr val="lt1"/>
+          </a:fontRef>
+        </p:style>
+        <p:txBody>
+          <a:bodyPr rtlCol="0" anchor="ctr"/>
+          <a:lstStyle/>
+          <a:p>
+            <a:pPr algn="ctr"/>
+          </a:p>
+        </p:txBody>
+      </p:sp>
+      <p:sp>
+        <p:nvSpPr>
+          <p:cNvPr id="11" name="TextBox 10"/>
+          <p:cNvSpPr txBox="1"/>
+          <p:nvPr/>
+        </p:nvSpPr>
+        <p:spPr>
+          <a:xfrm>
+            <a:off x="6309360" y="1463040"/>
+            <a:ext cx="5212080" cy="457200"/>
+          </a:xfrm>
+          <a:prstGeom prst="rect">
+            <a:avLst/>
+          </a:prstGeom>
+          <a:noFill/>
+        </p:spPr>
+        <p:txBody>
+          <a:bodyPr wrap="square">
+            <a:spAutoFit/>
+          </a:bodyPr>
+          <a:lstStyle/>
+          <a:p>
+            <a:pPr algn="l">
               <a:spcBef>
-                <a:spcPts val="1600"/>
+                <a:spcPts val="0"/>
               </a:spcBef>
               <a:spcAft>
-                <a:spcPts val="400"/>
+                <a:spcPts val="200"/>
               </a:spcAft>
-              <a:defRPr sz="2000" b="1">
-                <a:solidFill>
-                  <a:srgbClr val="2E75B6"/>
+              <a:defRPr sz="1800" b="1">
+                <a:solidFill>
+                  <a:srgbClr val="F4A261"/>
                 </a:solidFill>
               </a:defRPr>
             </a:pPr>
@@ -3776,58 +4802,283 @@
               <a:t>Pytania badawcze:</a:t>
             </a:r>
           </a:p>
-          <a:p>
-            <a:pPr lvl="1">
+        </p:txBody>
+      </p:sp>
+      <p:sp>
+        <p:nvSpPr>
+          <p:cNvPr id="12" name="Oval 11"/>
+          <p:cNvSpPr/>
+          <p:nvPr/>
+        </p:nvSpPr>
+        <p:spPr>
+          <a:xfrm>
+            <a:off x="6309360" y="2011680"/>
+            <a:ext cx="365760" cy="365760"/>
+          </a:xfrm>
+          <a:prstGeom prst="ellipse">
+            <a:avLst/>
+          </a:prstGeom>
+          <a:solidFill>
+            <a:srgbClr val="00B4D8"/>
+          </a:solidFill>
+          <a:ln>
+            <a:noFill/>
+          </a:ln>
+        </p:spPr>
+        <p:style>
+          <a:lnRef idx="1">
+            <a:schemeClr val="accent1"/>
+          </a:lnRef>
+          <a:fillRef idx="3">
+            <a:schemeClr val="accent1"/>
+          </a:fillRef>
+          <a:effectRef idx="2">
+            <a:schemeClr val="accent1"/>
+          </a:effectRef>
+          <a:fontRef idx="minor">
+            <a:schemeClr val="lt1"/>
+          </a:fontRef>
+        </p:style>
+        <p:txBody>
+          <a:bodyPr rtlCol="0" anchor="ctr"/>
+          <a:lstStyle/>
+          <a:p>
+            <a:pPr algn="ctr">
+              <a:defRPr sz="1300" b="1">
+                <a:solidFill>
+                  <a:srgbClr val="FFFFFF"/>
+                </a:solidFill>
+              </a:defRPr>
+            </a:pPr>
+            <a:r>
+              <a:t>1</a:t>
+            </a:r>
+          </a:p>
+        </p:txBody>
+      </p:sp>
+      <p:sp>
+        <p:nvSpPr>
+          <p:cNvPr id="13" name="TextBox 12"/>
+          <p:cNvSpPr txBox="1"/>
+          <p:nvPr/>
+        </p:nvSpPr>
+        <p:spPr>
+          <a:xfrm>
+            <a:off x="6858000" y="1965960"/>
+            <a:ext cx="4572000" cy="1188720"/>
+          </a:xfrm>
+          <a:prstGeom prst="rect">
+            <a:avLst/>
+          </a:prstGeom>
+          <a:noFill/>
+        </p:spPr>
+        <p:txBody>
+          <a:bodyPr wrap="square">
+            <a:spAutoFit/>
+          </a:bodyPr>
+          <a:lstStyle/>
+          <a:p>
+            <a:pPr algn="l">
               <a:spcBef>
-                <a:spcPts val="600"/>
+                <a:spcPts val="0"/>
               </a:spcBef>
               <a:spcAft>
-                <a:spcPts val="400"/>
+                <a:spcPts val="200"/>
               </a:spcAft>
-              <a:defRPr sz="1500" b="0">
-                <a:solidFill>
-                  <a:srgbClr val="333333"/>
+              <a:defRPr sz="1200" b="0">
+                <a:solidFill>
+                  <a:srgbClr val="2D3436"/>
                 </a:solidFill>
               </a:defRPr>
             </a:pPr>
             <a:r>
-              <a:t>1. W jaki sposób interfejs i funkcjonalności aplikacji finansowych wpływają na poczucie zrozumienia rynku i pewność siebie inwestorów indywidualnych?</a:t>
-            </a:r>
-          </a:p>
-          <a:p>
-            <a:pPr lvl="1">
+              <a:t>W jaki sposób interfejs i funkcjonalności aplikacji finansowych wpływają na poczucie zrozumienia rynku i pewność siebie inwestorów indywidualnych?</a:t>
+            </a:r>
+          </a:p>
+        </p:txBody>
+      </p:sp>
+      <p:sp>
+        <p:nvSpPr>
+          <p:cNvPr id="14" name="Oval 13"/>
+          <p:cNvSpPr/>
+          <p:nvPr/>
+        </p:nvSpPr>
+        <p:spPr>
+          <a:xfrm>
+            <a:off x="6309360" y="3200400"/>
+            <a:ext cx="365760" cy="365760"/>
+          </a:xfrm>
+          <a:prstGeom prst="ellipse">
+            <a:avLst/>
+          </a:prstGeom>
+          <a:solidFill>
+            <a:srgbClr val="F4A261"/>
+          </a:solidFill>
+          <a:ln>
+            <a:noFill/>
+          </a:ln>
+        </p:spPr>
+        <p:style>
+          <a:lnRef idx="1">
+            <a:schemeClr val="accent1"/>
+          </a:lnRef>
+          <a:fillRef idx="3">
+            <a:schemeClr val="accent1"/>
+          </a:fillRef>
+          <a:effectRef idx="2">
+            <a:schemeClr val="accent1"/>
+          </a:effectRef>
+          <a:fontRef idx="minor">
+            <a:schemeClr val="lt1"/>
+          </a:fontRef>
+        </p:style>
+        <p:txBody>
+          <a:bodyPr rtlCol="0" anchor="ctr"/>
+          <a:lstStyle/>
+          <a:p>
+            <a:pPr algn="ctr">
+              <a:defRPr sz="1300" b="1">
+                <a:solidFill>
+                  <a:srgbClr val="FFFFFF"/>
+                </a:solidFill>
+              </a:defRPr>
+            </a:pPr>
+            <a:r>
+              <a:t>2</a:t>
+            </a:r>
+          </a:p>
+        </p:txBody>
+      </p:sp>
+      <p:sp>
+        <p:nvSpPr>
+          <p:cNvPr id="15" name="TextBox 14"/>
+          <p:cNvSpPr txBox="1"/>
+          <p:nvPr/>
+        </p:nvSpPr>
+        <p:spPr>
+          <a:xfrm>
+            <a:off x="6858000" y="3154680"/>
+            <a:ext cx="4572000" cy="1188720"/>
+          </a:xfrm>
+          <a:prstGeom prst="rect">
+            <a:avLst/>
+          </a:prstGeom>
+          <a:noFill/>
+        </p:spPr>
+        <p:txBody>
+          <a:bodyPr wrap="square">
+            <a:spAutoFit/>
+          </a:bodyPr>
+          <a:lstStyle/>
+          <a:p>
+            <a:pPr algn="l">
               <a:spcBef>
-                <a:spcPts val="600"/>
+                <a:spcPts val="0"/>
               </a:spcBef>
               <a:spcAft>
-                <a:spcPts val="400"/>
+                <a:spcPts val="200"/>
               </a:spcAft>
-              <a:defRPr sz="1500" b="0">
-                <a:solidFill>
-                  <a:srgbClr val="333333"/>
+              <a:defRPr sz="1200" b="0">
+                <a:solidFill>
+                  <a:srgbClr val="2D3436"/>
                 </a:solidFill>
               </a:defRPr>
             </a:pPr>
             <a:r>
-              <a:t>2. Dlaczego użytkownicy podejmują decyzje o zakupie konkretnych instrumentów – w jakim stopniu opierają się na własnej wiedzy i analizie, a w jakim na sugestiach algorytmów i łatwości „kliknięcia”?</a:t>
-            </a:r>
-          </a:p>
-          <a:p>
-            <a:pPr lvl="1">
+              <a:t>Dlaczego użytkownicy podejmują decyzje o zakupie konkretnych instrumentów – w jakim stopniu opierają się na własnej wiedzy, a w jakim na sugestiach algorytmów i łatwości „kliknięcia”?</a:t>
+            </a:r>
+          </a:p>
+        </p:txBody>
+      </p:sp>
+      <p:sp>
+        <p:nvSpPr>
+          <p:cNvPr id="16" name="Oval 15"/>
+          <p:cNvSpPr/>
+          <p:nvPr/>
+        </p:nvSpPr>
+        <p:spPr>
+          <a:xfrm>
+            <a:off x="6309360" y="4480560"/>
+            <a:ext cx="365760" cy="365760"/>
+          </a:xfrm>
+          <a:prstGeom prst="ellipse">
+            <a:avLst/>
+          </a:prstGeom>
+          <a:solidFill>
+            <a:srgbClr val="1B2838"/>
+          </a:solidFill>
+          <a:ln>
+            <a:noFill/>
+          </a:ln>
+        </p:spPr>
+        <p:style>
+          <a:lnRef idx="1">
+            <a:schemeClr val="accent1"/>
+          </a:lnRef>
+          <a:fillRef idx="3">
+            <a:schemeClr val="accent1"/>
+          </a:fillRef>
+          <a:effectRef idx="2">
+            <a:schemeClr val="accent1"/>
+          </a:effectRef>
+          <a:fontRef idx="minor">
+            <a:schemeClr val="lt1"/>
+          </a:fontRef>
+        </p:style>
+        <p:txBody>
+          <a:bodyPr rtlCol="0" anchor="ctr"/>
+          <a:lstStyle/>
+          <a:p>
+            <a:pPr algn="ctr">
+              <a:defRPr sz="1300" b="1">
+                <a:solidFill>
+                  <a:srgbClr val="FFFFFF"/>
+                </a:solidFill>
+              </a:defRPr>
+            </a:pPr>
+            <a:r>
+              <a:t>3</a:t>
+            </a:r>
+          </a:p>
+        </p:txBody>
+      </p:sp>
+      <p:sp>
+        <p:nvSpPr>
+          <p:cNvPr id="17" name="TextBox 16"/>
+          <p:cNvSpPr txBox="1"/>
+          <p:nvPr/>
+        </p:nvSpPr>
+        <p:spPr>
+          <a:xfrm>
+            <a:off x="6858000" y="4434840"/>
+            <a:ext cx="4572000" cy="1371600"/>
+          </a:xfrm>
+          <a:prstGeom prst="rect">
+            <a:avLst/>
+          </a:prstGeom>
+          <a:noFill/>
+        </p:spPr>
+        <p:txBody>
+          <a:bodyPr wrap="square">
+            <a:spAutoFit/>
+          </a:bodyPr>
+          <a:lstStyle/>
+          <a:p>
+            <a:pPr algn="l">
               <a:spcBef>
-                <a:spcPts val="600"/>
+                <a:spcPts val="0"/>
               </a:spcBef>
               <a:spcAft>
-                <a:spcPts val="400"/>
+                <a:spcPts val="200"/>
               </a:spcAft>
-              <a:defRPr sz="1500" b="0">
-                <a:solidFill>
-                  <a:srgbClr val="333333"/>
+              <a:defRPr sz="1200" b="0">
+                <a:solidFill>
+                  <a:srgbClr val="2D3436"/>
                 </a:solidFill>
               </a:defRPr>
             </a:pPr>
             <a:r>
-              <a:t>3. Jak początkujący inwestorzy rozumieją i interpretują ryzyko utraty kapitału w środowisku aplikacji, które przypominają gry mobilne lub platformy społecznościowe?</a:t>
+              <a:t>Jak początkujący inwestorzy rozumieją i interpretują ryzyko utraty kapitału w środowisku aplikacji, które przypominają gry mobilne lub platformy społecznościowe?</a:t>
             </a:r>
           </a:p>
         </p:txBody>
@@ -3846,7 +5097,7 @@
     <p:bg>
       <p:bgPr>
         <a:solidFill>
-          <a:srgbClr val="FFFFFF"/>
+          <a:srgbClr val="F8F9FA"/>
         </a:solidFill>
         <a:effectLst/>
       </p:bgPr>
@@ -3867,13 +5118,13 @@
         <p:spPr>
           <a:xfrm>
             <a:off x="0" y="0"/>
-            <a:ext cx="12191695" cy="137160"/>
+            <a:ext cx="12191695" cy="54864"/>
           </a:xfrm>
           <a:prstGeom prst="rect">
             <a:avLst/>
           </a:prstGeom>
           <a:solidFill>
-            <a:srgbClr val="2E75B6"/>
+            <a:srgbClr val="F4A261"/>
           </a:solidFill>
           <a:ln>
             <a:noFill/>
@@ -3903,14 +5154,102 @@
       </p:sp>
       <p:sp>
         <p:nvSpPr>
-          <p:cNvPr id="3" name="TextBox 2"/>
+          <p:cNvPr id="3" name="Rectangle 2"/>
+          <p:cNvSpPr/>
+          <p:nvPr/>
+        </p:nvSpPr>
+        <p:spPr>
+          <a:xfrm>
+            <a:off x="0" y="0"/>
+            <a:ext cx="91440" cy="6858000"/>
+          </a:xfrm>
+          <a:prstGeom prst="rect">
+            <a:avLst/>
+          </a:prstGeom>
+          <a:solidFill>
+            <a:srgbClr val="F4A261"/>
+          </a:solidFill>
+          <a:ln>
+            <a:noFill/>
+          </a:ln>
+        </p:spPr>
+        <p:style>
+          <a:lnRef idx="1">
+            <a:schemeClr val="accent1"/>
+          </a:lnRef>
+          <a:fillRef idx="3">
+            <a:schemeClr val="accent1"/>
+          </a:fillRef>
+          <a:effectRef idx="2">
+            <a:schemeClr val="accent1"/>
+          </a:effectRef>
+          <a:fontRef idx="minor">
+            <a:schemeClr val="lt1"/>
+          </a:fontRef>
+        </p:style>
+        <p:txBody>
+          <a:bodyPr rtlCol="0" anchor="ctr"/>
+          <a:lstStyle/>
+          <a:p>
+            <a:pPr algn="ctr"/>
+          </a:p>
+        </p:txBody>
+      </p:sp>
+      <p:sp>
+        <p:nvSpPr>
+          <p:cNvPr id="4" name="Oval 3"/>
+          <p:cNvSpPr/>
+          <p:nvPr/>
+        </p:nvSpPr>
+        <p:spPr>
+          <a:xfrm>
+            <a:off x="9875520" y="4572000"/>
+            <a:ext cx="3200400" cy="3200400"/>
+          </a:xfrm>
+          <a:prstGeom prst="ellipse">
+            <a:avLst/>
+          </a:prstGeom>
+          <a:solidFill>
+            <a:srgbClr val="F4A261">
+              <a:alpha val="10000"/>
+            </a:srgbClr>
+          </a:solidFill>
+          <a:ln>
+            <a:noFill/>
+          </a:ln>
+        </p:spPr>
+        <p:style>
+          <a:lnRef idx="1">
+            <a:schemeClr val="accent1"/>
+          </a:lnRef>
+          <a:fillRef idx="3">
+            <a:schemeClr val="accent1"/>
+          </a:fillRef>
+          <a:effectRef idx="2">
+            <a:schemeClr val="accent1"/>
+          </a:effectRef>
+          <a:fontRef idx="minor">
+            <a:schemeClr val="lt1"/>
+          </a:fontRef>
+        </p:style>
+        <p:txBody>
+          <a:bodyPr rtlCol="0" anchor="ctr"/>
+          <a:lstStyle/>
+          <a:p>
+            <a:pPr algn="ctr"/>
+          </a:p>
+        </p:txBody>
+      </p:sp>
+      <p:sp>
+        <p:nvSpPr>
+          <p:cNvPr id="5" name="TextBox 4"/>
           <p:cNvSpPr txBox="1"/>
           <p:nvPr/>
         </p:nvSpPr>
         <p:spPr>
           <a:xfrm>
-            <a:off x="731520" y="365760"/>
-            <a:ext cx="10515600" cy="822960"/>
+            <a:off x="548640" y="274320"/>
+            <a:ext cx="9144000" cy="822960"/>
           </a:xfrm>
           <a:prstGeom prst="rect">
             <a:avLst/>
@@ -3923,10 +5262,16 @@
           </a:bodyPr>
           <a:lstStyle/>
           <a:p>
-            <a:pPr>
+            <a:pPr algn="l">
+              <a:spcBef>
+                <a:spcPts val="400"/>
+              </a:spcBef>
+              <a:spcAft>
+                <a:spcPts val="200"/>
+              </a:spcAft>
               <a:defRPr sz="3000" b="1">
                 <a:solidFill>
-                  <a:srgbClr val="1F3864"/>
+                  <a:srgbClr val="1B2838"/>
                 </a:solidFill>
               </a:defRPr>
             </a:pPr>
@@ -3938,14 +5283,102 @@
       </p:sp>
       <p:sp>
         <p:nvSpPr>
-          <p:cNvPr id="4" name="TextBox 3"/>
+          <p:cNvPr id="6" name="Rectangle 5"/>
+          <p:cNvSpPr/>
+          <p:nvPr/>
+        </p:nvSpPr>
+        <p:spPr>
+          <a:xfrm>
+            <a:off x="548640" y="960120"/>
+            <a:ext cx="2286000" cy="45720"/>
+          </a:xfrm>
+          <a:prstGeom prst="rect">
+            <a:avLst/>
+          </a:prstGeom>
+          <a:solidFill>
+            <a:srgbClr val="F4A261"/>
+          </a:solidFill>
+          <a:ln>
+            <a:noFill/>
+          </a:ln>
+        </p:spPr>
+        <p:style>
+          <a:lnRef idx="1">
+            <a:schemeClr val="accent1"/>
+          </a:lnRef>
+          <a:fillRef idx="3">
+            <a:schemeClr val="accent1"/>
+          </a:fillRef>
+          <a:effectRef idx="2">
+            <a:schemeClr val="accent1"/>
+          </a:effectRef>
+          <a:fontRef idx="minor">
+            <a:schemeClr val="lt1"/>
+          </a:fontRef>
+        </p:style>
+        <p:txBody>
+          <a:bodyPr rtlCol="0" anchor="ctr"/>
+          <a:lstStyle/>
+          <a:p>
+            <a:pPr algn="ctr"/>
+          </a:p>
+        </p:txBody>
+      </p:sp>
+      <p:sp>
+        <p:nvSpPr>
+          <p:cNvPr id="7" name="Rounded Rectangle 6"/>
+          <p:cNvSpPr/>
+          <p:nvPr/>
+        </p:nvSpPr>
+        <p:spPr>
+          <a:xfrm>
+            <a:off x="457200" y="1280160"/>
+            <a:ext cx="5486400" cy="2286000"/>
+          </a:xfrm>
+          <a:prstGeom prst="roundRect">
+            <a:avLst/>
+          </a:prstGeom>
+          <a:solidFill>
+            <a:srgbClr val="FFFFFF"/>
+          </a:solidFill>
+          <a:ln w="12700">
+            <a:solidFill>
+              <a:srgbClr val="DEE2E6"/>
+            </a:solidFill>
+          </a:ln>
+        </p:spPr>
+        <p:style>
+          <a:lnRef idx="1">
+            <a:schemeClr val="accent1"/>
+          </a:lnRef>
+          <a:fillRef idx="3">
+            <a:schemeClr val="accent1"/>
+          </a:fillRef>
+          <a:effectRef idx="2">
+            <a:schemeClr val="accent1"/>
+          </a:effectRef>
+          <a:fontRef idx="minor">
+            <a:schemeClr val="lt1"/>
+          </a:fontRef>
+        </p:style>
+        <p:txBody>
+          <a:bodyPr rtlCol="0" anchor="ctr"/>
+          <a:lstStyle/>
+          <a:p>
+            <a:pPr algn="ctr"/>
+          </a:p>
+        </p:txBody>
+      </p:sp>
+      <p:sp>
+        <p:nvSpPr>
+          <p:cNvPr id="8" name="TextBox 7"/>
           <p:cNvSpPr txBox="1"/>
           <p:nvPr/>
         </p:nvSpPr>
         <p:spPr>
           <a:xfrm>
-            <a:off x="731520" y="1371600"/>
-            <a:ext cx="10515600" cy="5029200"/>
+            <a:off x="731520" y="1417320"/>
+            <a:ext cx="5029200" cy="2011680"/>
           </a:xfrm>
           <a:prstGeom prst="rect">
             <a:avLst/>
@@ -3957,18 +5390,17 @@
             <a:spAutoFit/>
           </a:bodyPr>
           <a:lstStyle/>
-          <a:p/>
-          <a:p>
-            <a:pPr>
+          <a:p>
+            <a:pPr algn="l">
               <a:spcBef>
                 <a:spcPts val="0"/>
               </a:spcBef>
               <a:spcAft>
-                <a:spcPts val="400"/>
+                <a:spcPts val="200"/>
               </a:spcAft>
-              <a:defRPr sz="2000" b="1">
-                <a:solidFill>
-                  <a:srgbClr val="2E75B6"/>
+              <a:defRPr sz="1500" b="1">
+                <a:solidFill>
+                  <a:srgbClr val="00B4D8"/>
                 </a:solidFill>
               </a:defRPr>
             </a:pPr>
@@ -3977,201 +5409,423 @@
             </a:r>
           </a:p>
           <a:p>
-            <a:pPr lvl="1">
+            <a:pPr algn="l">
               <a:spcBef>
                 <a:spcPts val="600"/>
               </a:spcBef>
               <a:spcAft>
+                <a:spcPts val="200"/>
+              </a:spcAft>
+              <a:defRPr sz="1300" b="0">
+                <a:solidFill>
+                  <a:srgbClr val="2D3436"/>
+                </a:solidFill>
+              </a:defRPr>
+            </a:pPr>
+            <a:r>
+              <a:t>• Osoby dorosłe (25–40 lat), zarządzające własnym budżetem</a:t>
+            </a:r>
+          </a:p>
+          <a:p>
+            <a:pPr algn="l">
+              <a:spcBef>
                 <a:spcPts val="400"/>
+              </a:spcBef>
+              <a:spcAft>
+                <a:spcPts val="200"/>
               </a:spcAft>
-              <a:defRPr sz="1600" b="0">
-                <a:solidFill>
-                  <a:srgbClr val="333333"/>
+              <a:defRPr sz="1300" b="0">
+                <a:solidFill>
+                  <a:srgbClr val="2D3436"/>
                 </a:solidFill>
               </a:defRPr>
             </a:pPr>
             <a:r>
-              <a:t>Osoby dorosłe (25–40 lat), zarządzające własnym budżetem domowym</a:t>
-            </a:r>
-          </a:p>
-          <a:p>
-            <a:pPr lvl="1">
+              <a:t>• Bez wykształcenia kierunkowego (finansowego/ekonomicznego)</a:t>
+            </a:r>
+          </a:p>
+        </p:txBody>
+      </p:sp>
+      <p:sp>
+        <p:nvSpPr>
+          <p:cNvPr id="9" name="Rounded Rectangle 8"/>
+          <p:cNvSpPr/>
+          <p:nvPr/>
+        </p:nvSpPr>
+        <p:spPr>
+          <a:xfrm>
+            <a:off x="6217920" y="1280160"/>
+            <a:ext cx="5486400" cy="2286000"/>
+          </a:xfrm>
+          <a:prstGeom prst="roundRect">
+            <a:avLst/>
+          </a:prstGeom>
+          <a:solidFill>
+            <a:srgbClr val="FFFFFF"/>
+          </a:solidFill>
+          <a:ln w="12700">
+            <a:solidFill>
+              <a:srgbClr val="DEE2E6"/>
+            </a:solidFill>
+          </a:ln>
+        </p:spPr>
+        <p:style>
+          <a:lnRef idx="1">
+            <a:schemeClr val="accent1"/>
+          </a:lnRef>
+          <a:fillRef idx="3">
+            <a:schemeClr val="accent1"/>
+          </a:fillRef>
+          <a:effectRef idx="2">
+            <a:schemeClr val="accent1"/>
+          </a:effectRef>
+          <a:fontRef idx="minor">
+            <a:schemeClr val="lt1"/>
+          </a:fontRef>
+        </p:style>
+        <p:txBody>
+          <a:bodyPr rtlCol="0" anchor="ctr"/>
+          <a:lstStyle/>
+          <a:p>
+            <a:pPr algn="ctr"/>
+          </a:p>
+        </p:txBody>
+      </p:sp>
+      <p:sp>
+        <p:nvSpPr>
+          <p:cNvPr id="10" name="TextBox 9"/>
+          <p:cNvSpPr txBox="1"/>
+          <p:nvPr/>
+        </p:nvSpPr>
+        <p:spPr>
+          <a:xfrm>
+            <a:off x="6492240" y="1417320"/>
+            <a:ext cx="5029200" cy="2011680"/>
+          </a:xfrm>
+          <a:prstGeom prst="rect">
+            <a:avLst/>
+          </a:prstGeom>
+          <a:noFill/>
+        </p:spPr>
+        <p:txBody>
+          <a:bodyPr wrap="square">
+            <a:spAutoFit/>
+          </a:bodyPr>
+          <a:lstStyle/>
+          <a:p>
+            <a:pPr algn="l">
+              <a:spcBef>
+                <a:spcPts val="0"/>
+              </a:spcBef>
+              <a:spcAft>
+                <a:spcPts val="200"/>
+              </a:spcAft>
+              <a:defRPr sz="1500" b="1">
+                <a:solidFill>
+                  <a:srgbClr val="F4A261"/>
+                </a:solidFill>
+              </a:defRPr>
+            </a:pPr>
+            <a:r>
+              <a:t>Kryteria włączające:</a:t>
+            </a:r>
+          </a:p>
+          <a:p>
+            <a:pPr algn="l">
               <a:spcBef>
                 <a:spcPts val="600"/>
               </a:spcBef>
               <a:spcAft>
+                <a:spcPts val="200"/>
+              </a:spcAft>
+              <a:defRPr sz="1300" b="0">
+                <a:solidFill>
+                  <a:srgbClr val="2D3436"/>
+                </a:solidFill>
+              </a:defRPr>
+            </a:pPr>
+            <a:r>
+              <a:t>• Inwestowanie przez smartfon w ciągu ostatnich 12–24 miesięcy</a:t>
+            </a:r>
+          </a:p>
+          <a:p>
+            <a:pPr algn="l">
+              <a:spcBef>
                 <a:spcPts val="400"/>
-              </a:spcAft>
-              <a:defRPr sz="1600" b="0">
-                <a:solidFill>
-                  <a:srgbClr val="333333"/>
-                </a:solidFill>
-              </a:defRPr>
-            </a:pPr>
-            <a:r>
-              <a:t>Bez wykształcenia kierunkowego (finansowego/ekonomicznego)</a:t>
-            </a:r>
-          </a:p>
-          <a:p>
-            <a:pPr>
-              <a:spcBef>
-                <a:spcPts val="1400"/>
               </a:spcBef>
               <a:spcAft>
-                <a:spcPts val="400"/>
+                <a:spcPts val="200"/>
               </a:spcAft>
-              <a:defRPr sz="2000" b="1">
-                <a:solidFill>
-                  <a:srgbClr val="2E75B6"/>
+              <a:defRPr sz="1300" b="0">
+                <a:solidFill>
+                  <a:srgbClr val="2D3436"/>
                 </a:solidFill>
               </a:defRPr>
             </a:pPr>
             <a:r>
-              <a:t>Kryteria włączające:</a:t>
-            </a:r>
-          </a:p>
-          <a:p>
-            <a:pPr lvl="1">
+              <a:t>• Minimum 5 zrealizowanych transakcji</a:t>
+            </a:r>
+          </a:p>
+        </p:txBody>
+      </p:sp>
+      <p:sp>
+        <p:nvSpPr>
+          <p:cNvPr id="11" name="Rounded Rectangle 10"/>
+          <p:cNvSpPr/>
+          <p:nvPr/>
+        </p:nvSpPr>
+        <p:spPr>
+          <a:xfrm>
+            <a:off x="457200" y="3840480"/>
+            <a:ext cx="5486400" cy="2560320"/>
+          </a:xfrm>
+          <a:prstGeom prst="roundRect">
+            <a:avLst/>
+          </a:prstGeom>
+          <a:solidFill>
+            <a:srgbClr val="FFFFFF"/>
+          </a:solidFill>
+          <a:ln w="12700">
+            <a:solidFill>
+              <a:srgbClr val="DEE2E6"/>
+            </a:solidFill>
+          </a:ln>
+        </p:spPr>
+        <p:style>
+          <a:lnRef idx="1">
+            <a:schemeClr val="accent1"/>
+          </a:lnRef>
+          <a:fillRef idx="3">
+            <a:schemeClr val="accent1"/>
+          </a:fillRef>
+          <a:effectRef idx="2">
+            <a:schemeClr val="accent1"/>
+          </a:effectRef>
+          <a:fontRef idx="minor">
+            <a:schemeClr val="lt1"/>
+          </a:fontRef>
+        </p:style>
+        <p:txBody>
+          <a:bodyPr rtlCol="0" anchor="ctr"/>
+          <a:lstStyle/>
+          <a:p>
+            <a:pPr algn="ctr"/>
+          </a:p>
+        </p:txBody>
+      </p:sp>
+      <p:sp>
+        <p:nvSpPr>
+          <p:cNvPr id="12" name="TextBox 11"/>
+          <p:cNvSpPr txBox="1"/>
+          <p:nvPr/>
+        </p:nvSpPr>
+        <p:spPr>
+          <a:xfrm>
+            <a:off x="731520" y="3977639"/>
+            <a:ext cx="5029200" cy="2286000"/>
+          </a:xfrm>
+          <a:prstGeom prst="rect">
+            <a:avLst/>
+          </a:prstGeom>
+          <a:noFill/>
+        </p:spPr>
+        <p:txBody>
+          <a:bodyPr wrap="square">
+            <a:spAutoFit/>
+          </a:bodyPr>
+          <a:lstStyle/>
+          <a:p>
+            <a:pPr algn="l">
+              <a:spcBef>
+                <a:spcPts val="0"/>
+              </a:spcBef>
+              <a:spcAft>
+                <a:spcPts val="200"/>
+              </a:spcAft>
+              <a:defRPr sz="1500" b="1">
+                <a:solidFill>
+                  <a:srgbClr val="1B2838"/>
+                </a:solidFill>
+              </a:defRPr>
+            </a:pPr>
+            <a:r>
+              <a:t>Wielkość próby:</a:t>
+            </a:r>
+          </a:p>
+          <a:p>
+            <a:pPr algn="l">
               <a:spcBef>
                 <a:spcPts val="600"/>
               </a:spcBef>
               <a:spcAft>
-                <a:spcPts val="400"/>
+                <a:spcPts val="200"/>
               </a:spcAft>
-              <a:defRPr sz="1600" b="0">
-                <a:solidFill>
-                  <a:srgbClr val="333333"/>
+              <a:defRPr sz="1300" b="0">
+                <a:solidFill>
+                  <a:srgbClr val="2D3436"/>
                 </a:solidFill>
               </a:defRPr>
             </a:pPr>
             <a:r>
-              <a:t>Rozpoczęcie samodzielnego inwestowania za pośrednictwem smartfona w ciągu ostatnich 12–24 miesięcy</a:t>
-            </a:r>
-          </a:p>
-          <a:p>
-            <a:pPr lvl="1">
+              <a:t>• 12–15 osób (nasycenie informacyjne)</a:t>
+            </a:r>
+          </a:p>
+          <a:p>
+            <a:pPr algn="l">
+              <a:spcBef>
+                <a:spcPts val="1200"/>
+              </a:spcBef>
+              <a:spcAft>
+                <a:spcPts val="200"/>
+              </a:spcAft>
+              <a:defRPr sz="1500" b="1">
+                <a:solidFill>
+                  <a:srgbClr val="1B2838"/>
+                </a:solidFill>
+              </a:defRPr>
+            </a:pPr>
+            <a:r>
+              <a:t>Dlaczego ta grupa:</a:t>
+            </a:r>
+          </a:p>
+          <a:p>
+            <a:pPr algn="l">
               <a:spcBef>
                 <a:spcPts val="600"/>
               </a:spcBef>
               <a:spcAft>
-                <a:spcPts val="400"/>
+                <a:spcPts val="200"/>
               </a:spcAft>
-              <a:defRPr sz="1600" b="0">
-                <a:solidFill>
-                  <a:srgbClr val="333333"/>
+              <a:defRPr sz="1300" b="0">
+                <a:solidFill>
+                  <a:srgbClr val="2D3436"/>
                 </a:solidFill>
               </a:defRPr>
             </a:pPr>
             <a:r>
-              <a:t>Minimum 5 zrealizowanych transakcji</a:t>
-            </a:r>
-          </a:p>
-          <a:p>
-            <a:pPr>
+              <a:t>• „Świeży” inwestorzy najbardziej narażeni na skutki braku edukacji</a:t>
+            </a:r>
+          </a:p>
+        </p:txBody>
+      </p:sp>
+      <p:sp>
+        <p:nvSpPr>
+          <p:cNvPr id="13" name="Rounded Rectangle 12"/>
+          <p:cNvSpPr/>
+          <p:nvPr/>
+        </p:nvSpPr>
+        <p:spPr>
+          <a:xfrm>
+            <a:off x="6217920" y="3840480"/>
+            <a:ext cx="5486400" cy="2560320"/>
+          </a:xfrm>
+          <a:prstGeom prst="roundRect">
+            <a:avLst/>
+          </a:prstGeom>
+          <a:solidFill>
+            <a:srgbClr val="FFFFFF"/>
+          </a:solidFill>
+          <a:ln w="12700">
+            <a:solidFill>
+              <a:srgbClr val="DEE2E6"/>
+            </a:solidFill>
+          </a:ln>
+        </p:spPr>
+        <p:style>
+          <a:lnRef idx="1">
+            <a:schemeClr val="accent1"/>
+          </a:lnRef>
+          <a:fillRef idx="3">
+            <a:schemeClr val="accent1"/>
+          </a:fillRef>
+          <a:effectRef idx="2">
+            <a:schemeClr val="accent1"/>
+          </a:effectRef>
+          <a:fontRef idx="minor">
+            <a:schemeClr val="lt1"/>
+          </a:fontRef>
+        </p:style>
+        <p:txBody>
+          <a:bodyPr rtlCol="0" anchor="ctr"/>
+          <a:lstStyle/>
+          <a:p>
+            <a:pPr algn="ctr"/>
+          </a:p>
+        </p:txBody>
+      </p:sp>
+      <p:sp>
+        <p:nvSpPr>
+          <p:cNvPr id="14" name="TextBox 13"/>
+          <p:cNvSpPr txBox="1"/>
+          <p:nvPr/>
+        </p:nvSpPr>
+        <p:spPr>
+          <a:xfrm>
+            <a:off x="6492240" y="3977639"/>
+            <a:ext cx="5029200" cy="2286000"/>
+          </a:xfrm>
+          <a:prstGeom prst="rect">
+            <a:avLst/>
+          </a:prstGeom>
+          <a:noFill/>
+        </p:spPr>
+        <p:txBody>
+          <a:bodyPr wrap="square">
+            <a:spAutoFit/>
+          </a:bodyPr>
+          <a:lstStyle/>
+          <a:p>
+            <a:pPr algn="l">
               <a:spcBef>
-                <a:spcPts val="1400"/>
+                <a:spcPts val="0"/>
               </a:spcBef>
               <a:spcAft>
-                <a:spcPts val="400"/>
+                <a:spcPts val="200"/>
               </a:spcAft>
-              <a:defRPr sz="2000" b="1">
-                <a:solidFill>
-                  <a:srgbClr val="2E75B6"/>
+              <a:defRPr sz="1500" b="1">
+                <a:solidFill>
+                  <a:srgbClr val="1B2838"/>
                 </a:solidFill>
               </a:defRPr>
             </a:pPr>
             <a:r>
-              <a:t>Wielkość próby:</a:t>
-            </a:r>
-          </a:p>
-          <a:p>
-            <a:pPr lvl="1">
+              <a:t>Dobór próby:</a:t>
+            </a:r>
+          </a:p>
+          <a:p>
+            <a:pPr algn="l">
               <a:spcBef>
                 <a:spcPts val="600"/>
               </a:spcBef>
               <a:spcAft>
+                <a:spcPts val="200"/>
+              </a:spcAft>
+              <a:defRPr sz="1300" b="0">
+                <a:solidFill>
+                  <a:srgbClr val="2D3436"/>
+                </a:solidFill>
+              </a:defRPr>
+            </a:pPr>
+            <a:r>
+              <a:t>• Celowy (selekcja wg kryteriów stażu i aplikacji)</a:t>
+            </a:r>
+          </a:p>
+          <a:p>
+            <a:pPr algn="l">
+              <a:spcBef>
                 <a:spcPts val="400"/>
-              </a:spcAft>
-              <a:defRPr sz="1600" b="0">
-                <a:solidFill>
-                  <a:srgbClr val="333333"/>
-                </a:solidFill>
-              </a:defRPr>
-            </a:pPr>
-            <a:r>
-              <a:t>12–15 osób (nasycenie informacyjne)</a:t>
-            </a:r>
-          </a:p>
-          <a:p>
-            <a:pPr>
-              <a:spcBef>
-                <a:spcPts val="1400"/>
               </a:spcBef>
               <a:spcAft>
-                <a:spcPts val="400"/>
+                <a:spcPts val="200"/>
               </a:spcAft>
-              <a:defRPr sz="2000" b="1">
-                <a:solidFill>
-                  <a:srgbClr val="2E75B6"/>
+              <a:defRPr sz="1300" b="0">
+                <a:solidFill>
+                  <a:srgbClr val="2D3436"/>
                 </a:solidFill>
               </a:defRPr>
             </a:pPr>
             <a:r>
-              <a:t>Dlaczego ta grupa:</a:t>
-            </a:r>
-          </a:p>
-          <a:p>
-            <a:pPr lvl="1">
-              <a:spcBef>
-                <a:spcPts val="600"/>
-              </a:spcBef>
-              <a:spcAft>
-                <a:spcPts val="400"/>
-              </a:spcAft>
-              <a:defRPr sz="1600" b="0">
-                <a:solidFill>
-                  <a:srgbClr val="333333"/>
-                </a:solidFill>
-              </a:defRPr>
-            </a:pPr>
-            <a:r>
-              <a:t>„Świeży” inwestorzy detaliczni są najbardziej narażeni na skutki braku edukacji, a ich nawyki dopiero się kształtują</a:t>
-            </a:r>
-          </a:p>
-          <a:p>
-            <a:pPr>
-              <a:spcBef>
-                <a:spcPts val="1400"/>
-              </a:spcBef>
-              <a:spcAft>
-                <a:spcPts val="400"/>
-              </a:spcAft>
-              <a:defRPr sz="2000" b="1">
-                <a:solidFill>
-                  <a:srgbClr val="2E75B6"/>
-                </a:solidFill>
-              </a:defRPr>
-            </a:pPr>
-            <a:r>
-              <a:t>Dobór próby:</a:t>
-            </a:r>
-          </a:p>
-          <a:p>
-            <a:pPr lvl="1">
-              <a:spcBef>
-                <a:spcPts val="600"/>
-              </a:spcBef>
-              <a:spcAft>
-                <a:spcPts val="400"/>
-              </a:spcAft>
-              <a:defRPr sz="1600" b="0">
-                <a:solidFill>
-                  <a:srgbClr val="333333"/>
-                </a:solidFill>
-              </a:defRPr>
-            </a:pPr>
-            <a:r>
-              <a:t>Celowy (selekcja według kryteriów stażu i używanych aplikacji) połączony z metodą kuli śnieżnej</a:t>
+              <a:t>• Połączony z metodą kuli śnieżnej</a:t>
             </a:r>
           </a:p>
         </p:txBody>
@@ -4190,7 +5844,7 @@
     <p:bg>
       <p:bgPr>
         <a:solidFill>
-          <a:srgbClr val="FFFFFF"/>
+          <a:srgbClr val="1B2838"/>
         </a:solidFill>
         <a:effectLst/>
       </p:bgPr>
@@ -4204,20 +5858,22 @@
       <p:grpSpPr/>
       <p:sp>
         <p:nvSpPr>
-          <p:cNvPr id="2" name="Rectangle 1"/>
+          <p:cNvPr id="2" name="Oval 1"/>
           <p:cNvSpPr/>
           <p:nvPr/>
         </p:nvSpPr>
         <p:spPr>
           <a:xfrm>
-            <a:off x="0" y="0"/>
-            <a:ext cx="12191695" cy="137160"/>
-          </a:xfrm>
-          <a:prstGeom prst="rect">
-            <a:avLst/>
-          </a:prstGeom>
-          <a:solidFill>
-            <a:srgbClr val="2E75B6"/>
+            <a:off x="9144000" y="-1371600"/>
+            <a:ext cx="3657600" cy="3657600"/>
+          </a:xfrm>
+          <a:prstGeom prst="ellipse">
+            <a:avLst/>
+          </a:prstGeom>
+          <a:solidFill>
+            <a:srgbClr val="00B4D8">
+              <a:alpha val="10000"/>
+            </a:srgbClr>
           </a:solidFill>
           <a:ln>
             <a:noFill/>
@@ -4247,14 +5903,102 @@
       </p:sp>
       <p:sp>
         <p:nvSpPr>
-          <p:cNvPr id="3" name="TextBox 2"/>
+          <p:cNvPr id="3" name="Oval 2"/>
+          <p:cNvSpPr/>
+          <p:nvPr/>
+        </p:nvSpPr>
+        <p:spPr>
+          <a:xfrm>
+            <a:off x="-914400" y="5029200"/>
+            <a:ext cx="3200400" cy="3200400"/>
+          </a:xfrm>
+          <a:prstGeom prst="ellipse">
+            <a:avLst/>
+          </a:prstGeom>
+          <a:solidFill>
+            <a:srgbClr val="F4A261">
+              <a:alpha val="8000"/>
+            </a:srgbClr>
+          </a:solidFill>
+          <a:ln>
+            <a:noFill/>
+          </a:ln>
+        </p:spPr>
+        <p:style>
+          <a:lnRef idx="1">
+            <a:schemeClr val="accent1"/>
+          </a:lnRef>
+          <a:fillRef idx="3">
+            <a:schemeClr val="accent1"/>
+          </a:fillRef>
+          <a:effectRef idx="2">
+            <a:schemeClr val="accent1"/>
+          </a:effectRef>
+          <a:fontRef idx="minor">
+            <a:schemeClr val="lt1"/>
+          </a:fontRef>
+        </p:style>
+        <p:txBody>
+          <a:bodyPr rtlCol="0" anchor="ctr"/>
+          <a:lstStyle/>
+          <a:p>
+            <a:pPr algn="ctr"/>
+          </a:p>
+        </p:txBody>
+      </p:sp>
+      <p:sp>
+        <p:nvSpPr>
+          <p:cNvPr id="4" name="Rectangle 3"/>
+          <p:cNvSpPr/>
+          <p:nvPr/>
+        </p:nvSpPr>
+        <p:spPr>
+          <a:xfrm>
+            <a:off x="0" y="6803136"/>
+            <a:ext cx="12191695" cy="54864"/>
+          </a:xfrm>
+          <a:prstGeom prst="rect">
+            <a:avLst/>
+          </a:prstGeom>
+          <a:solidFill>
+            <a:srgbClr val="00B4D8"/>
+          </a:solidFill>
+          <a:ln>
+            <a:noFill/>
+          </a:ln>
+        </p:spPr>
+        <p:style>
+          <a:lnRef idx="1">
+            <a:schemeClr val="accent1"/>
+          </a:lnRef>
+          <a:fillRef idx="3">
+            <a:schemeClr val="accent1"/>
+          </a:fillRef>
+          <a:effectRef idx="2">
+            <a:schemeClr val="accent1"/>
+          </a:effectRef>
+          <a:fontRef idx="minor">
+            <a:schemeClr val="lt1"/>
+          </a:fontRef>
+        </p:style>
+        <p:txBody>
+          <a:bodyPr rtlCol="0" anchor="ctr"/>
+          <a:lstStyle/>
+          <a:p>
+            <a:pPr algn="ctr"/>
+          </a:p>
+        </p:txBody>
+      </p:sp>
+      <p:sp>
+        <p:nvSpPr>
+          <p:cNvPr id="5" name="TextBox 4"/>
           <p:cNvSpPr txBox="1"/>
           <p:nvPr/>
         </p:nvSpPr>
         <p:spPr>
           <a:xfrm>
             <a:off x="731520" y="365760"/>
-            <a:ext cx="10515600" cy="822960"/>
+            <a:ext cx="10058400" cy="822960"/>
           </a:xfrm>
           <a:prstGeom prst="rect">
             <a:avLst/>
@@ -4267,10 +6011,16 @@
           </a:bodyPr>
           <a:lstStyle/>
           <a:p>
-            <a:pPr>
+            <a:pPr algn="l">
+              <a:spcBef>
+                <a:spcPts val="400"/>
+              </a:spcBef>
+              <a:spcAft>
+                <a:spcPts val="200"/>
+              </a:spcAft>
               <a:defRPr sz="3000" b="1">
                 <a:solidFill>
-                  <a:srgbClr val="1F3864"/>
+                  <a:srgbClr val="FFFFFF"/>
                 </a:solidFill>
               </a:defRPr>
             </a:pPr>
@@ -4282,14 +6032,154 @@
       </p:sp>
       <p:sp>
         <p:nvSpPr>
-          <p:cNvPr id="4" name="TextBox 3"/>
+          <p:cNvPr id="6" name="Rectangle 5"/>
+          <p:cNvSpPr/>
+          <p:nvPr/>
+        </p:nvSpPr>
+        <p:spPr>
+          <a:xfrm>
+            <a:off x="731520" y="1005840"/>
+            <a:ext cx="2286000" cy="45720"/>
+          </a:xfrm>
+          <a:prstGeom prst="rect">
+            <a:avLst/>
+          </a:prstGeom>
+          <a:solidFill>
+            <a:srgbClr val="00B4D8"/>
+          </a:solidFill>
+          <a:ln>
+            <a:noFill/>
+          </a:ln>
+        </p:spPr>
+        <p:style>
+          <a:lnRef idx="1">
+            <a:schemeClr val="accent1"/>
+          </a:lnRef>
+          <a:fillRef idx="3">
+            <a:schemeClr val="accent1"/>
+          </a:fillRef>
+          <a:effectRef idx="2">
+            <a:schemeClr val="accent1"/>
+          </a:effectRef>
+          <a:fontRef idx="minor">
+            <a:schemeClr val="lt1"/>
+          </a:fontRef>
+        </p:style>
+        <p:txBody>
+          <a:bodyPr rtlCol="0" anchor="ctr"/>
+          <a:lstStyle/>
+          <a:p>
+            <a:pPr algn="ctr"/>
+          </a:p>
+        </p:txBody>
+      </p:sp>
+      <p:sp>
+        <p:nvSpPr>
+          <p:cNvPr id="7" name="Rounded Rectangle 6"/>
+          <p:cNvSpPr/>
+          <p:nvPr/>
+        </p:nvSpPr>
+        <p:spPr>
+          <a:xfrm>
+            <a:off x="548640" y="1371600"/>
+            <a:ext cx="10972800" cy="1051560"/>
+          </a:xfrm>
+          <a:prstGeom prst="roundRect">
+            <a:avLst/>
+          </a:prstGeom>
+          <a:solidFill>
+            <a:srgbClr val="223345"/>
+          </a:solidFill>
+          <a:ln w="12700">
+            <a:solidFill>
+              <a:srgbClr val="223345"/>
+            </a:solidFill>
+          </a:ln>
+        </p:spPr>
+        <p:style>
+          <a:lnRef idx="1">
+            <a:schemeClr val="accent1"/>
+          </a:lnRef>
+          <a:fillRef idx="3">
+            <a:schemeClr val="accent1"/>
+          </a:fillRef>
+          <a:effectRef idx="2">
+            <a:schemeClr val="accent1"/>
+          </a:effectRef>
+          <a:fontRef idx="minor">
+            <a:schemeClr val="lt1"/>
+          </a:fontRef>
+        </p:style>
+        <p:txBody>
+          <a:bodyPr rtlCol="0" anchor="ctr"/>
+          <a:lstStyle/>
+          <a:p>
+            <a:pPr algn="ctr"/>
+          </a:p>
+        </p:txBody>
+      </p:sp>
+      <p:sp>
+        <p:nvSpPr>
+          <p:cNvPr id="8" name="Oval 7"/>
+          <p:cNvSpPr/>
+          <p:nvPr/>
+        </p:nvSpPr>
+        <p:spPr>
+          <a:xfrm>
+            <a:off x="822960" y="1645920"/>
+            <a:ext cx="411480" cy="411480"/>
+          </a:xfrm>
+          <a:prstGeom prst="ellipse">
+            <a:avLst/>
+          </a:prstGeom>
+          <a:solidFill>
+            <a:srgbClr val="00B4D8"/>
+          </a:solidFill>
+          <a:ln>
+            <a:noFill/>
+          </a:ln>
+        </p:spPr>
+        <p:style>
+          <a:lnRef idx="1">
+            <a:schemeClr val="accent1"/>
+          </a:lnRef>
+          <a:fillRef idx="3">
+            <a:schemeClr val="accent1"/>
+          </a:fillRef>
+          <a:effectRef idx="2">
+            <a:schemeClr val="accent1"/>
+          </a:effectRef>
+          <a:fontRef idx="minor">
+            <a:schemeClr val="lt1"/>
+          </a:fontRef>
+        </p:style>
+        <p:txBody>
+          <a:bodyPr rtlCol="0" anchor="ctr"/>
+          <a:lstStyle/>
+          <a:p>
+            <a:pPr algn="ctr">
+              <a:defRPr sz="1300" b="1">
+                <a:solidFill>
+                  <a:srgbClr val="FFFFFF"/>
+                </a:solidFill>
+              </a:defRPr>
+            </a:pPr>
+            <a:r>
+              <a:t>1</a:t>
+            </a:r>
+          </a:p>
+        </p:txBody>
+      </p:sp>
+      <p:sp>
+        <p:nvSpPr>
+          <p:cNvPr id="9" name="TextBox 8"/>
           <p:cNvSpPr txBox="1"/>
           <p:nvPr/>
         </p:nvSpPr>
         <p:spPr>
           <a:xfrm>
-            <a:off x="731520" y="1371600"/>
-            <a:ext cx="10515600" cy="5029200"/>
+            <a:off x="1463040" y="1508760"/>
+            <a:ext cx="9601200" cy="914400"/>
           </a:xfrm>
           <a:prstGeom prst="rect">
             <a:avLst/>
@@ -4301,18 +6191,17 @@
             <a:spAutoFit/>
           </a:bodyPr>
           <a:lstStyle/>
-          <a:p/>
-          <a:p>
-            <a:pPr>
+          <a:p>
+            <a:pPr algn="l">
               <a:spcBef>
                 <a:spcPts val="0"/>
               </a:spcBef>
               <a:spcAft>
-                <a:spcPts val="400"/>
+                <a:spcPts val="200"/>
               </a:spcAft>
-              <a:defRPr sz="1800" b="0">
-                <a:solidFill>
-                  <a:srgbClr val="333333"/>
+              <a:defRPr sz="1500" b="0">
+                <a:solidFill>
+                  <a:srgbClr val="FFFFFF"/>
                 </a:solidFill>
               </a:defRPr>
             </a:pPr>
@@ -4320,17 +6209,137 @@
               <a:t>Finanse osobiste (straty, błędy, brak wiedzy) to tematy mocno wrażliwe – w grupie uczestnicy ulegaliby presji społecznej</a:t>
             </a:r>
           </a:p>
-          <a:p>
-            <a:pPr>
+        </p:txBody>
+      </p:sp>
+      <p:sp>
+        <p:nvSpPr>
+          <p:cNvPr id="10" name="Rounded Rectangle 9"/>
+          <p:cNvSpPr/>
+          <p:nvPr/>
+        </p:nvSpPr>
+        <p:spPr>
+          <a:xfrm>
+            <a:off x="548640" y="2651760"/>
+            <a:ext cx="10972800" cy="1051560"/>
+          </a:xfrm>
+          <a:prstGeom prst="roundRect">
+            <a:avLst/>
+          </a:prstGeom>
+          <a:solidFill>
+            <a:srgbClr val="223345"/>
+          </a:solidFill>
+          <a:ln w="12700">
+            <a:solidFill>
+              <a:srgbClr val="223345"/>
+            </a:solidFill>
+          </a:ln>
+        </p:spPr>
+        <p:style>
+          <a:lnRef idx="1">
+            <a:schemeClr val="accent1"/>
+          </a:lnRef>
+          <a:fillRef idx="3">
+            <a:schemeClr val="accent1"/>
+          </a:fillRef>
+          <a:effectRef idx="2">
+            <a:schemeClr val="accent1"/>
+          </a:effectRef>
+          <a:fontRef idx="minor">
+            <a:schemeClr val="lt1"/>
+          </a:fontRef>
+        </p:style>
+        <p:txBody>
+          <a:bodyPr rtlCol="0" anchor="ctr"/>
+          <a:lstStyle/>
+          <a:p>
+            <a:pPr algn="ctr"/>
+          </a:p>
+        </p:txBody>
+      </p:sp>
+      <p:sp>
+        <p:nvSpPr>
+          <p:cNvPr id="11" name="Oval 10"/>
+          <p:cNvSpPr/>
+          <p:nvPr/>
+        </p:nvSpPr>
+        <p:spPr>
+          <a:xfrm>
+            <a:off x="822960" y="2926080"/>
+            <a:ext cx="411480" cy="411480"/>
+          </a:xfrm>
+          <a:prstGeom prst="ellipse">
+            <a:avLst/>
+          </a:prstGeom>
+          <a:solidFill>
+            <a:srgbClr val="00B4D8"/>
+          </a:solidFill>
+          <a:ln>
+            <a:noFill/>
+          </a:ln>
+        </p:spPr>
+        <p:style>
+          <a:lnRef idx="1">
+            <a:schemeClr val="accent1"/>
+          </a:lnRef>
+          <a:fillRef idx="3">
+            <a:schemeClr val="accent1"/>
+          </a:fillRef>
+          <a:effectRef idx="2">
+            <a:schemeClr val="accent1"/>
+          </a:effectRef>
+          <a:fontRef idx="minor">
+            <a:schemeClr val="lt1"/>
+          </a:fontRef>
+        </p:style>
+        <p:txBody>
+          <a:bodyPr rtlCol="0" anchor="ctr"/>
+          <a:lstStyle/>
+          <a:p>
+            <a:pPr algn="ctr">
+              <a:defRPr sz="1300" b="1">
+                <a:solidFill>
+                  <a:srgbClr val="FFFFFF"/>
+                </a:solidFill>
+              </a:defRPr>
+            </a:pPr>
+            <a:r>
+              <a:t>2</a:t>
+            </a:r>
+          </a:p>
+        </p:txBody>
+      </p:sp>
+      <p:sp>
+        <p:nvSpPr>
+          <p:cNvPr id="12" name="TextBox 11"/>
+          <p:cNvSpPr txBox="1"/>
+          <p:nvPr/>
+        </p:nvSpPr>
+        <p:spPr>
+          <a:xfrm>
+            <a:off x="1463040" y="2788920"/>
+            <a:ext cx="9601200" cy="914400"/>
+          </a:xfrm>
+          <a:prstGeom prst="rect">
+            <a:avLst/>
+          </a:prstGeom>
+          <a:noFill/>
+        </p:spPr>
+        <p:txBody>
+          <a:bodyPr wrap="square">
+            <a:spAutoFit/>
+          </a:bodyPr>
+          <a:lstStyle/>
+          <a:p>
+            <a:pPr algn="l">
               <a:spcBef>
-                <a:spcPts val="1200"/>
+                <a:spcPts val="0"/>
               </a:spcBef>
               <a:spcAft>
-                <a:spcPts val="400"/>
+                <a:spcPts val="200"/>
               </a:spcAft>
-              <a:defRPr sz="1800" b="0">
-                <a:solidFill>
-                  <a:srgbClr val="333333"/>
+              <a:defRPr sz="1500" b="0">
+                <a:solidFill>
+                  <a:srgbClr val="FFFFFF"/>
                 </a:solidFill>
               </a:defRPr>
             </a:pPr>
@@ -4338,17 +6347,137 @@
               <a:t>Zależy nam na bardzo dokładnym prześledzeniu zachowania użytkownika i jego interakcji z aplikacją</a:t>
             </a:r>
           </a:p>
-          <a:p>
-            <a:pPr>
+        </p:txBody>
+      </p:sp>
+      <p:sp>
+        <p:nvSpPr>
+          <p:cNvPr id="13" name="Rounded Rectangle 12"/>
+          <p:cNvSpPr/>
+          <p:nvPr/>
+        </p:nvSpPr>
+        <p:spPr>
+          <a:xfrm>
+            <a:off x="548640" y="3931920"/>
+            <a:ext cx="10972800" cy="1051560"/>
+          </a:xfrm>
+          <a:prstGeom prst="roundRect">
+            <a:avLst/>
+          </a:prstGeom>
+          <a:solidFill>
+            <a:srgbClr val="223345"/>
+          </a:solidFill>
+          <a:ln w="12700">
+            <a:solidFill>
+              <a:srgbClr val="223345"/>
+            </a:solidFill>
+          </a:ln>
+        </p:spPr>
+        <p:style>
+          <a:lnRef idx="1">
+            <a:schemeClr val="accent1"/>
+          </a:lnRef>
+          <a:fillRef idx="3">
+            <a:schemeClr val="accent1"/>
+          </a:fillRef>
+          <a:effectRef idx="2">
+            <a:schemeClr val="accent1"/>
+          </a:effectRef>
+          <a:fontRef idx="minor">
+            <a:schemeClr val="lt1"/>
+          </a:fontRef>
+        </p:style>
+        <p:txBody>
+          <a:bodyPr rtlCol="0" anchor="ctr"/>
+          <a:lstStyle/>
+          <a:p>
+            <a:pPr algn="ctr"/>
+          </a:p>
+        </p:txBody>
+      </p:sp>
+      <p:sp>
+        <p:nvSpPr>
+          <p:cNvPr id="14" name="Oval 13"/>
+          <p:cNvSpPr/>
+          <p:nvPr/>
+        </p:nvSpPr>
+        <p:spPr>
+          <a:xfrm>
+            <a:off x="822960" y="4206240"/>
+            <a:ext cx="411480" cy="411480"/>
+          </a:xfrm>
+          <a:prstGeom prst="ellipse">
+            <a:avLst/>
+          </a:prstGeom>
+          <a:solidFill>
+            <a:srgbClr val="00B4D8"/>
+          </a:solidFill>
+          <a:ln>
+            <a:noFill/>
+          </a:ln>
+        </p:spPr>
+        <p:style>
+          <a:lnRef idx="1">
+            <a:schemeClr val="accent1"/>
+          </a:lnRef>
+          <a:fillRef idx="3">
+            <a:schemeClr val="accent1"/>
+          </a:fillRef>
+          <a:effectRef idx="2">
+            <a:schemeClr val="accent1"/>
+          </a:effectRef>
+          <a:fontRef idx="minor">
+            <a:schemeClr val="lt1"/>
+          </a:fontRef>
+        </p:style>
+        <p:txBody>
+          <a:bodyPr rtlCol="0" anchor="ctr"/>
+          <a:lstStyle/>
+          <a:p>
+            <a:pPr algn="ctr">
+              <a:defRPr sz="1300" b="1">
+                <a:solidFill>
+                  <a:srgbClr val="FFFFFF"/>
+                </a:solidFill>
+              </a:defRPr>
+            </a:pPr>
+            <a:r>
+              <a:t>3</a:t>
+            </a:r>
+          </a:p>
+        </p:txBody>
+      </p:sp>
+      <p:sp>
+        <p:nvSpPr>
+          <p:cNvPr id="15" name="TextBox 14"/>
+          <p:cNvSpPr txBox="1"/>
+          <p:nvPr/>
+        </p:nvSpPr>
+        <p:spPr>
+          <a:xfrm>
+            <a:off x="1463040" y="4069080"/>
+            <a:ext cx="9601200" cy="914400"/>
+          </a:xfrm>
+          <a:prstGeom prst="rect">
+            <a:avLst/>
+          </a:prstGeom>
+          <a:noFill/>
+        </p:spPr>
+        <p:txBody>
+          <a:bodyPr wrap="square">
+            <a:spAutoFit/>
+          </a:bodyPr>
+          <a:lstStyle/>
+          <a:p>
+            <a:pPr algn="l">
               <a:spcBef>
-                <a:spcPts val="1200"/>
+                <a:spcPts val="0"/>
               </a:spcBef>
               <a:spcAft>
-                <a:spcPts val="400"/>
+                <a:spcPts val="200"/>
               </a:spcAft>
-              <a:defRPr sz="1800" b="0">
-                <a:solidFill>
-                  <a:srgbClr val="333333"/>
+              <a:defRPr sz="1500" b="0">
+                <a:solidFill>
+                  <a:srgbClr val="FFFFFF"/>
                 </a:solidFill>
               </a:defRPr>
             </a:pPr>
@@ -4356,17 +6485,137 @@
               <a:t>Chcemy, żeby rozmówca odtworzył proces podejmowania konkretnej decyzji inwestycyjnej krok po kroku</a:t>
             </a:r>
           </a:p>
-          <a:p>
-            <a:pPr>
+        </p:txBody>
+      </p:sp>
+      <p:sp>
+        <p:nvSpPr>
+          <p:cNvPr id="16" name="Rounded Rectangle 15"/>
+          <p:cNvSpPr/>
+          <p:nvPr/>
+        </p:nvSpPr>
+        <p:spPr>
+          <a:xfrm>
+            <a:off x="548640" y="5212079"/>
+            <a:ext cx="10972800" cy="1051560"/>
+          </a:xfrm>
+          <a:prstGeom prst="roundRect">
+            <a:avLst/>
+          </a:prstGeom>
+          <a:solidFill>
+            <a:srgbClr val="223345"/>
+          </a:solidFill>
+          <a:ln w="12700">
+            <a:solidFill>
+              <a:srgbClr val="223345"/>
+            </a:solidFill>
+          </a:ln>
+        </p:spPr>
+        <p:style>
+          <a:lnRef idx="1">
+            <a:schemeClr val="accent1"/>
+          </a:lnRef>
+          <a:fillRef idx="3">
+            <a:schemeClr val="accent1"/>
+          </a:fillRef>
+          <a:effectRef idx="2">
+            <a:schemeClr val="accent1"/>
+          </a:effectRef>
+          <a:fontRef idx="minor">
+            <a:schemeClr val="lt1"/>
+          </a:fontRef>
+        </p:style>
+        <p:txBody>
+          <a:bodyPr rtlCol="0" anchor="ctr"/>
+          <a:lstStyle/>
+          <a:p>
+            <a:pPr algn="ctr"/>
+          </a:p>
+        </p:txBody>
+      </p:sp>
+      <p:sp>
+        <p:nvSpPr>
+          <p:cNvPr id="17" name="Oval 16"/>
+          <p:cNvSpPr/>
+          <p:nvPr/>
+        </p:nvSpPr>
+        <p:spPr>
+          <a:xfrm>
+            <a:off x="822960" y="5486399"/>
+            <a:ext cx="411480" cy="411480"/>
+          </a:xfrm>
+          <a:prstGeom prst="ellipse">
+            <a:avLst/>
+          </a:prstGeom>
+          <a:solidFill>
+            <a:srgbClr val="00B4D8"/>
+          </a:solidFill>
+          <a:ln>
+            <a:noFill/>
+          </a:ln>
+        </p:spPr>
+        <p:style>
+          <a:lnRef idx="1">
+            <a:schemeClr val="accent1"/>
+          </a:lnRef>
+          <a:fillRef idx="3">
+            <a:schemeClr val="accent1"/>
+          </a:fillRef>
+          <a:effectRef idx="2">
+            <a:schemeClr val="accent1"/>
+          </a:effectRef>
+          <a:fontRef idx="minor">
+            <a:schemeClr val="lt1"/>
+          </a:fontRef>
+        </p:style>
+        <p:txBody>
+          <a:bodyPr rtlCol="0" anchor="ctr"/>
+          <a:lstStyle/>
+          <a:p>
+            <a:pPr algn="ctr">
+              <a:defRPr sz="1300" b="1">
+                <a:solidFill>
+                  <a:srgbClr val="FFFFFF"/>
+                </a:solidFill>
+              </a:defRPr>
+            </a:pPr>
+            <a:r>
+              <a:t>4</a:t>
+            </a:r>
+          </a:p>
+        </p:txBody>
+      </p:sp>
+      <p:sp>
+        <p:nvSpPr>
+          <p:cNvPr id="18" name="TextBox 17"/>
+          <p:cNvSpPr txBox="1"/>
+          <p:nvPr/>
+        </p:nvSpPr>
+        <p:spPr>
+          <a:xfrm>
+            <a:off x="1463040" y="5349239"/>
+            <a:ext cx="9601200" cy="914400"/>
+          </a:xfrm>
+          <a:prstGeom prst="rect">
+            <a:avLst/>
+          </a:prstGeom>
+          <a:noFill/>
+        </p:spPr>
+        <p:txBody>
+          <a:bodyPr wrap="square">
+            <a:spAutoFit/>
+          </a:bodyPr>
+          <a:lstStyle/>
+          <a:p>
+            <a:pPr algn="l">
               <a:spcBef>
-                <a:spcPts val="1200"/>
+                <a:spcPts val="0"/>
               </a:spcBef>
               <a:spcAft>
-                <a:spcPts val="400"/>
+                <a:spcPts val="200"/>
               </a:spcAft>
-              <a:defRPr sz="1800" b="0">
-                <a:solidFill>
-                  <a:srgbClr val="333333"/>
+              <a:defRPr sz="1500" b="0">
+                <a:solidFill>
+                  <a:srgbClr val="FFFFFF"/>
                 </a:solidFill>
               </a:defRPr>
             </a:pPr>
@@ -4411,13 +6660,13 @@
         <p:spPr>
           <a:xfrm>
             <a:off x="0" y="0"/>
-            <a:ext cx="12191695" cy="137160"/>
+            <a:ext cx="12191695" cy="54864"/>
           </a:xfrm>
           <a:prstGeom prst="rect">
             <a:avLst/>
           </a:prstGeom>
           <a:solidFill>
-            <a:srgbClr val="2E75B6"/>
+            <a:srgbClr val="00B4D8"/>
           </a:solidFill>
           <a:ln>
             <a:noFill/>
@@ -4447,14 +6696,102 @@
       </p:sp>
       <p:sp>
         <p:nvSpPr>
-          <p:cNvPr id="3" name="TextBox 2"/>
+          <p:cNvPr id="3" name="Rectangle 2"/>
+          <p:cNvSpPr/>
+          <p:nvPr/>
+        </p:nvSpPr>
+        <p:spPr>
+          <a:xfrm>
+            <a:off x="0" y="0"/>
+            <a:ext cx="91440" cy="6858000"/>
+          </a:xfrm>
+          <a:prstGeom prst="rect">
+            <a:avLst/>
+          </a:prstGeom>
+          <a:solidFill>
+            <a:srgbClr val="1B2838"/>
+          </a:solidFill>
+          <a:ln>
+            <a:noFill/>
+          </a:ln>
+        </p:spPr>
+        <p:style>
+          <a:lnRef idx="1">
+            <a:schemeClr val="accent1"/>
+          </a:lnRef>
+          <a:fillRef idx="3">
+            <a:schemeClr val="accent1"/>
+          </a:fillRef>
+          <a:effectRef idx="2">
+            <a:schemeClr val="accent1"/>
+          </a:effectRef>
+          <a:fontRef idx="minor">
+            <a:schemeClr val="lt1"/>
+          </a:fontRef>
+        </p:style>
+        <p:txBody>
+          <a:bodyPr rtlCol="0" anchor="ctr"/>
+          <a:lstStyle/>
+          <a:p>
+            <a:pPr algn="ctr"/>
+          </a:p>
+        </p:txBody>
+      </p:sp>
+      <p:sp>
+        <p:nvSpPr>
+          <p:cNvPr id="4" name="Oval 3"/>
+          <p:cNvSpPr/>
+          <p:nvPr/>
+        </p:nvSpPr>
+        <p:spPr>
+          <a:xfrm>
+            <a:off x="10058400" y="4572000"/>
+            <a:ext cx="2743200" cy="2743200"/>
+          </a:xfrm>
+          <a:prstGeom prst="ellipse">
+            <a:avLst/>
+          </a:prstGeom>
+          <a:solidFill>
+            <a:srgbClr val="00B4D8">
+              <a:alpha val="8000"/>
+            </a:srgbClr>
+          </a:solidFill>
+          <a:ln>
+            <a:noFill/>
+          </a:ln>
+        </p:spPr>
+        <p:style>
+          <a:lnRef idx="1">
+            <a:schemeClr val="accent1"/>
+          </a:lnRef>
+          <a:fillRef idx="3">
+            <a:schemeClr val="accent1"/>
+          </a:fillRef>
+          <a:effectRef idx="2">
+            <a:schemeClr val="accent1"/>
+          </a:effectRef>
+          <a:fontRef idx="minor">
+            <a:schemeClr val="lt1"/>
+          </a:fontRef>
+        </p:style>
+        <p:txBody>
+          <a:bodyPr rtlCol="0" anchor="ctr"/>
+          <a:lstStyle/>
+          <a:p>
+            <a:pPr algn="ctr"/>
+          </a:p>
+        </p:txBody>
+      </p:sp>
+      <p:sp>
+        <p:nvSpPr>
+          <p:cNvPr id="5" name="TextBox 4"/>
           <p:cNvSpPr txBox="1"/>
           <p:nvPr/>
         </p:nvSpPr>
         <p:spPr>
           <a:xfrm>
-            <a:off x="731520" y="365760"/>
-            <a:ext cx="10515600" cy="822960"/>
+            <a:off x="548640" y="274320"/>
+            <a:ext cx="10058400" cy="822960"/>
           </a:xfrm>
           <a:prstGeom prst="rect">
             <a:avLst/>
@@ -4467,10 +6804,16 @@
           </a:bodyPr>
           <a:lstStyle/>
           <a:p>
-            <a:pPr>
-              <a:defRPr sz="3000" b="1">
-                <a:solidFill>
-                  <a:srgbClr val="1F3864"/>
+            <a:pPr algn="l">
+              <a:spcBef>
+                <a:spcPts val="400"/>
+              </a:spcBef>
+              <a:spcAft>
+                <a:spcPts val="200"/>
+              </a:spcAft>
+              <a:defRPr sz="2800" b="1">
+                <a:solidFill>
+                  <a:srgbClr val="1B2838"/>
                 </a:solidFill>
               </a:defRPr>
             </a:pPr>
@@ -4482,14 +6825,102 @@
       </p:sp>
       <p:sp>
         <p:nvSpPr>
-          <p:cNvPr id="4" name="TextBox 3"/>
+          <p:cNvPr id="6" name="Rectangle 5"/>
+          <p:cNvSpPr/>
+          <p:nvPr/>
+        </p:nvSpPr>
+        <p:spPr>
+          <a:xfrm>
+            <a:off x="548640" y="914400"/>
+            <a:ext cx="2286000" cy="45720"/>
+          </a:xfrm>
+          <a:prstGeom prst="rect">
+            <a:avLst/>
+          </a:prstGeom>
+          <a:solidFill>
+            <a:srgbClr val="00B4D8"/>
+          </a:solidFill>
+          <a:ln>
+            <a:noFill/>
+          </a:ln>
+        </p:spPr>
+        <p:style>
+          <a:lnRef idx="1">
+            <a:schemeClr val="accent1"/>
+          </a:lnRef>
+          <a:fillRef idx="3">
+            <a:schemeClr val="accent1"/>
+          </a:fillRef>
+          <a:effectRef idx="2">
+            <a:schemeClr val="accent1"/>
+          </a:effectRef>
+          <a:fontRef idx="minor">
+            <a:schemeClr val="lt1"/>
+          </a:fontRef>
+        </p:style>
+        <p:txBody>
+          <a:bodyPr rtlCol="0" anchor="ctr"/>
+          <a:lstStyle/>
+          <a:p>
+            <a:pPr algn="ctr"/>
+          </a:p>
+        </p:txBody>
+      </p:sp>
+      <p:sp>
+        <p:nvSpPr>
+          <p:cNvPr id="7" name="Rounded Rectangle 6"/>
+          <p:cNvSpPr/>
+          <p:nvPr/>
+        </p:nvSpPr>
+        <p:spPr>
+          <a:xfrm>
+            <a:off x="457200" y="1188720"/>
+            <a:ext cx="1828800" cy="457200"/>
+          </a:xfrm>
+          <a:prstGeom prst="roundRect">
+            <a:avLst/>
+          </a:prstGeom>
+          <a:solidFill>
+            <a:srgbClr val="00B4D8"/>
+          </a:solidFill>
+          <a:ln w="12700">
+            <a:solidFill>
+              <a:srgbClr val="00B4D8"/>
+            </a:solidFill>
+          </a:ln>
+        </p:spPr>
+        <p:style>
+          <a:lnRef idx="1">
+            <a:schemeClr val="accent1"/>
+          </a:lnRef>
+          <a:fillRef idx="3">
+            <a:schemeClr val="accent1"/>
+          </a:fillRef>
+          <a:effectRef idx="2">
+            <a:schemeClr val="accent1"/>
+          </a:effectRef>
+          <a:fontRef idx="minor">
+            <a:schemeClr val="lt1"/>
+          </a:fontRef>
+        </p:style>
+        <p:txBody>
+          <a:bodyPr rtlCol="0" anchor="ctr"/>
+          <a:lstStyle/>
+          <a:p>
+            <a:pPr algn="ctr"/>
+          </a:p>
+        </p:txBody>
+      </p:sp>
+      <p:sp>
+        <p:nvSpPr>
+          <p:cNvPr id="8" name="TextBox 7"/>
           <p:cNvSpPr txBox="1"/>
           <p:nvPr/>
         </p:nvSpPr>
         <p:spPr>
           <a:xfrm>
-            <a:off x="731520" y="1371600"/>
-            <a:ext cx="10515600" cy="5029200"/>
+            <a:off x="548640" y="1216152"/>
+            <a:ext cx="1645920" cy="411480"/>
           </a:xfrm>
           <a:prstGeom prst="rect">
             <a:avLst/>
@@ -4501,41 +6932,298 @@
             <a:spAutoFit/>
           </a:bodyPr>
           <a:lstStyle/>
-          <a:p/>
-          <a:p>
-            <a:pPr>
+          <a:p>
+            <a:pPr algn="ctr">
               <a:spcBef>
                 <a:spcPts val="0"/>
               </a:spcBef>
               <a:spcAft>
-                <a:spcPts val="400"/>
+                <a:spcPts val="200"/>
               </a:spcAft>
-              <a:defRPr sz="1800" b="0">
-                <a:solidFill>
-                  <a:srgbClr val="333333"/>
+              <a:defRPr sz="1100" b="1">
+                <a:solidFill>
+                  <a:srgbClr val="FFFFFF"/>
                 </a:solidFill>
               </a:defRPr>
             </a:pPr>
             <a:r>
-              <a:t>1. Jakie były Pana/Pani główne motywacje, żeby w ogóle zacząć lokować swoje oszczędności poza standardowym kontem w banku?</a:t>
-            </a:r>
-          </a:p>
-          <a:p>
-            <a:pPr>
+              <a:t>CZĘŚĆ A</a:t>
+            </a:r>
+          </a:p>
+        </p:txBody>
+      </p:sp>
+      <p:sp>
+        <p:nvSpPr>
+          <p:cNvPr id="9" name="Rounded Rectangle 8"/>
+          <p:cNvSpPr/>
+          <p:nvPr/>
+        </p:nvSpPr>
+        <p:spPr>
+          <a:xfrm>
+            <a:off x="457200" y="1920240"/>
+            <a:ext cx="10972800" cy="1645920"/>
+          </a:xfrm>
+          <a:prstGeom prst="roundRect">
+            <a:avLst/>
+          </a:prstGeom>
+          <a:solidFill>
+            <a:srgbClr val="F8F9FA"/>
+          </a:solidFill>
+          <a:ln w="12700">
+            <a:solidFill>
+              <a:srgbClr val="DEE2E6"/>
+            </a:solidFill>
+          </a:ln>
+        </p:spPr>
+        <p:style>
+          <a:lnRef idx="1">
+            <a:schemeClr val="accent1"/>
+          </a:lnRef>
+          <a:fillRef idx="3">
+            <a:schemeClr val="accent1"/>
+          </a:fillRef>
+          <a:effectRef idx="2">
+            <a:schemeClr val="accent1"/>
+          </a:effectRef>
+          <a:fontRef idx="minor">
+            <a:schemeClr val="lt1"/>
+          </a:fontRef>
+        </p:style>
+        <p:txBody>
+          <a:bodyPr rtlCol="0" anchor="ctr"/>
+          <a:lstStyle/>
+          <a:p>
+            <a:pPr algn="ctr"/>
+          </a:p>
+        </p:txBody>
+      </p:sp>
+      <p:sp>
+        <p:nvSpPr>
+          <p:cNvPr id="10" name="Oval 9"/>
+          <p:cNvSpPr/>
+          <p:nvPr/>
+        </p:nvSpPr>
+        <p:spPr>
+          <a:xfrm>
+            <a:off x="731520" y="2468880"/>
+            <a:ext cx="502920" cy="502920"/>
+          </a:xfrm>
+          <a:prstGeom prst="ellipse">
+            <a:avLst/>
+          </a:prstGeom>
+          <a:solidFill>
+            <a:srgbClr val="00B4D8"/>
+          </a:solidFill>
+          <a:ln>
+            <a:noFill/>
+          </a:ln>
+        </p:spPr>
+        <p:style>
+          <a:lnRef idx="1">
+            <a:schemeClr val="accent1"/>
+          </a:lnRef>
+          <a:fillRef idx="3">
+            <a:schemeClr val="accent1"/>
+          </a:fillRef>
+          <a:effectRef idx="2">
+            <a:schemeClr val="accent1"/>
+          </a:effectRef>
+          <a:fontRef idx="minor">
+            <a:schemeClr val="lt1"/>
+          </a:fontRef>
+        </p:style>
+        <p:txBody>
+          <a:bodyPr rtlCol="0" anchor="ctr"/>
+          <a:lstStyle/>
+          <a:p>
+            <a:pPr algn="ctr">
+              <a:defRPr sz="1300" b="1">
+                <a:solidFill>
+                  <a:srgbClr val="FFFFFF"/>
+                </a:solidFill>
+              </a:defRPr>
+            </a:pPr>
+            <a:r>
+              <a:t>1</a:t>
+            </a:r>
+          </a:p>
+        </p:txBody>
+      </p:sp>
+      <p:sp>
+        <p:nvSpPr>
+          <p:cNvPr id="11" name="TextBox 10"/>
+          <p:cNvSpPr txBox="1"/>
+          <p:nvPr/>
+        </p:nvSpPr>
+        <p:spPr>
+          <a:xfrm>
+            <a:off x="1463040" y="2194560"/>
+            <a:ext cx="9601200" cy="1280160"/>
+          </a:xfrm>
+          <a:prstGeom prst="rect">
+            <a:avLst/>
+          </a:prstGeom>
+          <a:noFill/>
+        </p:spPr>
+        <p:txBody>
+          <a:bodyPr wrap="square">
+            <a:spAutoFit/>
+          </a:bodyPr>
+          <a:lstStyle/>
+          <a:p>
+            <a:pPr algn="l">
               <a:spcBef>
-                <a:spcPts val="2000"/>
+                <a:spcPts val="0"/>
               </a:spcBef>
               <a:spcAft>
-                <a:spcPts val="400"/>
+                <a:spcPts val="200"/>
               </a:spcAft>
-              <a:defRPr sz="1800" b="0">
-                <a:solidFill>
-                  <a:srgbClr val="333333"/>
+              <a:defRPr sz="1600" b="0">
+                <a:solidFill>
+                  <a:srgbClr val="2D3436"/>
                 </a:solidFill>
               </a:defRPr>
             </a:pPr>
             <a:r>
-              <a:t>2. Z jakich aplikacji lub platform inwestycyjnych Pan(i) obecnie korzysta i dlaczego padł wybór akurat na nie?</a:t>
+              <a:t>Jakie były Pana/Pani główne motywacje, żeby w ogóle zacząć lokować swoje oszczędności poza standardowym kontem w banku?</a:t>
+            </a:r>
+          </a:p>
+        </p:txBody>
+      </p:sp>
+      <p:sp>
+        <p:nvSpPr>
+          <p:cNvPr id="12" name="Rounded Rectangle 11"/>
+          <p:cNvSpPr/>
+          <p:nvPr/>
+        </p:nvSpPr>
+        <p:spPr>
+          <a:xfrm>
+            <a:off x="457200" y="3931920"/>
+            <a:ext cx="10972800" cy="1645920"/>
+          </a:xfrm>
+          <a:prstGeom prst="roundRect">
+            <a:avLst/>
+          </a:prstGeom>
+          <a:solidFill>
+            <a:srgbClr val="F8F9FA"/>
+          </a:solidFill>
+          <a:ln w="12700">
+            <a:solidFill>
+              <a:srgbClr val="DEE2E6"/>
+            </a:solidFill>
+          </a:ln>
+        </p:spPr>
+        <p:style>
+          <a:lnRef idx="1">
+            <a:schemeClr val="accent1"/>
+          </a:lnRef>
+          <a:fillRef idx="3">
+            <a:schemeClr val="accent1"/>
+          </a:fillRef>
+          <a:effectRef idx="2">
+            <a:schemeClr val="accent1"/>
+          </a:effectRef>
+          <a:fontRef idx="minor">
+            <a:schemeClr val="lt1"/>
+          </a:fontRef>
+        </p:style>
+        <p:txBody>
+          <a:bodyPr rtlCol="0" anchor="ctr"/>
+          <a:lstStyle/>
+          <a:p>
+            <a:pPr algn="ctr"/>
+          </a:p>
+        </p:txBody>
+      </p:sp>
+      <p:sp>
+        <p:nvSpPr>
+          <p:cNvPr id="13" name="Oval 12"/>
+          <p:cNvSpPr/>
+          <p:nvPr/>
+        </p:nvSpPr>
+        <p:spPr>
+          <a:xfrm>
+            <a:off x="731520" y="4480560"/>
+            <a:ext cx="502920" cy="502920"/>
+          </a:xfrm>
+          <a:prstGeom prst="ellipse">
+            <a:avLst/>
+          </a:prstGeom>
+          <a:solidFill>
+            <a:srgbClr val="00B4D8"/>
+          </a:solidFill>
+          <a:ln>
+            <a:noFill/>
+          </a:ln>
+        </p:spPr>
+        <p:style>
+          <a:lnRef idx="1">
+            <a:schemeClr val="accent1"/>
+          </a:lnRef>
+          <a:fillRef idx="3">
+            <a:schemeClr val="accent1"/>
+          </a:fillRef>
+          <a:effectRef idx="2">
+            <a:schemeClr val="accent1"/>
+          </a:effectRef>
+          <a:fontRef idx="minor">
+            <a:schemeClr val="lt1"/>
+          </a:fontRef>
+        </p:style>
+        <p:txBody>
+          <a:bodyPr rtlCol="0" anchor="ctr"/>
+          <a:lstStyle/>
+          <a:p>
+            <a:pPr algn="ctr">
+              <a:defRPr sz="1300" b="1">
+                <a:solidFill>
+                  <a:srgbClr val="FFFFFF"/>
+                </a:solidFill>
+              </a:defRPr>
+            </a:pPr>
+            <a:r>
+              <a:t>2</a:t>
+            </a:r>
+          </a:p>
+        </p:txBody>
+      </p:sp>
+      <p:sp>
+        <p:nvSpPr>
+          <p:cNvPr id="14" name="TextBox 13"/>
+          <p:cNvSpPr txBox="1"/>
+          <p:nvPr/>
+        </p:nvSpPr>
+        <p:spPr>
+          <a:xfrm>
+            <a:off x="1463040" y="4206240"/>
+            <a:ext cx="9601200" cy="1280160"/>
+          </a:xfrm>
+          <a:prstGeom prst="rect">
+            <a:avLst/>
+          </a:prstGeom>
+          <a:noFill/>
+        </p:spPr>
+        <p:txBody>
+          <a:bodyPr wrap="square">
+            <a:spAutoFit/>
+          </a:bodyPr>
+          <a:lstStyle/>
+          <a:p>
+            <a:pPr algn="l">
+              <a:spcBef>
+                <a:spcPts val="0"/>
+              </a:spcBef>
+              <a:spcAft>
+                <a:spcPts val="200"/>
+              </a:spcAft>
+              <a:defRPr sz="1600" b="0">
+                <a:solidFill>
+                  <a:srgbClr val="2D3436"/>
+                </a:solidFill>
+              </a:defRPr>
+            </a:pPr>
+            <a:r>
+              <a:t>Z jakich aplikacji lub platform inwestycyjnych Pan(i) obecnie korzysta i dlaczego padł wybór akurat na nie?</a:t>
             </a:r>
           </a:p>
         </p:txBody>
@@ -4554,7 +7242,7 @@
     <p:bg>
       <p:bgPr>
         <a:solidFill>
-          <a:srgbClr val="FFFFFF"/>
+          <a:srgbClr val="F8F9FA"/>
         </a:solidFill>
         <a:effectLst/>
       </p:bgPr>
@@ -4575,13 +7263,13 @@
         <p:spPr>
           <a:xfrm>
             <a:off x="0" y="0"/>
-            <a:ext cx="12191695" cy="137160"/>
+            <a:ext cx="12191695" cy="54864"/>
           </a:xfrm>
           <a:prstGeom prst="rect">
             <a:avLst/>
           </a:prstGeom>
           <a:solidFill>
-            <a:srgbClr val="2E75B6"/>
+            <a:srgbClr val="F4A261"/>
           </a:solidFill>
           <a:ln>
             <a:noFill/>
@@ -4611,14 +7299,102 @@
       </p:sp>
       <p:sp>
         <p:nvSpPr>
-          <p:cNvPr id="3" name="TextBox 2"/>
+          <p:cNvPr id="3" name="Rectangle 2"/>
+          <p:cNvSpPr/>
+          <p:nvPr/>
+        </p:nvSpPr>
+        <p:spPr>
+          <a:xfrm>
+            <a:off x="0" y="0"/>
+            <a:ext cx="91440" cy="6858000"/>
+          </a:xfrm>
+          <a:prstGeom prst="rect">
+            <a:avLst/>
+          </a:prstGeom>
+          <a:solidFill>
+            <a:srgbClr val="F4A261"/>
+          </a:solidFill>
+          <a:ln>
+            <a:noFill/>
+          </a:ln>
+        </p:spPr>
+        <p:style>
+          <a:lnRef idx="1">
+            <a:schemeClr val="accent1"/>
+          </a:lnRef>
+          <a:fillRef idx="3">
+            <a:schemeClr val="accent1"/>
+          </a:fillRef>
+          <a:effectRef idx="2">
+            <a:schemeClr val="accent1"/>
+          </a:effectRef>
+          <a:fontRef idx="minor">
+            <a:schemeClr val="lt1"/>
+          </a:fontRef>
+        </p:style>
+        <p:txBody>
+          <a:bodyPr rtlCol="0" anchor="ctr"/>
+          <a:lstStyle/>
+          <a:p>
+            <a:pPr algn="ctr"/>
+          </a:p>
+        </p:txBody>
+      </p:sp>
+      <p:sp>
+        <p:nvSpPr>
+          <p:cNvPr id="4" name="Oval 3"/>
+          <p:cNvSpPr/>
+          <p:nvPr/>
+        </p:nvSpPr>
+        <p:spPr>
+          <a:xfrm>
+            <a:off x="-914400" y="-914400"/>
+            <a:ext cx="2743200" cy="2743200"/>
+          </a:xfrm>
+          <a:prstGeom prst="ellipse">
+            <a:avLst/>
+          </a:prstGeom>
+          <a:solidFill>
+            <a:srgbClr val="F4A261">
+              <a:alpha val="8000"/>
+            </a:srgbClr>
+          </a:solidFill>
+          <a:ln>
+            <a:noFill/>
+          </a:ln>
+        </p:spPr>
+        <p:style>
+          <a:lnRef idx="1">
+            <a:schemeClr val="accent1"/>
+          </a:lnRef>
+          <a:fillRef idx="3">
+            <a:schemeClr val="accent1"/>
+          </a:fillRef>
+          <a:effectRef idx="2">
+            <a:schemeClr val="accent1"/>
+          </a:effectRef>
+          <a:fontRef idx="minor">
+            <a:schemeClr val="lt1"/>
+          </a:fontRef>
+        </p:style>
+        <p:txBody>
+          <a:bodyPr rtlCol="0" anchor="ctr"/>
+          <a:lstStyle/>
+          <a:p>
+            <a:pPr algn="ctr"/>
+          </a:p>
+        </p:txBody>
+      </p:sp>
+      <p:sp>
+        <p:nvSpPr>
+          <p:cNvPr id="5" name="TextBox 4"/>
           <p:cNvSpPr txBox="1"/>
           <p:nvPr/>
         </p:nvSpPr>
         <p:spPr>
           <a:xfrm>
-            <a:off x="731520" y="365760"/>
-            <a:ext cx="10515600" cy="822960"/>
+            <a:off x="548640" y="182880"/>
+            <a:ext cx="10058400" cy="731520"/>
           </a:xfrm>
           <a:prstGeom prst="rect">
             <a:avLst/>
@@ -4631,10 +7407,16 @@
           </a:bodyPr>
           <a:lstStyle/>
           <a:p>
-            <a:pPr>
-              <a:defRPr sz="3000" b="1">
-                <a:solidFill>
-                  <a:srgbClr val="1F3864"/>
+            <a:pPr algn="l">
+              <a:spcBef>
+                <a:spcPts val="400"/>
+              </a:spcBef>
+              <a:spcAft>
+                <a:spcPts val="200"/>
+              </a:spcAft>
+              <a:defRPr sz="2600" b="1">
+                <a:solidFill>
+                  <a:srgbClr val="1B2838"/>
                 </a:solidFill>
               </a:defRPr>
             </a:pPr>
@@ -4646,14 +7428,102 @@
       </p:sp>
       <p:sp>
         <p:nvSpPr>
-          <p:cNvPr id="4" name="TextBox 3"/>
+          <p:cNvPr id="6" name="Rectangle 5"/>
+          <p:cNvSpPr/>
+          <p:nvPr/>
+        </p:nvSpPr>
+        <p:spPr>
+          <a:xfrm>
+            <a:off x="548640" y="777240"/>
+            <a:ext cx="2286000" cy="36576"/>
+          </a:xfrm>
+          <a:prstGeom prst="rect">
+            <a:avLst/>
+          </a:prstGeom>
+          <a:solidFill>
+            <a:srgbClr val="F4A261"/>
+          </a:solidFill>
+          <a:ln>
+            <a:noFill/>
+          </a:ln>
+        </p:spPr>
+        <p:style>
+          <a:lnRef idx="1">
+            <a:schemeClr val="accent1"/>
+          </a:lnRef>
+          <a:fillRef idx="3">
+            <a:schemeClr val="accent1"/>
+          </a:fillRef>
+          <a:effectRef idx="2">
+            <a:schemeClr val="accent1"/>
+          </a:effectRef>
+          <a:fontRef idx="minor">
+            <a:schemeClr val="lt1"/>
+          </a:fontRef>
+        </p:style>
+        <p:txBody>
+          <a:bodyPr rtlCol="0" anchor="ctr"/>
+          <a:lstStyle/>
+          <a:p>
+            <a:pPr algn="ctr"/>
+          </a:p>
+        </p:txBody>
+      </p:sp>
+      <p:sp>
+        <p:nvSpPr>
+          <p:cNvPr id="7" name="Rounded Rectangle 6"/>
+          <p:cNvSpPr/>
+          <p:nvPr/>
+        </p:nvSpPr>
+        <p:spPr>
+          <a:xfrm>
+            <a:off x="457200" y="1005840"/>
+            <a:ext cx="1828800" cy="411480"/>
+          </a:xfrm>
+          <a:prstGeom prst="roundRect">
+            <a:avLst/>
+          </a:prstGeom>
+          <a:solidFill>
+            <a:srgbClr val="F4A261"/>
+          </a:solidFill>
+          <a:ln w="12700">
+            <a:solidFill>
+              <a:srgbClr val="F4A261"/>
+            </a:solidFill>
+          </a:ln>
+        </p:spPr>
+        <p:style>
+          <a:lnRef idx="1">
+            <a:schemeClr val="accent1"/>
+          </a:lnRef>
+          <a:fillRef idx="3">
+            <a:schemeClr val="accent1"/>
+          </a:fillRef>
+          <a:effectRef idx="2">
+            <a:schemeClr val="accent1"/>
+          </a:effectRef>
+          <a:fontRef idx="minor">
+            <a:schemeClr val="lt1"/>
+          </a:fontRef>
+        </p:style>
+        <p:txBody>
+          <a:bodyPr rtlCol="0" anchor="ctr"/>
+          <a:lstStyle/>
+          <a:p>
+            <a:pPr algn="ctr"/>
+          </a:p>
+        </p:txBody>
+      </p:sp>
+      <p:sp>
+        <p:nvSpPr>
+          <p:cNvPr id="8" name="TextBox 7"/>
           <p:cNvSpPr txBox="1"/>
           <p:nvPr/>
         </p:nvSpPr>
         <p:spPr>
           <a:xfrm>
-            <a:off x="731520" y="1188720"/>
-            <a:ext cx="10515600" cy="5486400"/>
+            <a:off x="548640" y="1024128"/>
+            <a:ext cx="1645920" cy="365760"/>
           </a:xfrm>
           <a:prstGeom prst="rect">
             <a:avLst/>
@@ -4665,131 +7535,673 @@
             <a:spAutoFit/>
           </a:bodyPr>
           <a:lstStyle/>
-          <a:p/>
-          <a:p>
-            <a:pPr>
+          <a:p>
+            <a:pPr algn="ctr">
               <a:spcBef>
                 <a:spcPts val="0"/>
               </a:spcBef>
               <a:spcAft>
-                <a:spcPts val="400"/>
+                <a:spcPts val="200"/>
               </a:spcAft>
-              <a:defRPr sz="1500" b="0">
-                <a:solidFill>
-                  <a:srgbClr val="333333"/>
+              <a:defRPr sz="1000" b="1">
+                <a:solidFill>
+                  <a:srgbClr val="FFFFFF"/>
                 </a:solidFill>
               </a:defRPr>
             </a:pPr>
             <a:r>
-              <a:t>3. Proszę opowiedzieć mi o swojej pierwszej transakcji lub założeniu portfela w aplikacji. Jak to wyglądało krok po kroku i jak się Pan(i) wtedy czuł(a)?</a:t>
-            </a:r>
-          </a:p>
-          <a:p>
-            <a:pPr>
+              <a:t>CZĘŚĆ B</a:t>
+            </a:r>
+          </a:p>
+        </p:txBody>
+      </p:sp>
+      <p:sp>
+        <p:nvSpPr>
+          <p:cNvPr id="9" name="Oval 8"/>
+          <p:cNvSpPr/>
+          <p:nvPr/>
+        </p:nvSpPr>
+        <p:spPr>
+          <a:xfrm>
+            <a:off x="548640" y="1554480"/>
+            <a:ext cx="365760" cy="365760"/>
+          </a:xfrm>
+          <a:prstGeom prst="ellipse">
+            <a:avLst/>
+          </a:prstGeom>
+          <a:solidFill>
+            <a:srgbClr val="F4A261"/>
+          </a:solidFill>
+          <a:ln>
+            <a:noFill/>
+          </a:ln>
+        </p:spPr>
+        <p:style>
+          <a:lnRef idx="1">
+            <a:schemeClr val="accent1"/>
+          </a:lnRef>
+          <a:fillRef idx="3">
+            <a:schemeClr val="accent1"/>
+          </a:fillRef>
+          <a:effectRef idx="2">
+            <a:schemeClr val="accent1"/>
+          </a:effectRef>
+          <a:fontRef idx="minor">
+            <a:schemeClr val="lt1"/>
+          </a:fontRef>
+        </p:style>
+        <p:txBody>
+          <a:bodyPr rtlCol="0" anchor="ctr"/>
+          <a:lstStyle/>
+          <a:p>
+            <a:pPr algn="ctr">
+              <a:defRPr sz="1300" b="1">
+                <a:solidFill>
+                  <a:srgbClr val="FFFFFF"/>
+                </a:solidFill>
+              </a:defRPr>
+            </a:pPr>
+            <a:r>
+              <a:t>3</a:t>
+            </a:r>
+          </a:p>
+        </p:txBody>
+      </p:sp>
+      <p:sp>
+        <p:nvSpPr>
+          <p:cNvPr id="10" name="TextBox 9"/>
+          <p:cNvSpPr txBox="1"/>
+          <p:nvPr/>
+        </p:nvSpPr>
+        <p:spPr>
+          <a:xfrm>
+            <a:off x="1097280" y="1508760"/>
+            <a:ext cx="10515600" cy="731520"/>
+          </a:xfrm>
+          <a:prstGeom prst="rect">
+            <a:avLst/>
+          </a:prstGeom>
+          <a:noFill/>
+        </p:spPr>
+        <p:txBody>
+          <a:bodyPr wrap="square">
+            <a:spAutoFit/>
+          </a:bodyPr>
+          <a:lstStyle/>
+          <a:p>
+            <a:pPr algn="l">
               <a:spcBef>
-                <a:spcPts val="1000"/>
+                <a:spcPts val="0"/>
               </a:spcBef>
               <a:spcAft>
-                <a:spcPts val="400"/>
+                <a:spcPts val="200"/>
               </a:spcAft>
-              <a:defRPr sz="1500" b="0">
-                <a:solidFill>
-                  <a:srgbClr val="333333"/>
+              <a:defRPr sz="1200" b="0">
+                <a:solidFill>
+                  <a:srgbClr val="2D3436"/>
                 </a:solidFill>
               </a:defRPr>
             </a:pPr>
             <a:r>
-              <a:t>4. W jaki sposób aplikacja, z której Pan(i) korzysta, pomaga (lub nie) zrozumieć, w co dokładnie inwestowane są pieniądze?</a:t>
-            </a:r>
-          </a:p>
-          <a:p>
-            <a:pPr>
+              <a:t>Proszę opowiedzieć mi o swojej pierwszej transakcji lub założeniu portfela w aplikacji. Jak to wyglądało krok po kroku i jak się Pan(i) wtedy czuł(a)?</a:t>
+            </a:r>
+          </a:p>
+        </p:txBody>
+      </p:sp>
+      <p:sp>
+        <p:nvSpPr>
+          <p:cNvPr id="11" name="Oval 10"/>
+          <p:cNvSpPr/>
+          <p:nvPr/>
+        </p:nvSpPr>
+        <p:spPr>
+          <a:xfrm>
+            <a:off x="548640" y="2304288"/>
+            <a:ext cx="365760" cy="365760"/>
+          </a:xfrm>
+          <a:prstGeom prst="ellipse">
+            <a:avLst/>
+          </a:prstGeom>
+          <a:solidFill>
+            <a:srgbClr val="F4A261"/>
+          </a:solidFill>
+          <a:ln>
+            <a:noFill/>
+          </a:ln>
+        </p:spPr>
+        <p:style>
+          <a:lnRef idx="1">
+            <a:schemeClr val="accent1"/>
+          </a:lnRef>
+          <a:fillRef idx="3">
+            <a:schemeClr val="accent1"/>
+          </a:fillRef>
+          <a:effectRef idx="2">
+            <a:schemeClr val="accent1"/>
+          </a:effectRef>
+          <a:fontRef idx="minor">
+            <a:schemeClr val="lt1"/>
+          </a:fontRef>
+        </p:style>
+        <p:txBody>
+          <a:bodyPr rtlCol="0" anchor="ctr"/>
+          <a:lstStyle/>
+          <a:p>
+            <a:pPr algn="ctr">
+              <a:defRPr sz="1300" b="1">
+                <a:solidFill>
+                  <a:srgbClr val="FFFFFF"/>
+                </a:solidFill>
+              </a:defRPr>
+            </a:pPr>
+            <a:r>
+              <a:t>4</a:t>
+            </a:r>
+          </a:p>
+        </p:txBody>
+      </p:sp>
+      <p:sp>
+        <p:nvSpPr>
+          <p:cNvPr id="12" name="TextBox 11"/>
+          <p:cNvSpPr txBox="1"/>
+          <p:nvPr/>
+        </p:nvSpPr>
+        <p:spPr>
+          <a:xfrm>
+            <a:off x="1097280" y="2258568"/>
+            <a:ext cx="10515600" cy="731520"/>
+          </a:xfrm>
+          <a:prstGeom prst="rect">
+            <a:avLst/>
+          </a:prstGeom>
+          <a:noFill/>
+        </p:spPr>
+        <p:txBody>
+          <a:bodyPr wrap="square">
+            <a:spAutoFit/>
+          </a:bodyPr>
+          <a:lstStyle/>
+          <a:p>
+            <a:pPr algn="l">
               <a:spcBef>
-                <a:spcPts val="1000"/>
+                <a:spcPts val="0"/>
               </a:spcBef>
               <a:spcAft>
-                <a:spcPts val="400"/>
+                <a:spcPts val="200"/>
               </a:spcAft>
-              <a:defRPr sz="1500" b="0">
-                <a:solidFill>
-                  <a:srgbClr val="333333"/>
+              <a:defRPr sz="1200" b="0">
+                <a:solidFill>
+                  <a:srgbClr val="2D3436"/>
                 </a:solidFill>
               </a:defRPr>
             </a:pPr>
             <a:r>
-              <a:t>5. Zdarzyło się Panu(i) podjąć decyzję o zainwestowaniu w coś pod wpływem impulsu, bo zobaczył(a) Pan(i) to na ekranie głównym aplikacji?</a:t>
-            </a:r>
-          </a:p>
-          <a:p>
-            <a:pPr>
+              <a:t>W jaki sposób aplikacja, z której Pan(i) korzysta, pomaga (lub nie) zrozumieć, w co dokładnie inwestowane są pieniądze?</a:t>
+            </a:r>
+          </a:p>
+        </p:txBody>
+      </p:sp>
+      <p:sp>
+        <p:nvSpPr>
+          <p:cNvPr id="13" name="Oval 12"/>
+          <p:cNvSpPr/>
+          <p:nvPr/>
+        </p:nvSpPr>
+        <p:spPr>
+          <a:xfrm>
+            <a:off x="548640" y="3054096"/>
+            <a:ext cx="365760" cy="365760"/>
+          </a:xfrm>
+          <a:prstGeom prst="ellipse">
+            <a:avLst/>
+          </a:prstGeom>
+          <a:solidFill>
+            <a:srgbClr val="F4A261"/>
+          </a:solidFill>
+          <a:ln>
+            <a:noFill/>
+          </a:ln>
+        </p:spPr>
+        <p:style>
+          <a:lnRef idx="1">
+            <a:schemeClr val="accent1"/>
+          </a:lnRef>
+          <a:fillRef idx="3">
+            <a:schemeClr val="accent1"/>
+          </a:fillRef>
+          <a:effectRef idx="2">
+            <a:schemeClr val="accent1"/>
+          </a:effectRef>
+          <a:fontRef idx="minor">
+            <a:schemeClr val="lt1"/>
+          </a:fontRef>
+        </p:style>
+        <p:txBody>
+          <a:bodyPr rtlCol="0" anchor="ctr"/>
+          <a:lstStyle/>
+          <a:p>
+            <a:pPr algn="ctr">
+              <a:defRPr sz="1300" b="1">
+                <a:solidFill>
+                  <a:srgbClr val="FFFFFF"/>
+                </a:solidFill>
+              </a:defRPr>
+            </a:pPr>
+            <a:r>
+              <a:t>5</a:t>
+            </a:r>
+          </a:p>
+        </p:txBody>
+      </p:sp>
+      <p:sp>
+        <p:nvSpPr>
+          <p:cNvPr id="14" name="TextBox 13"/>
+          <p:cNvSpPr txBox="1"/>
+          <p:nvPr/>
+        </p:nvSpPr>
+        <p:spPr>
+          <a:xfrm>
+            <a:off x="1097280" y="3008376"/>
+            <a:ext cx="10515600" cy="731520"/>
+          </a:xfrm>
+          <a:prstGeom prst="rect">
+            <a:avLst/>
+          </a:prstGeom>
+          <a:noFill/>
+        </p:spPr>
+        <p:txBody>
+          <a:bodyPr wrap="square">
+            <a:spAutoFit/>
+          </a:bodyPr>
+          <a:lstStyle/>
+          <a:p>
+            <a:pPr algn="l">
               <a:spcBef>
-                <a:spcPts val="1000"/>
+                <a:spcPts val="0"/>
               </a:spcBef>
               <a:spcAft>
-                <a:spcPts val="400"/>
+                <a:spcPts val="200"/>
               </a:spcAft>
-              <a:defRPr sz="1500" b="0">
-                <a:solidFill>
-                  <a:srgbClr val="333333"/>
+              <a:defRPr sz="1200" b="0">
+                <a:solidFill>
+                  <a:srgbClr val="2D3436"/>
                 </a:solidFill>
               </a:defRPr>
             </a:pPr>
             <a:r>
-              <a:t>6. Gdyby miał(a) Pan(i) swoimi słowami wyjaśnić, czym jest instrument, w który Pan(i) inwestuje (np. ETF, akcja) – jak by to Pan(i) opisał(a)?</a:t>
-            </a:r>
-          </a:p>
-          <a:p>
-            <a:pPr>
+              <a:t>Zdarzyło się Panu(i) podjąć decyzję o zainwestowaniu w coś pod wpływem impulsu, bo zobaczył(a) Pan(i) to na ekranie głównym aplikacji?</a:t>
+            </a:r>
+          </a:p>
+        </p:txBody>
+      </p:sp>
+      <p:sp>
+        <p:nvSpPr>
+          <p:cNvPr id="15" name="Oval 14"/>
+          <p:cNvSpPr/>
+          <p:nvPr/>
+        </p:nvSpPr>
+        <p:spPr>
+          <a:xfrm>
+            <a:off x="548640" y="3803903"/>
+            <a:ext cx="365760" cy="365760"/>
+          </a:xfrm>
+          <a:prstGeom prst="ellipse">
+            <a:avLst/>
+          </a:prstGeom>
+          <a:solidFill>
+            <a:srgbClr val="F4A261"/>
+          </a:solidFill>
+          <a:ln>
+            <a:noFill/>
+          </a:ln>
+        </p:spPr>
+        <p:style>
+          <a:lnRef idx="1">
+            <a:schemeClr val="accent1"/>
+          </a:lnRef>
+          <a:fillRef idx="3">
+            <a:schemeClr val="accent1"/>
+          </a:fillRef>
+          <a:effectRef idx="2">
+            <a:schemeClr val="accent1"/>
+          </a:effectRef>
+          <a:fontRef idx="minor">
+            <a:schemeClr val="lt1"/>
+          </a:fontRef>
+        </p:style>
+        <p:txBody>
+          <a:bodyPr rtlCol="0" anchor="ctr"/>
+          <a:lstStyle/>
+          <a:p>
+            <a:pPr algn="ctr">
+              <a:defRPr sz="1300" b="1">
+                <a:solidFill>
+                  <a:srgbClr val="FFFFFF"/>
+                </a:solidFill>
+              </a:defRPr>
+            </a:pPr>
+            <a:r>
+              <a:t>6</a:t>
+            </a:r>
+          </a:p>
+        </p:txBody>
+      </p:sp>
+      <p:sp>
+        <p:nvSpPr>
+          <p:cNvPr id="16" name="TextBox 15"/>
+          <p:cNvSpPr txBox="1"/>
+          <p:nvPr/>
+        </p:nvSpPr>
+        <p:spPr>
+          <a:xfrm>
+            <a:off x="1097280" y="3758183"/>
+            <a:ext cx="10515600" cy="731520"/>
+          </a:xfrm>
+          <a:prstGeom prst="rect">
+            <a:avLst/>
+          </a:prstGeom>
+          <a:noFill/>
+        </p:spPr>
+        <p:txBody>
+          <a:bodyPr wrap="square">
+            <a:spAutoFit/>
+          </a:bodyPr>
+          <a:lstStyle/>
+          <a:p>
+            <a:pPr algn="l">
               <a:spcBef>
-                <a:spcPts val="1000"/>
+                <a:spcPts val="0"/>
               </a:spcBef>
               <a:spcAft>
-                <a:spcPts val="400"/>
+                <a:spcPts val="200"/>
               </a:spcAft>
-              <a:defRPr sz="1500" b="0">
-                <a:solidFill>
-                  <a:srgbClr val="333333"/>
+              <a:defRPr sz="1200" b="0">
+                <a:solidFill>
+                  <a:srgbClr val="2D3436"/>
                 </a:solidFill>
               </a:defRPr>
             </a:pPr>
             <a:r>
-              <a:t>7. Aplikacje często pokazują komunikaty o ryzyku utraty kapitału. Jak Pan(i) reaguje na te komunikaty w momencie podejmowania decyzji o zakupie?</a:t>
-            </a:r>
-          </a:p>
-          <a:p>
-            <a:pPr>
+              <a:t>Gdyby miał(a) Pan(i) swoimi słowami wyjaśnić, czym jest instrument, w który Pan(i) inwestuje (np. ETF, akcja) – jak by to Pan(i) opisał(a)?</a:t>
+            </a:r>
+          </a:p>
+        </p:txBody>
+      </p:sp>
+      <p:sp>
+        <p:nvSpPr>
+          <p:cNvPr id="17" name="Oval 16"/>
+          <p:cNvSpPr/>
+          <p:nvPr/>
+        </p:nvSpPr>
+        <p:spPr>
+          <a:xfrm>
+            <a:off x="548640" y="4553712"/>
+            <a:ext cx="365760" cy="365760"/>
+          </a:xfrm>
+          <a:prstGeom prst="ellipse">
+            <a:avLst/>
+          </a:prstGeom>
+          <a:solidFill>
+            <a:srgbClr val="F4A261"/>
+          </a:solidFill>
+          <a:ln>
+            <a:noFill/>
+          </a:ln>
+        </p:spPr>
+        <p:style>
+          <a:lnRef idx="1">
+            <a:schemeClr val="accent1"/>
+          </a:lnRef>
+          <a:fillRef idx="3">
+            <a:schemeClr val="accent1"/>
+          </a:fillRef>
+          <a:effectRef idx="2">
+            <a:schemeClr val="accent1"/>
+          </a:effectRef>
+          <a:fontRef idx="minor">
+            <a:schemeClr val="lt1"/>
+          </a:fontRef>
+        </p:style>
+        <p:txBody>
+          <a:bodyPr rtlCol="0" anchor="ctr"/>
+          <a:lstStyle/>
+          <a:p>
+            <a:pPr algn="ctr">
+              <a:defRPr sz="1300" b="1">
+                <a:solidFill>
+                  <a:srgbClr val="FFFFFF"/>
+                </a:solidFill>
+              </a:defRPr>
+            </a:pPr>
+            <a:r>
+              <a:t>7</a:t>
+            </a:r>
+          </a:p>
+        </p:txBody>
+      </p:sp>
+      <p:sp>
+        <p:nvSpPr>
+          <p:cNvPr id="18" name="TextBox 17"/>
+          <p:cNvSpPr txBox="1"/>
+          <p:nvPr/>
+        </p:nvSpPr>
+        <p:spPr>
+          <a:xfrm>
+            <a:off x="1097280" y="4507992"/>
+            <a:ext cx="10515600" cy="731520"/>
+          </a:xfrm>
+          <a:prstGeom prst="rect">
+            <a:avLst/>
+          </a:prstGeom>
+          <a:noFill/>
+        </p:spPr>
+        <p:txBody>
+          <a:bodyPr wrap="square">
+            <a:spAutoFit/>
+          </a:bodyPr>
+          <a:lstStyle/>
+          <a:p>
+            <a:pPr algn="l">
               <a:spcBef>
-                <a:spcPts val="1000"/>
+                <a:spcPts val="0"/>
               </a:spcBef>
               <a:spcAft>
-                <a:spcPts val="400"/>
+                <a:spcPts val="200"/>
               </a:spcAft>
-              <a:defRPr sz="1500" b="0">
-                <a:solidFill>
-                  <a:srgbClr val="333333"/>
+              <a:defRPr sz="1200" b="0">
+                <a:solidFill>
+                  <a:srgbClr val="2D3436"/>
                 </a:solidFill>
               </a:defRPr>
             </a:pPr>
             <a:r>
-              <a:t>8. Co się dzieje, gdy wchodzi Pan(i) do aplikacji i widzi, że cały wykres portfela jest „na czerwono”? Co Pan(i) wtedy robi i dlaczego?</a:t>
-            </a:r>
-          </a:p>
-          <a:p>
-            <a:pPr>
+              <a:t>Aplikacje często pokazują komunikaty o ryzyku utraty kapitału. Jak Pan(i) reaguje na te komunikaty w momencie podejmowania decyzji o zakupie?</a:t>
+            </a:r>
+          </a:p>
+        </p:txBody>
+      </p:sp>
+      <p:sp>
+        <p:nvSpPr>
+          <p:cNvPr id="19" name="Oval 18"/>
+          <p:cNvSpPr/>
+          <p:nvPr/>
+        </p:nvSpPr>
+        <p:spPr>
+          <a:xfrm>
+            <a:off x="548640" y="5303520"/>
+            <a:ext cx="365760" cy="365760"/>
+          </a:xfrm>
+          <a:prstGeom prst="ellipse">
+            <a:avLst/>
+          </a:prstGeom>
+          <a:solidFill>
+            <a:srgbClr val="F4A261"/>
+          </a:solidFill>
+          <a:ln>
+            <a:noFill/>
+          </a:ln>
+        </p:spPr>
+        <p:style>
+          <a:lnRef idx="1">
+            <a:schemeClr val="accent1"/>
+          </a:lnRef>
+          <a:fillRef idx="3">
+            <a:schemeClr val="accent1"/>
+          </a:fillRef>
+          <a:effectRef idx="2">
+            <a:schemeClr val="accent1"/>
+          </a:effectRef>
+          <a:fontRef idx="minor">
+            <a:schemeClr val="lt1"/>
+          </a:fontRef>
+        </p:style>
+        <p:txBody>
+          <a:bodyPr rtlCol="0" anchor="ctr"/>
+          <a:lstStyle/>
+          <a:p>
+            <a:pPr algn="ctr">
+              <a:defRPr sz="1300" b="1">
+                <a:solidFill>
+                  <a:srgbClr val="FFFFFF"/>
+                </a:solidFill>
+              </a:defRPr>
+            </a:pPr>
+            <a:r>
+              <a:t>8</a:t>
+            </a:r>
+          </a:p>
+        </p:txBody>
+      </p:sp>
+      <p:sp>
+        <p:nvSpPr>
+          <p:cNvPr id="20" name="TextBox 19"/>
+          <p:cNvSpPr txBox="1"/>
+          <p:nvPr/>
+        </p:nvSpPr>
+        <p:spPr>
+          <a:xfrm>
+            <a:off x="1097280" y="5257800"/>
+            <a:ext cx="10515600" cy="731520"/>
+          </a:xfrm>
+          <a:prstGeom prst="rect">
+            <a:avLst/>
+          </a:prstGeom>
+          <a:noFill/>
+        </p:spPr>
+        <p:txBody>
+          <a:bodyPr wrap="square">
+            <a:spAutoFit/>
+          </a:bodyPr>
+          <a:lstStyle/>
+          <a:p>
+            <a:pPr algn="l">
               <a:spcBef>
-                <a:spcPts val="1000"/>
+                <a:spcPts val="0"/>
               </a:spcBef>
               <a:spcAft>
-                <a:spcPts val="400"/>
+                <a:spcPts val="200"/>
               </a:spcAft>
-              <a:defRPr sz="1500" b="0">
-                <a:solidFill>
-                  <a:srgbClr val="333333"/>
+              <a:defRPr sz="1200" b="0">
+                <a:solidFill>
+                  <a:srgbClr val="2D3436"/>
                 </a:solidFill>
               </a:defRPr>
             </a:pPr>
             <a:r>
-              <a:t>9. Czy uważa Pan(i), że od kiedy używa Pan(i) tej aplikacji, Pana/Pani wiedza o finansach i ekonomii wzrosła? Skąd to przekonanie?</a:t>
+              <a:t>Co się dzieje, gdy wchodzi Pan(i) do aplikacji i widzi, że cały wykres portfela jest „na czerwono”? Co Pan(i) wtedy robi i dlaczego?</a:t>
+            </a:r>
+          </a:p>
+        </p:txBody>
+      </p:sp>
+      <p:sp>
+        <p:nvSpPr>
+          <p:cNvPr id="21" name="Oval 20"/>
+          <p:cNvSpPr/>
+          <p:nvPr/>
+        </p:nvSpPr>
+        <p:spPr>
+          <a:xfrm>
+            <a:off x="548640" y="6053328"/>
+            <a:ext cx="365760" cy="365760"/>
+          </a:xfrm>
+          <a:prstGeom prst="ellipse">
+            <a:avLst/>
+          </a:prstGeom>
+          <a:solidFill>
+            <a:srgbClr val="F4A261"/>
+          </a:solidFill>
+          <a:ln>
+            <a:noFill/>
+          </a:ln>
+        </p:spPr>
+        <p:style>
+          <a:lnRef idx="1">
+            <a:schemeClr val="accent1"/>
+          </a:lnRef>
+          <a:fillRef idx="3">
+            <a:schemeClr val="accent1"/>
+          </a:fillRef>
+          <a:effectRef idx="2">
+            <a:schemeClr val="accent1"/>
+          </a:effectRef>
+          <a:fontRef idx="minor">
+            <a:schemeClr val="lt1"/>
+          </a:fontRef>
+        </p:style>
+        <p:txBody>
+          <a:bodyPr rtlCol="0" anchor="ctr"/>
+          <a:lstStyle/>
+          <a:p>
+            <a:pPr algn="ctr">
+              <a:defRPr sz="1300" b="1">
+                <a:solidFill>
+                  <a:srgbClr val="FFFFFF"/>
+                </a:solidFill>
+              </a:defRPr>
+            </a:pPr>
+            <a:r>
+              <a:t>9</a:t>
+            </a:r>
+          </a:p>
+        </p:txBody>
+      </p:sp>
+      <p:sp>
+        <p:nvSpPr>
+          <p:cNvPr id="22" name="TextBox 21"/>
+          <p:cNvSpPr txBox="1"/>
+          <p:nvPr/>
+        </p:nvSpPr>
+        <p:spPr>
+          <a:xfrm>
+            <a:off x="1097280" y="6007608"/>
+            <a:ext cx="10515600" cy="731520"/>
+          </a:xfrm>
+          <a:prstGeom prst="rect">
+            <a:avLst/>
+          </a:prstGeom>
+          <a:noFill/>
+        </p:spPr>
+        <p:txBody>
+          <a:bodyPr wrap="square">
+            <a:spAutoFit/>
+          </a:bodyPr>
+          <a:lstStyle/>
+          <a:p>
+            <a:pPr algn="l">
+              <a:spcBef>
+                <a:spcPts val="0"/>
+              </a:spcBef>
+              <a:spcAft>
+                <a:spcPts val="200"/>
+              </a:spcAft>
+              <a:defRPr sz="1200" b="0">
+                <a:solidFill>
+                  <a:srgbClr val="2D3436"/>
+                </a:solidFill>
+              </a:defRPr>
+            </a:pPr>
+            <a:r>
+              <a:t>Czy uważa Pan(i), że od kiedy używa Pan(i) tej aplikacji, Pana/Pani wiedza o finansach i ekonomii wzrosła? Skąd to przekonanie?</a:t>
             </a:r>
           </a:p>
         </p:txBody>
@@ -4829,13 +8241,13 @@
         <p:spPr>
           <a:xfrm>
             <a:off x="0" y="0"/>
-            <a:ext cx="12191695" cy="137160"/>
+            <a:ext cx="12191695" cy="54864"/>
           </a:xfrm>
           <a:prstGeom prst="rect">
             <a:avLst/>
           </a:prstGeom>
           <a:solidFill>
-            <a:srgbClr val="2E75B6"/>
+            <a:srgbClr val="1B2838"/>
           </a:solidFill>
           <a:ln>
             <a:noFill/>
@@ -4865,14 +8277,102 @@
       </p:sp>
       <p:sp>
         <p:nvSpPr>
-          <p:cNvPr id="3" name="TextBox 2"/>
+          <p:cNvPr id="3" name="Rectangle 2"/>
+          <p:cNvSpPr/>
+          <p:nvPr/>
+        </p:nvSpPr>
+        <p:spPr>
+          <a:xfrm>
+            <a:off x="0" y="0"/>
+            <a:ext cx="91440" cy="6858000"/>
+          </a:xfrm>
+          <a:prstGeom prst="rect">
+            <a:avLst/>
+          </a:prstGeom>
+          <a:solidFill>
+            <a:srgbClr val="1B2838"/>
+          </a:solidFill>
+          <a:ln>
+            <a:noFill/>
+          </a:ln>
+        </p:spPr>
+        <p:style>
+          <a:lnRef idx="1">
+            <a:schemeClr val="accent1"/>
+          </a:lnRef>
+          <a:fillRef idx="3">
+            <a:schemeClr val="accent1"/>
+          </a:fillRef>
+          <a:effectRef idx="2">
+            <a:schemeClr val="accent1"/>
+          </a:effectRef>
+          <a:fontRef idx="minor">
+            <a:schemeClr val="lt1"/>
+          </a:fontRef>
+        </p:style>
+        <p:txBody>
+          <a:bodyPr rtlCol="0" anchor="ctr"/>
+          <a:lstStyle/>
+          <a:p>
+            <a:pPr algn="ctr"/>
+          </a:p>
+        </p:txBody>
+      </p:sp>
+      <p:sp>
+        <p:nvSpPr>
+          <p:cNvPr id="4" name="Oval 3"/>
+          <p:cNvSpPr/>
+          <p:nvPr/>
+        </p:nvSpPr>
+        <p:spPr>
+          <a:xfrm>
+            <a:off x="9601200" y="-1371600"/>
+            <a:ext cx="3200400" cy="3200400"/>
+          </a:xfrm>
+          <a:prstGeom prst="ellipse">
+            <a:avLst/>
+          </a:prstGeom>
+          <a:solidFill>
+            <a:srgbClr val="1B2838">
+              <a:alpha val="8000"/>
+            </a:srgbClr>
+          </a:solidFill>
+          <a:ln>
+            <a:noFill/>
+          </a:ln>
+        </p:spPr>
+        <p:style>
+          <a:lnRef idx="1">
+            <a:schemeClr val="accent1"/>
+          </a:lnRef>
+          <a:fillRef idx="3">
+            <a:schemeClr val="accent1"/>
+          </a:fillRef>
+          <a:effectRef idx="2">
+            <a:schemeClr val="accent1"/>
+          </a:effectRef>
+          <a:fontRef idx="minor">
+            <a:schemeClr val="lt1"/>
+          </a:fontRef>
+        </p:style>
+        <p:txBody>
+          <a:bodyPr rtlCol="0" anchor="ctr"/>
+          <a:lstStyle/>
+          <a:p>
+            <a:pPr algn="ctr"/>
+          </a:p>
+        </p:txBody>
+      </p:sp>
+      <p:sp>
+        <p:nvSpPr>
+          <p:cNvPr id="5" name="TextBox 4"/>
           <p:cNvSpPr txBox="1"/>
           <p:nvPr/>
         </p:nvSpPr>
         <p:spPr>
           <a:xfrm>
-            <a:off x="731520" y="365760"/>
-            <a:ext cx="10515600" cy="822960"/>
+            <a:off x="548640" y="274320"/>
+            <a:ext cx="10058400" cy="822960"/>
           </a:xfrm>
           <a:prstGeom prst="rect">
             <a:avLst/>
@@ -4885,10 +8385,16 @@
           </a:bodyPr>
           <a:lstStyle/>
           <a:p>
-            <a:pPr>
-              <a:defRPr sz="3000" b="1">
-                <a:solidFill>
-                  <a:srgbClr val="1F3864"/>
+            <a:pPr algn="l">
+              <a:spcBef>
+                <a:spcPts val="400"/>
+              </a:spcBef>
+              <a:spcAft>
+                <a:spcPts val="200"/>
+              </a:spcAft>
+              <a:defRPr sz="2800" b="1">
+                <a:solidFill>
+                  <a:srgbClr val="1B2838"/>
                 </a:solidFill>
               </a:defRPr>
             </a:pPr>
@@ -4900,14 +8406,102 @@
       </p:sp>
       <p:sp>
         <p:nvSpPr>
-          <p:cNvPr id="4" name="TextBox 3"/>
+          <p:cNvPr id="6" name="Rectangle 5"/>
+          <p:cNvSpPr/>
+          <p:nvPr/>
+        </p:nvSpPr>
+        <p:spPr>
+          <a:xfrm>
+            <a:off x="548640" y="914400"/>
+            <a:ext cx="2286000" cy="45720"/>
+          </a:xfrm>
+          <a:prstGeom prst="rect">
+            <a:avLst/>
+          </a:prstGeom>
+          <a:solidFill>
+            <a:srgbClr val="1B2838"/>
+          </a:solidFill>
+          <a:ln>
+            <a:noFill/>
+          </a:ln>
+        </p:spPr>
+        <p:style>
+          <a:lnRef idx="1">
+            <a:schemeClr val="accent1"/>
+          </a:lnRef>
+          <a:fillRef idx="3">
+            <a:schemeClr val="accent1"/>
+          </a:fillRef>
+          <a:effectRef idx="2">
+            <a:schemeClr val="accent1"/>
+          </a:effectRef>
+          <a:fontRef idx="minor">
+            <a:schemeClr val="lt1"/>
+          </a:fontRef>
+        </p:style>
+        <p:txBody>
+          <a:bodyPr rtlCol="0" anchor="ctr"/>
+          <a:lstStyle/>
+          <a:p>
+            <a:pPr algn="ctr"/>
+          </a:p>
+        </p:txBody>
+      </p:sp>
+      <p:sp>
+        <p:nvSpPr>
+          <p:cNvPr id="7" name="Rounded Rectangle 6"/>
+          <p:cNvSpPr/>
+          <p:nvPr/>
+        </p:nvSpPr>
+        <p:spPr>
+          <a:xfrm>
+            <a:off x="457200" y="1188720"/>
+            <a:ext cx="1828800" cy="457200"/>
+          </a:xfrm>
+          <a:prstGeom prst="roundRect">
+            <a:avLst/>
+          </a:prstGeom>
+          <a:solidFill>
+            <a:srgbClr val="1B2838"/>
+          </a:solidFill>
+          <a:ln w="12700">
+            <a:solidFill>
+              <a:srgbClr val="1B2838"/>
+            </a:solidFill>
+          </a:ln>
+        </p:spPr>
+        <p:style>
+          <a:lnRef idx="1">
+            <a:schemeClr val="accent1"/>
+          </a:lnRef>
+          <a:fillRef idx="3">
+            <a:schemeClr val="accent1"/>
+          </a:fillRef>
+          <a:effectRef idx="2">
+            <a:schemeClr val="accent1"/>
+          </a:effectRef>
+          <a:fontRef idx="minor">
+            <a:schemeClr val="lt1"/>
+          </a:fontRef>
+        </p:style>
+        <p:txBody>
+          <a:bodyPr rtlCol="0" anchor="ctr"/>
+          <a:lstStyle/>
+          <a:p>
+            <a:pPr algn="ctr"/>
+          </a:p>
+        </p:txBody>
+      </p:sp>
+      <p:sp>
+        <p:nvSpPr>
+          <p:cNvPr id="8" name="TextBox 7"/>
           <p:cNvSpPr txBox="1"/>
           <p:nvPr/>
         </p:nvSpPr>
         <p:spPr>
           <a:xfrm>
-            <a:off x="731520" y="1371600"/>
-            <a:ext cx="10515600" cy="5029200"/>
+            <a:off x="548640" y="1216152"/>
+            <a:ext cx="1645920" cy="411480"/>
           </a:xfrm>
           <a:prstGeom prst="rect">
             <a:avLst/>
@@ -4919,59 +8513,436 @@
             <a:spAutoFit/>
           </a:bodyPr>
           <a:lstStyle/>
-          <a:p/>
-          <a:p>
-            <a:pPr>
+          <a:p>
+            <a:pPr algn="ctr">
               <a:spcBef>
                 <a:spcPts val="0"/>
               </a:spcBef>
               <a:spcAft>
-                <a:spcPts val="400"/>
+                <a:spcPts val="200"/>
               </a:spcAft>
-              <a:defRPr sz="1700" b="0">
-                <a:solidFill>
-                  <a:srgbClr val="333333"/>
+              <a:defRPr sz="1100" b="1">
+                <a:solidFill>
+                  <a:srgbClr val="FFFFFF"/>
                 </a:solidFill>
               </a:defRPr>
             </a:pPr>
             <a:r>
-              <a:t>10. Czy uważa Pan(i), że takie aplikacje powinny przed pozwoleniem na zakup sprawdzać wiedzę użytkownika (np. krótkim quizem), czy inwestowanie powinno być dostępne dla każdego bez ograniczeń? Dlaczego?</a:t>
-            </a:r>
-          </a:p>
-          <a:p>
-            <a:pPr>
+              <a:t>CZĘŚĆ C</a:t>
+            </a:r>
+          </a:p>
+        </p:txBody>
+      </p:sp>
+      <p:sp>
+        <p:nvSpPr>
+          <p:cNvPr id="9" name="Rounded Rectangle 8"/>
+          <p:cNvSpPr/>
+          <p:nvPr/>
+        </p:nvSpPr>
+        <p:spPr>
+          <a:xfrm>
+            <a:off x="457200" y="1828800"/>
+            <a:ext cx="10972800" cy="1280160"/>
+          </a:xfrm>
+          <a:prstGeom prst="roundRect">
+            <a:avLst/>
+          </a:prstGeom>
+          <a:solidFill>
+            <a:srgbClr val="F8F9FA"/>
+          </a:solidFill>
+          <a:ln w="12700">
+            <a:solidFill>
+              <a:srgbClr val="DEE2E6"/>
+            </a:solidFill>
+          </a:ln>
+        </p:spPr>
+        <p:style>
+          <a:lnRef idx="1">
+            <a:schemeClr val="accent1"/>
+          </a:lnRef>
+          <a:fillRef idx="3">
+            <a:schemeClr val="accent1"/>
+          </a:fillRef>
+          <a:effectRef idx="2">
+            <a:schemeClr val="accent1"/>
+          </a:effectRef>
+          <a:fontRef idx="minor">
+            <a:schemeClr val="lt1"/>
+          </a:fontRef>
+        </p:style>
+        <p:txBody>
+          <a:bodyPr rtlCol="0" anchor="ctr"/>
+          <a:lstStyle/>
+          <a:p>
+            <a:pPr algn="ctr"/>
+          </a:p>
+        </p:txBody>
+      </p:sp>
+      <p:sp>
+        <p:nvSpPr>
+          <p:cNvPr id="10" name="Oval 9"/>
+          <p:cNvSpPr/>
+          <p:nvPr/>
+        </p:nvSpPr>
+        <p:spPr>
+          <a:xfrm>
+            <a:off x="731520" y="2194560"/>
+            <a:ext cx="502920" cy="502920"/>
+          </a:xfrm>
+          <a:prstGeom prst="ellipse">
+            <a:avLst/>
+          </a:prstGeom>
+          <a:solidFill>
+            <a:srgbClr val="1B2838"/>
+          </a:solidFill>
+          <a:ln>
+            <a:noFill/>
+          </a:ln>
+        </p:spPr>
+        <p:style>
+          <a:lnRef idx="1">
+            <a:schemeClr val="accent1"/>
+          </a:lnRef>
+          <a:fillRef idx="3">
+            <a:schemeClr val="accent1"/>
+          </a:fillRef>
+          <a:effectRef idx="2">
+            <a:schemeClr val="accent1"/>
+          </a:effectRef>
+          <a:fontRef idx="minor">
+            <a:schemeClr val="lt1"/>
+          </a:fontRef>
+        </p:style>
+        <p:txBody>
+          <a:bodyPr rtlCol="0" anchor="ctr"/>
+          <a:lstStyle/>
+          <a:p>
+            <a:pPr algn="ctr">
+              <a:defRPr sz="1300" b="1">
+                <a:solidFill>
+                  <a:srgbClr val="FFFFFF"/>
+                </a:solidFill>
+              </a:defRPr>
+            </a:pPr>
+            <a:r>
+              <a:t>10</a:t>
+            </a:r>
+          </a:p>
+        </p:txBody>
+      </p:sp>
+      <p:sp>
+        <p:nvSpPr>
+          <p:cNvPr id="11" name="TextBox 10"/>
+          <p:cNvSpPr txBox="1"/>
+          <p:nvPr/>
+        </p:nvSpPr>
+        <p:spPr>
+          <a:xfrm>
+            <a:off x="1463040" y="2011680"/>
+            <a:ext cx="9601200" cy="1097280"/>
+          </a:xfrm>
+          <a:prstGeom prst="rect">
+            <a:avLst/>
+          </a:prstGeom>
+          <a:noFill/>
+        </p:spPr>
+        <p:txBody>
+          <a:bodyPr wrap="square">
+            <a:spAutoFit/>
+          </a:bodyPr>
+          <a:lstStyle/>
+          <a:p>
+            <a:pPr algn="l">
               <a:spcBef>
-                <a:spcPts val="1600"/>
+                <a:spcPts val="0"/>
               </a:spcBef>
               <a:spcAft>
-                <a:spcPts val="400"/>
+                <a:spcPts val="200"/>
               </a:spcAft>
-              <a:defRPr sz="1700" b="0">
-                <a:solidFill>
-                  <a:srgbClr val="333333"/>
+              <a:defRPr sz="1500" b="0">
+                <a:solidFill>
+                  <a:srgbClr val="2D3436"/>
                 </a:solidFill>
               </a:defRPr>
             </a:pPr>
             <a:r>
-              <a:t>11. Gdyby znajomy bez żadnej wiedzy o finansach zapytał Pana(ią), czy warto zacząć korzystać z tej samej aplikacji – na co uważałby/aby Pan(i) za konieczne, by go ostrzec?</a:t>
-            </a:r>
-          </a:p>
-          <a:p>
-            <a:pPr>
+              <a:t>Czy uważa Pan(i), że takie aplikacje powinny przed pozwoleniem na zakup sprawdzać wiedzę użytkownika (np. krótkim quizem), czy inwestowanie powinno być dostępne dla każdego bez ograniczeń? Dlaczego?</a:t>
+            </a:r>
+          </a:p>
+        </p:txBody>
+      </p:sp>
+      <p:sp>
+        <p:nvSpPr>
+          <p:cNvPr id="12" name="Rounded Rectangle 11"/>
+          <p:cNvSpPr/>
+          <p:nvPr/>
+        </p:nvSpPr>
+        <p:spPr>
+          <a:xfrm>
+            <a:off x="457200" y="3383280"/>
+            <a:ext cx="10972800" cy="1280160"/>
+          </a:xfrm>
+          <a:prstGeom prst="roundRect">
+            <a:avLst/>
+          </a:prstGeom>
+          <a:solidFill>
+            <a:srgbClr val="F8F9FA"/>
+          </a:solidFill>
+          <a:ln w="12700">
+            <a:solidFill>
+              <a:srgbClr val="DEE2E6"/>
+            </a:solidFill>
+          </a:ln>
+        </p:spPr>
+        <p:style>
+          <a:lnRef idx="1">
+            <a:schemeClr val="accent1"/>
+          </a:lnRef>
+          <a:fillRef idx="3">
+            <a:schemeClr val="accent1"/>
+          </a:fillRef>
+          <a:effectRef idx="2">
+            <a:schemeClr val="accent1"/>
+          </a:effectRef>
+          <a:fontRef idx="minor">
+            <a:schemeClr val="lt1"/>
+          </a:fontRef>
+        </p:style>
+        <p:txBody>
+          <a:bodyPr rtlCol="0" anchor="ctr"/>
+          <a:lstStyle/>
+          <a:p>
+            <a:pPr algn="ctr"/>
+          </a:p>
+        </p:txBody>
+      </p:sp>
+      <p:sp>
+        <p:nvSpPr>
+          <p:cNvPr id="13" name="Oval 12"/>
+          <p:cNvSpPr/>
+          <p:nvPr/>
+        </p:nvSpPr>
+        <p:spPr>
+          <a:xfrm>
+            <a:off x="731520" y="3749040"/>
+            <a:ext cx="502920" cy="502920"/>
+          </a:xfrm>
+          <a:prstGeom prst="ellipse">
+            <a:avLst/>
+          </a:prstGeom>
+          <a:solidFill>
+            <a:srgbClr val="1B2838"/>
+          </a:solidFill>
+          <a:ln>
+            <a:noFill/>
+          </a:ln>
+        </p:spPr>
+        <p:style>
+          <a:lnRef idx="1">
+            <a:schemeClr val="accent1"/>
+          </a:lnRef>
+          <a:fillRef idx="3">
+            <a:schemeClr val="accent1"/>
+          </a:fillRef>
+          <a:effectRef idx="2">
+            <a:schemeClr val="accent1"/>
+          </a:effectRef>
+          <a:fontRef idx="minor">
+            <a:schemeClr val="lt1"/>
+          </a:fontRef>
+        </p:style>
+        <p:txBody>
+          <a:bodyPr rtlCol="0" anchor="ctr"/>
+          <a:lstStyle/>
+          <a:p>
+            <a:pPr algn="ctr">
+              <a:defRPr sz="1300" b="1">
+                <a:solidFill>
+                  <a:srgbClr val="FFFFFF"/>
+                </a:solidFill>
+              </a:defRPr>
+            </a:pPr>
+            <a:r>
+              <a:t>11</a:t>
+            </a:r>
+          </a:p>
+        </p:txBody>
+      </p:sp>
+      <p:sp>
+        <p:nvSpPr>
+          <p:cNvPr id="14" name="TextBox 13"/>
+          <p:cNvSpPr txBox="1"/>
+          <p:nvPr/>
+        </p:nvSpPr>
+        <p:spPr>
+          <a:xfrm>
+            <a:off x="1463040" y="3566160"/>
+            <a:ext cx="9601200" cy="1097280"/>
+          </a:xfrm>
+          <a:prstGeom prst="rect">
+            <a:avLst/>
+          </a:prstGeom>
+          <a:noFill/>
+        </p:spPr>
+        <p:txBody>
+          <a:bodyPr wrap="square">
+            <a:spAutoFit/>
+          </a:bodyPr>
+          <a:lstStyle/>
+          <a:p>
+            <a:pPr algn="l">
               <a:spcBef>
-                <a:spcPts val="1600"/>
+                <a:spcPts val="0"/>
               </a:spcBef>
               <a:spcAft>
-                <a:spcPts val="400"/>
+                <a:spcPts val="200"/>
               </a:spcAft>
-              <a:defRPr sz="1700" b="0">
-                <a:solidFill>
-                  <a:srgbClr val="333333"/>
+              <a:defRPr sz="1500" b="0">
+                <a:solidFill>
+                  <a:srgbClr val="2D3436"/>
                 </a:solidFill>
               </a:defRPr>
             </a:pPr>
             <a:r>
-              <a:t>12. Zbliżamy się do końca naszej rozmowy. Czy jest jeszcze coś ważnego w kwestii Pana/Pani doświadczeń z tymi aplikacjami, o co nie zapytałem?</a:t>
+              <a:t>Gdyby znajomy bez żadnej wiedzy o finansach zapytał Pana(ią), czy warto zacząć korzystać z tej samej aplikacji – na co uważałby/aby Pan(i) za konieczne, by go ostrzec?</a:t>
+            </a:r>
+          </a:p>
+        </p:txBody>
+      </p:sp>
+      <p:sp>
+        <p:nvSpPr>
+          <p:cNvPr id="15" name="Rounded Rectangle 14"/>
+          <p:cNvSpPr/>
+          <p:nvPr/>
+        </p:nvSpPr>
+        <p:spPr>
+          <a:xfrm>
+            <a:off x="457200" y="4937760"/>
+            <a:ext cx="10972800" cy="1280160"/>
+          </a:xfrm>
+          <a:prstGeom prst="roundRect">
+            <a:avLst/>
+          </a:prstGeom>
+          <a:solidFill>
+            <a:srgbClr val="F8F9FA"/>
+          </a:solidFill>
+          <a:ln w="12700">
+            <a:solidFill>
+              <a:srgbClr val="DEE2E6"/>
+            </a:solidFill>
+          </a:ln>
+        </p:spPr>
+        <p:style>
+          <a:lnRef idx="1">
+            <a:schemeClr val="accent1"/>
+          </a:lnRef>
+          <a:fillRef idx="3">
+            <a:schemeClr val="accent1"/>
+          </a:fillRef>
+          <a:effectRef idx="2">
+            <a:schemeClr val="accent1"/>
+          </a:effectRef>
+          <a:fontRef idx="minor">
+            <a:schemeClr val="lt1"/>
+          </a:fontRef>
+        </p:style>
+        <p:txBody>
+          <a:bodyPr rtlCol="0" anchor="ctr"/>
+          <a:lstStyle/>
+          <a:p>
+            <a:pPr algn="ctr"/>
+          </a:p>
+        </p:txBody>
+      </p:sp>
+      <p:sp>
+        <p:nvSpPr>
+          <p:cNvPr id="16" name="Oval 15"/>
+          <p:cNvSpPr/>
+          <p:nvPr/>
+        </p:nvSpPr>
+        <p:spPr>
+          <a:xfrm>
+            <a:off x="731520" y="5303520"/>
+            <a:ext cx="502920" cy="502920"/>
+          </a:xfrm>
+          <a:prstGeom prst="ellipse">
+            <a:avLst/>
+          </a:prstGeom>
+          <a:solidFill>
+            <a:srgbClr val="1B2838"/>
+          </a:solidFill>
+          <a:ln>
+            <a:noFill/>
+          </a:ln>
+        </p:spPr>
+        <p:style>
+          <a:lnRef idx="1">
+            <a:schemeClr val="accent1"/>
+          </a:lnRef>
+          <a:fillRef idx="3">
+            <a:schemeClr val="accent1"/>
+          </a:fillRef>
+          <a:effectRef idx="2">
+            <a:schemeClr val="accent1"/>
+          </a:effectRef>
+          <a:fontRef idx="minor">
+            <a:schemeClr val="lt1"/>
+          </a:fontRef>
+        </p:style>
+        <p:txBody>
+          <a:bodyPr rtlCol="0" anchor="ctr"/>
+          <a:lstStyle/>
+          <a:p>
+            <a:pPr algn="ctr">
+              <a:defRPr sz="1300" b="1">
+                <a:solidFill>
+                  <a:srgbClr val="FFFFFF"/>
+                </a:solidFill>
+              </a:defRPr>
+            </a:pPr>
+            <a:r>
+              <a:t>12</a:t>
+            </a:r>
+          </a:p>
+        </p:txBody>
+      </p:sp>
+      <p:sp>
+        <p:nvSpPr>
+          <p:cNvPr id="17" name="TextBox 16"/>
+          <p:cNvSpPr txBox="1"/>
+          <p:nvPr/>
+        </p:nvSpPr>
+        <p:spPr>
+          <a:xfrm>
+            <a:off x="1463040" y="5120640"/>
+            <a:ext cx="9601200" cy="1097280"/>
+          </a:xfrm>
+          <a:prstGeom prst="rect">
+            <a:avLst/>
+          </a:prstGeom>
+          <a:noFill/>
+        </p:spPr>
+        <p:txBody>
+          <a:bodyPr wrap="square">
+            <a:spAutoFit/>
+          </a:bodyPr>
+          <a:lstStyle/>
+          <a:p>
+            <a:pPr algn="l">
+              <a:spcBef>
+                <a:spcPts val="0"/>
+              </a:spcBef>
+              <a:spcAft>
+                <a:spcPts val="200"/>
+              </a:spcAft>
+              <a:defRPr sz="1500" b="0">
+                <a:solidFill>
+                  <a:srgbClr val="2D3436"/>
+                </a:solidFill>
+              </a:defRPr>
+            </a:pPr>
+            <a:r>
+              <a:t>Zbliżamy się do końca naszej rozmowy. Czy jest jeszcze coś ważnego w kwestii Pana/Pani doświadczeń z tymi aplikacjami, o co nie zapytałem?</a:t>
             </a:r>
           </a:p>
         </p:txBody>
@@ -4990,7 +8961,7 @@
     <p:bg>
       <p:bgPr>
         <a:solidFill>
-          <a:srgbClr val="FFFFFF"/>
+          <a:srgbClr val="1B2838"/>
         </a:solidFill>
         <a:effectLst/>
       </p:bgPr>
@@ -5004,20 +8975,22 @@
       <p:grpSpPr/>
       <p:sp>
         <p:nvSpPr>
-          <p:cNvPr id="2" name="Rectangle 1"/>
+          <p:cNvPr id="2" name="Oval 1"/>
           <p:cNvSpPr/>
           <p:nvPr/>
         </p:nvSpPr>
         <p:spPr>
           <a:xfrm>
-            <a:off x="0" y="0"/>
-            <a:ext cx="12191695" cy="137160"/>
-          </a:xfrm>
-          <a:prstGeom prst="rect">
-            <a:avLst/>
-          </a:prstGeom>
-          <a:solidFill>
-            <a:srgbClr val="2E75B6"/>
+            <a:off x="-914400" y="-914400"/>
+            <a:ext cx="3657600" cy="3657600"/>
+          </a:xfrm>
+          <a:prstGeom prst="ellipse">
+            <a:avLst/>
+          </a:prstGeom>
+          <a:solidFill>
+            <a:srgbClr val="00B4D8">
+              <a:alpha val="10000"/>
+            </a:srgbClr>
           </a:solidFill>
           <a:ln>
             <a:noFill/>
@@ -5047,14 +9020,102 @@
       </p:sp>
       <p:sp>
         <p:nvSpPr>
-          <p:cNvPr id="3" name="TextBox 2"/>
+          <p:cNvPr id="3" name="Oval 2"/>
+          <p:cNvSpPr/>
+          <p:nvPr/>
+        </p:nvSpPr>
+        <p:spPr>
+          <a:xfrm>
+            <a:off x="10058400" y="4572000"/>
+            <a:ext cx="3200400" cy="3200400"/>
+          </a:xfrm>
+          <a:prstGeom prst="ellipse">
+            <a:avLst/>
+          </a:prstGeom>
+          <a:solidFill>
+            <a:srgbClr val="F4A261">
+              <a:alpha val="10000"/>
+            </a:srgbClr>
+          </a:solidFill>
+          <a:ln>
+            <a:noFill/>
+          </a:ln>
+        </p:spPr>
+        <p:style>
+          <a:lnRef idx="1">
+            <a:schemeClr val="accent1"/>
+          </a:lnRef>
+          <a:fillRef idx="3">
+            <a:schemeClr val="accent1"/>
+          </a:fillRef>
+          <a:effectRef idx="2">
+            <a:schemeClr val="accent1"/>
+          </a:effectRef>
+          <a:fontRef idx="minor">
+            <a:schemeClr val="lt1"/>
+          </a:fontRef>
+        </p:style>
+        <p:txBody>
+          <a:bodyPr rtlCol="0" anchor="ctr"/>
+          <a:lstStyle/>
+          <a:p>
+            <a:pPr algn="ctr"/>
+          </a:p>
+        </p:txBody>
+      </p:sp>
+      <p:sp>
+        <p:nvSpPr>
+          <p:cNvPr id="4" name="Rectangle 3"/>
+          <p:cNvSpPr/>
+          <p:nvPr/>
+        </p:nvSpPr>
+        <p:spPr>
+          <a:xfrm>
+            <a:off x="0" y="6803136"/>
+            <a:ext cx="12191695" cy="54864"/>
+          </a:xfrm>
+          <a:prstGeom prst="rect">
+            <a:avLst/>
+          </a:prstGeom>
+          <a:solidFill>
+            <a:srgbClr val="F4A261"/>
+          </a:solidFill>
+          <a:ln>
+            <a:noFill/>
+          </a:ln>
+        </p:spPr>
+        <p:style>
+          <a:lnRef idx="1">
+            <a:schemeClr val="accent1"/>
+          </a:lnRef>
+          <a:fillRef idx="3">
+            <a:schemeClr val="accent1"/>
+          </a:fillRef>
+          <a:effectRef idx="2">
+            <a:schemeClr val="accent1"/>
+          </a:effectRef>
+          <a:fontRef idx="minor">
+            <a:schemeClr val="lt1"/>
+          </a:fontRef>
+        </p:style>
+        <p:txBody>
+          <a:bodyPr rtlCol="0" anchor="ctr"/>
+          <a:lstStyle/>
+          <a:p>
+            <a:pPr algn="ctr"/>
+          </a:p>
+        </p:txBody>
+      </p:sp>
+      <p:sp>
+        <p:nvSpPr>
+          <p:cNvPr id="5" name="TextBox 4"/>
           <p:cNvSpPr txBox="1"/>
           <p:nvPr/>
         </p:nvSpPr>
         <p:spPr>
           <a:xfrm>
             <a:off x="731520" y="365760"/>
-            <a:ext cx="10515600" cy="822960"/>
+            <a:ext cx="10058400" cy="822960"/>
           </a:xfrm>
           <a:prstGeom prst="rect">
             <a:avLst/>
@@ -5067,10 +9128,16 @@
           </a:bodyPr>
           <a:lstStyle/>
           <a:p>
-            <a:pPr>
+            <a:pPr algn="l">
+              <a:spcBef>
+                <a:spcPts val="400"/>
+              </a:spcBef>
+              <a:spcAft>
+                <a:spcPts val="200"/>
+              </a:spcAft>
               <a:defRPr sz="3000" b="1">
                 <a:solidFill>
-                  <a:srgbClr val="1F3864"/>
+                  <a:srgbClr val="FFFFFF"/>
                 </a:solidFill>
               </a:defRPr>
             </a:pPr>
@@ -5082,14 +9149,145 @@
       </p:sp>
       <p:sp>
         <p:nvSpPr>
-          <p:cNvPr id="4" name="TextBox 3"/>
+          <p:cNvPr id="6" name="Rectangle 5"/>
+          <p:cNvSpPr/>
+          <p:nvPr/>
+        </p:nvSpPr>
+        <p:spPr>
+          <a:xfrm>
+            <a:off x="731520" y="1005840"/>
+            <a:ext cx="2286000" cy="45720"/>
+          </a:xfrm>
+          <a:prstGeom prst="rect">
+            <a:avLst/>
+          </a:prstGeom>
+          <a:solidFill>
+            <a:srgbClr val="F4A261"/>
+          </a:solidFill>
+          <a:ln>
+            <a:noFill/>
+          </a:ln>
+        </p:spPr>
+        <p:style>
+          <a:lnRef idx="1">
+            <a:schemeClr val="accent1"/>
+          </a:lnRef>
+          <a:fillRef idx="3">
+            <a:schemeClr val="accent1"/>
+          </a:fillRef>
+          <a:effectRef idx="2">
+            <a:schemeClr val="accent1"/>
+          </a:effectRef>
+          <a:fontRef idx="minor">
+            <a:schemeClr val="lt1"/>
+          </a:fontRef>
+        </p:style>
+        <p:txBody>
+          <a:bodyPr rtlCol="0" anchor="ctr"/>
+          <a:lstStyle/>
+          <a:p>
+            <a:pPr algn="ctr"/>
+          </a:p>
+        </p:txBody>
+      </p:sp>
+      <p:sp>
+        <p:nvSpPr>
+          <p:cNvPr id="7" name="Rounded Rectangle 6"/>
+          <p:cNvSpPr/>
+          <p:nvPr/>
+        </p:nvSpPr>
+        <p:spPr>
+          <a:xfrm>
+            <a:off x="365760" y="1371600"/>
+            <a:ext cx="3657600" cy="4846320"/>
+          </a:xfrm>
+          <a:prstGeom prst="roundRect">
+            <a:avLst/>
+          </a:prstGeom>
+          <a:solidFill>
+            <a:srgbClr val="223345"/>
+          </a:solidFill>
+          <a:ln w="12700">
+            <a:solidFill>
+              <a:srgbClr val="223345"/>
+            </a:solidFill>
+          </a:ln>
+        </p:spPr>
+        <p:style>
+          <a:lnRef idx="1">
+            <a:schemeClr val="accent1"/>
+          </a:lnRef>
+          <a:fillRef idx="3">
+            <a:schemeClr val="accent1"/>
+          </a:fillRef>
+          <a:effectRef idx="2">
+            <a:schemeClr val="accent1"/>
+          </a:effectRef>
+          <a:fontRef idx="minor">
+            <a:schemeClr val="lt1"/>
+          </a:fontRef>
+        </p:style>
+        <p:txBody>
+          <a:bodyPr rtlCol="0" anchor="ctr"/>
+          <a:lstStyle/>
+          <a:p>
+            <a:pPr algn="ctr"/>
+          </a:p>
+        </p:txBody>
+      </p:sp>
+      <p:sp>
+        <p:nvSpPr>
+          <p:cNvPr id="8" name="Rectangle 7"/>
+          <p:cNvSpPr/>
+          <p:nvPr/>
+        </p:nvSpPr>
+        <p:spPr>
+          <a:xfrm>
+            <a:off x="365760" y="1371600"/>
+            <a:ext cx="3657600" cy="73152"/>
+          </a:xfrm>
+          <a:prstGeom prst="rect">
+            <a:avLst/>
+          </a:prstGeom>
+          <a:solidFill>
+            <a:srgbClr val="00B4D8"/>
+          </a:solidFill>
+          <a:ln>
+            <a:noFill/>
+          </a:ln>
+        </p:spPr>
+        <p:style>
+          <a:lnRef idx="1">
+            <a:schemeClr val="accent1"/>
+          </a:lnRef>
+          <a:fillRef idx="3">
+            <a:schemeClr val="accent1"/>
+          </a:fillRef>
+          <a:effectRef idx="2">
+            <a:schemeClr val="accent1"/>
+          </a:effectRef>
+          <a:fontRef idx="minor">
+            <a:schemeClr val="lt1"/>
+          </a:fontRef>
+        </p:style>
+        <p:txBody>
+          <a:bodyPr rtlCol="0" anchor="ctr"/>
+          <a:lstStyle/>
+          <a:p>
+            <a:pPr algn="ctr"/>
+          </a:p>
+        </p:txBody>
+      </p:sp>
+      <p:sp>
+        <p:nvSpPr>
+          <p:cNvPr id="9" name="TextBox 8"/>
           <p:cNvSpPr txBox="1"/>
           <p:nvPr/>
         </p:nvSpPr>
         <p:spPr>
           <a:xfrm>
-            <a:off x="731520" y="1371600"/>
-            <a:ext cx="10515600" cy="5029200"/>
+            <a:off x="640080" y="1645920"/>
+            <a:ext cx="3200400" cy="457200"/>
           </a:xfrm>
           <a:prstGeom prst="rect">
             <a:avLst/>
@@ -5101,18 +9299,17 @@
             <a:spAutoFit/>
           </a:bodyPr>
           <a:lstStyle/>
-          <a:p/>
-          <a:p>
-            <a:pPr>
+          <a:p>
+            <a:pPr algn="l">
               <a:spcBef>
                 <a:spcPts val="0"/>
               </a:spcBef>
               <a:spcAft>
-                <a:spcPts val="400"/>
+                <a:spcPts val="200"/>
               </a:spcAft>
-              <a:defRPr sz="2000" b="1">
-                <a:solidFill>
-                  <a:srgbClr val="2E75B6"/>
+              <a:defRPr sz="1400" b="1">
+                <a:solidFill>
+                  <a:srgbClr val="00B4D8"/>
                 </a:solidFill>
               </a:defRPr>
             </a:pPr>
@@ -5120,107 +9317,375 @@
               <a:t>Efekt Dunninga-Krugera</a:t>
             </a:r>
           </a:p>
-          <a:p>
-            <a:pPr lvl="1">
+        </p:txBody>
+      </p:sp>
+      <p:sp>
+        <p:nvSpPr>
+          <p:cNvPr id="10" name="TextBox 9"/>
+          <p:cNvSpPr txBox="1"/>
+          <p:nvPr/>
+        </p:nvSpPr>
+        <p:spPr>
+          <a:xfrm>
+            <a:off x="640080" y="2194560"/>
+            <a:ext cx="3200400" cy="3657600"/>
+          </a:xfrm>
+          <a:prstGeom prst="rect">
+            <a:avLst/>
+          </a:prstGeom>
+          <a:noFill/>
+        </p:spPr>
+        <p:txBody>
+          <a:bodyPr wrap="square">
+            <a:spAutoFit/>
+          </a:bodyPr>
+          <a:lstStyle/>
+          <a:p>
+            <a:pPr algn="l">
               <a:spcBef>
-                <a:spcPts val="600"/>
+                <a:spcPts val="0"/>
               </a:spcBef>
               <a:spcAft>
-                <a:spcPts val="400"/>
+                <a:spcPts val="200"/>
               </a:spcAft>
-              <a:defRPr sz="1600" b="0">
-                <a:solidFill>
-                  <a:srgbClr val="333333"/>
+              <a:defRPr sz="1200" b="0">
+                <a:solidFill>
+                  <a:srgbClr val="FFFFFF"/>
                 </a:solidFill>
               </a:defRPr>
             </a:pPr>
             <a:r>
-              <a:t>Badani mogą znacząco przeceniać swoją wiedzę finansową, szczególnie w okresach hossy</a:t>
-            </a:r>
-          </a:p>
-          <a:p>
-            <a:pPr lvl="1">
+              <a:t>• Badani mogą znacząco przeceniać swoją wiedzę finansową, szczególnie w okresach hossy</a:t>
+            </a:r>
+          </a:p>
+          <a:p>
+            <a:pPr algn="l">
               <a:spcBef>
-                <a:spcPts val="600"/>
+                <a:spcPts val="800"/>
               </a:spcBef>
               <a:spcAft>
-                <a:spcPts val="400"/>
+                <a:spcPts val="200"/>
               </a:spcAft>
-              <a:defRPr sz="1600" b="0">
-                <a:solidFill>
-                  <a:srgbClr val="333333"/>
+              <a:defRPr sz="1200" b="0">
+                <a:solidFill>
+                  <a:srgbClr val="FFFFFF"/>
                 </a:solidFill>
               </a:defRPr>
             </a:pPr>
             <a:r>
-              <a:t>Deklaratywny wzrost wiedzy może być w rzeczywistości tylko złudzeniem kontroli</a:t>
-            </a:r>
-          </a:p>
-          <a:p>
-            <a:pPr>
+              <a:t>• Deklaratywny wzrost wiedzy może być w rzeczywistości tylko złudzeniem kontroli</a:t>
+            </a:r>
+          </a:p>
+        </p:txBody>
+      </p:sp>
+      <p:sp>
+        <p:nvSpPr>
+          <p:cNvPr id="11" name="Rounded Rectangle 10"/>
+          <p:cNvSpPr/>
+          <p:nvPr/>
+        </p:nvSpPr>
+        <p:spPr>
+          <a:xfrm>
+            <a:off x="4297680" y="1371600"/>
+            <a:ext cx="3657600" cy="4846320"/>
+          </a:xfrm>
+          <a:prstGeom prst="roundRect">
+            <a:avLst/>
+          </a:prstGeom>
+          <a:solidFill>
+            <a:srgbClr val="223345"/>
+          </a:solidFill>
+          <a:ln w="12700">
+            <a:solidFill>
+              <a:srgbClr val="223345"/>
+            </a:solidFill>
+          </a:ln>
+        </p:spPr>
+        <p:style>
+          <a:lnRef idx="1">
+            <a:schemeClr val="accent1"/>
+          </a:lnRef>
+          <a:fillRef idx="3">
+            <a:schemeClr val="accent1"/>
+          </a:fillRef>
+          <a:effectRef idx="2">
+            <a:schemeClr val="accent1"/>
+          </a:effectRef>
+          <a:fontRef idx="minor">
+            <a:schemeClr val="lt1"/>
+          </a:fontRef>
+        </p:style>
+        <p:txBody>
+          <a:bodyPr rtlCol="0" anchor="ctr"/>
+          <a:lstStyle/>
+          <a:p>
+            <a:pPr algn="ctr"/>
+          </a:p>
+        </p:txBody>
+      </p:sp>
+      <p:sp>
+        <p:nvSpPr>
+          <p:cNvPr id="12" name="Rectangle 11"/>
+          <p:cNvSpPr/>
+          <p:nvPr/>
+        </p:nvSpPr>
+        <p:spPr>
+          <a:xfrm>
+            <a:off x="4297680" y="1371600"/>
+            <a:ext cx="3657600" cy="73152"/>
+          </a:xfrm>
+          <a:prstGeom prst="rect">
+            <a:avLst/>
+          </a:prstGeom>
+          <a:solidFill>
+            <a:srgbClr val="F4A261"/>
+          </a:solidFill>
+          <a:ln>
+            <a:noFill/>
+          </a:ln>
+        </p:spPr>
+        <p:style>
+          <a:lnRef idx="1">
+            <a:schemeClr val="accent1"/>
+          </a:lnRef>
+          <a:fillRef idx="3">
+            <a:schemeClr val="accent1"/>
+          </a:fillRef>
+          <a:effectRef idx="2">
+            <a:schemeClr val="accent1"/>
+          </a:effectRef>
+          <a:fontRef idx="minor">
+            <a:schemeClr val="lt1"/>
+          </a:fontRef>
+        </p:style>
+        <p:txBody>
+          <a:bodyPr rtlCol="0" anchor="ctr"/>
+          <a:lstStyle/>
+          <a:p>
+            <a:pPr algn="ctr"/>
+          </a:p>
+        </p:txBody>
+      </p:sp>
+      <p:sp>
+        <p:nvSpPr>
+          <p:cNvPr id="13" name="TextBox 12"/>
+          <p:cNvSpPr txBox="1"/>
+          <p:nvPr/>
+        </p:nvSpPr>
+        <p:spPr>
+          <a:xfrm>
+            <a:off x="4572000" y="1645920"/>
+            <a:ext cx="3200400" cy="457200"/>
+          </a:xfrm>
+          <a:prstGeom prst="rect">
+            <a:avLst/>
+          </a:prstGeom>
+          <a:noFill/>
+        </p:spPr>
+        <p:txBody>
+          <a:bodyPr wrap="square">
+            <a:spAutoFit/>
+          </a:bodyPr>
+          <a:lstStyle/>
+          <a:p>
+            <a:pPr algn="l">
               <a:spcBef>
-                <a:spcPts val="1400"/>
+                <a:spcPts val="0"/>
               </a:spcBef>
               <a:spcAft>
-                <a:spcPts val="400"/>
+                <a:spcPts val="200"/>
               </a:spcAft>
-              <a:defRPr sz="2000" b="1">
-                <a:solidFill>
-                  <a:srgbClr val="2E75B6"/>
+              <a:defRPr sz="1400" b="1">
+                <a:solidFill>
+                  <a:srgbClr val="F4A261"/>
                 </a:solidFill>
               </a:defRPr>
             </a:pPr>
             <a:r>
-              <a:t>Trudność w ewaluacji „obiektywnej” wiedzy</a:t>
-            </a:r>
-          </a:p>
-          <a:p>
-            <a:pPr lvl="1">
+              <a:t>Trudność ewaluacji wiedzy</a:t>
+            </a:r>
+          </a:p>
+        </p:txBody>
+      </p:sp>
+      <p:sp>
+        <p:nvSpPr>
+          <p:cNvPr id="14" name="TextBox 13"/>
+          <p:cNvSpPr txBox="1"/>
+          <p:nvPr/>
+        </p:nvSpPr>
+        <p:spPr>
+          <a:xfrm>
+            <a:off x="4572000" y="2194560"/>
+            <a:ext cx="3200400" cy="3657600"/>
+          </a:xfrm>
+          <a:prstGeom prst="rect">
+            <a:avLst/>
+          </a:prstGeom>
+          <a:noFill/>
+        </p:spPr>
+        <p:txBody>
+          <a:bodyPr wrap="square">
+            <a:spAutoFit/>
+          </a:bodyPr>
+          <a:lstStyle/>
+          <a:p>
+            <a:pPr algn="l">
               <a:spcBef>
-                <a:spcPts val="600"/>
+                <a:spcPts val="0"/>
               </a:spcBef>
               <a:spcAft>
-                <a:spcPts val="400"/>
+                <a:spcPts val="200"/>
               </a:spcAft>
-              <a:defRPr sz="1600" b="0">
-                <a:solidFill>
-                  <a:srgbClr val="333333"/>
+              <a:defRPr sz="1200" b="0">
+                <a:solidFill>
+                  <a:srgbClr val="FFFFFF"/>
                 </a:solidFill>
               </a:defRPr>
             </a:pPr>
             <a:r>
-              <a:t>Wywiad jakościowy nie jest testem wiedzy</a:t>
-            </a:r>
-          </a:p>
-          <a:p>
-            <a:pPr lvl="1">
+              <a:t>• Wywiad jakościowy nie jest testem wiedzy</a:t>
+            </a:r>
+          </a:p>
+          <a:p>
+            <a:pPr algn="l">
               <a:spcBef>
-                <a:spcPts val="600"/>
+                <a:spcPts val="800"/>
               </a:spcBef>
               <a:spcAft>
-                <a:spcPts val="400"/>
+                <a:spcPts val="200"/>
               </a:spcAft>
-              <a:defRPr sz="1600" b="0">
-                <a:solidFill>
-                  <a:srgbClr val="333333"/>
+              <a:defRPr sz="1200" b="0">
+                <a:solidFill>
+                  <a:srgbClr val="FFFFFF"/>
                 </a:solidFill>
               </a:defRPr>
             </a:pPr>
             <a:r>
-              <a:t>Trudno wyważyć dopytywanie o definicje, tak aby badany nie poczuł się jak na egzaminie</a:t>
-            </a:r>
-          </a:p>
-          <a:p>
-            <a:pPr>
+              <a:t>• Trudno wyważyć dopytywanie o definicje, tak aby badany nie poczuł się jak na egzaminie</a:t>
+            </a:r>
+          </a:p>
+        </p:txBody>
+      </p:sp>
+      <p:sp>
+        <p:nvSpPr>
+          <p:cNvPr id="15" name="Rounded Rectangle 14"/>
+          <p:cNvSpPr/>
+          <p:nvPr/>
+        </p:nvSpPr>
+        <p:spPr>
+          <a:xfrm>
+            <a:off x="8229600" y="1371600"/>
+            <a:ext cx="3657600" cy="4846320"/>
+          </a:xfrm>
+          <a:prstGeom prst="roundRect">
+            <a:avLst/>
+          </a:prstGeom>
+          <a:solidFill>
+            <a:srgbClr val="223345"/>
+          </a:solidFill>
+          <a:ln w="12700">
+            <a:solidFill>
+              <a:srgbClr val="223345"/>
+            </a:solidFill>
+          </a:ln>
+        </p:spPr>
+        <p:style>
+          <a:lnRef idx="1">
+            <a:schemeClr val="accent1"/>
+          </a:lnRef>
+          <a:fillRef idx="3">
+            <a:schemeClr val="accent1"/>
+          </a:fillRef>
+          <a:effectRef idx="2">
+            <a:schemeClr val="accent1"/>
+          </a:effectRef>
+          <a:fontRef idx="minor">
+            <a:schemeClr val="lt1"/>
+          </a:fontRef>
+        </p:style>
+        <p:txBody>
+          <a:bodyPr rtlCol="0" anchor="ctr"/>
+          <a:lstStyle/>
+          <a:p>
+            <a:pPr algn="ctr"/>
+          </a:p>
+        </p:txBody>
+      </p:sp>
+      <p:sp>
+        <p:nvSpPr>
+          <p:cNvPr id="16" name="Rectangle 15"/>
+          <p:cNvSpPr/>
+          <p:nvPr/>
+        </p:nvSpPr>
+        <p:spPr>
+          <a:xfrm>
+            <a:off x="8229600" y="1371600"/>
+            <a:ext cx="3657600" cy="73152"/>
+          </a:xfrm>
+          <a:prstGeom prst="rect">
+            <a:avLst/>
+          </a:prstGeom>
+          <a:solidFill>
+            <a:srgbClr val="FFFFFF"/>
+          </a:solidFill>
+          <a:ln>
+            <a:noFill/>
+          </a:ln>
+        </p:spPr>
+        <p:style>
+          <a:lnRef idx="1">
+            <a:schemeClr val="accent1"/>
+          </a:lnRef>
+          <a:fillRef idx="3">
+            <a:schemeClr val="accent1"/>
+          </a:fillRef>
+          <a:effectRef idx="2">
+            <a:schemeClr val="accent1"/>
+          </a:effectRef>
+          <a:fontRef idx="minor">
+            <a:schemeClr val="lt1"/>
+          </a:fontRef>
+        </p:style>
+        <p:txBody>
+          <a:bodyPr rtlCol="0" anchor="ctr"/>
+          <a:lstStyle/>
+          <a:p>
+            <a:pPr algn="ctr"/>
+          </a:p>
+        </p:txBody>
+      </p:sp>
+      <p:sp>
+        <p:nvSpPr>
+          <p:cNvPr id="17" name="TextBox 16"/>
+          <p:cNvSpPr txBox="1"/>
+          <p:nvPr/>
+        </p:nvSpPr>
+        <p:spPr>
+          <a:xfrm>
+            <a:off x="8503920" y="1645920"/>
+            <a:ext cx="3200400" cy="457200"/>
+          </a:xfrm>
+          <a:prstGeom prst="rect">
+            <a:avLst/>
+          </a:prstGeom>
+          <a:noFill/>
+        </p:spPr>
+        <p:txBody>
+          <a:bodyPr wrap="square">
+            <a:spAutoFit/>
+          </a:bodyPr>
+          <a:lstStyle/>
+          <a:p>
+            <a:pPr algn="l">
               <a:spcBef>
-                <a:spcPts val="1400"/>
+                <a:spcPts val="0"/>
               </a:spcBef>
               <a:spcAft>
-                <a:spcPts val="400"/>
+                <a:spcPts val="200"/>
               </a:spcAft>
-              <a:defRPr sz="2000" b="1">
-                <a:solidFill>
-                  <a:srgbClr val="2E75B6"/>
+              <a:defRPr sz="1400" b="1">
+                <a:solidFill>
+                  <a:srgbClr val="FFFFFF"/>
                 </a:solidFill>
               </a:defRPr>
             </a:pPr>
@@ -5228,58 +9693,81 @@
               <a:t>Bariera technologiczna</a:t>
             </a:r>
           </a:p>
-          <a:p>
-            <a:pPr lvl="1">
+        </p:txBody>
+      </p:sp>
+      <p:sp>
+        <p:nvSpPr>
+          <p:cNvPr id="18" name="TextBox 17"/>
+          <p:cNvSpPr txBox="1"/>
+          <p:nvPr/>
+        </p:nvSpPr>
+        <p:spPr>
+          <a:xfrm>
+            <a:off x="8503920" y="2194560"/>
+            <a:ext cx="3200400" cy="3657600"/>
+          </a:xfrm>
+          <a:prstGeom prst="rect">
+            <a:avLst/>
+          </a:prstGeom>
+          <a:noFill/>
+        </p:spPr>
+        <p:txBody>
+          <a:bodyPr wrap="square">
+            <a:spAutoFit/>
+          </a:bodyPr>
+          <a:lstStyle/>
+          <a:p>
+            <a:pPr algn="l">
               <a:spcBef>
-                <a:spcPts val="600"/>
+                <a:spcPts val="0"/>
               </a:spcBef>
               <a:spcAft>
-                <a:spcPts val="400"/>
+                <a:spcPts val="200"/>
               </a:spcAft>
-              <a:defRPr sz="1600" b="0">
-                <a:solidFill>
-                  <a:srgbClr val="333333"/>
+              <a:defRPr sz="1200" b="0">
+                <a:solidFill>
+                  <a:srgbClr val="FFFFFF"/>
                 </a:solidFill>
               </a:defRPr>
             </a:pPr>
             <a:r>
-              <a:t>Aplikacje różnią się interfejsem</a:t>
-            </a:r>
-          </a:p>
-          <a:p>
-            <a:pPr lvl="1">
+              <a:t>• Aplikacje różnią się interfejsem</a:t>
+            </a:r>
+          </a:p>
+          <a:p>
+            <a:pPr algn="l">
               <a:spcBef>
-                <a:spcPts val="600"/>
+                <a:spcPts val="800"/>
               </a:spcBef>
               <a:spcAft>
-                <a:spcPts val="400"/>
+                <a:spcPts val="200"/>
               </a:spcAft>
-              <a:defRPr sz="1600" b="0">
-                <a:solidFill>
-                  <a:srgbClr val="333333"/>
+              <a:defRPr sz="1200" b="0">
+                <a:solidFill>
+                  <a:srgbClr val="FFFFFF"/>
                 </a:solidFill>
               </a:defRPr>
             </a:pPr>
             <a:r>
-              <a:t>Odpowiedzi badanych mogą być mocno uzależnione od konkretnego rozwiązania (robo-doradca vs aktywny broker)</a:t>
-            </a:r>
-          </a:p>
-          <a:p>
-            <a:pPr lvl="1">
+              <a:t>• Odpowiedzi zależą od konkretnego rozwiązania (robo-doradca vs aktywny broker)</a:t>
+            </a:r>
+          </a:p>
+          <a:p>
+            <a:pPr algn="l">
               <a:spcBef>
-                <a:spcPts val="600"/>
+                <a:spcPts val="800"/>
               </a:spcBef>
               <a:spcAft>
-                <a:spcPts val="400"/>
+                <a:spcPts val="200"/>
               </a:spcAft>
-              <a:defRPr sz="1600" b="0">
-                <a:solidFill>
-                  <a:srgbClr val="333333"/>
+              <a:defRPr sz="1200" b="0">
+                <a:solidFill>
+                  <a:srgbClr val="FFFFFF"/>
                 </a:solidFill>
               </a:defRPr>
             </a:pPr>
             <a:r>
-              <a:t>Utrudni to znalezienie wspólnych mianowników na etapie analizy</a:t>
+              <a:t>• Utrudni to znalezienie wspólnych mianowników na etapie analizy</a:t>
             </a:r>
           </a:p>
         </p:txBody>

--- a/Prezentacja_Fintech.pptx
+++ b/Prezentacja_Fintech.pptx
@@ -3092,7 +3092,7 @@
     <p:bg>
       <p:bgPr>
         <a:solidFill>
-          <a:srgbClr val="1B2838"/>
+          <a:srgbClr val="0D1B2A"/>
         </a:solidFill>
         <a:effectLst/>
       </p:bgPr>
@@ -3106,22 +3106,20 @@
       <p:grpSpPr/>
       <p:sp>
         <p:nvSpPr>
-          <p:cNvPr id="2" name="Oval 1"/>
+          <p:cNvPr id="2" name="Rectangle 1"/>
           <p:cNvSpPr/>
           <p:nvPr/>
         </p:nvSpPr>
         <p:spPr>
           <a:xfrm>
-            <a:off x="10058400" y="-731520"/>
-            <a:ext cx="2743200" cy="2743200"/>
-          </a:xfrm>
-          <a:prstGeom prst="ellipse">
+            <a:off x="3657600" y="2194560"/>
+            <a:ext cx="4876495" cy="27432"/>
+          </a:xfrm>
+          <a:prstGeom prst="rect">
             <a:avLst/>
           </a:prstGeom>
           <a:solidFill>
-            <a:srgbClr val="00B4D8">
-              <a:alpha val="12000"/>
-            </a:srgbClr>
+            <a:srgbClr val="E8A838"/>
           </a:solidFill>
           <a:ln>
             <a:noFill/>
@@ -3151,22 +3149,56 @@
       </p:sp>
       <p:sp>
         <p:nvSpPr>
-          <p:cNvPr id="3" name="Oval 2"/>
+          <p:cNvPr id="3" name="TextBox 2"/>
+          <p:cNvSpPr txBox="1"/>
+          <p:nvPr/>
+        </p:nvSpPr>
+        <p:spPr>
+          <a:xfrm>
+            <a:off x="1371600" y="2468880"/>
+            <a:ext cx="9448495" cy="914400"/>
+          </a:xfrm>
+          <a:prstGeom prst="rect">
+            <a:avLst/>
+          </a:prstGeom>
+          <a:noFill/>
+        </p:spPr>
+        <p:txBody>
+          <a:bodyPr wrap="square">
+            <a:spAutoFit/>
+          </a:bodyPr>
+          <a:lstStyle/>
+          <a:p>
+            <a:pPr algn="ctr">
+              <a:defRPr sz="3800" b="1">
+                <a:solidFill>
+                  <a:srgbClr val="FFFFFF"/>
+                </a:solidFill>
+                <a:latin typeface="Segoe UI"/>
+              </a:defRPr>
+            </a:pPr>
+            <a:r>
+              <a:t>Edukacja czy automatyzacja?</a:t>
+            </a:r>
+          </a:p>
+        </p:txBody>
+      </p:sp>
+      <p:sp>
+        <p:nvSpPr>
+          <p:cNvPr id="4" name="Rectangle 3"/>
           <p:cNvSpPr/>
           <p:nvPr/>
         </p:nvSpPr>
         <p:spPr>
           <a:xfrm>
-            <a:off x="-914400" y="5029200"/>
-            <a:ext cx="2286000" cy="2286000"/>
-          </a:xfrm>
-          <a:prstGeom prst="ellipse">
+            <a:off x="3657600" y="3520440"/>
+            <a:ext cx="4876495" cy="27432"/>
+          </a:xfrm>
+          <a:prstGeom prst="rect">
             <a:avLst/>
           </a:prstGeom>
           <a:solidFill>
-            <a:srgbClr val="F4A261">
-              <a:alpha val="9999"/>
-            </a:srgbClr>
+            <a:srgbClr val="E8A838"/>
           </a:solidFill>
           <a:ln>
             <a:noFill/>
@@ -3196,57 +3228,14 @@
       </p:sp>
       <p:sp>
         <p:nvSpPr>
-          <p:cNvPr id="4" name="Rectangle 3"/>
-          <p:cNvSpPr/>
-          <p:nvPr/>
-        </p:nvSpPr>
-        <p:spPr>
-          <a:xfrm>
-            <a:off x="0" y="6583680"/>
-            <a:ext cx="12191695" cy="274320"/>
-          </a:xfrm>
-          <a:prstGeom prst="rect">
-            <a:avLst/>
-          </a:prstGeom>
-          <a:solidFill>
-            <a:srgbClr val="00B4D8"/>
-          </a:solidFill>
-          <a:ln>
-            <a:noFill/>
-          </a:ln>
-        </p:spPr>
-        <p:style>
-          <a:lnRef idx="1">
-            <a:schemeClr val="accent1"/>
-          </a:lnRef>
-          <a:fillRef idx="3">
-            <a:schemeClr val="accent1"/>
-          </a:fillRef>
-          <a:effectRef idx="2">
-            <a:schemeClr val="accent1"/>
-          </a:effectRef>
-          <a:fontRef idx="minor">
-            <a:schemeClr val="lt1"/>
-          </a:fontRef>
-        </p:style>
-        <p:txBody>
-          <a:bodyPr rtlCol="0" anchor="ctr"/>
-          <a:lstStyle/>
-          <a:p>
-            <a:pPr algn="ctr"/>
-          </a:p>
-        </p:txBody>
-      </p:sp>
-      <p:sp>
-        <p:nvSpPr>
           <p:cNvPr id="5" name="TextBox 4"/>
           <p:cNvSpPr txBox="1"/>
           <p:nvPr/>
         </p:nvSpPr>
         <p:spPr>
           <a:xfrm>
-            <a:off x="914400" y="1828800"/>
-            <a:ext cx="10058400" cy="1097280"/>
+            <a:off x="1828800" y="3840480"/>
+            <a:ext cx="8534095" cy="1371600"/>
           </a:xfrm>
           <a:prstGeom prst="rect">
             <a:avLst/>
@@ -3260,15 +3249,50 @@
           <a:lstStyle/>
           <a:p>
             <a:pPr algn="ctr">
-              <a:defRPr sz="4000" b="1">
-                <a:solidFill>
-                  <a:srgbClr val="FFFFFF"/>
+              <a:spcAft>
+                <a:spcPts val="400"/>
+              </a:spcAft>
+              <a:defRPr sz="1600">
+                <a:solidFill>
+                  <a:srgbClr val="B0B8C4"/>
                 </a:solidFill>
                 <a:latin typeface="Segoe UI"/>
               </a:defRPr>
             </a:pPr>
             <a:r>
-              <a:t>Edukacja czy automatyzacja?</a:t>
+              <a:t>Wpływ korzystania z aplikacji fintechowych i robo-doradców</a:t>
+            </a:r>
+          </a:p>
+          <a:p>
+            <a:pPr algn="ctr">
+              <a:spcAft>
+                <a:spcPts val="400"/>
+              </a:spcAft>
+              <a:defRPr sz="1600">
+                <a:solidFill>
+                  <a:srgbClr val="B0B8C4"/>
+                </a:solidFill>
+                <a:latin typeface="Segoe UI"/>
+              </a:defRPr>
+            </a:pPr>
+            <a:r>
+              <a:t>na poziom wiedzy finansowej oraz świadomość ryzyka</a:t>
+            </a:r>
+          </a:p>
+          <a:p>
+            <a:pPr algn="ctr">
+              <a:spcAft>
+                <a:spcPts val="400"/>
+              </a:spcAft>
+              <a:defRPr sz="1600">
+                <a:solidFill>
+                  <a:srgbClr val="B0B8C4"/>
+                </a:solidFill>
+                <a:latin typeface="Segoe UI"/>
+              </a:defRPr>
+            </a:pPr>
+            <a:r>
+              <a:t>inwestorów indywidualnych</a:t>
             </a:r>
           </a:p>
         </p:txBody>
@@ -3281,8 +3305,8 @@
         </p:nvSpPr>
         <p:spPr>
           <a:xfrm>
-            <a:off x="1371600" y="3017520"/>
-            <a:ext cx="9144000" cy="1371600"/>
+            <a:off x="1371600" y="5852160"/>
+            <a:ext cx="9448495" cy="457200"/>
           </a:xfrm>
           <a:prstGeom prst="rect">
             <a:avLst/>
@@ -3296,51 +3320,15 @@
           <a:lstStyle/>
           <a:p>
             <a:pPr algn="ctr">
-              <a:defRPr sz="1800" b="0">
-                <a:solidFill>
-                  <a:srgbClr val="CCCCCC"/>
+              <a:defRPr sz="1100" b="0">
+                <a:solidFill>
+                  <a:srgbClr val="6B7B8D"/>
                 </a:solidFill>
                 <a:latin typeface="Segoe UI"/>
               </a:defRPr>
             </a:pPr>
             <a:r>
-              <a:t>Wpływ korzystania z aplikacji fintechowych i robo-doradców na poziom wiedzy finansowej oraz świadomość ryzyka inwestorów indywidualnych.</a:t>
-            </a:r>
-          </a:p>
-        </p:txBody>
-      </p:sp>
-      <p:sp>
-        <p:nvSpPr>
-          <p:cNvPr id="7" name="TextBox 6"/>
-          <p:cNvSpPr txBox="1"/>
-          <p:nvPr/>
-        </p:nvSpPr>
-        <p:spPr>
-          <a:xfrm>
-            <a:off x="914400" y="5669280"/>
-            <a:ext cx="10058400" cy="548640"/>
-          </a:xfrm>
-          <a:prstGeom prst="rect">
-            <a:avLst/>
-          </a:prstGeom>
-          <a:noFill/>
-        </p:spPr>
-        <p:txBody>
-          <a:bodyPr wrap="square">
-            <a:spAutoFit/>
-          </a:bodyPr>
-          <a:lstStyle/>
-          <a:p>
-            <a:pPr algn="ctr">
-              <a:defRPr sz="1300" b="0">
-                <a:solidFill>
-                  <a:srgbClr val="00B4D8"/>
-                </a:solidFill>
-                <a:latin typeface="Segoe UI"/>
-              </a:defRPr>
-            </a:pPr>
-            <a:r>
-              <a:t>Projekt Badania Jakościowego: Fintech a świadomość inwestycyjna</a:t>
+              <a:t>Projekt Badania Jakościowego  |  Fintech a świadomość inwestycyjna</a:t>
             </a:r>
           </a:p>
         </p:txBody>
@@ -3359,7 +3347,7 @@
     <p:bg>
       <p:bgPr>
         <a:solidFill>
-          <a:srgbClr val="F8F9FA"/>
+          <a:srgbClr val="F4F5F7"/>
         </a:solidFill>
         <a:effectLst/>
       </p:bgPr>
@@ -3380,7 +3368,86 @@
         <p:spPr>
           <a:xfrm>
             <a:off x="0" y="0"/>
-            <a:ext cx="137160" cy="6858000"/>
+            <a:ext cx="12191695" cy="1097280"/>
+          </a:xfrm>
+          <a:prstGeom prst="rect">
+            <a:avLst/>
+          </a:prstGeom>
+          <a:solidFill>
+            <a:srgbClr val="0D1B2A"/>
+          </a:solidFill>
+          <a:ln>
+            <a:noFill/>
+          </a:ln>
+        </p:spPr>
+        <p:style>
+          <a:lnRef idx="1">
+            <a:schemeClr val="accent1"/>
+          </a:lnRef>
+          <a:fillRef idx="3">
+            <a:schemeClr val="accent1"/>
+          </a:fillRef>
+          <a:effectRef idx="2">
+            <a:schemeClr val="accent1"/>
+          </a:effectRef>
+          <a:fontRef idx="minor">
+            <a:schemeClr val="lt1"/>
+          </a:fontRef>
+        </p:style>
+        <p:txBody>
+          <a:bodyPr rtlCol="0" anchor="ctr"/>
+          <a:lstStyle/>
+          <a:p>
+            <a:pPr algn="ctr"/>
+          </a:p>
+        </p:txBody>
+      </p:sp>
+      <p:sp>
+        <p:nvSpPr>
+          <p:cNvPr id="3" name="TextBox 2"/>
+          <p:cNvSpPr txBox="1"/>
+          <p:nvPr/>
+        </p:nvSpPr>
+        <p:spPr>
+          <a:xfrm>
+            <a:off x="731520" y="228600"/>
+            <a:ext cx="10058400" cy="640080"/>
+          </a:xfrm>
+          <a:prstGeom prst="rect">
+            <a:avLst/>
+          </a:prstGeom>
+          <a:noFill/>
+        </p:spPr>
+        <p:txBody>
+          <a:bodyPr wrap="square">
+            <a:spAutoFit/>
+          </a:bodyPr>
+          <a:lstStyle/>
+          <a:p>
+            <a:pPr>
+              <a:defRPr sz="2600" b="1">
+                <a:solidFill>
+                  <a:srgbClr val="FFFFFF"/>
+                </a:solidFill>
+                <a:latin typeface="Segoe UI"/>
+              </a:defRPr>
+            </a:pPr>
+            <a:r>
+              <a:t>Uzasadnienie wyboru tematu</a:t>
+            </a:r>
+          </a:p>
+        </p:txBody>
+      </p:sp>
+      <p:sp>
+        <p:nvSpPr>
+          <p:cNvPr id="4" name="Rectangle 3"/>
+          <p:cNvSpPr/>
+          <p:nvPr/>
+        </p:nvSpPr>
+        <p:spPr>
+          <a:xfrm>
+            <a:off x="731520" y="960120"/>
+            <a:ext cx="3657600" cy="36576"/>
           </a:xfrm>
           <a:prstGeom prst="rect">
             <a:avLst/>
@@ -3416,20 +3483,20 @@
       </p:sp>
       <p:sp>
         <p:nvSpPr>
-          <p:cNvPr id="3" name="Rectangle 2"/>
+          <p:cNvPr id="5" name="Rounded Rectangle 4"/>
           <p:cNvSpPr/>
           <p:nvPr/>
         </p:nvSpPr>
         <p:spPr>
           <a:xfrm>
-            <a:off x="0" y="6583680"/>
-            <a:ext cx="12191695" cy="274320"/>
-          </a:xfrm>
-          <a:prstGeom prst="rect">
+            <a:off x="585216" y="1408176"/>
+            <a:ext cx="11064240" cy="5029200"/>
+          </a:xfrm>
+          <a:prstGeom prst="roundRect">
             <a:avLst/>
           </a:prstGeom>
           <a:solidFill>
-            <a:srgbClr val="F4A261"/>
+            <a:srgbClr val="E0E1E3"/>
           </a:solidFill>
           <a:ln>
             <a:noFill/>
@@ -3459,25 +3526,25 @@
       </p:sp>
       <p:sp>
         <p:nvSpPr>
-          <p:cNvPr id="4" name="Oval 3"/>
+          <p:cNvPr id="6" name="Rounded Rectangle 5"/>
           <p:cNvSpPr/>
           <p:nvPr/>
         </p:nvSpPr>
         <p:spPr>
           <a:xfrm>
-            <a:off x="10058400" y="-731520"/>
-            <a:ext cx="2743200" cy="2743200"/>
-          </a:xfrm>
-          <a:prstGeom prst="ellipse">
+            <a:off x="548640" y="1371600"/>
+            <a:ext cx="11064240" cy="5029200"/>
+          </a:xfrm>
+          <a:prstGeom prst="roundRect">
             <a:avLst/>
           </a:prstGeom>
           <a:solidFill>
-            <a:srgbClr val="1B2838">
-              <a:alpha val="12000"/>
-            </a:srgbClr>
+            <a:srgbClr val="FFFFFF"/>
           </a:solidFill>
-          <a:ln>
-            <a:noFill/>
+          <a:ln w="9525">
+            <a:solidFill>
+              <a:srgbClr val="E8E9EB"/>
+            </a:solidFill>
           </a:ln>
         </p:spPr>
         <p:style>
@@ -3504,22 +3571,20 @@
       </p:sp>
       <p:sp>
         <p:nvSpPr>
-          <p:cNvPr id="5" name="Oval 4"/>
+          <p:cNvPr id="7" name="Rectangle 6"/>
           <p:cNvSpPr/>
           <p:nvPr/>
         </p:nvSpPr>
         <p:spPr>
           <a:xfrm>
-            <a:off x="-914400" y="5029200"/>
-            <a:ext cx="2286000" cy="2286000"/>
-          </a:xfrm>
-          <a:prstGeom prst="ellipse">
+            <a:off x="4206240" y="1737360"/>
+            <a:ext cx="18288" cy="4297680"/>
+          </a:xfrm>
+          <a:prstGeom prst="rect">
             <a:avLst/>
           </a:prstGeom>
           <a:solidFill>
-            <a:srgbClr val="F4A261">
-              <a:alpha val="9999"/>
-            </a:srgbClr>
+            <a:srgbClr val="E0E1E3"/>
           </a:solidFill>
           <a:ln>
             <a:noFill/>
@@ -3549,63 +3614,24 @@
       </p:sp>
       <p:sp>
         <p:nvSpPr>
-          <p:cNvPr id="6" name="TextBox 5"/>
-          <p:cNvSpPr txBox="1"/>
-          <p:nvPr/>
-        </p:nvSpPr>
-        <p:spPr>
-          <a:xfrm>
-            <a:off x="548640" y="274320"/>
-            <a:ext cx="9144000" cy="731520"/>
+          <p:cNvPr id="8" name="Rectangle 7"/>
+          <p:cNvSpPr/>
+          <p:nvPr/>
+        </p:nvSpPr>
+        <p:spPr>
+          <a:xfrm>
+            <a:off x="7955279" y="1737360"/>
+            <a:ext cx="18288" cy="4297680"/>
           </a:xfrm>
           <a:prstGeom prst="rect">
             <a:avLst/>
           </a:prstGeom>
-          <a:noFill/>
-        </p:spPr>
-        <p:txBody>
-          <a:bodyPr wrap="square">
-            <a:spAutoFit/>
-          </a:bodyPr>
-          <a:lstStyle/>
-          <a:p>
-            <a:pPr algn="l">
-              <a:defRPr sz="2800" b="1">
-                <a:solidFill>
-                  <a:srgbClr val="1B2838"/>
-                </a:solidFill>
-                <a:latin typeface="Segoe UI"/>
-              </a:defRPr>
-            </a:pPr>
-            <a:r>
-              <a:t>Uzasadnienie wyboru tematu</a:t>
-            </a:r>
-          </a:p>
-        </p:txBody>
-      </p:sp>
-      <p:sp>
-        <p:nvSpPr>
-          <p:cNvPr id="7" name="Rounded Rectangle 6"/>
-          <p:cNvSpPr/>
-          <p:nvPr/>
-        </p:nvSpPr>
-        <p:spPr>
-          <a:xfrm>
-            <a:off x="548640" y="1280160"/>
-            <a:ext cx="3474720" cy="4572000"/>
-          </a:xfrm>
-          <a:prstGeom prst="roundRect">
-            <a:avLst/>
-          </a:prstGeom>
           <a:solidFill>
-            <a:srgbClr val="FFFFFF"/>
+            <a:srgbClr val="E0E1E3"/>
           </a:solidFill>
-          <a:ln w="6350">
-            <a:solidFill>
-              <a:srgbClr val="E0E0E0"/>
-            </a:solidFill>
+          <a:ln>
+            <a:noFill/>
           </a:ln>
-          <a:effectLst/>
         </p:spPr>
         <p:style>
           <a:lnRef idx="1">
@@ -3631,57 +3657,14 @@
       </p:sp>
       <p:sp>
         <p:nvSpPr>
-          <p:cNvPr id="8" name="Rounded Rectangle 7"/>
-          <p:cNvSpPr/>
-          <p:nvPr/>
-        </p:nvSpPr>
-        <p:spPr>
-          <a:xfrm>
-            <a:off x="548640" y="1280160"/>
-            <a:ext cx="3474720" cy="109728"/>
-          </a:xfrm>
-          <a:prstGeom prst="roundRect">
-            <a:avLst/>
-          </a:prstGeom>
-          <a:solidFill>
-            <a:srgbClr val="00B4D8"/>
-          </a:solidFill>
-          <a:ln>
-            <a:noFill/>
-          </a:ln>
-        </p:spPr>
-        <p:style>
-          <a:lnRef idx="1">
-            <a:schemeClr val="accent1"/>
-          </a:lnRef>
-          <a:fillRef idx="3">
-            <a:schemeClr val="accent1"/>
-          </a:fillRef>
-          <a:effectRef idx="2">
-            <a:schemeClr val="accent1"/>
-          </a:effectRef>
-          <a:fontRef idx="minor">
-            <a:schemeClr val="lt1"/>
-          </a:fontRef>
-        </p:style>
-        <p:txBody>
-          <a:bodyPr rtlCol="0" anchor="ctr"/>
-          <a:lstStyle/>
-          <a:p>
-            <a:pPr algn="ctr"/>
-          </a:p>
-        </p:txBody>
-      </p:sp>
-      <p:sp>
-        <p:nvSpPr>
           <p:cNvPr id="9" name="TextBox 8"/>
           <p:cNvSpPr txBox="1"/>
           <p:nvPr/>
         </p:nvSpPr>
         <p:spPr>
           <a:xfrm>
-            <a:off x="822960" y="1645920"/>
-            <a:ext cx="3017520" cy="457200"/>
+            <a:off x="914400" y="1645920"/>
+            <a:ext cx="3108960" cy="457200"/>
           </a:xfrm>
           <a:prstGeom prst="rect">
             <a:avLst/>
@@ -3716,8 +3699,8 @@
         </p:nvSpPr>
         <p:spPr>
           <a:xfrm>
-            <a:off x="822960" y="2194560"/>
-            <a:ext cx="3017520" cy="3200400"/>
+            <a:off x="914400" y="2286000"/>
+            <a:ext cx="3017520" cy="3657600"/>
           </a:xfrm>
           <a:prstGeom prst="rect">
             <a:avLst/>
@@ -3732,152 +3715,119 @@
           <a:p>
             <a:pPr>
               <a:spcAft>
-                <a:spcPts val="400"/>
+                <a:spcPts val="1000"/>
               </a:spcAft>
-              <a:defRPr sz="1100">
-                <a:solidFill>
-                  <a:srgbClr val="1B2B3C"/>
-                </a:solidFill>
-                <a:latin typeface="Segoe UI"/>
-              </a:defRPr>
             </a:pPr>
             <a:r>
-              <a:t>• Boom na aplikacje (Revolut, eToro, XTB) + robo-doradztwo (Finax, Portu)</a:t>
+              <a:rPr sz="800">
+                <a:solidFill>
+                  <a:srgbClr val="00B4D8"/>
+                </a:solidFill>
+                <a:latin typeface="Segoe UI"/>
+              </a:rPr>
+              <a:t>■  </a:t>
+            </a:r>
+            <a:r>
+              <a:rPr sz="1100">
+                <a:solidFill>
+                  <a:srgbClr val="1A1A2E"/>
+                </a:solidFill>
+                <a:latin typeface="Segoe UI"/>
+              </a:rPr>
+              <a:t>Boom na aplikacje inwestycyjne
+   (Revolut, eToro, XTB)</a:t>
             </a:r>
           </a:p>
           <a:p>
             <a:pPr>
               <a:spcAft>
-                <a:spcPts val="400"/>
+                <a:spcPts val="1000"/>
               </a:spcAft>
-              <a:defRPr sz="1100">
-                <a:solidFill>
-                  <a:srgbClr val="1B2B3C"/>
-                </a:solidFill>
-                <a:latin typeface="Segoe UI"/>
-              </a:defRPr>
             </a:pPr>
             <a:r>
-              <a:t>• Niskie bariery wejścia, gamifikacja</a:t>
+              <a:rPr sz="800">
+                <a:solidFill>
+                  <a:srgbClr val="00B4D8"/>
+                </a:solidFill>
+                <a:latin typeface="Segoe UI"/>
+              </a:rPr>
+              <a:t>■  </a:t>
+            </a:r>
+            <a:r>
+              <a:rPr sz="1100">
+                <a:solidFill>
+                  <a:srgbClr val="1A1A2E"/>
+                </a:solidFill>
+                <a:latin typeface="Segoe UI"/>
+              </a:rPr>
+              <a:t>Rozwoj robo-doradztwa
+   (Finax, Portu)</a:t>
             </a:r>
           </a:p>
           <a:p>
             <a:pPr>
               <a:spcAft>
-                <a:spcPts val="400"/>
+                <a:spcPts val="1000"/>
               </a:spcAft>
-              <a:defRPr sz="1100">
-                <a:solidFill>
-                  <a:srgbClr val="1B2B3C"/>
-                </a:solidFill>
-                <a:latin typeface="Segoe UI"/>
-              </a:defRPr>
             </a:pPr>
             <a:r>
-              <a:t>• Pytania o świadomość ryzyka</a:t>
-            </a:r>
-          </a:p>
-        </p:txBody>
-      </p:sp>
-      <p:sp>
-        <p:nvSpPr>
-          <p:cNvPr id="11" name="Rounded Rectangle 10"/>
-          <p:cNvSpPr/>
-          <p:nvPr/>
-        </p:nvSpPr>
-        <p:spPr>
-          <a:xfrm>
-            <a:off x="4297680" y="1280160"/>
-            <a:ext cx="3474720" cy="4572000"/>
-          </a:xfrm>
-          <a:prstGeom prst="roundRect">
-            <a:avLst/>
-          </a:prstGeom>
-          <a:solidFill>
-            <a:srgbClr val="FFFFFF"/>
-          </a:solidFill>
-          <a:ln w="6350">
-            <a:solidFill>
-              <a:srgbClr val="E0E0E0"/>
-            </a:solidFill>
-          </a:ln>
-          <a:effectLst/>
-        </p:spPr>
-        <p:style>
-          <a:lnRef idx="1">
-            <a:schemeClr val="accent1"/>
-          </a:lnRef>
-          <a:fillRef idx="3">
-            <a:schemeClr val="accent1"/>
-          </a:fillRef>
-          <a:effectRef idx="2">
-            <a:schemeClr val="accent1"/>
-          </a:effectRef>
-          <a:fontRef idx="minor">
-            <a:schemeClr val="lt1"/>
-          </a:fontRef>
-        </p:style>
-        <p:txBody>
-          <a:bodyPr rtlCol="0" anchor="ctr"/>
-          <a:lstStyle/>
-          <a:p>
-            <a:pPr algn="ctr"/>
-          </a:p>
-        </p:txBody>
-      </p:sp>
-      <p:sp>
-        <p:nvSpPr>
-          <p:cNvPr id="12" name="Rounded Rectangle 11"/>
-          <p:cNvSpPr/>
-          <p:nvPr/>
-        </p:nvSpPr>
-        <p:spPr>
-          <a:xfrm>
-            <a:off x="4297680" y="1280160"/>
-            <a:ext cx="3474720" cy="109728"/>
-          </a:xfrm>
-          <a:prstGeom prst="roundRect">
-            <a:avLst/>
-          </a:prstGeom>
-          <a:solidFill>
-            <a:srgbClr val="F4A261"/>
-          </a:solidFill>
-          <a:ln>
-            <a:noFill/>
-          </a:ln>
-        </p:spPr>
-        <p:style>
-          <a:lnRef idx="1">
-            <a:schemeClr val="accent1"/>
-          </a:lnRef>
-          <a:fillRef idx="3">
-            <a:schemeClr val="accent1"/>
-          </a:fillRef>
-          <a:effectRef idx="2">
-            <a:schemeClr val="accent1"/>
-          </a:effectRef>
-          <a:fontRef idx="minor">
-            <a:schemeClr val="lt1"/>
-          </a:fontRef>
-        </p:style>
-        <p:txBody>
-          <a:bodyPr rtlCol="0" anchor="ctr"/>
-          <a:lstStyle/>
-          <a:p>
-            <a:pPr algn="ctr"/>
-          </a:p>
-        </p:txBody>
-      </p:sp>
-      <p:sp>
-        <p:nvSpPr>
-          <p:cNvPr id="13" name="TextBox 12"/>
+              <a:rPr sz="800">
+                <a:solidFill>
+                  <a:srgbClr val="00B4D8"/>
+                </a:solidFill>
+                <a:latin typeface="Segoe UI"/>
+              </a:rPr>
+              <a:t>■  </a:t>
+            </a:r>
+            <a:r>
+              <a:rPr sz="1100">
+                <a:solidFill>
+                  <a:srgbClr val="1A1A2E"/>
+                </a:solidFill>
+                <a:latin typeface="Segoe UI"/>
+              </a:rPr>
+              <a:t>Niskie bariery wejscia
+   i gamifikacja inwestowania</a:t>
+            </a:r>
+          </a:p>
+          <a:p>
+            <a:pPr>
+              <a:spcAft>
+                <a:spcPts val="1000"/>
+              </a:spcAft>
+            </a:pPr>
+            <a:r>
+              <a:rPr sz="800">
+                <a:solidFill>
+                  <a:srgbClr val="00B4D8"/>
+                </a:solidFill>
+                <a:latin typeface="Segoe UI"/>
+              </a:rPr>
+              <a:t>■  </a:t>
+            </a:r>
+            <a:r>
+              <a:rPr sz="1100">
+                <a:solidFill>
+                  <a:srgbClr val="1A1A2E"/>
+                </a:solidFill>
+                <a:latin typeface="Segoe UI"/>
+              </a:rPr>
+              <a:t>Rosna pytania o swiadomosc
+   ryzyka wsrod nowych uzytkownikow</a:t>
+            </a:r>
+          </a:p>
+        </p:txBody>
+      </p:sp>
+      <p:sp>
+        <p:nvSpPr>
+          <p:cNvPr id="11" name="TextBox 10"/>
           <p:cNvSpPr txBox="1"/>
           <p:nvPr/>
         </p:nvSpPr>
         <p:spPr>
           <a:xfrm>
             <a:off x="4572000" y="1645920"/>
-            <a:ext cx="3017520" cy="457200"/>
+            <a:ext cx="3108960" cy="457200"/>
           </a:xfrm>
           <a:prstGeom prst="rect">
             <a:avLst/>
@@ -3893,7 +3843,7 @@
             <a:pPr algn="l">
               <a:defRPr sz="1400" b="1">
                 <a:solidFill>
-                  <a:srgbClr val="F4A261"/>
+                  <a:srgbClr val="00B4D8"/>
                 </a:solidFill>
                 <a:latin typeface="Segoe UI"/>
               </a:defRPr>
@@ -3906,14 +3856,14 @@
       </p:sp>
       <p:sp>
         <p:nvSpPr>
-          <p:cNvPr id="14" name="TextBox 13"/>
+          <p:cNvPr id="12" name="TextBox 11"/>
           <p:cNvSpPr txBox="1"/>
           <p:nvPr/>
         </p:nvSpPr>
         <p:spPr>
           <a:xfrm>
-            <a:off x="4572000" y="2194560"/>
-            <a:ext cx="3017520" cy="3200400"/>
+            <a:off x="4572000" y="2286000"/>
+            <a:ext cx="3017520" cy="3657600"/>
           </a:xfrm>
           <a:prstGeom prst="rect">
             <a:avLst/>
@@ -3928,152 +3878,94 @@
           <a:p>
             <a:pPr>
               <a:spcAft>
-                <a:spcPts val="400"/>
+                <a:spcPts val="1000"/>
               </a:spcAft>
-              <a:defRPr sz="1100">
-                <a:solidFill>
-                  <a:srgbClr val="1B2B3C"/>
-                </a:solidFill>
-                <a:latin typeface="Segoe UI"/>
-              </a:defRPr>
             </a:pPr>
             <a:r>
-              <a:t>• Początkujących inwestorów detalicznych</a:t>
+              <a:rPr sz="800">
+                <a:solidFill>
+                  <a:srgbClr val="00B4D8"/>
+                </a:solidFill>
+                <a:latin typeface="Segoe UI"/>
+              </a:rPr>
+              <a:t>■  </a:t>
+            </a:r>
+            <a:r>
+              <a:rPr sz="1100">
+                <a:solidFill>
+                  <a:srgbClr val="1A1A2E"/>
+                </a:solidFill>
+                <a:latin typeface="Segoe UI"/>
+              </a:rPr>
+              <a:t>Poczatkujacych inwestorow
+   detalicznych</a:t>
             </a:r>
           </a:p>
           <a:p>
             <a:pPr>
               <a:spcAft>
-                <a:spcPts val="400"/>
+                <a:spcPts val="1000"/>
               </a:spcAft>
-              <a:defRPr sz="1100">
-                <a:solidFill>
-                  <a:srgbClr val="1B2B3C"/>
-                </a:solidFill>
-                <a:latin typeface="Segoe UI"/>
-              </a:defRPr>
             </a:pPr>
             <a:r>
-              <a:t>• Szukają alternatywy dla lokat</a:t>
+              <a:rPr sz="800">
+                <a:solidFill>
+                  <a:srgbClr val="00B4D8"/>
+                </a:solidFill>
+                <a:latin typeface="Segoe UI"/>
+              </a:rPr>
+              <a:t>■  </a:t>
+            </a:r>
+            <a:r>
+              <a:rPr sz="1100">
+                <a:solidFill>
+                  <a:srgbClr val="1A1A2E"/>
+                </a:solidFill>
+                <a:latin typeface="Segoe UI"/>
+              </a:rPr>
+              <a:t>Osoby szukajace alternatywy
+   dla lokat bankowych</a:t>
             </a:r>
           </a:p>
           <a:p>
             <a:pPr>
               <a:spcAft>
-                <a:spcPts val="400"/>
+                <a:spcPts val="1000"/>
               </a:spcAft>
-              <a:defRPr sz="1100">
-                <a:solidFill>
-                  <a:srgbClr val="1B2B3C"/>
-                </a:solidFill>
-                <a:latin typeface="Segoe UI"/>
-              </a:defRPr>
             </a:pPr>
             <a:r>
-              <a:t>• Pierwszy kontakt z rynkiem przez smartfon</a:t>
-            </a:r>
-          </a:p>
-        </p:txBody>
-      </p:sp>
-      <p:sp>
-        <p:nvSpPr>
-          <p:cNvPr id="15" name="Rounded Rectangle 14"/>
-          <p:cNvSpPr/>
-          <p:nvPr/>
-        </p:nvSpPr>
-        <p:spPr>
-          <a:xfrm>
-            <a:off x="8046720" y="1280160"/>
-            <a:ext cx="3474720" cy="4572000"/>
-          </a:xfrm>
-          <a:prstGeom prst="roundRect">
-            <a:avLst/>
-          </a:prstGeom>
-          <a:solidFill>
-            <a:srgbClr val="FFFFFF"/>
-          </a:solidFill>
-          <a:ln w="6350">
-            <a:solidFill>
-              <a:srgbClr val="E0E0E0"/>
-            </a:solidFill>
-          </a:ln>
-          <a:effectLst/>
-        </p:spPr>
-        <p:style>
-          <a:lnRef idx="1">
-            <a:schemeClr val="accent1"/>
-          </a:lnRef>
-          <a:fillRef idx="3">
-            <a:schemeClr val="accent1"/>
-          </a:fillRef>
-          <a:effectRef idx="2">
-            <a:schemeClr val="accent1"/>
-          </a:effectRef>
-          <a:fontRef idx="minor">
-            <a:schemeClr val="lt1"/>
-          </a:fontRef>
-        </p:style>
-        <p:txBody>
-          <a:bodyPr rtlCol="0" anchor="ctr"/>
-          <a:lstStyle/>
-          <a:p>
-            <a:pPr algn="ctr"/>
-          </a:p>
-        </p:txBody>
-      </p:sp>
-      <p:sp>
-        <p:nvSpPr>
-          <p:cNvPr id="16" name="Rounded Rectangle 15"/>
-          <p:cNvSpPr/>
-          <p:nvPr/>
-        </p:nvSpPr>
-        <p:spPr>
-          <a:xfrm>
-            <a:off x="8046720" y="1280160"/>
-            <a:ext cx="3474720" cy="109728"/>
-          </a:xfrm>
-          <a:prstGeom prst="roundRect">
-            <a:avLst/>
-          </a:prstGeom>
-          <a:solidFill>
-            <a:srgbClr val="1B2838"/>
-          </a:solidFill>
-          <a:ln>
-            <a:noFill/>
-          </a:ln>
-        </p:spPr>
-        <p:style>
-          <a:lnRef idx="1">
-            <a:schemeClr val="accent1"/>
-          </a:lnRef>
-          <a:fillRef idx="3">
-            <a:schemeClr val="accent1"/>
-          </a:fillRef>
-          <a:effectRef idx="2">
-            <a:schemeClr val="accent1"/>
-          </a:effectRef>
-          <a:fontRef idx="minor">
-            <a:schemeClr val="lt1"/>
-          </a:fontRef>
-        </p:style>
-        <p:txBody>
-          <a:bodyPr rtlCol="0" anchor="ctr"/>
-          <a:lstStyle/>
-          <a:p>
-            <a:pPr algn="ctr"/>
-          </a:p>
-        </p:txBody>
-      </p:sp>
-      <p:sp>
-        <p:nvSpPr>
-          <p:cNvPr id="17" name="TextBox 16"/>
+              <a:rPr sz="800">
+                <a:solidFill>
+                  <a:srgbClr val="00B4D8"/>
+                </a:solidFill>
+                <a:latin typeface="Segoe UI"/>
+              </a:rPr>
+              <a:t>■  </a:t>
+            </a:r>
+            <a:r>
+              <a:rPr sz="1100">
+                <a:solidFill>
+                  <a:srgbClr val="1A1A2E"/>
+                </a:solidFill>
+                <a:latin typeface="Segoe UI"/>
+              </a:rPr>
+              <a:t>Uzytkownikow, ktorych pierwszy
+   kontakt z rynkiem jest przez
+   smartfon</a:t>
+            </a:r>
+          </a:p>
+        </p:txBody>
+      </p:sp>
+      <p:sp>
+        <p:nvSpPr>
+          <p:cNvPr id="13" name="TextBox 12"/>
           <p:cNvSpPr txBox="1"/>
           <p:nvPr/>
         </p:nvSpPr>
         <p:spPr>
           <a:xfrm>
             <a:off x="8321040" y="1645920"/>
-            <a:ext cx="3017520" cy="457200"/>
+            <a:ext cx="3108960" cy="457200"/>
           </a:xfrm>
           <a:prstGeom prst="rect">
             <a:avLst/>
@@ -4089,7 +3981,7 @@
             <a:pPr algn="l">
               <a:defRPr sz="1400" b="1">
                 <a:solidFill>
-                  <a:srgbClr val="1B2838"/>
+                  <a:srgbClr val="00B4D8"/>
                 </a:solidFill>
                 <a:latin typeface="Segoe UI"/>
               </a:defRPr>
@@ -4102,14 +3994,14 @@
       </p:sp>
       <p:sp>
         <p:nvSpPr>
-          <p:cNvPr id="18" name="TextBox 17"/>
+          <p:cNvPr id="14" name="TextBox 13"/>
           <p:cNvSpPr txBox="1"/>
           <p:nvPr/>
         </p:nvSpPr>
         <p:spPr>
           <a:xfrm>
-            <a:off x="8321040" y="2194560"/>
-            <a:ext cx="3017520" cy="3200400"/>
+            <a:off x="8321040" y="2286000"/>
+            <a:ext cx="3017520" cy="3657600"/>
           </a:xfrm>
           <a:prstGeom prst="rect">
             <a:avLst/>
@@ -4124,49 +4016,80 @@
           <a:p>
             <a:pPr>
               <a:spcAft>
-                <a:spcPts val="400"/>
+                <a:spcPts val="1000"/>
               </a:spcAft>
-              <a:defRPr sz="1100">
-                <a:solidFill>
-                  <a:srgbClr val="1B2B3C"/>
-                </a:solidFill>
-                <a:latin typeface="Segoe UI"/>
-              </a:defRPr>
             </a:pPr>
             <a:r>
-              <a:t>• Dla KNF – ochrona konsumenta</a:t>
+              <a:rPr sz="800">
+                <a:solidFill>
+                  <a:srgbClr val="00B4D8"/>
+                </a:solidFill>
+                <a:latin typeface="Segoe UI"/>
+              </a:rPr>
+              <a:t>■  </a:t>
+            </a:r>
+            <a:r>
+              <a:rPr sz="1100">
+                <a:solidFill>
+                  <a:srgbClr val="1A1A2E"/>
+                </a:solidFill>
+                <a:latin typeface="Segoe UI"/>
+              </a:rPr>
+              <a:t>Dla KNF: ochrona konsumenta
+   i regulacje rynku</a:t>
             </a:r>
           </a:p>
           <a:p>
             <a:pPr>
               <a:spcAft>
-                <a:spcPts val="400"/>
+                <a:spcPts val="1000"/>
               </a:spcAft>
-              <a:defRPr sz="1100">
-                <a:solidFill>
-                  <a:srgbClr val="1B2B3C"/>
-                </a:solidFill>
-                <a:latin typeface="Segoe UI"/>
-              </a:defRPr>
             </a:pPr>
             <a:r>
-              <a:t>• Dla rynku – ryzyko paniki tłumu</a:t>
+              <a:rPr sz="800">
+                <a:solidFill>
+                  <a:srgbClr val="00B4D8"/>
+                </a:solidFill>
+                <a:latin typeface="Segoe UI"/>
+              </a:rPr>
+              <a:t>■  </a:t>
+            </a:r>
+            <a:r>
+              <a:rPr sz="1100">
+                <a:solidFill>
+                  <a:srgbClr val="1A1A2E"/>
+                </a:solidFill>
+                <a:latin typeface="Segoe UI"/>
+              </a:rPr>
+              <a:t>Dla rynku: ryzyko paniki tlumu
+   i niestabilnosci</a:t>
             </a:r>
           </a:p>
           <a:p>
             <a:pPr>
               <a:spcAft>
-                <a:spcPts val="400"/>
+                <a:spcPts val="1000"/>
               </a:spcAft>
-              <a:defRPr sz="1100">
-                <a:solidFill>
-                  <a:srgbClr val="1B2B3C"/>
-                </a:solidFill>
-                <a:latin typeface="Segoe UI"/>
-              </a:defRPr>
             </a:pPr>
             <a:r>
-              <a:t>• Dla twórców – odpowiedzialne projektowanie</a:t>
+              <a:rPr sz="800">
+                <a:solidFill>
+                  <a:srgbClr val="00B4D8"/>
+                </a:solidFill>
+                <a:latin typeface="Segoe UI"/>
+              </a:rPr>
+              <a:t>■  </a:t>
+            </a:r>
+            <a:r>
+              <a:rPr sz="1100">
+                <a:solidFill>
+                  <a:srgbClr val="1A1A2E"/>
+                </a:solidFill>
+                <a:latin typeface="Segoe UI"/>
+              </a:rPr>
+              <a:t>Dla tworcow aplikacji:
+   odpowiedzialne projektowanie
+   interfejsow</a:t>
             </a:r>
           </a:p>
         </p:txBody>
@@ -4185,7 +4108,7 @@
     <p:bg>
       <p:bgPr>
         <a:solidFill>
-          <a:srgbClr val="FFFFFF"/>
+          <a:srgbClr val="F4F5F7"/>
         </a:solidFill>
         <a:effectLst/>
       </p:bgPr>
@@ -4206,13 +4129,13 @@
         <p:spPr>
           <a:xfrm>
             <a:off x="0" y="0"/>
-            <a:ext cx="137160" cy="6858000"/>
+            <a:ext cx="12191695" cy="1097280"/>
           </a:xfrm>
           <a:prstGeom prst="rect">
             <a:avLst/>
           </a:prstGeom>
           <a:solidFill>
-            <a:srgbClr val="F4A261"/>
+            <a:srgbClr val="0D1B2A"/>
           </a:solidFill>
           <a:ln>
             <a:noFill/>
@@ -4242,14 +4165,50 @@
       </p:sp>
       <p:sp>
         <p:nvSpPr>
-          <p:cNvPr id="3" name="Rectangle 2"/>
+          <p:cNvPr id="3" name="TextBox 2"/>
+          <p:cNvSpPr txBox="1"/>
+          <p:nvPr/>
+        </p:nvSpPr>
+        <p:spPr>
+          <a:xfrm>
+            <a:off x="731520" y="228600"/>
+            <a:ext cx="10058400" cy="640080"/>
+          </a:xfrm>
+          <a:prstGeom prst="rect">
+            <a:avLst/>
+          </a:prstGeom>
+          <a:noFill/>
+        </p:spPr>
+        <p:txBody>
+          <a:bodyPr wrap="square">
+            <a:spAutoFit/>
+          </a:bodyPr>
+          <a:lstStyle/>
+          <a:p>
+            <a:pPr>
+              <a:defRPr sz="2600" b="1">
+                <a:solidFill>
+                  <a:srgbClr val="FFFFFF"/>
+                </a:solidFill>
+                <a:latin typeface="Segoe UI"/>
+              </a:defRPr>
+            </a:pPr>
+            <a:r>
+              <a:t>Cel badania i pytania badawcze</a:t>
+            </a:r>
+          </a:p>
+        </p:txBody>
+      </p:sp>
+      <p:sp>
+        <p:nvSpPr>
+          <p:cNvPr id="4" name="Rectangle 3"/>
           <p:cNvSpPr/>
           <p:nvPr/>
         </p:nvSpPr>
         <p:spPr>
           <a:xfrm>
-            <a:off x="0" y="6583680"/>
-            <a:ext cx="12191695" cy="274320"/>
+            <a:off x="731520" y="960120"/>
+            <a:ext cx="3657600" cy="36576"/>
           </a:xfrm>
           <a:prstGeom prst="rect">
             <a:avLst/>
@@ -4285,22 +4244,20 @@
       </p:sp>
       <p:sp>
         <p:nvSpPr>
-          <p:cNvPr id="4" name="Oval 3"/>
+          <p:cNvPr id="5" name="Rounded Rectangle 4"/>
           <p:cNvSpPr/>
           <p:nvPr/>
         </p:nvSpPr>
         <p:spPr>
           <a:xfrm>
-            <a:off x="10058400" y="-731520"/>
-            <a:ext cx="2743200" cy="2743200"/>
-          </a:xfrm>
-          <a:prstGeom prst="ellipse">
+            <a:off x="585216" y="1408176"/>
+            <a:ext cx="11064240" cy="5029200"/>
+          </a:xfrm>
+          <a:prstGeom prst="roundRect">
             <a:avLst/>
           </a:prstGeom>
           <a:solidFill>
-            <a:srgbClr val="1B2838">
-              <a:alpha val="12000"/>
-            </a:srgbClr>
+            <a:srgbClr val="E0E1E3"/>
           </a:solidFill>
           <a:ln>
             <a:noFill/>
@@ -4330,25 +4287,25 @@
       </p:sp>
       <p:sp>
         <p:nvSpPr>
-          <p:cNvPr id="5" name="Oval 4"/>
+          <p:cNvPr id="6" name="Rounded Rectangle 5"/>
           <p:cNvSpPr/>
           <p:nvPr/>
         </p:nvSpPr>
         <p:spPr>
           <a:xfrm>
-            <a:off x="-914400" y="5029200"/>
-            <a:ext cx="2286000" cy="2286000"/>
-          </a:xfrm>
-          <a:prstGeom prst="ellipse">
+            <a:off x="548640" y="1371600"/>
+            <a:ext cx="11064240" cy="5029200"/>
+          </a:xfrm>
+          <a:prstGeom prst="roundRect">
             <a:avLst/>
           </a:prstGeom>
           <a:solidFill>
-            <a:srgbClr val="F4A261">
-              <a:alpha val="9999"/>
-            </a:srgbClr>
+            <a:srgbClr val="FFFFFF"/>
           </a:solidFill>
-          <a:ln>
-            <a:noFill/>
+          <a:ln w="9525">
+            <a:solidFill>
+              <a:srgbClr val="E8E9EB"/>
+            </a:solidFill>
           </a:ln>
         </p:spPr>
         <p:style>
@@ -4375,14 +4332,14 @@
       </p:sp>
       <p:sp>
         <p:nvSpPr>
-          <p:cNvPr id="6" name="TextBox 5"/>
+          <p:cNvPr id="7" name="TextBox 6"/>
           <p:cNvSpPr txBox="1"/>
           <p:nvPr/>
         </p:nvSpPr>
         <p:spPr>
           <a:xfrm>
-            <a:off x="548640" y="274320"/>
-            <a:ext cx="9144000" cy="731520"/>
+            <a:off x="914400" y="1645920"/>
+            <a:ext cx="2743200" cy="365760"/>
           </a:xfrm>
           <a:prstGeom prst="rect">
             <a:avLst/>
@@ -4396,42 +4353,75 @@
           <a:lstStyle/>
           <a:p>
             <a:pPr algn="l">
-              <a:defRPr sz="2800" b="1">
-                <a:solidFill>
-                  <a:srgbClr val="1B2838"/>
+              <a:defRPr sz="1300" b="1">
+                <a:solidFill>
+                  <a:srgbClr val="0D1B2A"/>
                 </a:solidFill>
                 <a:latin typeface="Segoe UI"/>
               </a:defRPr>
             </a:pPr>
             <a:r>
-              <a:t>Cel badania i pytania badawcze</a:t>
-            </a:r>
-          </a:p>
-        </p:txBody>
-      </p:sp>
-      <p:sp>
-        <p:nvSpPr>
-          <p:cNvPr id="7" name="Rounded Rectangle 6"/>
+              <a:t>CEL BADANIA</a:t>
+            </a:r>
+          </a:p>
+        </p:txBody>
+      </p:sp>
+      <p:sp>
+        <p:nvSpPr>
+          <p:cNvPr id="8" name="TextBox 7"/>
+          <p:cNvSpPr txBox="1"/>
+          <p:nvPr/>
+        </p:nvSpPr>
+        <p:spPr>
+          <a:xfrm>
+            <a:off x="914400" y="2103120"/>
+            <a:ext cx="10058400" cy="1097280"/>
+          </a:xfrm>
+          <a:prstGeom prst="rect">
+            <a:avLst/>
+          </a:prstGeom>
+          <a:noFill/>
+        </p:spPr>
+        <p:txBody>
+          <a:bodyPr wrap="square">
+            <a:spAutoFit/>
+          </a:bodyPr>
+          <a:lstStyle/>
+          <a:p>
+            <a:pPr algn="l">
+              <a:defRPr sz="1200" b="0">
+                <a:solidFill>
+                  <a:srgbClr val="4A4A5A"/>
+                </a:solidFill>
+                <a:latin typeface="Segoe UI"/>
+              </a:defRPr>
+            </a:pPr>
+            <a:r>
+              <a:t>Zrozumienie, w jaki sposob interakcja z platformami fintechowymi i robo-doradcami ksztaltuje (lub nie) wiedze finansowa oraz swiadomosc ryzyka wsrod poczatkujacych inwestorow indywidualnych. Zbadanie, czy aplikacje pelnia role edukacyjna, czy raczej usypiaja czujnosc uzytkownikow.</a:t>
+            </a:r>
+          </a:p>
+        </p:txBody>
+      </p:sp>
+      <p:sp>
+        <p:nvSpPr>
+          <p:cNvPr id="9" name="Rectangle 8"/>
           <p:cNvSpPr/>
           <p:nvPr/>
         </p:nvSpPr>
         <p:spPr>
           <a:xfrm>
-            <a:off x="548640" y="1371600"/>
-            <a:ext cx="5029200" cy="4754880"/>
-          </a:xfrm>
-          <a:prstGeom prst="roundRect">
+            <a:off x="914400" y="3200400"/>
+            <a:ext cx="10058400" cy="18288"/>
+          </a:xfrm>
+          <a:prstGeom prst="rect">
             <a:avLst/>
           </a:prstGeom>
           <a:solidFill>
-            <a:srgbClr val="FFFFFF"/>
+            <a:srgbClr val="E0E1E3"/>
           </a:solidFill>
-          <a:ln w="6350">
-            <a:solidFill>
-              <a:srgbClr val="E0E0E0"/>
-            </a:solidFill>
+          <a:ln>
+            <a:noFill/>
           </a:ln>
-          <a:effectLst/>
         </p:spPr>
         <p:style>
           <a:lnRef idx="1">
@@ -4457,57 +4447,14 @@
       </p:sp>
       <p:sp>
         <p:nvSpPr>
-          <p:cNvPr id="8" name="Rounded Rectangle 7"/>
-          <p:cNvSpPr/>
-          <p:nvPr/>
-        </p:nvSpPr>
-        <p:spPr>
-          <a:xfrm>
-            <a:off x="548640" y="1371600"/>
-            <a:ext cx="5029200" cy="109728"/>
-          </a:xfrm>
-          <a:prstGeom prst="roundRect">
-            <a:avLst/>
-          </a:prstGeom>
-          <a:solidFill>
-            <a:srgbClr val="00B4D8"/>
-          </a:solidFill>
-          <a:ln>
-            <a:noFill/>
-          </a:ln>
-        </p:spPr>
-        <p:style>
-          <a:lnRef idx="1">
-            <a:schemeClr val="accent1"/>
-          </a:lnRef>
-          <a:fillRef idx="3">
-            <a:schemeClr val="accent1"/>
-          </a:fillRef>
-          <a:effectRef idx="2">
-            <a:schemeClr val="accent1"/>
-          </a:effectRef>
-          <a:fontRef idx="minor">
-            <a:schemeClr val="lt1"/>
-          </a:fontRef>
-        </p:style>
-        <p:txBody>
-          <a:bodyPr rtlCol="0" anchor="ctr"/>
-          <a:lstStyle/>
-          <a:p>
-            <a:pPr algn="ctr"/>
-          </a:p>
-        </p:txBody>
-      </p:sp>
-      <p:sp>
-        <p:nvSpPr>
-          <p:cNvPr id="9" name="TextBox 8"/>
+          <p:cNvPr id="10" name="TextBox 9"/>
           <p:cNvSpPr txBox="1"/>
           <p:nvPr/>
         </p:nvSpPr>
         <p:spPr>
           <a:xfrm>
-            <a:off x="914400" y="1737360"/>
-            <a:ext cx="4389120" cy="457200"/>
+            <a:off x="914400" y="3383280"/>
+            <a:ext cx="3657600" cy="365760"/>
           </a:xfrm>
           <a:prstGeom prst="rect">
             <a:avLst/>
@@ -4521,29 +4468,29 @@
           <a:lstStyle/>
           <a:p>
             <a:pPr algn="l">
-              <a:defRPr sz="1600" b="1">
-                <a:solidFill>
-                  <a:srgbClr val="00B4D8"/>
+              <a:defRPr sz="1300" b="1">
+                <a:solidFill>
+                  <a:srgbClr val="0D1B2A"/>
                 </a:solidFill>
                 <a:latin typeface="Segoe UI"/>
               </a:defRPr>
             </a:pPr>
             <a:r>
-              <a:t>Cel</a:t>
-            </a:r>
-          </a:p>
-        </p:txBody>
-      </p:sp>
-      <p:sp>
-        <p:nvSpPr>
-          <p:cNvPr id="10" name="TextBox 9"/>
+              <a:t>PYTANIA BADAWCZE</a:t>
+            </a:r>
+          </a:p>
+        </p:txBody>
+      </p:sp>
+      <p:sp>
+        <p:nvSpPr>
+          <p:cNvPr id="11" name="TextBox 10"/>
           <p:cNvSpPr txBox="1"/>
           <p:nvPr/>
         </p:nvSpPr>
         <p:spPr>
           <a:xfrm>
-            <a:off x="914400" y="2286000"/>
-            <a:ext cx="4389120" cy="3200400"/>
+            <a:off x="914400" y="3840480"/>
+            <a:ext cx="10058400" cy="2743200"/>
           </a:xfrm>
           <a:prstGeom prst="rect">
             <a:avLst/>
@@ -4558,349 +4505,76 @@
           <a:p>
             <a:pPr>
               <a:spcAft>
-                <a:spcPts val="400"/>
+                <a:spcPts val="1200"/>
               </a:spcAft>
-              <a:defRPr sz="1300">
-                <a:solidFill>
-                  <a:srgbClr val="1B2B3C"/>
-                </a:solidFill>
-                <a:latin typeface="Segoe UI"/>
-              </a:defRPr>
             </a:pPr>
             <a:r>
-              <a:t>• Zrozumienie czy interakcja z platformami kształtuje wiedzę</a:t>
+              <a:rPr sz="1200" b="1">
+                <a:solidFill>
+                  <a:srgbClr val="00B4D8"/>
+                </a:solidFill>
+                <a:latin typeface="Segoe UI"/>
+              </a:rPr>
+              <a:t>1.  </a:t>
+            </a:r>
+            <a:r>
+              <a:rPr sz="1200">
+                <a:solidFill>
+                  <a:srgbClr val="1A1A2E"/>
+                </a:solidFill>
+                <a:latin typeface="Segoe UI"/>
+              </a:rPr>
+              <a:t>W jaki sposob interfejs aplikacji inwestycyjnych wplywa na subiektywne poczucie zrozumienia mechanizmow rynkowych?</a:t>
             </a:r>
           </a:p>
           <a:p>
             <a:pPr>
               <a:spcAft>
-                <a:spcPts val="400"/>
+                <a:spcPts val="1200"/>
               </a:spcAft>
-              <a:defRPr sz="1300">
-                <a:solidFill>
-                  <a:srgbClr val="1B2B3C"/>
-                </a:solidFill>
-                <a:latin typeface="Segoe UI"/>
-              </a:defRPr>
             </a:pPr>
             <a:r>
-              <a:t>• </a:t>
+              <a:rPr sz="1200" b="1">
+                <a:solidFill>
+                  <a:srgbClr val="00B4D8"/>
+                </a:solidFill>
+                <a:latin typeface="Segoe UI"/>
+              </a:rPr>
+              <a:t>2.  </a:t>
+            </a:r>
+            <a:r>
+              <a:rPr sz="1200">
+                <a:solidFill>
+                  <a:srgbClr val="1A1A2E"/>
+                </a:solidFill>
+                <a:latin typeface="Segoe UI"/>
+              </a:rPr>
+              <a:t>Dlaczego uzytkownicy podejmuja decyzje inwestycyjne - na podstawie wlasnej wiedzy czy w oparciu o algorytmy i rekomendacje aplikacji?</a:t>
             </a:r>
           </a:p>
           <a:p>
             <a:pPr>
               <a:spcAft>
-                <a:spcPts val="400"/>
+                <a:spcPts val="1200"/>
               </a:spcAft>
-              <a:defRPr sz="1300">
-                <a:solidFill>
-                  <a:srgbClr val="1B2B3C"/>
-                </a:solidFill>
-                <a:latin typeface="Segoe UI"/>
-              </a:defRPr>
             </a:pPr>
             <a:r>
-              <a:t>• Czy aplikacje edukują czy usypiają czujność</a:t>
-            </a:r>
-          </a:p>
-        </p:txBody>
-      </p:sp>
-      <p:sp>
-        <p:nvSpPr>
-          <p:cNvPr id="11" name="TextBox 10"/>
-          <p:cNvSpPr txBox="1"/>
-          <p:nvPr/>
-        </p:nvSpPr>
-        <p:spPr>
-          <a:xfrm>
-            <a:off x="5943600" y="1737360"/>
-            <a:ext cx="5029200" cy="457200"/>
-          </a:xfrm>
-          <a:prstGeom prst="rect">
-            <a:avLst/>
-          </a:prstGeom>
-          <a:noFill/>
-        </p:spPr>
-        <p:txBody>
-          <a:bodyPr wrap="square">
-            <a:spAutoFit/>
-          </a:bodyPr>
-          <a:lstStyle/>
-          <a:p>
-            <a:pPr algn="l">
-              <a:defRPr sz="1600" b="1">
-                <a:solidFill>
-                  <a:srgbClr val="1B2838"/>
-                </a:solidFill>
-                <a:latin typeface="Segoe UI"/>
-              </a:defRPr>
-            </a:pPr>
-            <a:r>
-              <a:t>Pytania badawcze</a:t>
-            </a:r>
-          </a:p>
-        </p:txBody>
-      </p:sp>
-      <p:sp>
-        <p:nvSpPr>
-          <p:cNvPr id="12" name="Oval 11"/>
-          <p:cNvSpPr/>
-          <p:nvPr/>
-        </p:nvSpPr>
-        <p:spPr>
-          <a:xfrm>
-            <a:off x="5943600" y="2377440"/>
-            <a:ext cx="365760" cy="365760"/>
-          </a:xfrm>
-          <a:prstGeom prst="ellipse">
-            <a:avLst/>
-          </a:prstGeom>
-          <a:solidFill>
-            <a:srgbClr val="00B4D8"/>
-          </a:solidFill>
-          <a:ln>
-            <a:noFill/>
-          </a:ln>
-        </p:spPr>
-        <p:style>
-          <a:lnRef idx="1">
-            <a:schemeClr val="accent1"/>
-          </a:lnRef>
-          <a:fillRef idx="3">
-            <a:schemeClr val="accent1"/>
-          </a:fillRef>
-          <a:effectRef idx="2">
-            <a:schemeClr val="accent1"/>
-          </a:effectRef>
-          <a:fontRef idx="minor">
-            <a:schemeClr val="lt1"/>
-          </a:fontRef>
-        </p:style>
-        <p:txBody>
-          <a:bodyPr rtlCol="0" anchor="ctr" wrap="none"/>
-          <a:lstStyle/>
-          <a:p>
-            <a:pPr algn="ctr"/>
-            <a:r>
-              <a:rPr sz="1100" b="1">
-                <a:solidFill>
-                  <a:srgbClr val="FFFFFF"/>
-                </a:solidFill>
-                <a:latin typeface="Segoe UI"/>
-              </a:rPr>
-              <a:t>1</a:t>
-            </a:r>
-          </a:p>
-        </p:txBody>
-      </p:sp>
-      <p:sp>
-        <p:nvSpPr>
-          <p:cNvPr id="13" name="TextBox 12"/>
-          <p:cNvSpPr txBox="1"/>
-          <p:nvPr/>
-        </p:nvSpPr>
-        <p:spPr>
-          <a:xfrm>
-            <a:off x="6492240" y="2377440"/>
-            <a:ext cx="5029200" cy="1097280"/>
-          </a:xfrm>
-          <a:prstGeom prst="rect">
-            <a:avLst/>
-          </a:prstGeom>
-          <a:noFill/>
-        </p:spPr>
-        <p:txBody>
-          <a:bodyPr wrap="square">
-            <a:spAutoFit/>
-          </a:bodyPr>
-          <a:lstStyle/>
-          <a:p>
-            <a:pPr algn="l">
-              <a:defRPr sz="1200" b="0">
-                <a:solidFill>
-                  <a:srgbClr val="1B2B3C"/>
-                </a:solidFill>
-                <a:latin typeface="Segoe UI"/>
-              </a:defRPr>
-            </a:pPr>
-            <a:r>
-              <a:t>Jak interfejs wpływa na poczucie zrozumienia rynku?</a:t>
-            </a:r>
-          </a:p>
-        </p:txBody>
-      </p:sp>
-      <p:sp>
-        <p:nvSpPr>
-          <p:cNvPr id="14" name="Oval 13"/>
-          <p:cNvSpPr/>
-          <p:nvPr/>
-        </p:nvSpPr>
-        <p:spPr>
-          <a:xfrm>
-            <a:off x="5943600" y="3749039"/>
-            <a:ext cx="365760" cy="365760"/>
-          </a:xfrm>
-          <a:prstGeom prst="ellipse">
-            <a:avLst/>
-          </a:prstGeom>
-          <a:solidFill>
-            <a:srgbClr val="00B4D8"/>
-          </a:solidFill>
-          <a:ln>
-            <a:noFill/>
-          </a:ln>
-        </p:spPr>
-        <p:style>
-          <a:lnRef idx="1">
-            <a:schemeClr val="accent1"/>
-          </a:lnRef>
-          <a:fillRef idx="3">
-            <a:schemeClr val="accent1"/>
-          </a:fillRef>
-          <a:effectRef idx="2">
-            <a:schemeClr val="accent1"/>
-          </a:effectRef>
-          <a:fontRef idx="minor">
-            <a:schemeClr val="lt1"/>
-          </a:fontRef>
-        </p:style>
-        <p:txBody>
-          <a:bodyPr rtlCol="0" anchor="ctr" wrap="none"/>
-          <a:lstStyle/>
-          <a:p>
-            <a:pPr algn="ctr"/>
-            <a:r>
-              <a:rPr sz="1100" b="1">
-                <a:solidFill>
-                  <a:srgbClr val="FFFFFF"/>
-                </a:solidFill>
-                <a:latin typeface="Segoe UI"/>
-              </a:rPr>
-              <a:t>2</a:t>
-            </a:r>
-          </a:p>
-        </p:txBody>
-      </p:sp>
-      <p:sp>
-        <p:nvSpPr>
-          <p:cNvPr id="15" name="TextBox 14"/>
-          <p:cNvSpPr txBox="1"/>
-          <p:nvPr/>
-        </p:nvSpPr>
-        <p:spPr>
-          <a:xfrm>
-            <a:off x="6492240" y="3749039"/>
-            <a:ext cx="5029200" cy="1097280"/>
-          </a:xfrm>
-          <a:prstGeom prst="rect">
-            <a:avLst/>
-          </a:prstGeom>
-          <a:noFill/>
-        </p:spPr>
-        <p:txBody>
-          <a:bodyPr wrap="square">
-            <a:spAutoFit/>
-          </a:bodyPr>
-          <a:lstStyle/>
-          <a:p>
-            <a:pPr algn="l">
-              <a:defRPr sz="1200" b="0">
-                <a:solidFill>
-                  <a:srgbClr val="1B2B3C"/>
-                </a:solidFill>
-                <a:latin typeface="Segoe UI"/>
-              </a:defRPr>
-            </a:pPr>
-            <a:r>
-              <a:t>Dlaczego użytkownicy podejmują decyzje – własna wiedza vs algorytmy?</a:t>
-            </a:r>
-          </a:p>
-        </p:txBody>
-      </p:sp>
-      <p:sp>
-        <p:nvSpPr>
-          <p:cNvPr id="16" name="Oval 15"/>
-          <p:cNvSpPr/>
-          <p:nvPr/>
-        </p:nvSpPr>
-        <p:spPr>
-          <a:xfrm>
-            <a:off x="5943600" y="5120640"/>
-            <a:ext cx="365760" cy="365760"/>
-          </a:xfrm>
-          <a:prstGeom prst="ellipse">
-            <a:avLst/>
-          </a:prstGeom>
-          <a:solidFill>
-            <a:srgbClr val="00B4D8"/>
-          </a:solidFill>
-          <a:ln>
-            <a:noFill/>
-          </a:ln>
-        </p:spPr>
-        <p:style>
-          <a:lnRef idx="1">
-            <a:schemeClr val="accent1"/>
-          </a:lnRef>
-          <a:fillRef idx="3">
-            <a:schemeClr val="accent1"/>
-          </a:fillRef>
-          <a:effectRef idx="2">
-            <a:schemeClr val="accent1"/>
-          </a:effectRef>
-          <a:fontRef idx="minor">
-            <a:schemeClr val="lt1"/>
-          </a:fontRef>
-        </p:style>
-        <p:txBody>
-          <a:bodyPr rtlCol="0" anchor="ctr" wrap="none"/>
-          <a:lstStyle/>
-          <a:p>
-            <a:pPr algn="ctr"/>
-            <a:r>
-              <a:rPr sz="1100" b="1">
-                <a:solidFill>
-                  <a:srgbClr val="FFFFFF"/>
-                </a:solidFill>
-                <a:latin typeface="Segoe UI"/>
-              </a:rPr>
-              <a:t>3</a:t>
-            </a:r>
-          </a:p>
-        </p:txBody>
-      </p:sp>
-      <p:sp>
-        <p:nvSpPr>
-          <p:cNvPr id="17" name="TextBox 16"/>
-          <p:cNvSpPr txBox="1"/>
-          <p:nvPr/>
-        </p:nvSpPr>
-        <p:spPr>
-          <a:xfrm>
-            <a:off x="6492240" y="5120640"/>
-            <a:ext cx="5029200" cy="1097280"/>
-          </a:xfrm>
-          <a:prstGeom prst="rect">
-            <a:avLst/>
-          </a:prstGeom>
-          <a:noFill/>
-        </p:spPr>
-        <p:txBody>
-          <a:bodyPr wrap="square">
-            <a:spAutoFit/>
-          </a:bodyPr>
-          <a:lstStyle/>
-          <a:p>
-            <a:pPr algn="l">
-              <a:defRPr sz="1200" b="0">
-                <a:solidFill>
-                  <a:srgbClr val="1B2B3C"/>
-                </a:solidFill>
-                <a:latin typeface="Segoe UI"/>
-              </a:defRPr>
-            </a:pPr>
-            <a:r>
-              <a:t>Jak początkujący interpretują ryzyko w środowisku przypominającym gry?</a:t>
+              <a:rPr sz="1200" b="1">
+                <a:solidFill>
+                  <a:srgbClr val="00B4D8"/>
+                </a:solidFill>
+                <a:latin typeface="Segoe UI"/>
+              </a:rPr>
+              <a:t>3.  </a:t>
+            </a:r>
+            <a:r>
+              <a:rPr sz="1200">
+                <a:solidFill>
+                  <a:srgbClr val="1A1A2E"/>
+                </a:solidFill>
+                <a:latin typeface="Segoe UI"/>
+              </a:rPr>
+              <a:t>Jak poczatkujacy inwestorzy interpretuja i oceniaja ryzyko w srodowisku cyfrowym przypominajacym gry?</a:t>
             </a:r>
           </a:p>
         </p:txBody>
@@ -4919,7 +4593,7 @@
     <p:bg>
       <p:bgPr>
         <a:solidFill>
-          <a:srgbClr val="F8F9FA"/>
+          <a:srgbClr val="F4F5F7"/>
         </a:solidFill>
         <a:effectLst/>
       </p:bgPr>
@@ -4940,7 +4614,86 @@
         <p:spPr>
           <a:xfrm>
             <a:off x="0" y="0"/>
-            <a:ext cx="137160" cy="6858000"/>
+            <a:ext cx="12191695" cy="1097280"/>
+          </a:xfrm>
+          <a:prstGeom prst="rect">
+            <a:avLst/>
+          </a:prstGeom>
+          <a:solidFill>
+            <a:srgbClr val="0D1B2A"/>
+          </a:solidFill>
+          <a:ln>
+            <a:noFill/>
+          </a:ln>
+        </p:spPr>
+        <p:style>
+          <a:lnRef idx="1">
+            <a:schemeClr val="accent1"/>
+          </a:lnRef>
+          <a:fillRef idx="3">
+            <a:schemeClr val="accent1"/>
+          </a:fillRef>
+          <a:effectRef idx="2">
+            <a:schemeClr val="accent1"/>
+          </a:effectRef>
+          <a:fontRef idx="minor">
+            <a:schemeClr val="lt1"/>
+          </a:fontRef>
+        </p:style>
+        <p:txBody>
+          <a:bodyPr rtlCol="0" anchor="ctr"/>
+          <a:lstStyle/>
+          <a:p>
+            <a:pPr algn="ctr"/>
+          </a:p>
+        </p:txBody>
+      </p:sp>
+      <p:sp>
+        <p:nvSpPr>
+          <p:cNvPr id="3" name="TextBox 2"/>
+          <p:cNvSpPr txBox="1"/>
+          <p:nvPr/>
+        </p:nvSpPr>
+        <p:spPr>
+          <a:xfrm>
+            <a:off x="731520" y="228600"/>
+            <a:ext cx="10058400" cy="640080"/>
+          </a:xfrm>
+          <a:prstGeom prst="rect">
+            <a:avLst/>
+          </a:prstGeom>
+          <a:noFill/>
+        </p:spPr>
+        <p:txBody>
+          <a:bodyPr wrap="square">
+            <a:spAutoFit/>
+          </a:bodyPr>
+          <a:lstStyle/>
+          <a:p>
+            <a:pPr>
+              <a:defRPr sz="2600" b="1">
+                <a:solidFill>
+                  <a:srgbClr val="FFFFFF"/>
+                </a:solidFill>
+                <a:latin typeface="Segoe UI"/>
+              </a:defRPr>
+            </a:pPr>
+            <a:r>
+              <a:t>Charakterystyka badanych</a:t>
+            </a:r>
+          </a:p>
+        </p:txBody>
+      </p:sp>
+      <p:sp>
+        <p:nvSpPr>
+          <p:cNvPr id="4" name="Rectangle 3"/>
+          <p:cNvSpPr/>
+          <p:nvPr/>
+        </p:nvSpPr>
+        <p:spPr>
+          <a:xfrm>
+            <a:off x="731520" y="960120"/>
+            <a:ext cx="3657600" cy="36576"/>
           </a:xfrm>
           <a:prstGeom prst="rect">
             <a:avLst/>
@@ -4976,20 +4729,20 @@
       </p:sp>
       <p:sp>
         <p:nvSpPr>
-          <p:cNvPr id="3" name="Rectangle 2"/>
+          <p:cNvPr id="5" name="Rounded Rectangle 4"/>
           <p:cNvSpPr/>
           <p:nvPr/>
         </p:nvSpPr>
         <p:spPr>
           <a:xfrm>
-            <a:off x="0" y="6583680"/>
-            <a:ext cx="12191695" cy="274320"/>
-          </a:xfrm>
-          <a:prstGeom prst="rect">
+            <a:off x="585216" y="1408176"/>
+            <a:ext cx="11064240" cy="5029200"/>
+          </a:xfrm>
+          <a:prstGeom prst="roundRect">
             <a:avLst/>
           </a:prstGeom>
           <a:solidFill>
-            <a:srgbClr val="F4A261"/>
+            <a:srgbClr val="E0E1E3"/>
           </a:solidFill>
           <a:ln>
             <a:noFill/>
@@ -5019,25 +4772,25 @@
       </p:sp>
       <p:sp>
         <p:nvSpPr>
-          <p:cNvPr id="4" name="Oval 3"/>
+          <p:cNvPr id="6" name="Rounded Rectangle 5"/>
           <p:cNvSpPr/>
           <p:nvPr/>
         </p:nvSpPr>
         <p:spPr>
           <a:xfrm>
-            <a:off x="10058400" y="-731520"/>
-            <a:ext cx="2743200" cy="2743200"/>
-          </a:xfrm>
-          <a:prstGeom prst="ellipse">
+            <a:off x="548640" y="1371600"/>
+            <a:ext cx="11064240" cy="5029200"/>
+          </a:xfrm>
+          <a:prstGeom prst="roundRect">
             <a:avLst/>
           </a:prstGeom>
           <a:solidFill>
-            <a:srgbClr val="1B2838">
-              <a:alpha val="12000"/>
-            </a:srgbClr>
+            <a:srgbClr val="FFFFFF"/>
           </a:solidFill>
-          <a:ln>
-            <a:noFill/>
+          <a:ln w="9525">
+            <a:solidFill>
+              <a:srgbClr val="E8E9EB"/>
+            </a:solidFill>
           </a:ln>
         </p:spPr>
         <p:style>
@@ -5064,22 +4817,63 @@
       </p:sp>
       <p:sp>
         <p:nvSpPr>
-          <p:cNvPr id="5" name="Oval 4"/>
+          <p:cNvPr id="7" name="TextBox 6"/>
+          <p:cNvSpPr txBox="1"/>
+          <p:nvPr/>
+        </p:nvSpPr>
+        <p:spPr>
+          <a:xfrm>
+            <a:off x="914400" y="1737360"/>
+            <a:ext cx="10058400" cy="731520"/>
+          </a:xfrm>
+          <a:prstGeom prst="rect">
+            <a:avLst/>
+          </a:prstGeom>
+          <a:noFill/>
+        </p:spPr>
+        <p:txBody>
+          <a:bodyPr wrap="square">
+            <a:spAutoFit/>
+          </a:bodyPr>
+          <a:lstStyle/>
+          <a:p>
+            <a:r>
+              <a:rPr sz="1200" b="1">
+                <a:solidFill>
+                  <a:srgbClr val="00B4D8"/>
+                </a:solidFill>
+                <a:latin typeface="Segoe UI"/>
+              </a:rPr>
+              <a:t>Kto?  </a:t>
+            </a:r>
+            <a:r>
+              <a:rPr sz="1200">
+                <a:solidFill>
+                  <a:srgbClr val="1A1A2E"/>
+                </a:solidFill>
+                <a:latin typeface="Segoe UI"/>
+              </a:rPr>
+              <a:t>Osoby w wieku 25-40 lat, bez formalnego wyksztalcenia finansowego, aktywnie korzystajace z aplikacji inwestycyjnych</a:t>
+            </a:r>
+          </a:p>
+        </p:txBody>
+      </p:sp>
+      <p:sp>
+        <p:nvSpPr>
+          <p:cNvPr id="8" name="Rectangle 7"/>
           <p:cNvSpPr/>
           <p:nvPr/>
         </p:nvSpPr>
         <p:spPr>
           <a:xfrm>
-            <a:off x="-914400" y="5029200"/>
-            <a:ext cx="2286000" cy="2286000"/>
-          </a:xfrm>
-          <a:prstGeom prst="ellipse">
+            <a:off x="914400" y="2377440"/>
+            <a:ext cx="10058400" cy="18288"/>
+          </a:xfrm>
+          <a:prstGeom prst="rect">
             <a:avLst/>
           </a:prstGeom>
           <a:solidFill>
-            <a:srgbClr val="F4A261">
-              <a:alpha val="9999"/>
-            </a:srgbClr>
+            <a:srgbClr val="E0E1E3"/>
           </a:solidFill>
           <a:ln>
             <a:noFill/>
@@ -5109,14 +4903,14 @@
       </p:sp>
       <p:sp>
         <p:nvSpPr>
-          <p:cNvPr id="6" name="TextBox 5"/>
+          <p:cNvPr id="9" name="TextBox 8"/>
           <p:cNvSpPr txBox="1"/>
           <p:nvPr/>
         </p:nvSpPr>
         <p:spPr>
           <a:xfrm>
-            <a:off x="548640" y="274320"/>
-            <a:ext cx="9144000" cy="731520"/>
+            <a:off x="914400" y="2651760"/>
+            <a:ext cx="10058400" cy="731520"/>
           </a:xfrm>
           <a:prstGeom prst="rect">
             <a:avLst/>
@@ -5129,43 +4923,47 @@
           </a:bodyPr>
           <a:lstStyle/>
           <a:p>
-            <a:pPr algn="l">
-              <a:defRPr sz="2800" b="1">
-                <a:solidFill>
-                  <a:srgbClr val="1B2838"/>
-                </a:solidFill>
-                <a:latin typeface="Segoe UI"/>
-              </a:defRPr>
-            </a:pPr>
-            <a:r>
-              <a:t>Charakterystyka badanych</a:t>
-            </a:r>
-          </a:p>
-        </p:txBody>
-      </p:sp>
-      <p:sp>
-        <p:nvSpPr>
-          <p:cNvPr id="7" name="Rounded Rectangle 6"/>
+            <a:r>
+              <a:rPr sz="1200" b="1">
+                <a:solidFill>
+                  <a:srgbClr val="00B4D8"/>
+                </a:solidFill>
+                <a:latin typeface="Segoe UI"/>
+              </a:rPr>
+              <a:t>Kryteria doboru:  </a:t>
+            </a:r>
+            <a:r>
+              <a:rPr sz="1200">
+                <a:solidFill>
+                  <a:srgbClr val="1A1A2E"/>
+                </a:solidFill>
+                <a:latin typeface="Segoe UI"/>
+              </a:rPr>
+              <a:t>Inwestowanie za posrednictwem smartfona przez 12-24 miesiace, minimum 5 zrealizowanych transakcji</a:t>
+            </a:r>
+          </a:p>
+        </p:txBody>
+      </p:sp>
+      <p:sp>
+        <p:nvSpPr>
+          <p:cNvPr id="10" name="Rectangle 9"/>
           <p:cNvSpPr/>
           <p:nvPr/>
         </p:nvSpPr>
         <p:spPr>
           <a:xfrm>
-            <a:off x="548640" y="1371600"/>
-            <a:ext cx="5303520" cy="2103120"/>
-          </a:xfrm>
-          <a:prstGeom prst="roundRect">
+            <a:off x="914400" y="3291840"/>
+            <a:ext cx="10058400" cy="18288"/>
+          </a:xfrm>
+          <a:prstGeom prst="rect">
             <a:avLst/>
           </a:prstGeom>
           <a:solidFill>
-            <a:srgbClr val="FFFFFF"/>
+            <a:srgbClr val="E0E1E3"/>
           </a:solidFill>
-          <a:ln w="6350">
-            <a:solidFill>
-              <a:srgbClr val="E0E0E0"/>
-            </a:solidFill>
+          <a:ln>
+            <a:noFill/>
           </a:ln>
-          <a:effectLst/>
         </p:spPr>
         <p:style>
           <a:lnRef idx="1">
@@ -5191,20 +4989,63 @@
       </p:sp>
       <p:sp>
         <p:nvSpPr>
-          <p:cNvPr id="8" name="Rounded Rectangle 7"/>
+          <p:cNvPr id="11" name="TextBox 10"/>
+          <p:cNvSpPr txBox="1"/>
+          <p:nvPr/>
+        </p:nvSpPr>
+        <p:spPr>
+          <a:xfrm>
+            <a:off x="914400" y="3566160"/>
+            <a:ext cx="10058400" cy="731520"/>
+          </a:xfrm>
+          <a:prstGeom prst="rect">
+            <a:avLst/>
+          </a:prstGeom>
+          <a:noFill/>
+        </p:spPr>
+        <p:txBody>
+          <a:bodyPr wrap="square">
+            <a:spAutoFit/>
+          </a:bodyPr>
+          <a:lstStyle/>
+          <a:p>
+            <a:r>
+              <a:rPr sz="1200" b="1">
+                <a:solidFill>
+                  <a:srgbClr val="00B4D8"/>
+                </a:solidFill>
+                <a:latin typeface="Segoe UI"/>
+              </a:rPr>
+              <a:t>Wielkosc proby:  </a:t>
+            </a:r>
+            <a:r>
+              <a:rPr sz="1200">
+                <a:solidFill>
+                  <a:srgbClr val="1A1A2E"/>
+                </a:solidFill>
+                <a:latin typeface="Segoe UI"/>
+              </a:rPr>
+              <a:t>12-15 osob - swiezi inwestorzy, najbardziej narazeni na ryzyko nieswiadomych decyzji</a:t>
+            </a:r>
+          </a:p>
+        </p:txBody>
+      </p:sp>
+      <p:sp>
+        <p:nvSpPr>
+          <p:cNvPr id="12" name="Rectangle 11"/>
           <p:cNvSpPr/>
           <p:nvPr/>
         </p:nvSpPr>
         <p:spPr>
           <a:xfrm>
-            <a:off x="548640" y="1371600"/>
-            <a:ext cx="5303520" cy="109728"/>
-          </a:xfrm>
-          <a:prstGeom prst="roundRect">
+            <a:off x="914400" y="4206240"/>
+            <a:ext cx="10058400" cy="18288"/>
+          </a:xfrm>
+          <a:prstGeom prst="rect">
             <a:avLst/>
           </a:prstGeom>
           <a:solidFill>
-            <a:srgbClr val="00B4D8"/>
+            <a:srgbClr val="E0E1E3"/>
           </a:solidFill>
           <a:ln>
             <a:noFill/>
@@ -5234,14 +5075,14 @@
       </p:sp>
       <p:sp>
         <p:nvSpPr>
-          <p:cNvPr id="9" name="TextBox 8"/>
+          <p:cNvPr id="13" name="TextBox 12"/>
           <p:cNvSpPr txBox="1"/>
           <p:nvPr/>
         </p:nvSpPr>
         <p:spPr>
           <a:xfrm>
-            <a:off x="914400" y="1737360"/>
-            <a:ext cx="4572000" cy="457200"/>
+            <a:off x="914400" y="4480560"/>
+            <a:ext cx="10058400" cy="731520"/>
           </a:xfrm>
           <a:prstGeom prst="rect">
             <a:avLst/>
@@ -5254,79 +5095,47 @@
           </a:bodyPr>
           <a:lstStyle/>
           <a:p>
-            <a:pPr algn="l">
-              <a:defRPr sz="1400" b="1">
+            <a:r>
+              <a:rPr sz="1200" b="1">
                 <a:solidFill>
                   <a:srgbClr val="00B4D8"/>
                 </a:solidFill>
                 <a:latin typeface="Segoe UI"/>
-              </a:defRPr>
-            </a:pPr>
-            <a:r>
-              <a:t>Kto</a:t>
-            </a:r>
-          </a:p>
-        </p:txBody>
-      </p:sp>
-      <p:sp>
-        <p:nvSpPr>
-          <p:cNvPr id="10" name="TextBox 9"/>
-          <p:cNvSpPr txBox="1"/>
-          <p:nvPr/>
-        </p:nvSpPr>
-        <p:spPr>
-          <a:xfrm>
-            <a:off x="914400" y="2377440"/>
-            <a:ext cx="4572000" cy="914400"/>
+              </a:rPr>
+              <a:t>Dlaczego ta grupa?  </a:t>
+            </a:r>
+            <a:r>
+              <a:rPr sz="1200">
+                <a:solidFill>
+                  <a:srgbClr val="1A1A2E"/>
+                </a:solidFill>
+                <a:latin typeface="Segoe UI"/>
+              </a:rPr>
+              <a:t>Najbardziej podatna na wplyw interfejsu aplikacji, brak doswiadczenia z tradycyjnym doradztwem finansowym</a:t>
+            </a:r>
+          </a:p>
+        </p:txBody>
+      </p:sp>
+      <p:sp>
+        <p:nvSpPr>
+          <p:cNvPr id="14" name="Rectangle 13"/>
+          <p:cNvSpPr/>
+          <p:nvPr/>
+        </p:nvSpPr>
+        <p:spPr>
+          <a:xfrm>
+            <a:off x="914400" y="5120640"/>
+            <a:ext cx="10058400" cy="18288"/>
           </a:xfrm>
           <a:prstGeom prst="rect">
             <a:avLst/>
           </a:prstGeom>
-          <a:noFill/>
-        </p:spPr>
-        <p:txBody>
-          <a:bodyPr wrap="square">
-            <a:spAutoFit/>
-          </a:bodyPr>
-          <a:lstStyle/>
-          <a:p>
-            <a:pPr algn="l">
-              <a:defRPr sz="1200" b="0">
-                <a:solidFill>
-                  <a:srgbClr val="1B2B3C"/>
-                </a:solidFill>
-                <a:latin typeface="Segoe UI"/>
-              </a:defRPr>
-            </a:pPr>
-            <a:r>
-              <a:t>Osoby 25–40 lat, bez wykształcenia finansowego</a:t>
-            </a:r>
-          </a:p>
-        </p:txBody>
-      </p:sp>
-      <p:sp>
-        <p:nvSpPr>
-          <p:cNvPr id="11" name="Rounded Rectangle 10"/>
-          <p:cNvSpPr/>
-          <p:nvPr/>
-        </p:nvSpPr>
-        <p:spPr>
-          <a:xfrm>
-            <a:off x="6217920" y="1371600"/>
-            <a:ext cx="5303520" cy="2103120"/>
-          </a:xfrm>
-          <a:prstGeom prst="roundRect">
-            <a:avLst/>
-          </a:prstGeom>
           <a:solidFill>
-            <a:srgbClr val="FFFFFF"/>
+            <a:srgbClr val="E0E1E3"/>
           </a:solidFill>
-          <a:ln w="6350">
-            <a:solidFill>
-              <a:srgbClr val="E0E0E0"/>
-            </a:solidFill>
+          <a:ln>
+            <a:noFill/>
           </a:ln>
-          <a:effectLst/>
         </p:spPr>
         <p:style>
           <a:lnRef idx="1">
@@ -5352,57 +5161,14 @@
       </p:sp>
       <p:sp>
         <p:nvSpPr>
-          <p:cNvPr id="12" name="Rounded Rectangle 11"/>
-          <p:cNvSpPr/>
-          <p:nvPr/>
-        </p:nvSpPr>
-        <p:spPr>
-          <a:xfrm>
-            <a:off x="6217920" y="1371600"/>
-            <a:ext cx="5303520" cy="109728"/>
-          </a:xfrm>
-          <a:prstGeom prst="roundRect">
-            <a:avLst/>
-          </a:prstGeom>
-          <a:solidFill>
-            <a:srgbClr val="F4A261"/>
-          </a:solidFill>
-          <a:ln>
-            <a:noFill/>
-          </a:ln>
-        </p:spPr>
-        <p:style>
-          <a:lnRef idx="1">
-            <a:schemeClr val="accent1"/>
-          </a:lnRef>
-          <a:fillRef idx="3">
-            <a:schemeClr val="accent1"/>
-          </a:fillRef>
-          <a:effectRef idx="2">
-            <a:schemeClr val="accent1"/>
-          </a:effectRef>
-          <a:fontRef idx="minor">
-            <a:schemeClr val="lt1"/>
-          </a:fontRef>
-        </p:style>
-        <p:txBody>
-          <a:bodyPr rtlCol="0" anchor="ctr"/>
-          <a:lstStyle/>
-          <a:p>
-            <a:pPr algn="ctr"/>
-          </a:p>
-        </p:txBody>
-      </p:sp>
-      <p:sp>
-        <p:nvSpPr>
-          <p:cNvPr id="13" name="TextBox 12"/>
+          <p:cNvPr id="15" name="TextBox 14"/>
           <p:cNvSpPr txBox="1"/>
           <p:nvPr/>
         </p:nvSpPr>
         <p:spPr>
           <a:xfrm>
-            <a:off x="6583680" y="1737360"/>
-            <a:ext cx="4572000" cy="457200"/>
+            <a:off x="914400" y="5394960"/>
+            <a:ext cx="10058400" cy="731520"/>
           </a:xfrm>
           <a:prstGeom prst="rect">
             <a:avLst/>
@@ -5415,374 +5181,23 @@
           </a:bodyPr>
           <a:lstStyle/>
           <a:p>
-            <a:pPr algn="l">
-              <a:defRPr sz="1400" b="1">
-                <a:solidFill>
-                  <a:srgbClr val="F4A261"/>
-                </a:solidFill>
-                <a:latin typeface="Segoe UI"/>
-              </a:defRPr>
-            </a:pPr>
-            <a:r>
-              <a:t>Kryteria</a:t>
-            </a:r>
-          </a:p>
-        </p:txBody>
-      </p:sp>
-      <p:sp>
-        <p:nvSpPr>
-          <p:cNvPr id="14" name="TextBox 13"/>
-          <p:cNvSpPr txBox="1"/>
-          <p:nvPr/>
-        </p:nvSpPr>
-        <p:spPr>
-          <a:xfrm>
-            <a:off x="6583680" y="2377440"/>
-            <a:ext cx="4572000" cy="914400"/>
-          </a:xfrm>
-          <a:prstGeom prst="rect">
-            <a:avLst/>
-          </a:prstGeom>
-          <a:noFill/>
-        </p:spPr>
-        <p:txBody>
-          <a:bodyPr wrap="square">
-            <a:spAutoFit/>
-          </a:bodyPr>
-          <a:lstStyle/>
-          <a:p>
-            <a:pPr algn="l">
-              <a:defRPr sz="1200" b="0">
-                <a:solidFill>
-                  <a:srgbClr val="1B2B3C"/>
-                </a:solidFill>
-                <a:latin typeface="Segoe UI"/>
-              </a:defRPr>
-            </a:pPr>
-            <a:r>
-              <a:t>Inwestowanie przez smartfon 12–24 mies., min. 5 transakcji</a:t>
-            </a:r>
-          </a:p>
-        </p:txBody>
-      </p:sp>
-      <p:sp>
-        <p:nvSpPr>
-          <p:cNvPr id="15" name="Rounded Rectangle 14"/>
-          <p:cNvSpPr/>
-          <p:nvPr/>
-        </p:nvSpPr>
-        <p:spPr>
-          <a:xfrm>
-            <a:off x="548640" y="3840480"/>
-            <a:ext cx="5303520" cy="2103120"/>
-          </a:xfrm>
-          <a:prstGeom prst="roundRect">
-            <a:avLst/>
-          </a:prstGeom>
-          <a:solidFill>
-            <a:srgbClr val="FFFFFF"/>
-          </a:solidFill>
-          <a:ln w="6350">
-            <a:solidFill>
-              <a:srgbClr val="E0E0E0"/>
-            </a:solidFill>
-          </a:ln>
-          <a:effectLst/>
-        </p:spPr>
-        <p:style>
-          <a:lnRef idx="1">
-            <a:schemeClr val="accent1"/>
-          </a:lnRef>
-          <a:fillRef idx="3">
-            <a:schemeClr val="accent1"/>
-          </a:fillRef>
-          <a:effectRef idx="2">
-            <a:schemeClr val="accent1"/>
-          </a:effectRef>
-          <a:fontRef idx="minor">
-            <a:schemeClr val="lt1"/>
-          </a:fontRef>
-        </p:style>
-        <p:txBody>
-          <a:bodyPr rtlCol="0" anchor="ctr"/>
-          <a:lstStyle/>
-          <a:p>
-            <a:pPr algn="ctr"/>
-          </a:p>
-        </p:txBody>
-      </p:sp>
-      <p:sp>
-        <p:nvSpPr>
-          <p:cNvPr id="16" name="Rounded Rectangle 15"/>
-          <p:cNvSpPr/>
-          <p:nvPr/>
-        </p:nvSpPr>
-        <p:spPr>
-          <a:xfrm>
-            <a:off x="548640" y="3840480"/>
-            <a:ext cx="5303520" cy="109728"/>
-          </a:xfrm>
-          <a:prstGeom prst="roundRect">
-            <a:avLst/>
-          </a:prstGeom>
-          <a:solidFill>
-            <a:srgbClr val="1B2838"/>
-          </a:solidFill>
-          <a:ln>
-            <a:noFill/>
-          </a:ln>
-        </p:spPr>
-        <p:style>
-          <a:lnRef idx="1">
-            <a:schemeClr val="accent1"/>
-          </a:lnRef>
-          <a:fillRef idx="3">
-            <a:schemeClr val="accent1"/>
-          </a:fillRef>
-          <a:effectRef idx="2">
-            <a:schemeClr val="accent1"/>
-          </a:effectRef>
-          <a:fontRef idx="minor">
-            <a:schemeClr val="lt1"/>
-          </a:fontRef>
-        </p:style>
-        <p:txBody>
-          <a:bodyPr rtlCol="0" anchor="ctr"/>
-          <a:lstStyle/>
-          <a:p>
-            <a:pPr algn="ctr"/>
-          </a:p>
-        </p:txBody>
-      </p:sp>
-      <p:sp>
-        <p:nvSpPr>
-          <p:cNvPr id="17" name="TextBox 16"/>
-          <p:cNvSpPr txBox="1"/>
-          <p:nvPr/>
-        </p:nvSpPr>
-        <p:spPr>
-          <a:xfrm>
-            <a:off x="914400" y="4206240"/>
-            <a:ext cx="4572000" cy="457200"/>
-          </a:xfrm>
-          <a:prstGeom prst="rect">
-            <a:avLst/>
-          </a:prstGeom>
-          <a:noFill/>
-        </p:spPr>
-        <p:txBody>
-          <a:bodyPr wrap="square">
-            <a:spAutoFit/>
-          </a:bodyPr>
-          <a:lstStyle/>
-          <a:p>
-            <a:pPr algn="l">
-              <a:defRPr sz="1400" b="1">
-                <a:solidFill>
-                  <a:srgbClr val="1B2838"/>
-                </a:solidFill>
-                <a:latin typeface="Segoe UI"/>
-              </a:defRPr>
-            </a:pPr>
-            <a:r>
-              <a:t>Wielkość próby</a:t>
-            </a:r>
-          </a:p>
-        </p:txBody>
-      </p:sp>
-      <p:sp>
-        <p:nvSpPr>
-          <p:cNvPr id="18" name="TextBox 17"/>
-          <p:cNvSpPr txBox="1"/>
-          <p:nvPr/>
-        </p:nvSpPr>
-        <p:spPr>
-          <a:xfrm>
-            <a:off x="914400" y="4846320"/>
-            <a:ext cx="4572000" cy="914400"/>
-          </a:xfrm>
-          <a:prstGeom prst="rect">
-            <a:avLst/>
-          </a:prstGeom>
-          <a:noFill/>
-        </p:spPr>
-        <p:txBody>
-          <a:bodyPr wrap="square">
-            <a:spAutoFit/>
-          </a:bodyPr>
-          <a:lstStyle/>
-          <a:p>
-            <a:pPr algn="l">
-              <a:defRPr sz="1200" b="0">
-                <a:solidFill>
-                  <a:srgbClr val="1B2B3C"/>
-                </a:solidFill>
-                <a:latin typeface="Segoe UI"/>
-              </a:defRPr>
-            </a:pPr>
-            <a:r>
-              <a:t>12–15 osób; Świeży inwestorzy najbardziej narażeni</a:t>
-            </a:r>
-          </a:p>
-        </p:txBody>
-      </p:sp>
-      <p:sp>
-        <p:nvSpPr>
-          <p:cNvPr id="19" name="Rounded Rectangle 18"/>
-          <p:cNvSpPr/>
-          <p:nvPr/>
-        </p:nvSpPr>
-        <p:spPr>
-          <a:xfrm>
-            <a:off x="6217920" y="3840480"/>
-            <a:ext cx="5303520" cy="2103120"/>
-          </a:xfrm>
-          <a:prstGeom prst="roundRect">
-            <a:avLst/>
-          </a:prstGeom>
-          <a:solidFill>
-            <a:srgbClr val="FFFFFF"/>
-          </a:solidFill>
-          <a:ln w="6350">
-            <a:solidFill>
-              <a:srgbClr val="E0E0E0"/>
-            </a:solidFill>
-          </a:ln>
-          <a:effectLst/>
-        </p:spPr>
-        <p:style>
-          <a:lnRef idx="1">
-            <a:schemeClr val="accent1"/>
-          </a:lnRef>
-          <a:fillRef idx="3">
-            <a:schemeClr val="accent1"/>
-          </a:fillRef>
-          <a:effectRef idx="2">
-            <a:schemeClr val="accent1"/>
-          </a:effectRef>
-          <a:fontRef idx="minor">
-            <a:schemeClr val="lt1"/>
-          </a:fontRef>
-        </p:style>
-        <p:txBody>
-          <a:bodyPr rtlCol="0" anchor="ctr"/>
-          <a:lstStyle/>
-          <a:p>
-            <a:pPr algn="ctr"/>
-          </a:p>
-        </p:txBody>
-      </p:sp>
-      <p:sp>
-        <p:nvSpPr>
-          <p:cNvPr id="20" name="Rounded Rectangle 19"/>
-          <p:cNvSpPr/>
-          <p:nvPr/>
-        </p:nvSpPr>
-        <p:spPr>
-          <a:xfrm>
-            <a:off x="6217920" y="3840480"/>
-            <a:ext cx="5303520" cy="109728"/>
-          </a:xfrm>
-          <a:prstGeom prst="roundRect">
-            <a:avLst/>
-          </a:prstGeom>
-          <a:solidFill>
-            <a:srgbClr val="00B4D8"/>
-          </a:solidFill>
-          <a:ln>
-            <a:noFill/>
-          </a:ln>
-        </p:spPr>
-        <p:style>
-          <a:lnRef idx="1">
-            <a:schemeClr val="accent1"/>
-          </a:lnRef>
-          <a:fillRef idx="3">
-            <a:schemeClr val="accent1"/>
-          </a:fillRef>
-          <a:effectRef idx="2">
-            <a:schemeClr val="accent1"/>
-          </a:effectRef>
-          <a:fontRef idx="minor">
-            <a:schemeClr val="lt1"/>
-          </a:fontRef>
-        </p:style>
-        <p:txBody>
-          <a:bodyPr rtlCol="0" anchor="ctr"/>
-          <a:lstStyle/>
-          <a:p>
-            <a:pPr algn="ctr"/>
-          </a:p>
-        </p:txBody>
-      </p:sp>
-      <p:sp>
-        <p:nvSpPr>
-          <p:cNvPr id="21" name="TextBox 20"/>
-          <p:cNvSpPr txBox="1"/>
-          <p:nvPr/>
-        </p:nvSpPr>
-        <p:spPr>
-          <a:xfrm>
-            <a:off x="6583680" y="4206240"/>
-            <a:ext cx="4572000" cy="457200"/>
-          </a:xfrm>
-          <a:prstGeom prst="rect">
-            <a:avLst/>
-          </a:prstGeom>
-          <a:noFill/>
-        </p:spPr>
-        <p:txBody>
-          <a:bodyPr wrap="square">
-            <a:spAutoFit/>
-          </a:bodyPr>
-          <a:lstStyle/>
-          <a:p>
-            <a:pPr algn="l">
-              <a:defRPr sz="1400" b="1">
+            <a:r>
+              <a:rPr sz="1200" b="1">
                 <a:solidFill>
                   <a:srgbClr val="00B4D8"/>
                 </a:solidFill>
                 <a:latin typeface="Segoe UI"/>
-              </a:defRPr>
-            </a:pPr>
-            <a:r>
-              <a:t>Dobór</a:t>
-            </a:r>
-          </a:p>
-        </p:txBody>
-      </p:sp>
-      <p:sp>
-        <p:nvSpPr>
-          <p:cNvPr id="22" name="TextBox 21"/>
-          <p:cNvSpPr txBox="1"/>
-          <p:nvPr/>
-        </p:nvSpPr>
-        <p:spPr>
-          <a:xfrm>
-            <a:off x="6583680" y="4846320"/>
-            <a:ext cx="4572000" cy="914400"/>
-          </a:xfrm>
-          <a:prstGeom prst="rect">
-            <a:avLst/>
-          </a:prstGeom>
-          <a:noFill/>
-        </p:spPr>
-        <p:txBody>
-          <a:bodyPr wrap="square">
-            <a:spAutoFit/>
-          </a:bodyPr>
-          <a:lstStyle/>
-          <a:p>
-            <a:pPr algn="l">
-              <a:defRPr sz="1200" b="0">
-                <a:solidFill>
-                  <a:srgbClr val="1B2B3C"/>
-                </a:solidFill>
-                <a:latin typeface="Segoe UI"/>
-              </a:defRPr>
-            </a:pPr>
-            <a:r>
-              <a:t>Celowy + metoda kuli śnieznej</a:t>
+              </a:rPr>
+              <a:t>Dobor proby:  </a:t>
+            </a:r>
+            <a:r>
+              <a:rPr sz="1200">
+                <a:solidFill>
+                  <a:srgbClr val="1A1A2E"/>
+                </a:solidFill>
+                <a:latin typeface="Segoe UI"/>
+              </a:rPr>
+              <a:t>Celowy + metoda kuli snieznej (rekrutacja przez spolecznosci inwestorow online)</a:t>
             </a:r>
           </a:p>
         </p:txBody>
@@ -5801,7 +5216,7 @@
     <p:bg>
       <p:bgPr>
         <a:solidFill>
-          <a:srgbClr val="1B2838"/>
+          <a:srgbClr val="F4F5F7"/>
         </a:solidFill>
         <a:effectLst/>
       </p:bgPr>
@@ -5815,22 +5230,20 @@
       <p:grpSpPr/>
       <p:sp>
         <p:nvSpPr>
-          <p:cNvPr id="2" name="Oval 1"/>
+          <p:cNvPr id="2" name="Rectangle 1"/>
           <p:cNvSpPr/>
           <p:nvPr/>
         </p:nvSpPr>
         <p:spPr>
           <a:xfrm>
-            <a:off x="10058400" y="-731520"/>
-            <a:ext cx="2743200" cy="2743200"/>
-          </a:xfrm>
-          <a:prstGeom prst="ellipse">
+            <a:off x="0" y="0"/>
+            <a:ext cx="12191695" cy="1097280"/>
+          </a:xfrm>
+          <a:prstGeom prst="rect">
             <a:avLst/>
           </a:prstGeom>
           <a:solidFill>
-            <a:srgbClr val="00B4D8">
-              <a:alpha val="12000"/>
-            </a:srgbClr>
+            <a:srgbClr val="0D1B2A"/>
           </a:solidFill>
           <a:ln>
             <a:noFill/>
@@ -5860,102 +5273,14 @@
       </p:sp>
       <p:sp>
         <p:nvSpPr>
-          <p:cNvPr id="3" name="Oval 2"/>
-          <p:cNvSpPr/>
-          <p:nvPr/>
-        </p:nvSpPr>
-        <p:spPr>
-          <a:xfrm>
-            <a:off x="-914400" y="5029200"/>
-            <a:ext cx="2286000" cy="2286000"/>
-          </a:xfrm>
-          <a:prstGeom prst="ellipse">
-            <a:avLst/>
-          </a:prstGeom>
-          <a:solidFill>
-            <a:srgbClr val="F4A261">
-              <a:alpha val="9999"/>
-            </a:srgbClr>
-          </a:solidFill>
-          <a:ln>
-            <a:noFill/>
-          </a:ln>
-        </p:spPr>
-        <p:style>
-          <a:lnRef idx="1">
-            <a:schemeClr val="accent1"/>
-          </a:lnRef>
-          <a:fillRef idx="3">
-            <a:schemeClr val="accent1"/>
-          </a:fillRef>
-          <a:effectRef idx="2">
-            <a:schemeClr val="accent1"/>
-          </a:effectRef>
-          <a:fontRef idx="minor">
-            <a:schemeClr val="lt1"/>
-          </a:fontRef>
-        </p:style>
-        <p:txBody>
-          <a:bodyPr rtlCol="0" anchor="ctr"/>
-          <a:lstStyle/>
-          <a:p>
-            <a:pPr algn="ctr"/>
-          </a:p>
-        </p:txBody>
-      </p:sp>
-      <p:sp>
-        <p:nvSpPr>
-          <p:cNvPr id="4" name="Rectangle 3"/>
-          <p:cNvSpPr/>
-          <p:nvPr/>
-        </p:nvSpPr>
-        <p:spPr>
-          <a:xfrm>
-            <a:off x="0" y="6583680"/>
-            <a:ext cx="12191695" cy="274320"/>
-          </a:xfrm>
-          <a:prstGeom prst="rect">
-            <a:avLst/>
-          </a:prstGeom>
-          <a:solidFill>
-            <a:srgbClr val="F4A261"/>
-          </a:solidFill>
-          <a:ln>
-            <a:noFill/>
-          </a:ln>
-        </p:spPr>
-        <p:style>
-          <a:lnRef idx="1">
-            <a:schemeClr val="accent1"/>
-          </a:lnRef>
-          <a:fillRef idx="3">
-            <a:schemeClr val="accent1"/>
-          </a:fillRef>
-          <a:effectRef idx="2">
-            <a:schemeClr val="accent1"/>
-          </a:effectRef>
-          <a:fontRef idx="minor">
-            <a:schemeClr val="lt1"/>
-          </a:fontRef>
-        </p:style>
-        <p:txBody>
-          <a:bodyPr rtlCol="0" anchor="ctr"/>
-          <a:lstStyle/>
-          <a:p>
-            <a:pPr algn="ctr"/>
-          </a:p>
-        </p:txBody>
-      </p:sp>
-      <p:sp>
-        <p:nvSpPr>
-          <p:cNvPr id="5" name="TextBox 4"/>
+          <p:cNvPr id="3" name="TextBox 2"/>
           <p:cNvSpPr txBox="1"/>
           <p:nvPr/>
         </p:nvSpPr>
         <p:spPr>
           <a:xfrm>
-            <a:off x="548640" y="274320"/>
-            <a:ext cx="9144000" cy="731520"/>
+            <a:off x="731520" y="228600"/>
+            <a:ext cx="10058400" cy="640080"/>
           </a:xfrm>
           <a:prstGeom prst="rect">
             <a:avLst/>
@@ -5968,8 +5293,8 @@
           </a:bodyPr>
           <a:lstStyle/>
           <a:p>
-            <a:pPr algn="l">
-              <a:defRPr sz="2800" b="1">
+            <a:pPr>
+              <a:defRPr sz="2600" b="1">
                 <a:solidFill>
                   <a:srgbClr val="FFFFFF"/>
                 </a:solidFill>
@@ -5984,59 +5309,16 @@
       </p:sp>
       <p:sp>
         <p:nvSpPr>
-          <p:cNvPr id="6" name="Rounded Rectangle 5"/>
+          <p:cNvPr id="4" name="Rectangle 3"/>
           <p:cNvSpPr/>
           <p:nvPr/>
         </p:nvSpPr>
         <p:spPr>
           <a:xfrm>
-            <a:off x="1097280" y="1645920"/>
-            <a:ext cx="9875520" cy="1005840"/>
-          </a:xfrm>
-          <a:prstGeom prst="roundRect">
-            <a:avLst/>
-          </a:prstGeom>
-          <a:solidFill>
-            <a:srgbClr val="253548"/>
-          </a:solidFill>
-          <a:ln>
-            <a:noFill/>
-          </a:ln>
-        </p:spPr>
-        <p:style>
-          <a:lnRef idx="1">
-            <a:schemeClr val="accent1"/>
-          </a:lnRef>
-          <a:fillRef idx="3">
-            <a:schemeClr val="accent1"/>
-          </a:fillRef>
-          <a:effectRef idx="2">
-            <a:schemeClr val="accent1"/>
-          </a:effectRef>
-          <a:fontRef idx="minor">
-            <a:schemeClr val="lt1"/>
-          </a:fontRef>
-        </p:style>
-        <p:txBody>
-          <a:bodyPr rtlCol="0" anchor="ctr"/>
-          <a:lstStyle/>
-          <a:p>
-            <a:pPr algn="ctr"/>
-          </a:p>
-        </p:txBody>
-      </p:sp>
-      <p:sp>
-        <p:nvSpPr>
-          <p:cNvPr id="7" name="Oval 6"/>
-          <p:cNvSpPr/>
-          <p:nvPr/>
-        </p:nvSpPr>
-        <p:spPr>
-          <a:xfrm>
-            <a:off x="1371600" y="1920240"/>
-            <a:ext cx="411480" cy="411480"/>
-          </a:xfrm>
-          <a:prstGeom prst="ellipse">
+            <a:off x="731520" y="960120"/>
+            <a:ext cx="3657600" cy="36576"/>
+          </a:xfrm>
+          <a:prstGeom prst="rect">
             <a:avLst/>
           </a:prstGeom>
           <a:solidFill>
@@ -6061,74 +5343,29 @@
           </a:fontRef>
         </p:style>
         <p:txBody>
-          <a:bodyPr rtlCol="0" anchor="ctr" wrap="none"/>
+          <a:bodyPr rtlCol="0" anchor="ctr"/>
           <a:lstStyle/>
           <a:p>
             <a:pPr algn="ctr"/>
-            <a:r>
-              <a:rPr sz="1100" b="1">
-                <a:solidFill>
-                  <a:srgbClr val="FFFFFF"/>
-                </a:solidFill>
-                <a:latin typeface="Segoe UI"/>
-              </a:rPr>
-              <a:t>1</a:t>
-            </a:r>
-          </a:p>
-        </p:txBody>
-      </p:sp>
-      <p:sp>
-        <p:nvSpPr>
-          <p:cNvPr id="8" name="TextBox 7"/>
-          <p:cNvSpPr txBox="1"/>
-          <p:nvPr/>
-        </p:nvSpPr>
-        <p:spPr>
-          <a:xfrm>
-            <a:off x="2011680" y="1920240"/>
-            <a:ext cx="8686800" cy="640080"/>
-          </a:xfrm>
-          <a:prstGeom prst="rect">
-            <a:avLst/>
-          </a:prstGeom>
-          <a:noFill/>
-        </p:spPr>
-        <p:txBody>
-          <a:bodyPr wrap="square">
-            <a:spAutoFit/>
-          </a:bodyPr>
-          <a:lstStyle/>
-          <a:p>
-            <a:pPr algn="l">
-              <a:defRPr sz="1300" b="0">
-                <a:solidFill>
-                  <a:srgbClr val="FFFFFF"/>
-                </a:solidFill>
-                <a:latin typeface="Segoe UI"/>
-              </a:defRPr>
-            </a:pPr>
-            <a:r>
-              <a:t>Finanse osobiste to tematy wrażliwe – presja społeczna w grupie</a:t>
-            </a:r>
-          </a:p>
-        </p:txBody>
-      </p:sp>
-      <p:sp>
-        <p:nvSpPr>
-          <p:cNvPr id="9" name="Rounded Rectangle 8"/>
+          </a:p>
+        </p:txBody>
+      </p:sp>
+      <p:sp>
+        <p:nvSpPr>
+          <p:cNvPr id="5" name="Rounded Rectangle 4"/>
           <p:cNvSpPr/>
           <p:nvPr/>
         </p:nvSpPr>
         <p:spPr>
           <a:xfrm>
-            <a:off x="1097280" y="2880360"/>
-            <a:ext cx="9875520" cy="1005840"/>
+            <a:off x="585216" y="1408176"/>
+            <a:ext cx="11064240" cy="5029200"/>
           </a:xfrm>
           <a:prstGeom prst="roundRect">
             <a:avLst/>
           </a:prstGeom>
           <a:solidFill>
-            <a:srgbClr val="253548"/>
+            <a:srgbClr val="E0E1E3"/>
           </a:solidFill>
           <a:ln>
             <a:noFill/>
@@ -6158,23 +5395,25 @@
       </p:sp>
       <p:sp>
         <p:nvSpPr>
-          <p:cNvPr id="10" name="Oval 9"/>
+          <p:cNvPr id="6" name="Rounded Rectangle 5"/>
           <p:cNvSpPr/>
           <p:nvPr/>
         </p:nvSpPr>
         <p:spPr>
           <a:xfrm>
-            <a:off x="1371600" y="3154680"/>
-            <a:ext cx="411480" cy="411480"/>
-          </a:xfrm>
-          <a:prstGeom prst="ellipse">
+            <a:off x="548640" y="1371600"/>
+            <a:ext cx="11064240" cy="5029200"/>
+          </a:xfrm>
+          <a:prstGeom prst="roundRect">
             <a:avLst/>
           </a:prstGeom>
           <a:solidFill>
-            <a:srgbClr val="F4A261"/>
+            <a:srgbClr val="FFFFFF"/>
           </a:solidFill>
-          <a:ln>
-            <a:noFill/>
+          <a:ln w="9525">
+            <a:solidFill>
+              <a:srgbClr val="E8E9EB"/>
+            </a:solidFill>
           </a:ln>
         </p:spPr>
         <p:style>
@@ -6192,32 +5431,23 @@
           </a:fontRef>
         </p:style>
         <p:txBody>
-          <a:bodyPr rtlCol="0" anchor="ctr" wrap="none"/>
+          <a:bodyPr rtlCol="0" anchor="ctr"/>
           <a:lstStyle/>
           <a:p>
             <a:pPr algn="ctr"/>
-            <a:r>
-              <a:rPr sz="1100" b="1">
-                <a:solidFill>
-                  <a:srgbClr val="FFFFFF"/>
-                </a:solidFill>
-                <a:latin typeface="Segoe UI"/>
-              </a:rPr>
-              <a:t>2</a:t>
-            </a:r>
-          </a:p>
-        </p:txBody>
-      </p:sp>
-      <p:sp>
-        <p:nvSpPr>
-          <p:cNvPr id="11" name="TextBox 10"/>
+          </a:p>
+        </p:txBody>
+      </p:sp>
+      <p:sp>
+        <p:nvSpPr>
+          <p:cNvPr id="7" name="TextBox 6"/>
           <p:cNvSpPr txBox="1"/>
           <p:nvPr/>
         </p:nvSpPr>
         <p:spPr>
           <a:xfrm>
-            <a:off x="2011680" y="3154680"/>
-            <a:ext cx="8686800" cy="640080"/>
+            <a:off x="1097280" y="1828800"/>
+            <a:ext cx="9875520" cy="4114800"/>
           </a:xfrm>
           <a:prstGeom prst="rect">
             <a:avLst/>
@@ -6230,278 +5460,103 @@
           </a:bodyPr>
           <a:lstStyle/>
           <a:p>
-            <a:pPr algn="l">
-              <a:defRPr sz="1300" b="0">
-                <a:solidFill>
-                  <a:srgbClr val="FFFFFF"/>
-                </a:solidFill>
-                <a:latin typeface="Segoe UI"/>
-              </a:defRPr>
+            <a:pPr>
+              <a:spcAft>
+                <a:spcPts val="1800"/>
+              </a:spcAft>
             </a:pPr>
             <a:r>
-              <a:t>Dokładne prześledzenie zachowania i interakcji z aplikacją</a:t>
-            </a:r>
-          </a:p>
-        </p:txBody>
-      </p:sp>
-      <p:sp>
-        <p:nvSpPr>
-          <p:cNvPr id="12" name="Rounded Rectangle 11"/>
-          <p:cNvSpPr/>
-          <p:nvPr/>
-        </p:nvSpPr>
-        <p:spPr>
-          <a:xfrm>
-            <a:off x="1097280" y="4114800"/>
-            <a:ext cx="9875520" cy="1005840"/>
-          </a:xfrm>
-          <a:prstGeom prst="roundRect">
-            <a:avLst/>
-          </a:prstGeom>
-          <a:solidFill>
-            <a:srgbClr val="253548"/>
-          </a:solidFill>
-          <a:ln>
-            <a:noFill/>
-          </a:ln>
-        </p:spPr>
-        <p:style>
-          <a:lnRef idx="1">
-            <a:schemeClr val="accent1"/>
-          </a:lnRef>
-          <a:fillRef idx="3">
-            <a:schemeClr val="accent1"/>
-          </a:fillRef>
-          <a:effectRef idx="2">
-            <a:schemeClr val="accent1"/>
-          </a:effectRef>
-          <a:fontRef idx="minor">
-            <a:schemeClr val="lt1"/>
-          </a:fontRef>
-        </p:style>
-        <p:txBody>
-          <a:bodyPr rtlCol="0" anchor="ctr"/>
-          <a:lstStyle/>
-          <a:p>
-            <a:pPr algn="ctr"/>
-          </a:p>
-        </p:txBody>
-      </p:sp>
-      <p:sp>
-        <p:nvSpPr>
-          <p:cNvPr id="13" name="Oval 12"/>
-          <p:cNvSpPr/>
-          <p:nvPr/>
-        </p:nvSpPr>
-        <p:spPr>
-          <a:xfrm>
-            <a:off x="1371600" y="4389120"/>
-            <a:ext cx="411480" cy="411480"/>
-          </a:xfrm>
-          <a:prstGeom prst="ellipse">
-            <a:avLst/>
-          </a:prstGeom>
-          <a:solidFill>
-            <a:srgbClr val="00B4D8"/>
-          </a:solidFill>
-          <a:ln>
-            <a:noFill/>
-          </a:ln>
-        </p:spPr>
-        <p:style>
-          <a:lnRef idx="1">
-            <a:schemeClr val="accent1"/>
-          </a:lnRef>
-          <a:fillRef idx="3">
-            <a:schemeClr val="accent1"/>
-          </a:fillRef>
-          <a:effectRef idx="2">
-            <a:schemeClr val="accent1"/>
-          </a:effectRef>
-          <a:fontRef idx="minor">
-            <a:schemeClr val="lt1"/>
-          </a:fontRef>
-        </p:style>
-        <p:txBody>
-          <a:bodyPr rtlCol="0" anchor="ctr" wrap="none"/>
-          <a:lstStyle/>
-          <a:p>
-            <a:pPr algn="ctr"/>
-            <a:r>
-              <a:rPr sz="1100" b="1">
-                <a:solidFill>
-                  <a:srgbClr val="FFFFFF"/>
-                </a:solidFill>
-                <a:latin typeface="Segoe UI"/>
-              </a:rPr>
-              <a:t>3</a:t>
-            </a:r>
-          </a:p>
-        </p:txBody>
-      </p:sp>
-      <p:sp>
-        <p:nvSpPr>
-          <p:cNvPr id="14" name="TextBox 13"/>
-          <p:cNvSpPr txBox="1"/>
-          <p:nvPr/>
-        </p:nvSpPr>
-        <p:spPr>
-          <a:xfrm>
-            <a:off x="2011680" y="4389120"/>
-            <a:ext cx="8686800" cy="640080"/>
-          </a:xfrm>
-          <a:prstGeom prst="rect">
-            <a:avLst/>
-          </a:prstGeom>
-          <a:noFill/>
-        </p:spPr>
-        <p:txBody>
-          <a:bodyPr wrap="square">
-            <a:spAutoFit/>
-          </a:bodyPr>
-          <a:lstStyle/>
-          <a:p>
-            <a:pPr algn="l">
-              <a:defRPr sz="1300" b="0">
-                <a:solidFill>
-                  <a:srgbClr val="FFFFFF"/>
-                </a:solidFill>
-                <a:latin typeface="Segoe UI"/>
-              </a:defRPr>
+              <a:rPr sz="1300" b="1">
+                <a:solidFill>
+                  <a:srgbClr val="00B4D8"/>
+                </a:solidFill>
+                <a:latin typeface="Segoe UI"/>
+              </a:rPr>
+              <a:t>1.  </a:t>
+            </a:r>
+            <a:r>
+              <a:rPr sz="1300">
+                <a:solidFill>
+                  <a:srgbClr val="1A1A2E"/>
+                </a:solidFill>
+                <a:latin typeface="Segoe UI"/>
+              </a:rPr>
+              <a:t>Finanse osobiste to tematy wrazliwe - w grupie wystepuje presja spoleczna, ktora znieksztalca odpowiedzi</a:t>
+            </a:r>
+          </a:p>
+          <a:p>
+            <a:pPr>
+              <a:spcAft>
+                <a:spcPts val="1800"/>
+              </a:spcAft>
             </a:pPr>
             <a:r>
-              <a:t>Odtworzenie procesu decyzji krok po kroku</a:t>
-            </a:r>
-          </a:p>
-        </p:txBody>
-      </p:sp>
-      <p:sp>
-        <p:nvSpPr>
-          <p:cNvPr id="15" name="Rounded Rectangle 14"/>
-          <p:cNvSpPr/>
-          <p:nvPr/>
-        </p:nvSpPr>
-        <p:spPr>
-          <a:xfrm>
-            <a:off x="1097280" y="5349240"/>
-            <a:ext cx="9875520" cy="1005840"/>
-          </a:xfrm>
-          <a:prstGeom prst="roundRect">
-            <a:avLst/>
-          </a:prstGeom>
-          <a:solidFill>
-            <a:srgbClr val="253548"/>
-          </a:solidFill>
-          <a:ln>
-            <a:noFill/>
-          </a:ln>
-        </p:spPr>
-        <p:style>
-          <a:lnRef idx="1">
-            <a:schemeClr val="accent1"/>
-          </a:lnRef>
-          <a:fillRef idx="3">
-            <a:schemeClr val="accent1"/>
-          </a:fillRef>
-          <a:effectRef idx="2">
-            <a:schemeClr val="accent1"/>
-          </a:effectRef>
-          <a:fontRef idx="minor">
-            <a:schemeClr val="lt1"/>
-          </a:fontRef>
-        </p:style>
-        <p:txBody>
-          <a:bodyPr rtlCol="0" anchor="ctr"/>
-          <a:lstStyle/>
-          <a:p>
-            <a:pPr algn="ctr"/>
-          </a:p>
-        </p:txBody>
-      </p:sp>
-      <p:sp>
-        <p:nvSpPr>
-          <p:cNvPr id="16" name="Oval 15"/>
-          <p:cNvSpPr/>
-          <p:nvPr/>
-        </p:nvSpPr>
-        <p:spPr>
-          <a:xfrm>
-            <a:off x="1371600" y="5623560"/>
-            <a:ext cx="411480" cy="411480"/>
-          </a:xfrm>
-          <a:prstGeom prst="ellipse">
-            <a:avLst/>
-          </a:prstGeom>
-          <a:solidFill>
-            <a:srgbClr val="F4A261"/>
-          </a:solidFill>
-          <a:ln>
-            <a:noFill/>
-          </a:ln>
-        </p:spPr>
-        <p:style>
-          <a:lnRef idx="1">
-            <a:schemeClr val="accent1"/>
-          </a:lnRef>
-          <a:fillRef idx="3">
-            <a:schemeClr val="accent1"/>
-          </a:fillRef>
-          <a:effectRef idx="2">
-            <a:schemeClr val="accent1"/>
-          </a:effectRef>
-          <a:fontRef idx="minor">
-            <a:schemeClr val="lt1"/>
-          </a:fontRef>
-        </p:style>
-        <p:txBody>
-          <a:bodyPr rtlCol="0" anchor="ctr" wrap="none"/>
-          <a:lstStyle/>
-          <a:p>
-            <a:pPr algn="ctr"/>
-            <a:r>
-              <a:rPr sz="1100" b="1">
-                <a:solidFill>
-                  <a:srgbClr val="FFFFFF"/>
-                </a:solidFill>
-                <a:latin typeface="Segoe UI"/>
-              </a:rPr>
-              <a:t>4</a:t>
-            </a:r>
-          </a:p>
-        </p:txBody>
-      </p:sp>
-      <p:sp>
-        <p:nvSpPr>
-          <p:cNvPr id="17" name="TextBox 16"/>
-          <p:cNvSpPr txBox="1"/>
-          <p:nvPr/>
-        </p:nvSpPr>
-        <p:spPr>
-          <a:xfrm>
-            <a:off x="2011680" y="5623560"/>
-            <a:ext cx="8686800" cy="640080"/>
-          </a:xfrm>
-          <a:prstGeom prst="rect">
-            <a:avLst/>
-          </a:prstGeom>
-          <a:noFill/>
-        </p:spPr>
-        <p:txBody>
-          <a:bodyPr wrap="square">
-            <a:spAutoFit/>
-          </a:bodyPr>
-          <a:lstStyle/>
-          <a:p>
-            <a:pPr algn="l">
-              <a:defRPr sz="1300" b="0">
-                <a:solidFill>
-                  <a:srgbClr val="FFFFFF"/>
-                </a:solidFill>
-                <a:latin typeface="Segoe UI"/>
-              </a:defRPr>
+              <a:rPr sz="1300" b="1">
+                <a:solidFill>
+                  <a:srgbClr val="00B4D8"/>
+                </a:solidFill>
+                <a:latin typeface="Segoe UI"/>
+              </a:rPr>
+              <a:t>2.  </a:t>
+            </a:r>
+            <a:r>
+              <a:rPr sz="1300">
+                <a:solidFill>
+                  <a:srgbClr val="1A1A2E"/>
+                </a:solidFill>
+                <a:latin typeface="Segoe UI"/>
+              </a:rPr>
+              <a:t>Umozliwia dokladne prosledzenie zachowania respondenta i jego interakcji z aplikacja krok po kroku</a:t>
+            </a:r>
+          </a:p>
+          <a:p>
+            <a:pPr>
+              <a:spcAft>
+                <a:spcPts val="1800"/>
+              </a:spcAft>
             </a:pPr>
             <a:r>
-              <a:t>Swoboda reagowania, dopytywania i pogłębiania wątków</a:t>
+              <a:rPr sz="1300" b="1">
+                <a:solidFill>
+                  <a:srgbClr val="00B4D8"/>
+                </a:solidFill>
+                <a:latin typeface="Segoe UI"/>
+              </a:rPr>
+              <a:t>3.  </a:t>
+            </a:r>
+            <a:r>
+              <a:rPr sz="1300">
+                <a:solidFill>
+                  <a:srgbClr val="1A1A2E"/>
+                </a:solidFill>
+                <a:latin typeface="Segoe UI"/>
+              </a:rPr>
+              <a:t>Pozwala na odtworzenie calego procesu podejmowania decyzji inwestycyjnej w naturalny sposob</a:t>
+            </a:r>
+          </a:p>
+          <a:p>
+            <a:pPr>
+              <a:spcAft>
+                <a:spcPts val="1800"/>
+              </a:spcAft>
+            </a:pPr>
+            <a:r>
+              <a:rPr sz="1300" b="1">
+                <a:solidFill>
+                  <a:srgbClr val="00B4D8"/>
+                </a:solidFill>
+                <a:latin typeface="Segoe UI"/>
+              </a:rPr>
+              <a:t>4.  </a:t>
+            </a:r>
+            <a:r>
+              <a:rPr sz="1300">
+                <a:solidFill>
+                  <a:srgbClr val="1A1A2E"/>
+                </a:solidFill>
+                <a:latin typeface="Segoe UI"/>
+              </a:rPr>
+              <a:t>Daje swobode reagowania, dopytywania i poglebiania interesujacych watkow w czasie rzeczywistym</a:t>
             </a:r>
           </a:p>
         </p:txBody>
@@ -6520,7 +5575,7 @@
     <p:bg>
       <p:bgPr>
         <a:solidFill>
-          <a:srgbClr val="FFFFFF"/>
+          <a:srgbClr val="F4F5F7"/>
         </a:solidFill>
         <a:effectLst/>
       </p:bgPr>
@@ -6541,7 +5596,86 @@
         <p:spPr>
           <a:xfrm>
             <a:off x="0" y="0"/>
-            <a:ext cx="137160" cy="6858000"/>
+            <a:ext cx="12191695" cy="1097280"/>
+          </a:xfrm>
+          <a:prstGeom prst="rect">
+            <a:avLst/>
+          </a:prstGeom>
+          <a:solidFill>
+            <a:srgbClr val="0D1B2A"/>
+          </a:solidFill>
+          <a:ln>
+            <a:noFill/>
+          </a:ln>
+        </p:spPr>
+        <p:style>
+          <a:lnRef idx="1">
+            <a:schemeClr val="accent1"/>
+          </a:lnRef>
+          <a:fillRef idx="3">
+            <a:schemeClr val="accent1"/>
+          </a:fillRef>
+          <a:effectRef idx="2">
+            <a:schemeClr val="accent1"/>
+          </a:effectRef>
+          <a:fontRef idx="minor">
+            <a:schemeClr val="lt1"/>
+          </a:fontRef>
+        </p:style>
+        <p:txBody>
+          <a:bodyPr rtlCol="0" anchor="ctr"/>
+          <a:lstStyle/>
+          <a:p>
+            <a:pPr algn="ctr"/>
+          </a:p>
+        </p:txBody>
+      </p:sp>
+      <p:sp>
+        <p:nvSpPr>
+          <p:cNvPr id="3" name="TextBox 2"/>
+          <p:cNvSpPr txBox="1"/>
+          <p:nvPr/>
+        </p:nvSpPr>
+        <p:spPr>
+          <a:xfrm>
+            <a:off x="731520" y="228600"/>
+            <a:ext cx="10058400" cy="640080"/>
+          </a:xfrm>
+          <a:prstGeom prst="rect">
+            <a:avLst/>
+          </a:prstGeom>
+          <a:noFill/>
+        </p:spPr>
+        <p:txBody>
+          <a:bodyPr wrap="square">
+            <a:spAutoFit/>
+          </a:bodyPr>
+          <a:lstStyle/>
+          <a:p>
+            <a:pPr>
+              <a:defRPr sz="2600" b="1">
+                <a:solidFill>
+                  <a:srgbClr val="FFFFFF"/>
+                </a:solidFill>
+                <a:latin typeface="Segoe UI"/>
+              </a:defRPr>
+            </a:pPr>
+            <a:r>
+              <a:t>Scenariusz wywiadu – A. Wprowadzenie</a:t>
+            </a:r>
+          </a:p>
+        </p:txBody>
+      </p:sp>
+      <p:sp>
+        <p:nvSpPr>
+          <p:cNvPr id="4" name="Rectangle 3"/>
+          <p:cNvSpPr/>
+          <p:nvPr/>
+        </p:nvSpPr>
+        <p:spPr>
+          <a:xfrm>
+            <a:off x="731520" y="960120"/>
+            <a:ext cx="3657600" cy="36576"/>
           </a:xfrm>
           <a:prstGeom prst="rect">
             <a:avLst/>
@@ -6577,20 +5711,20 @@
       </p:sp>
       <p:sp>
         <p:nvSpPr>
-          <p:cNvPr id="3" name="Rectangle 2"/>
+          <p:cNvPr id="5" name="Rounded Rectangle 4"/>
           <p:cNvSpPr/>
           <p:nvPr/>
         </p:nvSpPr>
         <p:spPr>
           <a:xfrm>
-            <a:off x="0" y="6583680"/>
-            <a:ext cx="12191695" cy="274320"/>
-          </a:xfrm>
-          <a:prstGeom prst="rect">
+            <a:off x="585216" y="1408176"/>
+            <a:ext cx="11064240" cy="5029200"/>
+          </a:xfrm>
+          <a:prstGeom prst="roundRect">
             <a:avLst/>
           </a:prstGeom>
           <a:solidFill>
-            <a:srgbClr val="00B4D8"/>
+            <a:srgbClr val="E0E1E3"/>
           </a:solidFill>
           <a:ln>
             <a:noFill/>
@@ -6620,25 +5754,25 @@
       </p:sp>
       <p:sp>
         <p:nvSpPr>
-          <p:cNvPr id="4" name="Oval 3"/>
+          <p:cNvPr id="6" name="Rounded Rectangle 5"/>
           <p:cNvSpPr/>
           <p:nvPr/>
         </p:nvSpPr>
         <p:spPr>
           <a:xfrm>
-            <a:off x="10058400" y="-731520"/>
-            <a:ext cx="2743200" cy="2743200"/>
-          </a:xfrm>
-          <a:prstGeom prst="ellipse">
+            <a:off x="548640" y="1371600"/>
+            <a:ext cx="11064240" cy="5029200"/>
+          </a:xfrm>
+          <a:prstGeom prst="roundRect">
             <a:avLst/>
           </a:prstGeom>
           <a:solidFill>
-            <a:srgbClr val="1B2838">
-              <a:alpha val="12000"/>
-            </a:srgbClr>
+            <a:srgbClr val="FFFFFF"/>
           </a:solidFill>
-          <a:ln>
-            <a:noFill/>
+          <a:ln w="9525">
+            <a:solidFill>
+              <a:srgbClr val="E8E9EB"/>
+            </a:solidFill>
           </a:ln>
         </p:spPr>
         <p:style>
@@ -6665,59 +5799,14 @@
       </p:sp>
       <p:sp>
         <p:nvSpPr>
-          <p:cNvPr id="5" name="Oval 4"/>
-          <p:cNvSpPr/>
-          <p:nvPr/>
-        </p:nvSpPr>
-        <p:spPr>
-          <a:xfrm>
-            <a:off x="-914400" y="5029200"/>
-            <a:ext cx="2286000" cy="2286000"/>
-          </a:xfrm>
-          <a:prstGeom prst="ellipse">
-            <a:avLst/>
-          </a:prstGeom>
-          <a:solidFill>
-            <a:srgbClr val="F4A261">
-              <a:alpha val="9999"/>
-            </a:srgbClr>
-          </a:solidFill>
-          <a:ln>
-            <a:noFill/>
-          </a:ln>
-        </p:spPr>
-        <p:style>
-          <a:lnRef idx="1">
-            <a:schemeClr val="accent1"/>
-          </a:lnRef>
-          <a:fillRef idx="3">
-            <a:schemeClr val="accent1"/>
-          </a:fillRef>
-          <a:effectRef idx="2">
-            <a:schemeClr val="accent1"/>
-          </a:effectRef>
-          <a:fontRef idx="minor">
-            <a:schemeClr val="lt1"/>
-          </a:fontRef>
-        </p:style>
-        <p:txBody>
-          <a:bodyPr rtlCol="0" anchor="ctr"/>
-          <a:lstStyle/>
-          <a:p>
-            <a:pPr algn="ctr"/>
-          </a:p>
-        </p:txBody>
-      </p:sp>
-      <p:sp>
-        <p:nvSpPr>
-          <p:cNvPr id="6" name="TextBox 5"/>
+          <p:cNvPr id="7" name="TextBox 6"/>
           <p:cNvSpPr txBox="1"/>
           <p:nvPr/>
         </p:nvSpPr>
         <p:spPr>
           <a:xfrm>
-            <a:off x="548640" y="274320"/>
-            <a:ext cx="9144000" cy="731520"/>
+            <a:off x="914400" y="1645920"/>
+            <a:ext cx="5486400" cy="365760"/>
           </a:xfrm>
           <a:prstGeom prst="rect">
             <a:avLst/>
@@ -6731,170 +5820,29 @@
           <a:lstStyle/>
           <a:p>
             <a:pPr algn="l">
-              <a:defRPr sz="2800" b="1">
-                <a:solidFill>
-                  <a:srgbClr val="1B2838"/>
+              <a:defRPr sz="1100" b="1">
+                <a:solidFill>
+                  <a:srgbClr val="4A4A5A"/>
                 </a:solidFill>
                 <a:latin typeface="Segoe UI"/>
               </a:defRPr>
             </a:pPr>
             <a:r>
-              <a:t>Scenariusz wywiadu – A. Wprowadzenie</a:t>
-            </a:r>
-          </a:p>
-        </p:txBody>
-      </p:sp>
-      <p:sp>
-        <p:nvSpPr>
-          <p:cNvPr id="7" name="Rounded Rectangle 6"/>
-          <p:cNvSpPr/>
-          <p:nvPr/>
-        </p:nvSpPr>
-        <p:spPr>
-          <a:xfrm>
-            <a:off x="731520" y="1828800"/>
-            <a:ext cx="10515600" cy="1645920"/>
-          </a:xfrm>
-          <a:prstGeom prst="roundRect">
-            <a:avLst/>
-          </a:prstGeom>
-          <a:solidFill>
-            <a:srgbClr val="FFFFFF"/>
-          </a:solidFill>
-          <a:ln w="6350">
-            <a:solidFill>
-              <a:srgbClr val="E0E0E0"/>
-            </a:solidFill>
-          </a:ln>
-          <a:effectLst/>
-        </p:spPr>
-        <p:style>
-          <a:lnRef idx="1">
-            <a:schemeClr val="accent1"/>
-          </a:lnRef>
-          <a:fillRef idx="3">
-            <a:schemeClr val="accent1"/>
-          </a:fillRef>
-          <a:effectRef idx="2">
-            <a:schemeClr val="accent1"/>
-          </a:effectRef>
-          <a:fontRef idx="minor">
-            <a:schemeClr val="lt1"/>
-          </a:fontRef>
-        </p:style>
-        <p:txBody>
-          <a:bodyPr rtlCol="0" anchor="ctr"/>
-          <a:lstStyle/>
-          <a:p>
-            <a:pPr algn="ctr"/>
-          </a:p>
-        </p:txBody>
-      </p:sp>
-      <p:sp>
-        <p:nvSpPr>
-          <p:cNvPr id="8" name="Rounded Rectangle 7"/>
-          <p:cNvSpPr/>
-          <p:nvPr/>
-        </p:nvSpPr>
-        <p:spPr>
-          <a:xfrm>
-            <a:off x="731520" y="1828800"/>
-            <a:ext cx="10515600" cy="109728"/>
-          </a:xfrm>
-          <a:prstGeom prst="roundRect">
-            <a:avLst/>
-          </a:prstGeom>
-          <a:solidFill>
-            <a:srgbClr val="00B4D8"/>
-          </a:solidFill>
-          <a:ln>
-            <a:noFill/>
-          </a:ln>
-        </p:spPr>
-        <p:style>
-          <a:lnRef idx="1">
-            <a:schemeClr val="accent1"/>
-          </a:lnRef>
-          <a:fillRef idx="3">
-            <a:schemeClr val="accent1"/>
-          </a:fillRef>
-          <a:effectRef idx="2">
-            <a:schemeClr val="accent1"/>
-          </a:effectRef>
-          <a:fontRef idx="minor">
-            <a:schemeClr val="lt1"/>
-          </a:fontRef>
-        </p:style>
-        <p:txBody>
-          <a:bodyPr rtlCol="0" anchor="ctr"/>
-          <a:lstStyle/>
-          <a:p>
-            <a:pPr algn="ctr"/>
-          </a:p>
-        </p:txBody>
-      </p:sp>
-      <p:sp>
-        <p:nvSpPr>
-          <p:cNvPr id="9" name="Oval 8"/>
-          <p:cNvSpPr/>
-          <p:nvPr/>
-        </p:nvSpPr>
-        <p:spPr>
-          <a:xfrm>
-            <a:off x="1097280" y="2377440"/>
-            <a:ext cx="457200" cy="457200"/>
-          </a:xfrm>
-          <a:prstGeom prst="ellipse">
-            <a:avLst/>
-          </a:prstGeom>
-          <a:solidFill>
-            <a:srgbClr val="00B4D8"/>
-          </a:solidFill>
-          <a:ln>
-            <a:noFill/>
-          </a:ln>
-        </p:spPr>
-        <p:style>
-          <a:lnRef idx="1">
-            <a:schemeClr val="accent1"/>
-          </a:lnRef>
-          <a:fillRef idx="3">
-            <a:schemeClr val="accent1"/>
-          </a:fillRef>
-          <a:effectRef idx="2">
-            <a:schemeClr val="accent1"/>
-          </a:effectRef>
-          <a:fontRef idx="minor">
-            <a:schemeClr val="lt1"/>
-          </a:fontRef>
-        </p:style>
-        <p:txBody>
-          <a:bodyPr rtlCol="0" anchor="ctr" wrap="none"/>
-          <a:lstStyle/>
-          <a:p>
-            <a:pPr algn="ctr"/>
-            <a:r>
-              <a:rPr sz="1100" b="1">
-                <a:solidFill>
-                  <a:srgbClr val="FFFFFF"/>
-                </a:solidFill>
-                <a:latin typeface="Segoe UI"/>
-              </a:rPr>
-              <a:t>1</a:t>
-            </a:r>
-          </a:p>
-        </p:txBody>
-      </p:sp>
-      <p:sp>
-        <p:nvSpPr>
-          <p:cNvPr id="10" name="TextBox 9"/>
+              <a:t>PYTANIA OTWIERAJACE</a:t>
+            </a:r>
+          </a:p>
+        </p:txBody>
+      </p:sp>
+      <p:sp>
+        <p:nvSpPr>
+          <p:cNvPr id="8" name="TextBox 7"/>
           <p:cNvSpPr txBox="1"/>
           <p:nvPr/>
         </p:nvSpPr>
         <p:spPr>
           <a:xfrm>
-            <a:off x="1828800" y="2377440"/>
-            <a:ext cx="8961120" cy="731520"/>
+            <a:off x="1097280" y="2286000"/>
+            <a:ext cx="9875520" cy="3657600"/>
           </a:xfrm>
           <a:prstGeom prst="rect">
             <a:avLst/>
@@ -6907,193 +5855,53 @@
           </a:bodyPr>
           <a:lstStyle/>
           <a:p>
-            <a:pPr algn="l">
-              <a:defRPr sz="1400" b="0">
-                <a:solidFill>
-                  <a:srgbClr val="1B2B3C"/>
-                </a:solidFill>
-                <a:latin typeface="Segoe UI"/>
-              </a:defRPr>
+            <a:pPr>
+              <a:spcAft>
+                <a:spcPts val="2400"/>
+              </a:spcAft>
             </a:pPr>
             <a:r>
-              <a:t>Jakie były motywacje by lokować oszczędności poza kontem bankowym?</a:t>
-            </a:r>
-          </a:p>
-        </p:txBody>
-      </p:sp>
-      <p:sp>
-        <p:nvSpPr>
-          <p:cNvPr id="11" name="Rounded Rectangle 10"/>
-          <p:cNvSpPr/>
-          <p:nvPr/>
-        </p:nvSpPr>
-        <p:spPr>
-          <a:xfrm>
-            <a:off x="731520" y="3840480"/>
-            <a:ext cx="10515600" cy="1645920"/>
-          </a:xfrm>
-          <a:prstGeom prst="roundRect">
-            <a:avLst/>
-          </a:prstGeom>
-          <a:solidFill>
-            <a:srgbClr val="FFFFFF"/>
-          </a:solidFill>
-          <a:ln w="6350">
-            <a:solidFill>
-              <a:srgbClr val="E0E0E0"/>
-            </a:solidFill>
-          </a:ln>
-          <a:effectLst/>
-        </p:spPr>
-        <p:style>
-          <a:lnRef idx="1">
-            <a:schemeClr val="accent1"/>
-          </a:lnRef>
-          <a:fillRef idx="3">
-            <a:schemeClr val="accent1"/>
-          </a:fillRef>
-          <a:effectRef idx="2">
-            <a:schemeClr val="accent1"/>
-          </a:effectRef>
-          <a:fontRef idx="minor">
-            <a:schemeClr val="lt1"/>
-          </a:fontRef>
-        </p:style>
-        <p:txBody>
-          <a:bodyPr rtlCol="0" anchor="ctr"/>
-          <a:lstStyle/>
-          <a:p>
-            <a:pPr algn="ctr"/>
-          </a:p>
-        </p:txBody>
-      </p:sp>
-      <p:sp>
-        <p:nvSpPr>
-          <p:cNvPr id="12" name="Rounded Rectangle 11"/>
-          <p:cNvSpPr/>
-          <p:nvPr/>
-        </p:nvSpPr>
-        <p:spPr>
-          <a:xfrm>
-            <a:off x="731520" y="3840480"/>
-            <a:ext cx="10515600" cy="109728"/>
-          </a:xfrm>
-          <a:prstGeom prst="roundRect">
-            <a:avLst/>
-          </a:prstGeom>
-          <a:solidFill>
-            <a:srgbClr val="00B4D8"/>
-          </a:solidFill>
-          <a:ln>
-            <a:noFill/>
-          </a:ln>
-        </p:spPr>
-        <p:style>
-          <a:lnRef idx="1">
-            <a:schemeClr val="accent1"/>
-          </a:lnRef>
-          <a:fillRef idx="3">
-            <a:schemeClr val="accent1"/>
-          </a:fillRef>
-          <a:effectRef idx="2">
-            <a:schemeClr val="accent1"/>
-          </a:effectRef>
-          <a:fontRef idx="minor">
-            <a:schemeClr val="lt1"/>
-          </a:fontRef>
-        </p:style>
-        <p:txBody>
-          <a:bodyPr rtlCol="0" anchor="ctr"/>
-          <a:lstStyle/>
-          <a:p>
-            <a:pPr algn="ctr"/>
-          </a:p>
-        </p:txBody>
-      </p:sp>
-      <p:sp>
-        <p:nvSpPr>
-          <p:cNvPr id="13" name="Oval 12"/>
-          <p:cNvSpPr/>
-          <p:nvPr/>
-        </p:nvSpPr>
-        <p:spPr>
-          <a:xfrm>
-            <a:off x="1097280" y="4389120"/>
-            <a:ext cx="457200" cy="457200"/>
-          </a:xfrm>
-          <a:prstGeom prst="ellipse">
-            <a:avLst/>
-          </a:prstGeom>
-          <a:solidFill>
-            <a:srgbClr val="00B4D8"/>
-          </a:solidFill>
-          <a:ln>
-            <a:noFill/>
-          </a:ln>
-        </p:spPr>
-        <p:style>
-          <a:lnRef idx="1">
-            <a:schemeClr val="accent1"/>
-          </a:lnRef>
-          <a:fillRef idx="3">
-            <a:schemeClr val="accent1"/>
-          </a:fillRef>
-          <a:effectRef idx="2">
-            <a:schemeClr val="accent1"/>
-          </a:effectRef>
-          <a:fontRef idx="minor">
-            <a:schemeClr val="lt1"/>
-          </a:fontRef>
-        </p:style>
-        <p:txBody>
-          <a:bodyPr rtlCol="0" anchor="ctr" wrap="none"/>
-          <a:lstStyle/>
-          <a:p>
-            <a:pPr algn="ctr"/>
-            <a:r>
-              <a:rPr sz="1100" b="1">
-                <a:solidFill>
-                  <a:srgbClr val="FFFFFF"/>
-                </a:solidFill>
-                <a:latin typeface="Segoe UI"/>
-              </a:rPr>
-              <a:t>2</a:t>
-            </a:r>
-          </a:p>
-        </p:txBody>
-      </p:sp>
-      <p:sp>
-        <p:nvSpPr>
-          <p:cNvPr id="14" name="TextBox 13"/>
-          <p:cNvSpPr txBox="1"/>
-          <p:nvPr/>
-        </p:nvSpPr>
-        <p:spPr>
-          <a:xfrm>
-            <a:off x="1828800" y="4389120"/>
-            <a:ext cx="8961120" cy="731520"/>
-          </a:xfrm>
-          <a:prstGeom prst="rect">
-            <a:avLst/>
-          </a:prstGeom>
-          <a:noFill/>
-        </p:spPr>
-        <p:txBody>
-          <a:bodyPr wrap="square">
-            <a:spAutoFit/>
-          </a:bodyPr>
-          <a:lstStyle/>
-          <a:p>
-            <a:pPr algn="l">
-              <a:defRPr sz="1400" b="0">
-                <a:solidFill>
-                  <a:srgbClr val="1B2B3C"/>
-                </a:solidFill>
-                <a:latin typeface="Segoe UI"/>
-              </a:defRPr>
+              <a:rPr sz="1400" b="1">
+                <a:solidFill>
+                  <a:srgbClr val="00B4D8"/>
+                </a:solidFill>
+                <a:latin typeface="Segoe UI"/>
+              </a:rPr>
+              <a:t>1.  </a:t>
+            </a:r>
+            <a:r>
+              <a:rPr sz="1400">
+                <a:solidFill>
+                  <a:srgbClr val="1A1A2E"/>
+                </a:solidFill>
+                <a:latin typeface="Segoe UI"/>
+              </a:rPr>
+              <a:t>Jakie byly Pana/Pani motywacje, zeby zaczac lokowac oszczednosci poza kontem bankowym lub lokata?</a:t>
+            </a:r>
+          </a:p>
+          <a:p>
+            <a:pPr>
+              <a:spcAft>
+                <a:spcPts val="2400"/>
+              </a:spcAft>
             </a:pPr>
             <a:r>
-              <a:t>Z jakich aplikacji Pan(i) korzysta i dlaczego?</a:t>
+              <a:rPr sz="1400" b="1">
+                <a:solidFill>
+                  <a:srgbClr val="00B4D8"/>
+                </a:solidFill>
+                <a:latin typeface="Segoe UI"/>
+              </a:rPr>
+              <a:t>2.  </a:t>
+            </a:r>
+            <a:r>
+              <a:rPr sz="1400">
+                <a:solidFill>
+                  <a:srgbClr val="1A1A2E"/>
+                </a:solidFill>
+                <a:latin typeface="Segoe UI"/>
+              </a:rPr>
+              <a:t>Z jakich aplikacji inwestycyjnych Pan(i) korzysta i co zadecydowalo o ich wyborze?</a:t>
             </a:r>
           </a:p>
         </p:txBody>
@@ -7112,7 +5920,7 @@
     <p:bg>
       <p:bgPr>
         <a:solidFill>
-          <a:srgbClr val="F8F9FA"/>
+          <a:srgbClr val="F4F5F7"/>
         </a:solidFill>
         <a:effectLst/>
       </p:bgPr>
@@ -7133,13 +5941,13 @@
         <p:spPr>
           <a:xfrm>
             <a:off x="0" y="0"/>
-            <a:ext cx="137160" cy="6858000"/>
+            <a:ext cx="12191695" cy="1097280"/>
           </a:xfrm>
           <a:prstGeom prst="rect">
             <a:avLst/>
           </a:prstGeom>
           <a:solidFill>
-            <a:srgbClr val="F4A261"/>
+            <a:srgbClr val="0D1B2A"/>
           </a:solidFill>
           <a:ln>
             <a:noFill/>
@@ -7169,20 +5977,56 @@
       </p:sp>
       <p:sp>
         <p:nvSpPr>
-          <p:cNvPr id="3" name="Rectangle 2"/>
+          <p:cNvPr id="3" name="TextBox 2"/>
+          <p:cNvSpPr txBox="1"/>
+          <p:nvPr/>
+        </p:nvSpPr>
+        <p:spPr>
+          <a:xfrm>
+            <a:off x="731520" y="228600"/>
+            <a:ext cx="10058400" cy="640080"/>
+          </a:xfrm>
+          <a:prstGeom prst="rect">
+            <a:avLst/>
+          </a:prstGeom>
+          <a:noFill/>
+        </p:spPr>
+        <p:txBody>
+          <a:bodyPr wrap="square">
+            <a:spAutoFit/>
+          </a:bodyPr>
+          <a:lstStyle/>
+          <a:p>
+            <a:pPr>
+              <a:defRPr sz="2600" b="1">
+                <a:solidFill>
+                  <a:srgbClr val="FFFFFF"/>
+                </a:solidFill>
+                <a:latin typeface="Segoe UI"/>
+              </a:defRPr>
+            </a:pPr>
+            <a:r>
+              <a:t>Scenariusz wywiadu – B. Część główna</a:t>
+            </a:r>
+          </a:p>
+        </p:txBody>
+      </p:sp>
+      <p:sp>
+        <p:nvSpPr>
+          <p:cNvPr id="4" name="Rectangle 3"/>
           <p:cNvSpPr/>
           <p:nvPr/>
         </p:nvSpPr>
         <p:spPr>
           <a:xfrm>
-            <a:off x="0" y="6583680"/>
-            <a:ext cx="12191695" cy="274320"/>
+            <a:off x="731520" y="960120"/>
+            <a:ext cx="3657600" cy="36576"/>
           </a:xfrm>
           <a:prstGeom prst="rect">
             <a:avLst/>
           </a:prstGeom>
           <a:solidFill>
-            <a:srgbClr val="F4A261"/>
+            <a:srgbClr val="00B4D8"/>
           </a:solidFill>
           <a:ln>
             <a:noFill/>
@@ -7212,22 +6056,20 @@
       </p:sp>
       <p:sp>
         <p:nvSpPr>
-          <p:cNvPr id="4" name="Oval 3"/>
+          <p:cNvPr id="5" name="Rounded Rectangle 4"/>
           <p:cNvSpPr/>
           <p:nvPr/>
         </p:nvSpPr>
         <p:spPr>
           <a:xfrm>
-            <a:off x="10058400" y="-731520"/>
-            <a:ext cx="2743200" cy="2743200"/>
-          </a:xfrm>
-          <a:prstGeom prst="ellipse">
+            <a:off x="585216" y="1408176"/>
+            <a:ext cx="11064240" cy="5029200"/>
+          </a:xfrm>
+          <a:prstGeom prst="roundRect">
             <a:avLst/>
           </a:prstGeom>
           <a:solidFill>
-            <a:srgbClr val="1B2838">
-              <a:alpha val="12000"/>
-            </a:srgbClr>
+            <a:srgbClr val="E0E1E3"/>
           </a:solidFill>
           <a:ln>
             <a:noFill/>
@@ -7257,25 +6099,25 @@
       </p:sp>
       <p:sp>
         <p:nvSpPr>
-          <p:cNvPr id="5" name="Oval 4"/>
+          <p:cNvPr id="6" name="Rounded Rectangle 5"/>
           <p:cNvSpPr/>
           <p:nvPr/>
         </p:nvSpPr>
         <p:spPr>
           <a:xfrm>
-            <a:off x="-914400" y="5029200"/>
-            <a:ext cx="2286000" cy="2286000"/>
-          </a:xfrm>
-          <a:prstGeom prst="ellipse">
+            <a:off x="548640" y="1371600"/>
+            <a:ext cx="11064240" cy="5029200"/>
+          </a:xfrm>
+          <a:prstGeom prst="roundRect">
             <a:avLst/>
           </a:prstGeom>
           <a:solidFill>
-            <a:srgbClr val="F4A261">
-              <a:alpha val="9999"/>
-            </a:srgbClr>
+            <a:srgbClr val="FFFFFF"/>
           </a:solidFill>
-          <a:ln>
-            <a:noFill/>
+          <a:ln w="9525">
+            <a:solidFill>
+              <a:srgbClr val="E8E9EB"/>
+            </a:solidFill>
           </a:ln>
         </p:spPr>
         <p:style>
@@ -7302,14 +6144,14 @@
       </p:sp>
       <p:sp>
         <p:nvSpPr>
-          <p:cNvPr id="6" name="TextBox 5"/>
+          <p:cNvPr id="7" name="TextBox 6"/>
           <p:cNvSpPr txBox="1"/>
           <p:nvPr/>
         </p:nvSpPr>
         <p:spPr>
           <a:xfrm>
-            <a:off x="548640" y="274320"/>
-            <a:ext cx="9144000" cy="731520"/>
+            <a:off x="914400" y="1645920"/>
+            <a:ext cx="5486400" cy="365760"/>
           </a:xfrm>
           <a:prstGeom prst="rect">
             <a:avLst/>
@@ -7323,67 +6165,15 @@
           <a:lstStyle/>
           <a:p>
             <a:pPr algn="l">
-              <a:defRPr sz="2800" b="1">
-                <a:solidFill>
-                  <a:srgbClr val="1B2838"/>
+              <a:defRPr sz="1100" b="1">
+                <a:solidFill>
+                  <a:srgbClr val="4A4A5A"/>
                 </a:solidFill>
                 <a:latin typeface="Segoe UI"/>
               </a:defRPr>
             </a:pPr>
             <a:r>
-              <a:t>Scenariusz wywiadu – B. Część główna</a:t>
-            </a:r>
-          </a:p>
-        </p:txBody>
-      </p:sp>
-      <p:sp>
-        <p:nvSpPr>
-          <p:cNvPr id="7" name="Oval 6"/>
-          <p:cNvSpPr/>
-          <p:nvPr/>
-        </p:nvSpPr>
-        <p:spPr>
-          <a:xfrm>
-            <a:off x="731520" y="1280160"/>
-            <a:ext cx="347472" cy="347472"/>
-          </a:xfrm>
-          <a:prstGeom prst="ellipse">
-            <a:avLst/>
-          </a:prstGeom>
-          <a:solidFill>
-            <a:srgbClr val="F4A261"/>
-          </a:solidFill>
-          <a:ln>
-            <a:noFill/>
-          </a:ln>
-        </p:spPr>
-        <p:style>
-          <a:lnRef idx="1">
-            <a:schemeClr val="accent1"/>
-          </a:lnRef>
-          <a:fillRef idx="3">
-            <a:schemeClr val="accent1"/>
-          </a:fillRef>
-          <a:effectRef idx="2">
-            <a:schemeClr val="accent1"/>
-          </a:effectRef>
-          <a:fontRef idx="minor">
-            <a:schemeClr val="lt1"/>
-          </a:fontRef>
-        </p:style>
-        <p:txBody>
-          <a:bodyPr rtlCol="0" anchor="ctr" wrap="none"/>
-          <a:lstStyle/>
-          <a:p>
-            <a:pPr algn="ctr"/>
-            <a:r>
-              <a:rPr sz="1100" b="1">
-                <a:solidFill>
-                  <a:srgbClr val="FFFFFF"/>
-                </a:solidFill>
-                <a:latin typeface="Segoe UI"/>
-              </a:rPr>
-              <a:t>3</a:t>
+              <a:t>PYTANIA GLOWNE</a:t>
             </a:r>
           </a:p>
         </p:txBody>
@@ -7396,8 +6186,8 @@
         </p:nvSpPr>
         <p:spPr>
           <a:xfrm>
-            <a:off x="1280160" y="1280160"/>
-            <a:ext cx="10058400" cy="640080"/>
+            <a:off x="1097280" y="2194560"/>
+            <a:ext cx="9875520" cy="4114800"/>
           </a:xfrm>
           <a:prstGeom prst="rect">
             <a:avLst/>
@@ -7410,544 +6200,178 @@
           </a:bodyPr>
           <a:lstStyle/>
           <a:p>
-            <a:pPr algn="l">
-              <a:defRPr sz="1200" b="0">
-                <a:solidFill>
-                  <a:srgbClr val="1B2B3C"/>
-                </a:solidFill>
-                <a:latin typeface="Segoe UI"/>
-              </a:defRPr>
+            <a:pPr>
+              <a:spcAft>
+                <a:spcPts val="1000"/>
+              </a:spcAft>
             </a:pPr>
             <a:r>
-              <a:t>Opowieść o pierwszej transakcji krok po kroku</a:t>
-            </a:r>
-          </a:p>
-        </p:txBody>
-      </p:sp>
-      <p:sp>
-        <p:nvSpPr>
-          <p:cNvPr id="9" name="Oval 8"/>
-          <p:cNvSpPr/>
-          <p:nvPr/>
-        </p:nvSpPr>
-        <p:spPr>
-          <a:xfrm>
-            <a:off x="731520" y="2029967"/>
-            <a:ext cx="347472" cy="347472"/>
-          </a:xfrm>
-          <a:prstGeom prst="ellipse">
-            <a:avLst/>
-          </a:prstGeom>
-          <a:solidFill>
-            <a:srgbClr val="F4A261"/>
-          </a:solidFill>
-          <a:ln>
-            <a:noFill/>
-          </a:ln>
-        </p:spPr>
-        <p:style>
-          <a:lnRef idx="1">
-            <a:schemeClr val="accent1"/>
-          </a:lnRef>
-          <a:fillRef idx="3">
-            <a:schemeClr val="accent1"/>
-          </a:fillRef>
-          <a:effectRef idx="2">
-            <a:schemeClr val="accent1"/>
-          </a:effectRef>
-          <a:fontRef idx="minor">
-            <a:schemeClr val="lt1"/>
-          </a:fontRef>
-        </p:style>
-        <p:txBody>
-          <a:bodyPr rtlCol="0" anchor="ctr" wrap="none"/>
-          <a:lstStyle/>
-          <a:p>
-            <a:pPr algn="ctr"/>
-            <a:r>
-              <a:rPr sz="1100" b="1">
-                <a:solidFill>
-                  <a:srgbClr val="FFFFFF"/>
-                </a:solidFill>
-                <a:latin typeface="Segoe UI"/>
-              </a:rPr>
-              <a:t>4</a:t>
-            </a:r>
-          </a:p>
-        </p:txBody>
-      </p:sp>
-      <p:sp>
-        <p:nvSpPr>
-          <p:cNvPr id="10" name="TextBox 9"/>
-          <p:cNvSpPr txBox="1"/>
-          <p:nvPr/>
-        </p:nvSpPr>
-        <p:spPr>
-          <a:xfrm>
-            <a:off x="1280160" y="2029967"/>
-            <a:ext cx="10058400" cy="640080"/>
-          </a:xfrm>
-          <a:prstGeom prst="rect">
-            <a:avLst/>
-          </a:prstGeom>
-          <a:noFill/>
-        </p:spPr>
-        <p:txBody>
-          <a:bodyPr wrap="square">
-            <a:spAutoFit/>
-          </a:bodyPr>
-          <a:lstStyle/>
-          <a:p>
-            <a:pPr algn="l">
-              <a:defRPr sz="1200" b="0">
-                <a:solidFill>
-                  <a:srgbClr val="1B2B3C"/>
-                </a:solidFill>
-                <a:latin typeface="Segoe UI"/>
-              </a:defRPr>
+              <a:rPr sz="1200" b="1">
+                <a:solidFill>
+                  <a:srgbClr val="00B4D8"/>
+                </a:solidFill>
+                <a:latin typeface="Segoe UI"/>
+              </a:rPr>
+              <a:t>3.  </a:t>
+            </a:r>
+            <a:r>
+              <a:rPr sz="1200">
+                <a:solidFill>
+                  <a:srgbClr val="1A1A2E"/>
+                </a:solidFill>
+                <a:latin typeface="Segoe UI"/>
+              </a:rPr>
+              <a:t>Prosze opowiedziec o pierwszej transakcji krok po kroku</a:t>
+            </a:r>
+          </a:p>
+          <a:p>
+            <a:pPr>
+              <a:spcAft>
+                <a:spcPts val="1000"/>
+              </a:spcAft>
             </a:pPr>
             <a:r>
-              <a:t>Jak aplikacja pomaga zrozumieć w co inwestowane są pieniądze?</a:t>
-            </a:r>
-          </a:p>
-        </p:txBody>
-      </p:sp>
-      <p:sp>
-        <p:nvSpPr>
-          <p:cNvPr id="11" name="Oval 10"/>
-          <p:cNvSpPr/>
-          <p:nvPr/>
-        </p:nvSpPr>
-        <p:spPr>
-          <a:xfrm>
-            <a:off x="731520" y="2779776"/>
-            <a:ext cx="347472" cy="347472"/>
-          </a:xfrm>
-          <a:prstGeom prst="ellipse">
-            <a:avLst/>
-          </a:prstGeom>
-          <a:solidFill>
-            <a:srgbClr val="F4A261"/>
-          </a:solidFill>
-          <a:ln>
-            <a:noFill/>
-          </a:ln>
-        </p:spPr>
-        <p:style>
-          <a:lnRef idx="1">
-            <a:schemeClr val="accent1"/>
-          </a:lnRef>
-          <a:fillRef idx="3">
-            <a:schemeClr val="accent1"/>
-          </a:fillRef>
-          <a:effectRef idx="2">
-            <a:schemeClr val="accent1"/>
-          </a:effectRef>
-          <a:fontRef idx="minor">
-            <a:schemeClr val="lt1"/>
-          </a:fontRef>
-        </p:style>
-        <p:txBody>
-          <a:bodyPr rtlCol="0" anchor="ctr" wrap="none"/>
-          <a:lstStyle/>
-          <a:p>
-            <a:pPr algn="ctr"/>
-            <a:r>
-              <a:rPr sz="1100" b="1">
-                <a:solidFill>
-                  <a:srgbClr val="FFFFFF"/>
-                </a:solidFill>
-                <a:latin typeface="Segoe UI"/>
-              </a:rPr>
-              <a:t>5</a:t>
-            </a:r>
-          </a:p>
-        </p:txBody>
-      </p:sp>
-      <p:sp>
-        <p:nvSpPr>
-          <p:cNvPr id="12" name="TextBox 11"/>
-          <p:cNvSpPr txBox="1"/>
-          <p:nvPr/>
-        </p:nvSpPr>
-        <p:spPr>
-          <a:xfrm>
-            <a:off x="1280160" y="2779776"/>
-            <a:ext cx="10058400" cy="640080"/>
-          </a:xfrm>
-          <a:prstGeom prst="rect">
-            <a:avLst/>
-          </a:prstGeom>
-          <a:noFill/>
-        </p:spPr>
-        <p:txBody>
-          <a:bodyPr wrap="square">
-            <a:spAutoFit/>
-          </a:bodyPr>
-          <a:lstStyle/>
-          <a:p>
-            <a:pPr algn="l">
-              <a:defRPr sz="1200" b="0">
-                <a:solidFill>
-                  <a:srgbClr val="1B2B3C"/>
-                </a:solidFill>
-                <a:latin typeface="Segoe UI"/>
-              </a:defRPr>
+              <a:rPr sz="1200" b="1">
+                <a:solidFill>
+                  <a:srgbClr val="00B4D8"/>
+                </a:solidFill>
+                <a:latin typeface="Segoe UI"/>
+              </a:rPr>
+              <a:t>4.  </a:t>
+            </a:r>
+            <a:r>
+              <a:rPr sz="1200">
+                <a:solidFill>
+                  <a:srgbClr val="1A1A2E"/>
+                </a:solidFill>
+                <a:latin typeface="Segoe UI"/>
+              </a:rPr>
+              <a:t>Jak aplikacja pomaga zrozumiec, w co inwestowane sa pieniadze?</a:t>
+            </a:r>
+          </a:p>
+          <a:p>
+            <a:pPr>
+              <a:spcAft>
+                <a:spcPts val="1000"/>
+              </a:spcAft>
             </a:pPr>
             <a:r>
-              <a:t>Decyzja pod wpływem impulsu z ekranu głównego?</a:t>
-            </a:r>
-          </a:p>
-        </p:txBody>
-      </p:sp>
-      <p:sp>
-        <p:nvSpPr>
-          <p:cNvPr id="13" name="Oval 12"/>
-          <p:cNvSpPr/>
-          <p:nvPr/>
-        </p:nvSpPr>
-        <p:spPr>
-          <a:xfrm>
-            <a:off x="731520" y="3529584"/>
-            <a:ext cx="347472" cy="347472"/>
-          </a:xfrm>
-          <a:prstGeom prst="ellipse">
-            <a:avLst/>
-          </a:prstGeom>
-          <a:solidFill>
-            <a:srgbClr val="F4A261"/>
-          </a:solidFill>
-          <a:ln>
-            <a:noFill/>
-          </a:ln>
-        </p:spPr>
-        <p:style>
-          <a:lnRef idx="1">
-            <a:schemeClr val="accent1"/>
-          </a:lnRef>
-          <a:fillRef idx="3">
-            <a:schemeClr val="accent1"/>
-          </a:fillRef>
-          <a:effectRef idx="2">
-            <a:schemeClr val="accent1"/>
-          </a:effectRef>
-          <a:fontRef idx="minor">
-            <a:schemeClr val="lt1"/>
-          </a:fontRef>
-        </p:style>
-        <p:txBody>
-          <a:bodyPr rtlCol="0" anchor="ctr" wrap="none"/>
-          <a:lstStyle/>
-          <a:p>
-            <a:pPr algn="ctr"/>
-            <a:r>
-              <a:rPr sz="1100" b="1">
-                <a:solidFill>
-                  <a:srgbClr val="FFFFFF"/>
-                </a:solidFill>
-                <a:latin typeface="Segoe UI"/>
-              </a:rPr>
-              <a:t>6</a:t>
-            </a:r>
-          </a:p>
-        </p:txBody>
-      </p:sp>
-      <p:sp>
-        <p:nvSpPr>
-          <p:cNvPr id="14" name="TextBox 13"/>
-          <p:cNvSpPr txBox="1"/>
-          <p:nvPr/>
-        </p:nvSpPr>
-        <p:spPr>
-          <a:xfrm>
-            <a:off x="1280160" y="3529584"/>
-            <a:ext cx="10058400" cy="640080"/>
-          </a:xfrm>
-          <a:prstGeom prst="rect">
-            <a:avLst/>
-          </a:prstGeom>
-          <a:noFill/>
-        </p:spPr>
-        <p:txBody>
-          <a:bodyPr wrap="square">
-            <a:spAutoFit/>
-          </a:bodyPr>
-          <a:lstStyle/>
-          <a:p>
-            <a:pPr algn="l">
-              <a:defRPr sz="1200" b="0">
-                <a:solidFill>
-                  <a:srgbClr val="1B2B3C"/>
-                </a:solidFill>
-                <a:latin typeface="Segoe UI"/>
-              </a:defRPr>
+              <a:rPr sz="1200" b="1">
+                <a:solidFill>
+                  <a:srgbClr val="00B4D8"/>
+                </a:solidFill>
+                <a:latin typeface="Segoe UI"/>
+              </a:rPr>
+              <a:t>5.  </a:t>
+            </a:r>
+            <a:r>
+              <a:rPr sz="1200">
+                <a:solidFill>
+                  <a:srgbClr val="1A1A2E"/>
+                </a:solidFill>
+                <a:latin typeface="Segoe UI"/>
+              </a:rPr>
+              <a:t>Czy zdarzyla sie decyzja pod wplywem impulsu z ekranu glownego?</a:t>
+            </a:r>
+          </a:p>
+          <a:p>
+            <a:pPr>
+              <a:spcAft>
+                <a:spcPts val="1000"/>
+              </a:spcAft>
             </a:pPr>
             <a:r>
-              <a:t>Wyjaśnienie swoimi słowami czym jest ETF/akcja</a:t>
-            </a:r>
-          </a:p>
-        </p:txBody>
-      </p:sp>
-      <p:sp>
-        <p:nvSpPr>
-          <p:cNvPr id="15" name="Oval 14"/>
-          <p:cNvSpPr/>
-          <p:nvPr/>
-        </p:nvSpPr>
-        <p:spPr>
-          <a:xfrm>
-            <a:off x="731520" y="4279392"/>
-            <a:ext cx="347472" cy="347472"/>
-          </a:xfrm>
-          <a:prstGeom prst="ellipse">
-            <a:avLst/>
-          </a:prstGeom>
-          <a:solidFill>
-            <a:srgbClr val="F4A261"/>
-          </a:solidFill>
-          <a:ln>
-            <a:noFill/>
-          </a:ln>
-        </p:spPr>
-        <p:style>
-          <a:lnRef idx="1">
-            <a:schemeClr val="accent1"/>
-          </a:lnRef>
-          <a:fillRef idx="3">
-            <a:schemeClr val="accent1"/>
-          </a:fillRef>
-          <a:effectRef idx="2">
-            <a:schemeClr val="accent1"/>
-          </a:effectRef>
-          <a:fontRef idx="minor">
-            <a:schemeClr val="lt1"/>
-          </a:fontRef>
-        </p:style>
-        <p:txBody>
-          <a:bodyPr rtlCol="0" anchor="ctr" wrap="none"/>
-          <a:lstStyle/>
-          <a:p>
-            <a:pPr algn="ctr"/>
-            <a:r>
-              <a:rPr sz="1100" b="1">
-                <a:solidFill>
-                  <a:srgbClr val="FFFFFF"/>
-                </a:solidFill>
-                <a:latin typeface="Segoe UI"/>
-              </a:rPr>
-              <a:t>7</a:t>
-            </a:r>
-          </a:p>
-        </p:txBody>
-      </p:sp>
-      <p:sp>
-        <p:nvSpPr>
-          <p:cNvPr id="16" name="TextBox 15"/>
-          <p:cNvSpPr txBox="1"/>
-          <p:nvPr/>
-        </p:nvSpPr>
-        <p:spPr>
-          <a:xfrm>
-            <a:off x="1280160" y="4279392"/>
-            <a:ext cx="10058400" cy="640080"/>
-          </a:xfrm>
-          <a:prstGeom prst="rect">
-            <a:avLst/>
-          </a:prstGeom>
-          <a:noFill/>
-        </p:spPr>
-        <p:txBody>
-          <a:bodyPr wrap="square">
-            <a:spAutoFit/>
-          </a:bodyPr>
-          <a:lstStyle/>
-          <a:p>
-            <a:pPr algn="l">
-              <a:defRPr sz="1200" b="0">
-                <a:solidFill>
-                  <a:srgbClr val="1B2B3C"/>
-                </a:solidFill>
-                <a:latin typeface="Segoe UI"/>
-              </a:defRPr>
+              <a:rPr sz="1200" b="1">
+                <a:solidFill>
+                  <a:srgbClr val="00B4D8"/>
+                </a:solidFill>
+                <a:latin typeface="Segoe UI"/>
+              </a:rPr>
+              <a:t>6.  </a:t>
+            </a:r>
+            <a:r>
+              <a:rPr sz="1200">
+                <a:solidFill>
+                  <a:srgbClr val="1A1A2E"/>
+                </a:solidFill>
+                <a:latin typeface="Segoe UI"/>
+              </a:rPr>
+              <a:t>Prosze wyjasnic swoimi slowami czym jest ETF lub akcja</a:t>
+            </a:r>
+          </a:p>
+          <a:p>
+            <a:pPr>
+              <a:spcAft>
+                <a:spcPts val="1000"/>
+              </a:spcAft>
             </a:pPr>
             <a:r>
-              <a:t>Reakcja na komunikaty o ryzyku utraty kapitału</a:t>
-            </a:r>
-          </a:p>
-        </p:txBody>
-      </p:sp>
-      <p:sp>
-        <p:nvSpPr>
-          <p:cNvPr id="17" name="Oval 16"/>
-          <p:cNvSpPr/>
-          <p:nvPr/>
-        </p:nvSpPr>
-        <p:spPr>
-          <a:xfrm>
-            <a:off x="731520" y="5029200"/>
-            <a:ext cx="347472" cy="347472"/>
-          </a:xfrm>
-          <a:prstGeom prst="ellipse">
-            <a:avLst/>
-          </a:prstGeom>
-          <a:solidFill>
-            <a:srgbClr val="F4A261"/>
-          </a:solidFill>
-          <a:ln>
-            <a:noFill/>
-          </a:ln>
-        </p:spPr>
-        <p:style>
-          <a:lnRef idx="1">
-            <a:schemeClr val="accent1"/>
-          </a:lnRef>
-          <a:fillRef idx="3">
-            <a:schemeClr val="accent1"/>
-          </a:fillRef>
-          <a:effectRef idx="2">
-            <a:schemeClr val="accent1"/>
-          </a:effectRef>
-          <a:fontRef idx="minor">
-            <a:schemeClr val="lt1"/>
-          </a:fontRef>
-        </p:style>
-        <p:txBody>
-          <a:bodyPr rtlCol="0" anchor="ctr" wrap="none"/>
-          <a:lstStyle/>
-          <a:p>
-            <a:pPr algn="ctr"/>
-            <a:r>
-              <a:rPr sz="1100" b="1">
-                <a:solidFill>
-                  <a:srgbClr val="FFFFFF"/>
-                </a:solidFill>
-                <a:latin typeface="Segoe UI"/>
-              </a:rPr>
-              <a:t>8</a:t>
-            </a:r>
-          </a:p>
-        </p:txBody>
-      </p:sp>
-      <p:sp>
-        <p:nvSpPr>
-          <p:cNvPr id="18" name="TextBox 17"/>
-          <p:cNvSpPr txBox="1"/>
-          <p:nvPr/>
-        </p:nvSpPr>
-        <p:spPr>
-          <a:xfrm>
-            <a:off x="1280160" y="5029200"/>
-            <a:ext cx="10058400" cy="640080"/>
-          </a:xfrm>
-          <a:prstGeom prst="rect">
-            <a:avLst/>
-          </a:prstGeom>
-          <a:noFill/>
-        </p:spPr>
-        <p:txBody>
-          <a:bodyPr wrap="square">
-            <a:spAutoFit/>
-          </a:bodyPr>
-          <a:lstStyle/>
-          <a:p>
-            <a:pPr algn="l">
-              <a:defRPr sz="1200" b="0">
-                <a:solidFill>
-                  <a:srgbClr val="1B2B3C"/>
-                </a:solidFill>
-                <a:latin typeface="Segoe UI"/>
-              </a:defRPr>
+              <a:rPr sz="1200" b="1">
+                <a:solidFill>
+                  <a:srgbClr val="00B4D8"/>
+                </a:solidFill>
+                <a:latin typeface="Segoe UI"/>
+              </a:rPr>
+              <a:t>7.  </a:t>
+            </a:r>
+            <a:r>
+              <a:rPr sz="1200">
+                <a:solidFill>
+                  <a:srgbClr val="1A1A2E"/>
+                </a:solidFill>
+                <a:latin typeface="Segoe UI"/>
+              </a:rPr>
+              <a:t>Jak reaguje Pan(i) na komunikaty o ryzyku utraty kapitalu?</a:t>
+            </a:r>
+          </a:p>
+          <a:p>
+            <a:pPr>
+              <a:spcAft>
+                <a:spcPts val="1000"/>
+              </a:spcAft>
             </a:pPr>
             <a:r>
-              <a:t>Co robi gdy portfel jest na czerwono?</a:t>
-            </a:r>
-          </a:p>
-        </p:txBody>
-      </p:sp>
-      <p:sp>
-        <p:nvSpPr>
-          <p:cNvPr id="19" name="Oval 18"/>
-          <p:cNvSpPr/>
-          <p:nvPr/>
-        </p:nvSpPr>
-        <p:spPr>
-          <a:xfrm>
-            <a:off x="731520" y="5779008"/>
-            <a:ext cx="347472" cy="347472"/>
-          </a:xfrm>
-          <a:prstGeom prst="ellipse">
-            <a:avLst/>
-          </a:prstGeom>
-          <a:solidFill>
-            <a:srgbClr val="F4A261"/>
-          </a:solidFill>
-          <a:ln>
-            <a:noFill/>
-          </a:ln>
-        </p:spPr>
-        <p:style>
-          <a:lnRef idx="1">
-            <a:schemeClr val="accent1"/>
-          </a:lnRef>
-          <a:fillRef idx="3">
-            <a:schemeClr val="accent1"/>
-          </a:fillRef>
-          <a:effectRef idx="2">
-            <a:schemeClr val="accent1"/>
-          </a:effectRef>
-          <a:fontRef idx="minor">
-            <a:schemeClr val="lt1"/>
-          </a:fontRef>
-        </p:style>
-        <p:txBody>
-          <a:bodyPr rtlCol="0" anchor="ctr" wrap="none"/>
-          <a:lstStyle/>
-          <a:p>
-            <a:pPr algn="ctr"/>
-            <a:r>
-              <a:rPr sz="1100" b="1">
-                <a:solidFill>
-                  <a:srgbClr val="FFFFFF"/>
-                </a:solidFill>
-                <a:latin typeface="Segoe UI"/>
-              </a:rPr>
-              <a:t>9</a:t>
-            </a:r>
-          </a:p>
-        </p:txBody>
-      </p:sp>
-      <p:sp>
-        <p:nvSpPr>
-          <p:cNvPr id="20" name="TextBox 19"/>
-          <p:cNvSpPr txBox="1"/>
-          <p:nvPr/>
-        </p:nvSpPr>
-        <p:spPr>
-          <a:xfrm>
-            <a:off x="1280160" y="5779008"/>
-            <a:ext cx="10058400" cy="640080"/>
-          </a:xfrm>
-          <a:prstGeom prst="rect">
-            <a:avLst/>
-          </a:prstGeom>
-          <a:noFill/>
-        </p:spPr>
-        <p:txBody>
-          <a:bodyPr wrap="square">
-            <a:spAutoFit/>
-          </a:bodyPr>
-          <a:lstStyle/>
-          <a:p>
-            <a:pPr algn="l">
-              <a:defRPr sz="1200" b="0">
-                <a:solidFill>
-                  <a:srgbClr val="1B2B3C"/>
-                </a:solidFill>
-                <a:latin typeface="Segoe UI"/>
-              </a:defRPr>
+              <a:rPr sz="1200" b="1">
+                <a:solidFill>
+                  <a:srgbClr val="00B4D8"/>
+                </a:solidFill>
+                <a:latin typeface="Segoe UI"/>
+              </a:rPr>
+              <a:t>8.  </a:t>
+            </a:r>
+            <a:r>
+              <a:rPr sz="1200">
+                <a:solidFill>
+                  <a:srgbClr val="1A1A2E"/>
+                </a:solidFill>
+                <a:latin typeface="Segoe UI"/>
+              </a:rPr>
+              <a:t>Co robi Pan(i) gdy portfel jest na czerwono (strata)?</a:t>
+            </a:r>
+          </a:p>
+          <a:p>
+            <a:pPr>
+              <a:spcAft>
+                <a:spcPts val="1000"/>
+              </a:spcAft>
             </a:pPr>
             <a:r>
-              <a:t>Czy wiedza o finansach wzrosła od użycia aplikacji?</a:t>
+              <a:rPr sz="1200" b="1">
+                <a:solidFill>
+                  <a:srgbClr val="00B4D8"/>
+                </a:solidFill>
+                <a:latin typeface="Segoe UI"/>
+              </a:rPr>
+              <a:t>9.  </a:t>
+            </a:r>
+            <a:r>
+              <a:rPr sz="1200">
+                <a:solidFill>
+                  <a:srgbClr val="1A1A2E"/>
+                </a:solidFill>
+                <a:latin typeface="Segoe UI"/>
+              </a:rPr>
+              <a:t>Czy wiedza o finansach wzrosla od momentu uzycia aplikacji?</a:t>
             </a:r>
           </a:p>
         </p:txBody>
@@ -7966,7 +6390,7 @@
     <p:bg>
       <p:bgPr>
         <a:solidFill>
-          <a:srgbClr val="FFFFFF"/>
+          <a:srgbClr val="F4F5F7"/>
         </a:solidFill>
         <a:effectLst/>
       </p:bgPr>
@@ -7987,13 +6411,13 @@
         <p:spPr>
           <a:xfrm>
             <a:off x="0" y="0"/>
-            <a:ext cx="137160" cy="6858000"/>
+            <a:ext cx="12191695" cy="1097280"/>
           </a:xfrm>
           <a:prstGeom prst="rect">
             <a:avLst/>
           </a:prstGeom>
           <a:solidFill>
-            <a:srgbClr val="1B2838"/>
+            <a:srgbClr val="0D1B2A"/>
           </a:solidFill>
           <a:ln>
             <a:noFill/>
@@ -8023,20 +6447,56 @@
       </p:sp>
       <p:sp>
         <p:nvSpPr>
-          <p:cNvPr id="3" name="Rectangle 2"/>
+          <p:cNvPr id="3" name="TextBox 2"/>
+          <p:cNvSpPr txBox="1"/>
+          <p:nvPr/>
+        </p:nvSpPr>
+        <p:spPr>
+          <a:xfrm>
+            <a:off x="731520" y="228600"/>
+            <a:ext cx="10058400" cy="640080"/>
+          </a:xfrm>
+          <a:prstGeom prst="rect">
+            <a:avLst/>
+          </a:prstGeom>
+          <a:noFill/>
+        </p:spPr>
+        <p:txBody>
+          <a:bodyPr wrap="square">
+            <a:spAutoFit/>
+          </a:bodyPr>
+          <a:lstStyle/>
+          <a:p>
+            <a:pPr>
+              <a:defRPr sz="2600" b="1">
+                <a:solidFill>
+                  <a:srgbClr val="FFFFFF"/>
+                </a:solidFill>
+                <a:latin typeface="Segoe UI"/>
+              </a:defRPr>
+            </a:pPr>
+            <a:r>
+              <a:t>Scenariusz wywiadu – C. Zakończenie</a:t>
+            </a:r>
+          </a:p>
+        </p:txBody>
+      </p:sp>
+      <p:sp>
+        <p:nvSpPr>
+          <p:cNvPr id="4" name="Rectangle 3"/>
           <p:cNvSpPr/>
           <p:nvPr/>
         </p:nvSpPr>
         <p:spPr>
           <a:xfrm>
-            <a:off x="0" y="6583680"/>
-            <a:ext cx="12191695" cy="274320"/>
+            <a:off x="731520" y="960120"/>
+            <a:ext cx="3657600" cy="36576"/>
           </a:xfrm>
           <a:prstGeom prst="rect">
             <a:avLst/>
           </a:prstGeom>
           <a:solidFill>
-            <a:srgbClr val="1B2838"/>
+            <a:srgbClr val="00B4D8"/>
           </a:solidFill>
           <a:ln>
             <a:noFill/>
@@ -8066,22 +6526,20 @@
       </p:sp>
       <p:sp>
         <p:nvSpPr>
-          <p:cNvPr id="4" name="Oval 3"/>
+          <p:cNvPr id="5" name="Rounded Rectangle 4"/>
           <p:cNvSpPr/>
           <p:nvPr/>
         </p:nvSpPr>
         <p:spPr>
           <a:xfrm>
-            <a:off x="10058400" y="-731520"/>
-            <a:ext cx="2743200" cy="2743200"/>
-          </a:xfrm>
-          <a:prstGeom prst="ellipse">
+            <a:off x="585216" y="1408176"/>
+            <a:ext cx="11064240" cy="5029200"/>
+          </a:xfrm>
+          <a:prstGeom prst="roundRect">
             <a:avLst/>
           </a:prstGeom>
           <a:solidFill>
-            <a:srgbClr val="1B2838">
-              <a:alpha val="12000"/>
-            </a:srgbClr>
+            <a:srgbClr val="E0E1E3"/>
           </a:solidFill>
           <a:ln>
             <a:noFill/>
@@ -8111,25 +6569,25 @@
       </p:sp>
       <p:sp>
         <p:nvSpPr>
-          <p:cNvPr id="5" name="Oval 4"/>
+          <p:cNvPr id="6" name="Rounded Rectangle 5"/>
           <p:cNvSpPr/>
           <p:nvPr/>
         </p:nvSpPr>
         <p:spPr>
           <a:xfrm>
-            <a:off x="-914400" y="5029200"/>
-            <a:ext cx="2286000" cy="2286000"/>
-          </a:xfrm>
-          <a:prstGeom prst="ellipse">
+            <a:off x="548640" y="1371600"/>
+            <a:ext cx="11064240" cy="5029200"/>
+          </a:xfrm>
+          <a:prstGeom prst="roundRect">
             <a:avLst/>
           </a:prstGeom>
           <a:solidFill>
-            <a:srgbClr val="F4A261">
-              <a:alpha val="9999"/>
-            </a:srgbClr>
+            <a:srgbClr val="FFFFFF"/>
           </a:solidFill>
-          <a:ln>
-            <a:noFill/>
+          <a:ln w="9525">
+            <a:solidFill>
+              <a:srgbClr val="E8E9EB"/>
+            </a:solidFill>
           </a:ln>
         </p:spPr>
         <p:style>
@@ -8156,14 +6614,14 @@
       </p:sp>
       <p:sp>
         <p:nvSpPr>
-          <p:cNvPr id="6" name="TextBox 5"/>
+          <p:cNvPr id="7" name="TextBox 6"/>
           <p:cNvSpPr txBox="1"/>
           <p:nvPr/>
         </p:nvSpPr>
         <p:spPr>
           <a:xfrm>
-            <a:off x="548640" y="274320"/>
-            <a:ext cx="9144000" cy="731520"/>
+            <a:off x="914400" y="1645920"/>
+            <a:ext cx="5486400" cy="365760"/>
           </a:xfrm>
           <a:prstGeom prst="rect">
             <a:avLst/>
@@ -8177,170 +6635,29 @@
           <a:lstStyle/>
           <a:p>
             <a:pPr algn="l">
-              <a:defRPr sz="2800" b="1">
-                <a:solidFill>
-                  <a:srgbClr val="1B2838"/>
+              <a:defRPr sz="1100" b="1">
+                <a:solidFill>
+                  <a:srgbClr val="4A4A5A"/>
                 </a:solidFill>
                 <a:latin typeface="Segoe UI"/>
               </a:defRPr>
             </a:pPr>
             <a:r>
-              <a:t>Scenariusz wywiadu – C. Zakończenie</a:t>
-            </a:r>
-          </a:p>
-        </p:txBody>
-      </p:sp>
-      <p:sp>
-        <p:nvSpPr>
-          <p:cNvPr id="7" name="Rounded Rectangle 6"/>
-          <p:cNvSpPr/>
-          <p:nvPr/>
-        </p:nvSpPr>
-        <p:spPr>
-          <a:xfrm>
-            <a:off x="731520" y="1828800"/>
-            <a:ext cx="10515600" cy="1188720"/>
-          </a:xfrm>
-          <a:prstGeom prst="roundRect">
-            <a:avLst/>
-          </a:prstGeom>
-          <a:solidFill>
-            <a:srgbClr val="FFFFFF"/>
-          </a:solidFill>
-          <a:ln w="6350">
-            <a:solidFill>
-              <a:srgbClr val="E0E0E0"/>
-            </a:solidFill>
-          </a:ln>
-          <a:effectLst/>
-        </p:spPr>
-        <p:style>
-          <a:lnRef idx="1">
-            <a:schemeClr val="accent1"/>
-          </a:lnRef>
-          <a:fillRef idx="3">
-            <a:schemeClr val="accent1"/>
-          </a:fillRef>
-          <a:effectRef idx="2">
-            <a:schemeClr val="accent1"/>
-          </a:effectRef>
-          <a:fontRef idx="minor">
-            <a:schemeClr val="lt1"/>
-          </a:fontRef>
-        </p:style>
-        <p:txBody>
-          <a:bodyPr rtlCol="0" anchor="ctr"/>
-          <a:lstStyle/>
-          <a:p>
-            <a:pPr algn="ctr"/>
-          </a:p>
-        </p:txBody>
-      </p:sp>
-      <p:sp>
-        <p:nvSpPr>
-          <p:cNvPr id="8" name="Rounded Rectangle 7"/>
-          <p:cNvSpPr/>
-          <p:nvPr/>
-        </p:nvSpPr>
-        <p:spPr>
-          <a:xfrm>
-            <a:off x="731520" y="1828800"/>
-            <a:ext cx="10515600" cy="109728"/>
-          </a:xfrm>
-          <a:prstGeom prst="roundRect">
-            <a:avLst/>
-          </a:prstGeom>
-          <a:solidFill>
-            <a:srgbClr val="1B2838"/>
-          </a:solidFill>
-          <a:ln>
-            <a:noFill/>
-          </a:ln>
-        </p:spPr>
-        <p:style>
-          <a:lnRef idx="1">
-            <a:schemeClr val="accent1"/>
-          </a:lnRef>
-          <a:fillRef idx="3">
-            <a:schemeClr val="accent1"/>
-          </a:fillRef>
-          <a:effectRef idx="2">
-            <a:schemeClr val="accent1"/>
-          </a:effectRef>
-          <a:fontRef idx="minor">
-            <a:schemeClr val="lt1"/>
-          </a:fontRef>
-        </p:style>
-        <p:txBody>
-          <a:bodyPr rtlCol="0" anchor="ctr"/>
-          <a:lstStyle/>
-          <a:p>
-            <a:pPr algn="ctr"/>
-          </a:p>
-        </p:txBody>
-      </p:sp>
-      <p:sp>
-        <p:nvSpPr>
-          <p:cNvPr id="9" name="Oval 8"/>
-          <p:cNvSpPr/>
-          <p:nvPr/>
-        </p:nvSpPr>
-        <p:spPr>
-          <a:xfrm>
-            <a:off x="1097280" y="2194560"/>
-            <a:ext cx="457200" cy="457200"/>
-          </a:xfrm>
-          <a:prstGeom prst="ellipse">
-            <a:avLst/>
-          </a:prstGeom>
-          <a:solidFill>
-            <a:srgbClr val="1B2838"/>
-          </a:solidFill>
-          <a:ln>
-            <a:noFill/>
-          </a:ln>
-        </p:spPr>
-        <p:style>
-          <a:lnRef idx="1">
-            <a:schemeClr val="accent1"/>
-          </a:lnRef>
-          <a:fillRef idx="3">
-            <a:schemeClr val="accent1"/>
-          </a:fillRef>
-          <a:effectRef idx="2">
-            <a:schemeClr val="accent1"/>
-          </a:effectRef>
-          <a:fontRef idx="minor">
-            <a:schemeClr val="lt1"/>
-          </a:fontRef>
-        </p:style>
-        <p:txBody>
-          <a:bodyPr rtlCol="0" anchor="ctr" wrap="none"/>
-          <a:lstStyle/>
-          <a:p>
-            <a:pPr algn="ctr"/>
-            <a:r>
-              <a:rPr sz="1100" b="1">
-                <a:solidFill>
-                  <a:srgbClr val="FFFFFF"/>
-                </a:solidFill>
-                <a:latin typeface="Segoe UI"/>
-              </a:rPr>
-              <a:t>10</a:t>
-            </a:r>
-          </a:p>
-        </p:txBody>
-      </p:sp>
-      <p:sp>
-        <p:nvSpPr>
-          <p:cNvPr id="10" name="TextBox 9"/>
+              <a:t>PYTANIA ZAMYKAJACE</a:t>
+            </a:r>
+          </a:p>
+        </p:txBody>
+      </p:sp>
+      <p:sp>
+        <p:nvSpPr>
+          <p:cNvPr id="8" name="TextBox 7"/>
           <p:cNvSpPr txBox="1"/>
           <p:nvPr/>
         </p:nvSpPr>
         <p:spPr>
           <a:xfrm>
-            <a:off x="1828800" y="2194560"/>
-            <a:ext cx="8961120" cy="640080"/>
+            <a:off x="1097280" y="2286000"/>
+            <a:ext cx="9875520" cy="3657600"/>
           </a:xfrm>
           <a:prstGeom prst="rect">
             <a:avLst/>
@@ -8353,370 +6670,78 @@
           </a:bodyPr>
           <a:lstStyle/>
           <a:p>
-            <a:pPr algn="l">
-              <a:defRPr sz="1400" b="0">
-                <a:solidFill>
-                  <a:srgbClr val="1B2B3C"/>
-                </a:solidFill>
-                <a:latin typeface="Segoe UI"/>
-              </a:defRPr>
+            <a:pPr>
+              <a:spcAft>
+                <a:spcPts val="2000"/>
+              </a:spcAft>
             </a:pPr>
             <a:r>
-              <a:t>Czy aplikacje powinny sprawdzać wiedzę przed zakupem?</a:t>
-            </a:r>
-          </a:p>
-        </p:txBody>
-      </p:sp>
-      <p:sp>
-        <p:nvSpPr>
-          <p:cNvPr id="11" name="Rounded Rectangle 10"/>
-          <p:cNvSpPr/>
-          <p:nvPr/>
-        </p:nvSpPr>
-        <p:spPr>
-          <a:xfrm>
-            <a:off x="731520" y="3291840"/>
-            <a:ext cx="10515600" cy="1188720"/>
-          </a:xfrm>
-          <a:prstGeom prst="roundRect">
-            <a:avLst/>
-          </a:prstGeom>
-          <a:solidFill>
-            <a:srgbClr val="FFFFFF"/>
-          </a:solidFill>
-          <a:ln w="6350">
-            <a:solidFill>
-              <a:srgbClr val="E0E0E0"/>
-            </a:solidFill>
-          </a:ln>
-          <a:effectLst/>
-        </p:spPr>
-        <p:style>
-          <a:lnRef idx="1">
-            <a:schemeClr val="accent1"/>
-          </a:lnRef>
-          <a:fillRef idx="3">
-            <a:schemeClr val="accent1"/>
-          </a:fillRef>
-          <a:effectRef idx="2">
-            <a:schemeClr val="accent1"/>
-          </a:effectRef>
-          <a:fontRef idx="minor">
-            <a:schemeClr val="lt1"/>
-          </a:fontRef>
-        </p:style>
-        <p:txBody>
-          <a:bodyPr rtlCol="0" anchor="ctr"/>
-          <a:lstStyle/>
-          <a:p>
-            <a:pPr algn="ctr"/>
-          </a:p>
-        </p:txBody>
-      </p:sp>
-      <p:sp>
-        <p:nvSpPr>
-          <p:cNvPr id="12" name="Rounded Rectangle 11"/>
-          <p:cNvSpPr/>
-          <p:nvPr/>
-        </p:nvSpPr>
-        <p:spPr>
-          <a:xfrm>
-            <a:off x="731520" y="3291840"/>
-            <a:ext cx="10515600" cy="109728"/>
-          </a:xfrm>
-          <a:prstGeom prst="roundRect">
-            <a:avLst/>
-          </a:prstGeom>
-          <a:solidFill>
-            <a:srgbClr val="1B2838"/>
-          </a:solidFill>
-          <a:ln>
-            <a:noFill/>
-          </a:ln>
-        </p:spPr>
-        <p:style>
-          <a:lnRef idx="1">
-            <a:schemeClr val="accent1"/>
-          </a:lnRef>
-          <a:fillRef idx="3">
-            <a:schemeClr val="accent1"/>
-          </a:fillRef>
-          <a:effectRef idx="2">
-            <a:schemeClr val="accent1"/>
-          </a:effectRef>
-          <a:fontRef idx="minor">
-            <a:schemeClr val="lt1"/>
-          </a:fontRef>
-        </p:style>
-        <p:txBody>
-          <a:bodyPr rtlCol="0" anchor="ctr"/>
-          <a:lstStyle/>
-          <a:p>
-            <a:pPr algn="ctr"/>
-          </a:p>
-        </p:txBody>
-      </p:sp>
-      <p:sp>
-        <p:nvSpPr>
-          <p:cNvPr id="13" name="Oval 12"/>
-          <p:cNvSpPr/>
-          <p:nvPr/>
-        </p:nvSpPr>
-        <p:spPr>
-          <a:xfrm>
-            <a:off x="1097280" y="3657600"/>
-            <a:ext cx="457200" cy="457200"/>
-          </a:xfrm>
-          <a:prstGeom prst="ellipse">
-            <a:avLst/>
-          </a:prstGeom>
-          <a:solidFill>
-            <a:srgbClr val="1B2838"/>
-          </a:solidFill>
-          <a:ln>
-            <a:noFill/>
-          </a:ln>
-        </p:spPr>
-        <p:style>
-          <a:lnRef idx="1">
-            <a:schemeClr val="accent1"/>
-          </a:lnRef>
-          <a:fillRef idx="3">
-            <a:schemeClr val="accent1"/>
-          </a:fillRef>
-          <a:effectRef idx="2">
-            <a:schemeClr val="accent1"/>
-          </a:effectRef>
-          <a:fontRef idx="minor">
-            <a:schemeClr val="lt1"/>
-          </a:fontRef>
-        </p:style>
-        <p:txBody>
-          <a:bodyPr rtlCol="0" anchor="ctr" wrap="none"/>
-          <a:lstStyle/>
-          <a:p>
-            <a:pPr algn="ctr"/>
-            <a:r>
-              <a:rPr sz="1100" b="1">
-                <a:solidFill>
-                  <a:srgbClr val="FFFFFF"/>
-                </a:solidFill>
-                <a:latin typeface="Segoe UI"/>
-              </a:rPr>
-              <a:t>11</a:t>
-            </a:r>
-          </a:p>
-        </p:txBody>
-      </p:sp>
-      <p:sp>
-        <p:nvSpPr>
-          <p:cNvPr id="14" name="TextBox 13"/>
-          <p:cNvSpPr txBox="1"/>
-          <p:nvPr/>
-        </p:nvSpPr>
-        <p:spPr>
-          <a:xfrm>
-            <a:off x="1828800" y="3657600"/>
-            <a:ext cx="8961120" cy="640080"/>
-          </a:xfrm>
-          <a:prstGeom prst="rect">
-            <a:avLst/>
-          </a:prstGeom>
-          <a:noFill/>
-        </p:spPr>
-        <p:txBody>
-          <a:bodyPr wrap="square">
-            <a:spAutoFit/>
-          </a:bodyPr>
-          <a:lstStyle/>
-          <a:p>
-            <a:pPr algn="l">
-              <a:defRPr sz="1400" b="0">
-                <a:solidFill>
-                  <a:srgbClr val="1B2B3C"/>
-                </a:solidFill>
-                <a:latin typeface="Segoe UI"/>
-              </a:defRPr>
+              <a:rPr sz="1300" b="1">
+                <a:solidFill>
+                  <a:srgbClr val="00B4D8"/>
+                </a:solidFill>
+                <a:latin typeface="Segoe UI"/>
+              </a:rPr>
+              <a:t>10.  </a:t>
+            </a:r>
+            <a:r>
+              <a:rPr sz="1300">
+                <a:solidFill>
+                  <a:srgbClr val="1A1A2E"/>
+                </a:solidFill>
+                <a:latin typeface="Segoe UI"/>
+              </a:rPr>
+              <a:t>Czy uwaza Pan(i), ze aplikacje powinny sprawdzac poziom wiedzy uzytkownika przed umozliwieniem zakupu instrumentow finansowych?</a:t>
+            </a:r>
+          </a:p>
+          <a:p>
+            <a:pPr>
+              <a:spcAft>
+                <a:spcPts val="2000"/>
+              </a:spcAft>
             </a:pPr>
             <a:r>
-              <a:t>Na co ostrzec znajomego bez wiedzy finansowej?</a:t>
-            </a:r>
-          </a:p>
-        </p:txBody>
-      </p:sp>
-      <p:sp>
-        <p:nvSpPr>
-          <p:cNvPr id="15" name="Rounded Rectangle 14"/>
-          <p:cNvSpPr/>
-          <p:nvPr/>
-        </p:nvSpPr>
-        <p:spPr>
-          <a:xfrm>
-            <a:off x="731520" y="4754880"/>
-            <a:ext cx="10515600" cy="1188720"/>
-          </a:xfrm>
-          <a:prstGeom prst="roundRect">
-            <a:avLst/>
-          </a:prstGeom>
-          <a:solidFill>
-            <a:srgbClr val="FFFFFF"/>
-          </a:solidFill>
-          <a:ln w="6350">
-            <a:solidFill>
-              <a:srgbClr val="E0E0E0"/>
-            </a:solidFill>
-          </a:ln>
-          <a:effectLst/>
-        </p:spPr>
-        <p:style>
-          <a:lnRef idx="1">
-            <a:schemeClr val="accent1"/>
-          </a:lnRef>
-          <a:fillRef idx="3">
-            <a:schemeClr val="accent1"/>
-          </a:fillRef>
-          <a:effectRef idx="2">
-            <a:schemeClr val="accent1"/>
-          </a:effectRef>
-          <a:fontRef idx="minor">
-            <a:schemeClr val="lt1"/>
-          </a:fontRef>
-        </p:style>
-        <p:txBody>
-          <a:bodyPr rtlCol="0" anchor="ctr"/>
-          <a:lstStyle/>
-          <a:p>
-            <a:pPr algn="ctr"/>
-          </a:p>
-        </p:txBody>
-      </p:sp>
-      <p:sp>
-        <p:nvSpPr>
-          <p:cNvPr id="16" name="Rounded Rectangle 15"/>
-          <p:cNvSpPr/>
-          <p:nvPr/>
-        </p:nvSpPr>
-        <p:spPr>
-          <a:xfrm>
-            <a:off x="731520" y="4754880"/>
-            <a:ext cx="10515600" cy="109728"/>
-          </a:xfrm>
-          <a:prstGeom prst="roundRect">
-            <a:avLst/>
-          </a:prstGeom>
-          <a:solidFill>
-            <a:srgbClr val="1B2838"/>
-          </a:solidFill>
-          <a:ln>
-            <a:noFill/>
-          </a:ln>
-        </p:spPr>
-        <p:style>
-          <a:lnRef idx="1">
-            <a:schemeClr val="accent1"/>
-          </a:lnRef>
-          <a:fillRef idx="3">
-            <a:schemeClr val="accent1"/>
-          </a:fillRef>
-          <a:effectRef idx="2">
-            <a:schemeClr val="accent1"/>
-          </a:effectRef>
-          <a:fontRef idx="minor">
-            <a:schemeClr val="lt1"/>
-          </a:fontRef>
-        </p:style>
-        <p:txBody>
-          <a:bodyPr rtlCol="0" anchor="ctr"/>
-          <a:lstStyle/>
-          <a:p>
-            <a:pPr algn="ctr"/>
-          </a:p>
-        </p:txBody>
-      </p:sp>
-      <p:sp>
-        <p:nvSpPr>
-          <p:cNvPr id="17" name="Oval 16"/>
-          <p:cNvSpPr/>
-          <p:nvPr/>
-        </p:nvSpPr>
-        <p:spPr>
-          <a:xfrm>
-            <a:off x="1097280" y="5120640"/>
-            <a:ext cx="457200" cy="457200"/>
-          </a:xfrm>
-          <a:prstGeom prst="ellipse">
-            <a:avLst/>
-          </a:prstGeom>
-          <a:solidFill>
-            <a:srgbClr val="1B2838"/>
-          </a:solidFill>
-          <a:ln>
-            <a:noFill/>
-          </a:ln>
-        </p:spPr>
-        <p:style>
-          <a:lnRef idx="1">
-            <a:schemeClr val="accent1"/>
-          </a:lnRef>
-          <a:fillRef idx="3">
-            <a:schemeClr val="accent1"/>
-          </a:fillRef>
-          <a:effectRef idx="2">
-            <a:schemeClr val="accent1"/>
-          </a:effectRef>
-          <a:fontRef idx="minor">
-            <a:schemeClr val="lt1"/>
-          </a:fontRef>
-        </p:style>
-        <p:txBody>
-          <a:bodyPr rtlCol="0" anchor="ctr" wrap="none"/>
-          <a:lstStyle/>
-          <a:p>
-            <a:pPr algn="ctr"/>
-            <a:r>
-              <a:rPr sz="1100" b="1">
-                <a:solidFill>
-                  <a:srgbClr val="FFFFFF"/>
-                </a:solidFill>
-                <a:latin typeface="Segoe UI"/>
-              </a:rPr>
-              <a:t>12</a:t>
-            </a:r>
-          </a:p>
-        </p:txBody>
-      </p:sp>
-      <p:sp>
-        <p:nvSpPr>
-          <p:cNvPr id="18" name="TextBox 17"/>
-          <p:cNvSpPr txBox="1"/>
-          <p:nvPr/>
-        </p:nvSpPr>
-        <p:spPr>
-          <a:xfrm>
-            <a:off x="1828800" y="5120640"/>
-            <a:ext cx="8961120" cy="640080"/>
-          </a:xfrm>
-          <a:prstGeom prst="rect">
-            <a:avLst/>
-          </a:prstGeom>
-          <a:noFill/>
-        </p:spPr>
-        <p:txBody>
-          <a:bodyPr wrap="square">
-            <a:spAutoFit/>
-          </a:bodyPr>
-          <a:lstStyle/>
-          <a:p>
-            <a:pPr algn="l">
-              <a:defRPr sz="1400" b="0">
-                <a:solidFill>
-                  <a:srgbClr val="1B2B3C"/>
-                </a:solidFill>
-                <a:latin typeface="Segoe UI"/>
-              </a:defRPr>
+              <a:rPr sz="1300" b="1">
+                <a:solidFill>
+                  <a:srgbClr val="00B4D8"/>
+                </a:solidFill>
+                <a:latin typeface="Segoe UI"/>
+              </a:rPr>
+              <a:t>11.  </a:t>
+            </a:r>
+            <a:r>
+              <a:rPr sz="1300">
+                <a:solidFill>
+                  <a:srgbClr val="1A1A2E"/>
+                </a:solidFill>
+                <a:latin typeface="Segoe UI"/>
+              </a:rPr>
+              <a:t>Na co ostrzeglby/ostrzeglaby Pan(i) znajomego, ktory nie ma wiedzy finansowej, a chce zaczac inwestowac przez aplikacje?</a:t>
+            </a:r>
+          </a:p>
+          <a:p>
+            <a:pPr>
+              <a:spcAft>
+                <a:spcPts val="2000"/>
+              </a:spcAft>
             </a:pPr>
             <a:r>
-              <a:t>Czy jest jeszcze coś ważnego o czym nie zapytałem?</a:t>
+              <a:rPr sz="1300" b="1">
+                <a:solidFill>
+                  <a:srgbClr val="00B4D8"/>
+                </a:solidFill>
+                <a:latin typeface="Segoe UI"/>
+              </a:rPr>
+              <a:t>12.  </a:t>
+            </a:r>
+            <a:r>
+              <a:rPr sz="1300">
+                <a:solidFill>
+                  <a:srgbClr val="1A1A2E"/>
+                </a:solidFill>
+                <a:latin typeface="Segoe UI"/>
+              </a:rPr>
+              <a:t>Czy jest jeszcze cos waznego zwiazanego z tym tematem, o czym nie zapytalem, a chcialby/chcialaby Pan(i) powiedziec?</a:t>
             </a:r>
           </a:p>
         </p:txBody>
@@ -8735,7 +6760,7 @@
     <p:bg>
       <p:bgPr>
         <a:solidFill>
-          <a:srgbClr val="1B2838"/>
+          <a:srgbClr val="F4F5F7"/>
         </a:solidFill>
         <a:effectLst/>
       </p:bgPr>
@@ -8749,22 +6774,20 @@
       <p:grpSpPr/>
       <p:sp>
         <p:nvSpPr>
-          <p:cNvPr id="2" name="Oval 1"/>
+          <p:cNvPr id="2" name="Rectangle 1"/>
           <p:cNvSpPr/>
           <p:nvPr/>
         </p:nvSpPr>
         <p:spPr>
           <a:xfrm>
-            <a:off x="10058400" y="-731520"/>
-            <a:ext cx="2743200" cy="2743200"/>
-          </a:xfrm>
-          <a:prstGeom prst="ellipse">
+            <a:off x="0" y="0"/>
+            <a:ext cx="12191695" cy="1097280"/>
+          </a:xfrm>
+          <a:prstGeom prst="rect">
             <a:avLst/>
           </a:prstGeom>
           <a:solidFill>
-            <a:srgbClr val="00B4D8">
-              <a:alpha val="12000"/>
-            </a:srgbClr>
+            <a:srgbClr val="0D1B2A"/>
           </a:solidFill>
           <a:ln>
             <a:noFill/>
@@ -8794,46 +6817,37 @@
       </p:sp>
       <p:sp>
         <p:nvSpPr>
-          <p:cNvPr id="3" name="Oval 2"/>
-          <p:cNvSpPr/>
-          <p:nvPr/>
-        </p:nvSpPr>
-        <p:spPr>
-          <a:xfrm>
-            <a:off x="-914400" y="5029200"/>
-            <a:ext cx="2286000" cy="2286000"/>
-          </a:xfrm>
-          <a:prstGeom prst="ellipse">
-            <a:avLst/>
-          </a:prstGeom>
-          <a:solidFill>
-            <a:srgbClr val="F4A261">
-              <a:alpha val="9999"/>
-            </a:srgbClr>
-          </a:solidFill>
-          <a:ln>
-            <a:noFill/>
-          </a:ln>
-        </p:spPr>
-        <p:style>
-          <a:lnRef idx="1">
-            <a:schemeClr val="accent1"/>
-          </a:lnRef>
-          <a:fillRef idx="3">
-            <a:schemeClr val="accent1"/>
-          </a:fillRef>
-          <a:effectRef idx="2">
-            <a:schemeClr val="accent1"/>
-          </a:effectRef>
-          <a:fontRef idx="minor">
-            <a:schemeClr val="lt1"/>
-          </a:fontRef>
-        </p:style>
-        <p:txBody>
-          <a:bodyPr rtlCol="0" anchor="ctr"/>
-          <a:lstStyle/>
-          <a:p>
-            <a:pPr algn="ctr"/>
+          <p:cNvPr id="3" name="TextBox 2"/>
+          <p:cNvSpPr txBox="1"/>
+          <p:nvPr/>
+        </p:nvSpPr>
+        <p:spPr>
+          <a:xfrm>
+            <a:off x="731520" y="228600"/>
+            <a:ext cx="10058400" cy="640080"/>
+          </a:xfrm>
+          <a:prstGeom prst="rect">
+            <a:avLst/>
+          </a:prstGeom>
+          <a:noFill/>
+        </p:spPr>
+        <p:txBody>
+          <a:bodyPr wrap="square">
+            <a:spAutoFit/>
+          </a:bodyPr>
+          <a:lstStyle/>
+          <a:p>
+            <a:pPr>
+              <a:defRPr sz="2600" b="1">
+                <a:solidFill>
+                  <a:srgbClr val="FFFFFF"/>
+                </a:solidFill>
+                <a:latin typeface="Segoe UI"/>
+              </a:defRPr>
+            </a:pPr>
+            <a:r>
+              <a:t>Ograniczenia badania</a:t>
+            </a:r>
           </a:p>
         </p:txBody>
       </p:sp>
@@ -8845,8 +6859,8 @@
         </p:nvSpPr>
         <p:spPr>
           <a:xfrm>
-            <a:off x="0" y="6583680"/>
-            <a:ext cx="12191695" cy="274320"/>
+            <a:off x="731520" y="960120"/>
+            <a:ext cx="3657600" cy="36576"/>
           </a:xfrm>
           <a:prstGeom prst="rect">
             <a:avLst/>
@@ -8882,63 +6896,24 @@
       </p:sp>
       <p:sp>
         <p:nvSpPr>
-          <p:cNvPr id="5" name="TextBox 4"/>
-          <p:cNvSpPr txBox="1"/>
-          <p:nvPr/>
-        </p:nvSpPr>
-        <p:spPr>
-          <a:xfrm>
-            <a:off x="548640" y="274320"/>
-            <a:ext cx="9144000" cy="731520"/>
-          </a:xfrm>
-          <a:prstGeom prst="rect">
-            <a:avLst/>
-          </a:prstGeom>
-          <a:noFill/>
-        </p:spPr>
-        <p:txBody>
-          <a:bodyPr wrap="square">
-            <a:spAutoFit/>
-          </a:bodyPr>
-          <a:lstStyle/>
-          <a:p>
-            <a:pPr algn="l">
-              <a:defRPr sz="2800" b="1">
-                <a:solidFill>
-                  <a:srgbClr val="FFFFFF"/>
-                </a:solidFill>
-                <a:latin typeface="Segoe UI"/>
-              </a:defRPr>
-            </a:pPr>
-            <a:r>
-              <a:t>Ograniczenia badania</a:t>
-            </a:r>
-          </a:p>
-        </p:txBody>
-      </p:sp>
-      <p:sp>
-        <p:nvSpPr>
-          <p:cNvPr id="6" name="Rounded Rectangle 5"/>
+          <p:cNvPr id="5" name="Rounded Rectangle 4"/>
           <p:cNvSpPr/>
           <p:nvPr/>
         </p:nvSpPr>
         <p:spPr>
           <a:xfrm>
-            <a:off x="457200" y="1463040"/>
-            <a:ext cx="3566160" cy="4572000"/>
+            <a:off x="585216" y="1408176"/>
+            <a:ext cx="11064240" cy="5029200"/>
           </a:xfrm>
           <a:prstGeom prst="roundRect">
             <a:avLst/>
           </a:prstGeom>
           <a:solidFill>
-            <a:srgbClr val="FFFFFF"/>
+            <a:srgbClr val="E0E1E3"/>
           </a:solidFill>
-          <a:ln w="6350">
-            <a:solidFill>
-              <a:srgbClr val="E0E0E0"/>
-            </a:solidFill>
+          <a:ln>
+            <a:noFill/>
           </a:ln>
-          <a:effectLst/>
         </p:spPr>
         <p:style>
           <a:lnRef idx="1">
@@ -8964,23 +6939,25 @@
       </p:sp>
       <p:sp>
         <p:nvSpPr>
-          <p:cNvPr id="7" name="Rounded Rectangle 6"/>
+          <p:cNvPr id="6" name="Rounded Rectangle 5"/>
           <p:cNvSpPr/>
           <p:nvPr/>
         </p:nvSpPr>
         <p:spPr>
           <a:xfrm>
-            <a:off x="457200" y="1463040"/>
-            <a:ext cx="3566160" cy="109728"/>
+            <a:off x="548640" y="1371600"/>
+            <a:ext cx="11064240" cy="5029200"/>
           </a:xfrm>
           <a:prstGeom prst="roundRect">
             <a:avLst/>
           </a:prstGeom>
           <a:solidFill>
-            <a:srgbClr val="00B4D8"/>
+            <a:srgbClr val="FFFFFF"/>
           </a:solidFill>
-          <a:ln>
-            <a:noFill/>
+          <a:ln w="9525">
+            <a:solidFill>
+              <a:srgbClr val="E8E9EB"/>
+            </a:solidFill>
           </a:ln>
         </p:spPr>
         <p:style>
@@ -9007,14 +6984,14 @@
       </p:sp>
       <p:sp>
         <p:nvSpPr>
-          <p:cNvPr id="8" name="TextBox 7"/>
+          <p:cNvPr id="7" name="TextBox 6"/>
           <p:cNvSpPr txBox="1"/>
           <p:nvPr/>
         </p:nvSpPr>
         <p:spPr>
           <a:xfrm>
-            <a:off x="822960" y="1828800"/>
-            <a:ext cx="2926080" cy="457200"/>
+            <a:off x="914400" y="1645920"/>
+            <a:ext cx="9144000" cy="365760"/>
           </a:xfrm>
           <a:prstGeom prst="rect">
             <a:avLst/>
@@ -9030,27 +7007,27 @@
             <a:pPr algn="l">
               <a:defRPr sz="1300" b="1">
                 <a:solidFill>
-                  <a:srgbClr val="00B4D8"/>
+                  <a:srgbClr val="0D1B2A"/>
                 </a:solidFill>
                 <a:latin typeface="Segoe UI"/>
               </a:defRPr>
             </a:pPr>
             <a:r>
-              <a:t>Efekt Dunninga-Krugera</a:t>
-            </a:r>
-          </a:p>
-        </p:txBody>
-      </p:sp>
-      <p:sp>
-        <p:nvSpPr>
-          <p:cNvPr id="9" name="TextBox 8"/>
+              <a:t>1.  Efekt Dunninga-Krugera</a:t>
+            </a:r>
+          </a:p>
+        </p:txBody>
+      </p:sp>
+      <p:sp>
+        <p:nvSpPr>
+          <p:cNvPr id="8" name="TextBox 7"/>
           <p:cNvSpPr txBox="1"/>
           <p:nvPr/>
         </p:nvSpPr>
         <p:spPr>
           <a:xfrm>
-            <a:off x="822960" y="2377440"/>
-            <a:ext cx="2926080" cy="2743200"/>
+            <a:off x="1280160" y="2103120"/>
+            <a:ext cx="9144000" cy="1097280"/>
           </a:xfrm>
           <a:prstGeom prst="rect">
             <a:avLst/>
@@ -9065,60 +7042,75 @@
           <a:p>
             <a:pPr>
               <a:spcAft>
-                <a:spcPts val="400"/>
+                <a:spcPts val="600"/>
               </a:spcAft>
-              <a:defRPr sz="1100">
-                <a:solidFill>
-                  <a:srgbClr val="1B2B3C"/>
-                </a:solidFill>
-                <a:latin typeface="Segoe UI"/>
-              </a:defRPr>
             </a:pPr>
             <a:r>
-              <a:t>• Przecenianie wiedzy w hossie</a:t>
+              <a:rPr sz="800">
+                <a:solidFill>
+                  <a:srgbClr val="00B4D8"/>
+                </a:solidFill>
+                <a:latin typeface="Segoe UI"/>
+              </a:rPr>
+              <a:t>■  </a:t>
+            </a:r>
+            <a:r>
+              <a:rPr sz="1100">
+                <a:solidFill>
+                  <a:srgbClr val="4A4A5A"/>
+                </a:solidFill>
+                <a:latin typeface="Segoe UI"/>
+              </a:rPr>
+              <a:t>Respondenci moga przeceniac swoja wiedze, szczegolnie w okresie hossy</a:t>
             </a:r>
           </a:p>
           <a:p>
             <a:pPr>
               <a:spcAft>
-                <a:spcPts val="400"/>
+                <a:spcPts val="600"/>
               </a:spcAft>
-              <a:defRPr sz="1100">
-                <a:solidFill>
-                  <a:srgbClr val="1B2B3C"/>
-                </a:solidFill>
-                <a:latin typeface="Segoe UI"/>
-              </a:defRPr>
             </a:pPr>
             <a:r>
-              <a:t>• Złudzenie kontroli</a:t>
-            </a:r>
-          </a:p>
-        </p:txBody>
-      </p:sp>
-      <p:sp>
-        <p:nvSpPr>
-          <p:cNvPr id="10" name="Rounded Rectangle 9"/>
+              <a:rPr sz="800">
+                <a:solidFill>
+                  <a:srgbClr val="00B4D8"/>
+                </a:solidFill>
+                <a:latin typeface="Segoe UI"/>
+              </a:rPr>
+              <a:t>■  </a:t>
+            </a:r>
+            <a:r>
+              <a:rPr sz="1100">
+                <a:solidFill>
+                  <a:srgbClr val="4A4A5A"/>
+                </a:solidFill>
+                <a:latin typeface="Segoe UI"/>
+              </a:rPr>
+              <a:t>Zludzenie kontroli wynikajace z prostoty interfejsu aplikacji</a:t>
+            </a:r>
+          </a:p>
+        </p:txBody>
+      </p:sp>
+      <p:sp>
+        <p:nvSpPr>
+          <p:cNvPr id="9" name="Rectangle 8"/>
           <p:cNvSpPr/>
           <p:nvPr/>
         </p:nvSpPr>
         <p:spPr>
           <a:xfrm>
-            <a:off x="4297680" y="1463040"/>
-            <a:ext cx="3566160" cy="4572000"/>
-          </a:xfrm>
-          <a:prstGeom prst="roundRect">
+            <a:off x="914400" y="3108960"/>
+            <a:ext cx="10058400" cy="18288"/>
+          </a:xfrm>
+          <a:prstGeom prst="rect">
             <a:avLst/>
           </a:prstGeom>
           <a:solidFill>
-            <a:srgbClr val="FFFFFF"/>
+            <a:srgbClr val="E0E1E3"/>
           </a:solidFill>
-          <a:ln w="6350">
-            <a:solidFill>
-              <a:srgbClr val="E0E0E0"/>
-            </a:solidFill>
+          <a:ln>
+            <a:noFill/>
           </a:ln>
-          <a:effectLst/>
         </p:spPr>
         <p:style>
           <a:lnRef idx="1">
@@ -9144,20 +7136,129 @@
       </p:sp>
       <p:sp>
         <p:nvSpPr>
-          <p:cNvPr id="11" name="Rounded Rectangle 10"/>
+          <p:cNvPr id="10" name="TextBox 9"/>
+          <p:cNvSpPr txBox="1"/>
+          <p:nvPr/>
+        </p:nvSpPr>
+        <p:spPr>
+          <a:xfrm>
+            <a:off x="914400" y="3291840"/>
+            <a:ext cx="9144000" cy="365760"/>
+          </a:xfrm>
+          <a:prstGeom prst="rect">
+            <a:avLst/>
+          </a:prstGeom>
+          <a:noFill/>
+        </p:spPr>
+        <p:txBody>
+          <a:bodyPr wrap="square">
+            <a:spAutoFit/>
+          </a:bodyPr>
+          <a:lstStyle/>
+          <a:p>
+            <a:pPr algn="l">
+              <a:defRPr sz="1300" b="1">
+                <a:solidFill>
+                  <a:srgbClr val="0D1B2A"/>
+                </a:solidFill>
+                <a:latin typeface="Segoe UI"/>
+              </a:defRPr>
+            </a:pPr>
+            <a:r>
+              <a:t>2.  Trudnosc ewaluacji wiedzy</a:t>
+            </a:r>
+          </a:p>
+        </p:txBody>
+      </p:sp>
+      <p:sp>
+        <p:nvSpPr>
+          <p:cNvPr id="11" name="TextBox 10"/>
+          <p:cNvSpPr txBox="1"/>
+          <p:nvPr/>
+        </p:nvSpPr>
+        <p:spPr>
+          <a:xfrm>
+            <a:off x="1280160" y="3749039"/>
+            <a:ext cx="9144000" cy="1097280"/>
+          </a:xfrm>
+          <a:prstGeom prst="rect">
+            <a:avLst/>
+          </a:prstGeom>
+          <a:noFill/>
+        </p:spPr>
+        <p:txBody>
+          <a:bodyPr wrap="square">
+            <a:spAutoFit/>
+          </a:bodyPr>
+          <a:lstStyle/>
+          <a:p>
+            <a:pPr>
+              <a:spcAft>
+                <a:spcPts val="600"/>
+              </a:spcAft>
+            </a:pPr>
+            <a:r>
+              <a:rPr sz="800">
+                <a:solidFill>
+                  <a:srgbClr val="00B4D8"/>
+                </a:solidFill>
+                <a:latin typeface="Segoe UI"/>
+              </a:rPr>
+              <a:t>■  </a:t>
+            </a:r>
+            <a:r>
+              <a:rPr sz="1100">
+                <a:solidFill>
+                  <a:srgbClr val="4A4A5A"/>
+                </a:solidFill>
+                <a:latin typeface="Segoe UI"/>
+              </a:rPr>
+              <a:t>Wywiad poglebiony nie jest testem wiedzy - nie mozna stosowac punktacji</a:t>
+            </a:r>
+          </a:p>
+          <a:p>
+            <a:pPr>
+              <a:spcAft>
+                <a:spcPts val="600"/>
+              </a:spcAft>
+            </a:pPr>
+            <a:r>
+              <a:rPr sz="800">
+                <a:solidFill>
+                  <a:srgbClr val="00B4D8"/>
+                </a:solidFill>
+                <a:latin typeface="Segoe UI"/>
+              </a:rPr>
+              <a:t>■  </a:t>
+            </a:r>
+            <a:r>
+              <a:rPr sz="1100">
+                <a:solidFill>
+                  <a:srgbClr val="4A4A5A"/>
+                </a:solidFill>
+                <a:latin typeface="Segoe UI"/>
+              </a:rPr>
+              <a:t>Respondent nie moze czuc sie jak na egzaminie, co ogranicza weryfikacje</a:t>
+            </a:r>
+          </a:p>
+        </p:txBody>
+      </p:sp>
+      <p:sp>
+        <p:nvSpPr>
+          <p:cNvPr id="12" name="Rectangle 11"/>
           <p:cNvSpPr/>
           <p:nvPr/>
         </p:nvSpPr>
         <p:spPr>
           <a:xfrm>
-            <a:off x="4297680" y="1463040"/>
-            <a:ext cx="3566160" cy="109728"/>
-          </a:xfrm>
-          <a:prstGeom prst="roundRect">
+            <a:off x="914400" y="4754880"/>
+            <a:ext cx="10058400" cy="18288"/>
+          </a:xfrm>
+          <a:prstGeom prst="rect">
             <a:avLst/>
           </a:prstGeom>
           <a:solidFill>
-            <a:srgbClr val="F4A261"/>
+            <a:srgbClr val="E0E1E3"/>
           </a:solidFill>
           <a:ln>
             <a:noFill/>
@@ -9187,14 +7288,14 @@
       </p:sp>
       <p:sp>
         <p:nvSpPr>
-          <p:cNvPr id="12" name="TextBox 11"/>
+          <p:cNvPr id="13" name="TextBox 12"/>
           <p:cNvSpPr txBox="1"/>
           <p:nvPr/>
         </p:nvSpPr>
         <p:spPr>
           <a:xfrm>
-            <a:off x="4663440" y="1828800"/>
-            <a:ext cx="2926080" cy="457200"/>
+            <a:off x="914400" y="4937760"/>
+            <a:ext cx="9144000" cy="365760"/>
           </a:xfrm>
           <a:prstGeom prst="rect">
             <a:avLst/>
@@ -9210,27 +7311,27 @@
             <a:pPr algn="l">
               <a:defRPr sz="1300" b="1">
                 <a:solidFill>
-                  <a:srgbClr val="F4A261"/>
+                  <a:srgbClr val="0D1B2A"/>
                 </a:solidFill>
                 <a:latin typeface="Segoe UI"/>
               </a:defRPr>
             </a:pPr>
             <a:r>
-              <a:t>Trudność ewaluacji wiedzy</a:t>
-            </a:r>
-          </a:p>
-        </p:txBody>
-      </p:sp>
-      <p:sp>
-        <p:nvSpPr>
-          <p:cNvPr id="13" name="TextBox 12"/>
+              <a:t>3.  Bariera technologiczna</a:t>
+            </a:r>
+          </a:p>
+        </p:txBody>
+      </p:sp>
+      <p:sp>
+        <p:nvSpPr>
+          <p:cNvPr id="14" name="TextBox 13"/>
           <p:cNvSpPr txBox="1"/>
           <p:nvPr/>
         </p:nvSpPr>
         <p:spPr>
           <a:xfrm>
-            <a:off x="4663440" y="2377440"/>
-            <a:ext cx="2926080" cy="2743200"/>
+            <a:off x="1280160" y="5394960"/>
+            <a:ext cx="9144000" cy="1097280"/>
           </a:xfrm>
           <a:prstGeom prst="rect">
             <a:avLst/>
@@ -9245,229 +7346,51 @@
           <a:p>
             <a:pPr>
               <a:spcAft>
-                <a:spcPts val="400"/>
+                <a:spcPts val="600"/>
               </a:spcAft>
-              <a:defRPr sz="1100">
-                <a:solidFill>
-                  <a:srgbClr val="1B2B3C"/>
-                </a:solidFill>
-                <a:latin typeface="Segoe UI"/>
-              </a:defRPr>
             </a:pPr>
             <a:r>
-              <a:t>• Wywiad nie jest testem</a:t>
+              <a:rPr sz="800">
+                <a:solidFill>
+                  <a:srgbClr val="00B4D8"/>
+                </a:solidFill>
+                <a:latin typeface="Segoe UI"/>
+              </a:rPr>
+              <a:t>■  </a:t>
+            </a:r>
+            <a:r>
+              <a:rPr sz="1100">
+                <a:solidFill>
+                  <a:srgbClr val="4A4A5A"/>
+                </a:solidFill>
+                <a:latin typeface="Segoe UI"/>
+              </a:rPr>
+              <a:t>Rozne interfejsy aplikacji - odpowiedzi zaleza od konkretnego rozwiazania</a:t>
             </a:r>
           </a:p>
           <a:p>
             <a:pPr>
               <a:spcAft>
-                <a:spcPts val="400"/>
+                <a:spcPts val="600"/>
               </a:spcAft>
-              <a:defRPr sz="1100">
-                <a:solidFill>
-                  <a:srgbClr val="1B2B3C"/>
-                </a:solidFill>
-                <a:latin typeface="Segoe UI"/>
-              </a:defRPr>
             </a:pPr>
             <a:r>
-              <a:t>• Badany nie może czuć się jak na egzaminie</a:t>
-            </a:r>
-          </a:p>
-        </p:txBody>
-      </p:sp>
-      <p:sp>
-        <p:nvSpPr>
-          <p:cNvPr id="14" name="Rounded Rectangle 13"/>
-          <p:cNvSpPr/>
-          <p:nvPr/>
-        </p:nvSpPr>
-        <p:spPr>
-          <a:xfrm>
-            <a:off x="8138160" y="1463040"/>
-            <a:ext cx="3566160" cy="4572000"/>
-          </a:xfrm>
-          <a:prstGeom prst="roundRect">
-            <a:avLst/>
-          </a:prstGeom>
-          <a:solidFill>
-            <a:srgbClr val="FFFFFF"/>
-          </a:solidFill>
-          <a:ln w="6350">
-            <a:solidFill>
-              <a:srgbClr val="E0E0E0"/>
-            </a:solidFill>
-          </a:ln>
-          <a:effectLst/>
-        </p:spPr>
-        <p:style>
-          <a:lnRef idx="1">
-            <a:schemeClr val="accent1"/>
-          </a:lnRef>
-          <a:fillRef idx="3">
-            <a:schemeClr val="accent1"/>
-          </a:fillRef>
-          <a:effectRef idx="2">
-            <a:schemeClr val="accent1"/>
-          </a:effectRef>
-          <a:fontRef idx="minor">
-            <a:schemeClr val="lt1"/>
-          </a:fontRef>
-        </p:style>
-        <p:txBody>
-          <a:bodyPr rtlCol="0" anchor="ctr"/>
-          <a:lstStyle/>
-          <a:p>
-            <a:pPr algn="ctr"/>
-          </a:p>
-        </p:txBody>
-      </p:sp>
-      <p:sp>
-        <p:nvSpPr>
-          <p:cNvPr id="15" name="Rounded Rectangle 14"/>
-          <p:cNvSpPr/>
-          <p:nvPr/>
-        </p:nvSpPr>
-        <p:spPr>
-          <a:xfrm>
-            <a:off x="8138160" y="1463040"/>
-            <a:ext cx="3566160" cy="109728"/>
-          </a:xfrm>
-          <a:prstGeom prst="roundRect">
-            <a:avLst/>
-          </a:prstGeom>
-          <a:solidFill>
-            <a:srgbClr val="FFFFFF"/>
-          </a:solidFill>
-          <a:ln>
-            <a:noFill/>
-          </a:ln>
-        </p:spPr>
-        <p:style>
-          <a:lnRef idx="1">
-            <a:schemeClr val="accent1"/>
-          </a:lnRef>
-          <a:fillRef idx="3">
-            <a:schemeClr val="accent1"/>
-          </a:fillRef>
-          <a:effectRef idx="2">
-            <a:schemeClr val="accent1"/>
-          </a:effectRef>
-          <a:fontRef idx="minor">
-            <a:schemeClr val="lt1"/>
-          </a:fontRef>
-        </p:style>
-        <p:txBody>
-          <a:bodyPr rtlCol="0" anchor="ctr"/>
-          <a:lstStyle/>
-          <a:p>
-            <a:pPr algn="ctr"/>
-          </a:p>
-        </p:txBody>
-      </p:sp>
-      <p:sp>
-        <p:nvSpPr>
-          <p:cNvPr id="16" name="TextBox 15"/>
-          <p:cNvSpPr txBox="1"/>
-          <p:nvPr/>
-        </p:nvSpPr>
-        <p:spPr>
-          <a:xfrm>
-            <a:off x="8503920" y="1828800"/>
-            <a:ext cx="2926080" cy="457200"/>
-          </a:xfrm>
-          <a:prstGeom prst="rect">
-            <a:avLst/>
-          </a:prstGeom>
-          <a:noFill/>
-        </p:spPr>
-        <p:txBody>
-          <a:bodyPr wrap="square">
-            <a:spAutoFit/>
-          </a:bodyPr>
-          <a:lstStyle/>
-          <a:p>
-            <a:pPr algn="l">
-              <a:defRPr sz="1300" b="1">
-                <a:solidFill>
-                  <a:srgbClr val="1B2838"/>
-                </a:solidFill>
-                <a:latin typeface="Segoe UI"/>
-              </a:defRPr>
-            </a:pPr>
-            <a:r>
-              <a:t>Bariera technologiczna</a:t>
-            </a:r>
-          </a:p>
-        </p:txBody>
-      </p:sp>
-      <p:sp>
-        <p:nvSpPr>
-          <p:cNvPr id="17" name="TextBox 16"/>
-          <p:cNvSpPr txBox="1"/>
-          <p:nvPr/>
-        </p:nvSpPr>
-        <p:spPr>
-          <a:xfrm>
-            <a:off x="8503920" y="2377440"/>
-            <a:ext cx="2926080" cy="2743200"/>
-          </a:xfrm>
-          <a:prstGeom prst="rect">
-            <a:avLst/>
-          </a:prstGeom>
-          <a:noFill/>
-        </p:spPr>
-        <p:txBody>
-          <a:bodyPr wrap="square">
-            <a:spAutoFit/>
-          </a:bodyPr>
-          <a:lstStyle/>
-          <a:p>
-            <a:pPr>
-              <a:spcAft>
-                <a:spcPts val="400"/>
-              </a:spcAft>
-              <a:defRPr sz="1100">
-                <a:solidFill>
-                  <a:srgbClr val="1B2B3C"/>
-                </a:solidFill>
-                <a:latin typeface="Segoe UI"/>
-              </a:defRPr>
-            </a:pPr>
-            <a:r>
-              <a:t>• Różne interfejsy</a:t>
-            </a:r>
-          </a:p>
-          <a:p>
-            <a:pPr>
-              <a:spcAft>
-                <a:spcPts val="400"/>
-              </a:spcAft>
-              <a:defRPr sz="1100">
-                <a:solidFill>
-                  <a:srgbClr val="1B2B3C"/>
-                </a:solidFill>
-                <a:latin typeface="Segoe UI"/>
-              </a:defRPr>
-            </a:pPr>
-            <a:r>
-              <a:t>• Odpowiedzi zależą od rozwiązania</a:t>
-            </a:r>
-          </a:p>
-          <a:p>
-            <a:pPr>
-              <a:spcAft>
-                <a:spcPts val="400"/>
-              </a:spcAft>
-              <a:defRPr sz="1100">
-                <a:solidFill>
-                  <a:srgbClr val="1B2B3C"/>
-                </a:solidFill>
-                <a:latin typeface="Segoe UI"/>
-              </a:defRPr>
-            </a:pPr>
-            <a:r>
-              <a:t>• Trudność wspólnych mianowników</a:t>
+              <a:rPr sz="800">
+                <a:solidFill>
+                  <a:srgbClr val="00B4D8"/>
+                </a:solidFill>
+                <a:latin typeface="Segoe UI"/>
+              </a:rPr>
+              <a:t>■  </a:t>
+            </a:r>
+            <a:r>
+              <a:rPr sz="1100">
+                <a:solidFill>
+                  <a:srgbClr val="4A4A5A"/>
+                </a:solidFill>
+                <a:latin typeface="Segoe UI"/>
+              </a:rPr>
+              <a:t>Trudnosc znalezienia wspolnych mianownikow miedzy platformami</a:t>
             </a:r>
           </a:p>
         </p:txBody>
